--- a/Capstone_Project/Credit-Risk-Intelligence-Platform/docs/Project_Documents/Credit_Risk_Platform_Capstone_project.pptx
+++ b/Capstone_Project/Credit-Risk-Intelligence-Platform/docs/Project_Documents/Credit_Risk_Platform_Capstone_project.pptx
@@ -6,7 +6,7 @@
     <p:sldMasterId id="2147483760" r:id="rId2"/>
   </p:sldMasterIdLst>
   <p:notesMasterIdLst>
-    <p:notesMasterId r:id="rId22"/>
+    <p:notesMasterId r:id="rId23"/>
   </p:notesMasterIdLst>
   <p:sldIdLst>
     <p:sldId id="256" r:id="rId3"/>
@@ -27,7 +27,8 @@
     <p:sldId id="264" r:id="rId18"/>
     <p:sldId id="266" r:id="rId19"/>
     <p:sldId id="269" r:id="rId20"/>
-    <p:sldId id="271" r:id="rId21"/>
+    <p:sldId id="310" r:id="rId21"/>
+    <p:sldId id="271" r:id="rId22"/>
   </p:sldIdLst>
   <p:sldSz cx="9144000" cy="5143500" type="screen16x9"/>
   <p:notesSz cx="5143500" cy="9144000"/>
@@ -387,10 +388,7 @@
           <a:bodyPr/>
           <a:lstStyle/>
           <a:p>
-            <a:r>
-              <a:rPr lang="en-US" dirty="0"/>
-              <a:t>Thank the audience. Offer to show the live app and LangSmith traces. Invite questions.</a:t>
-            </a:r>
+            <a:endParaRPr lang="en-US" dirty="0"/>
           </a:p>
         </p:txBody>
       </p:sp>
@@ -409,9 +407,156 @@
           <a:bodyPr/>
           <a:lstStyle/>
           <a:p>
+            <a:pPr marL="0" marR="0" lvl="0" indent="0" algn="l" defTabSz="914400" rtl="0" eaLnBrk="1" fontAlgn="auto" latinLnBrk="0" hangingPunct="1">
+              <a:lnSpc>
+                <a:spcPct val="100000"/>
+              </a:lnSpc>
+              <a:spcBef>
+                <a:spcPts val="0"/>
+              </a:spcBef>
+              <a:spcAft>
+                <a:spcPts val="0"/>
+              </a:spcAft>
+              <a:buClrTx/>
+              <a:buSzTx/>
+              <a:buFontTx/>
+              <a:buNone/>
+              <a:tabLst/>
+              <a:defRPr/>
+            </a:pPr>
+            <a:fld id="{F7021451-1387-4CA6-816F-3879F97B5CBC}" type="slidenum">
+              <a:rPr kumimoji="0" lang="en-US" sz="1800" b="0" i="0" u="none" strike="noStrike" kern="1200" cap="none" spc="0" normalizeH="0" baseline="0" noProof="0">
+                <a:ln>
+                  <a:noFill/>
+                </a:ln>
+                <a:solidFill>
+                  <a:prstClr val="black"/>
+                </a:solidFill>
+                <a:effectLst/>
+                <a:uLnTx/>
+                <a:uFillTx/>
+                <a:latin typeface="Calibri" panose="020F0502020204030204"/>
+                <a:ea typeface="+mn-ea"/>
+                <a:cs typeface="+mn-cs"/>
+              </a:rPr>
+              <a:pPr marL="0" marR="0" lvl="0" indent="0" algn="l" defTabSz="914400" rtl="0" eaLnBrk="1" fontAlgn="auto" latinLnBrk="0" hangingPunct="1">
+                <a:lnSpc>
+                  <a:spcPct val="100000"/>
+                </a:lnSpc>
+                <a:spcBef>
+                  <a:spcPts val="0"/>
+                </a:spcBef>
+                <a:spcAft>
+                  <a:spcPts val="0"/>
+                </a:spcAft>
+                <a:buClrTx/>
+                <a:buSzTx/>
+                <a:buFontTx/>
+                <a:buNone/>
+                <a:tabLst/>
+                <a:defRPr/>
+              </a:pPr>
+              <a:t>19</a:t>
+            </a:fld>
+            <a:endParaRPr kumimoji="0" lang="en-US" sz="1800" b="0" i="0" u="none" strike="noStrike" kern="1200" cap="none" spc="0" normalizeH="0" baseline="0" noProof="0">
+              <a:ln>
+                <a:noFill/>
+              </a:ln>
+              <a:solidFill>
+                <a:prstClr val="black"/>
+              </a:solidFill>
+              <a:effectLst/>
+              <a:uLnTx/>
+              <a:uFillTx/>
+              <a:latin typeface="Calibri" panose="020F0502020204030204"/>
+              <a:ea typeface="+mn-ea"/>
+              <a:cs typeface="+mn-cs"/>
+            </a:endParaRPr>
+          </a:p>
+        </p:txBody>
+      </p:sp>
+    </p:spTree>
+    <p:extLst>
+      <p:ext uri="{BB962C8B-B14F-4D97-AF65-F5344CB8AC3E}">
+        <p14:creationId xmlns:p14="http://schemas.microsoft.com/office/powerpoint/2010/main" val="2011497894"/>
+      </p:ext>
+    </p:extLst>
+  </p:cSld>
+  <p:clrMapOvr>
+    <a:masterClrMapping/>
+  </p:clrMapOvr>
+</p:notes>
+</file>
+
+<file path=ppt/notesSlides/notesSlide11.xml><?xml version="1.0" encoding="utf-8"?>
+<p:notes xmlns:a="http://schemas.openxmlformats.org/drawingml/2006/main" xmlns:r="http://schemas.openxmlformats.org/officeDocument/2006/relationships" xmlns:p="http://schemas.openxmlformats.org/presentationml/2006/main">
+  <p:cSld>
+    <p:spTree>
+      <p:nvGrpSpPr>
+        <p:cNvPr id="1" name=""/>
+        <p:cNvGrpSpPr/>
+        <p:nvPr/>
+      </p:nvGrpSpPr>
+      <p:grpSpPr>
+        <a:xfrm>
+          <a:off x="0" y="0"/>
+          <a:ext cx="0" cy="0"/>
+          <a:chOff x="0" y="0"/>
+          <a:chExt cx="0" cy="0"/>
+        </a:xfrm>
+      </p:grpSpPr>
+      <p:sp>
+        <p:nvSpPr>
+          <p:cNvPr id="2" name="Slide Image Placeholder 1"/>
+          <p:cNvSpPr>
+            <a:spLocks noGrp="1" noRot="1" noChangeAspect="1"/>
+          </p:cNvSpPr>
+          <p:nvPr>
+            <p:ph type="sldImg"/>
+          </p:nvPr>
+        </p:nvSpPr>
+        <p:spPr/>
+      </p:sp>
+      <p:sp>
+        <p:nvSpPr>
+          <p:cNvPr id="3" name="Notes Placeholder 2"/>
+          <p:cNvSpPr>
+            <a:spLocks noGrp="1"/>
+          </p:cNvSpPr>
+          <p:nvPr>
+            <p:ph type="body" idx="1"/>
+          </p:nvPr>
+        </p:nvSpPr>
+        <p:spPr/>
+        <p:txBody>
+          <a:bodyPr/>
+          <a:lstStyle/>
+          <a:p>
+            <a:r>
+              <a:rPr lang="en-US" dirty="0"/>
+              <a:t>Thank the audience. Offer to show the live app and LangSmith traces. Invite questions.</a:t>
+            </a:r>
+          </a:p>
+        </p:txBody>
+      </p:sp>
+      <p:sp>
+        <p:nvSpPr>
+          <p:cNvPr id="4" name="Slide Number Placeholder 3"/>
+          <p:cNvSpPr>
+            <a:spLocks noGrp="1"/>
+          </p:cNvSpPr>
+          <p:nvPr>
+            <p:ph type="sldNum" sz="quarter" idx="10"/>
+          </p:nvPr>
+        </p:nvSpPr>
+        <p:spPr/>
+        <p:txBody>
+          <a:bodyPr/>
+          <a:lstStyle/>
+          <a:p>
             <a:fld id="{F7021451-1387-4CA6-816F-3879F97B5CBC}" type="slidenum">
               <a:rPr lang="en-US"/>
-              <a:t>19</a:t>
+              <a:t>20</a:t>
             </a:fld>
             <a:endParaRPr lang="en-US"/>
           </a:p>
@@ -13767,7 +13912,7 @@
 
 <file path=ppt/slides/slide19.xml><?xml version="1.0" encoding="utf-8"?>
 <p:sld xmlns:a="http://schemas.openxmlformats.org/drawingml/2006/main" xmlns:r="http://schemas.openxmlformats.org/officeDocument/2006/relationships" xmlns:p="http://schemas.openxmlformats.org/presentationml/2006/main">
-  <p:cSld name="Slide 16">
+  <p:cSld>
     <p:bg>
       <p:bgPr>
         <a:solidFill>
@@ -13798,61 +13943,17 @@
         </p:nvSpPr>
         <p:spPr>
           <a:xfrm>
-            <a:off x="6858000" y="-914400"/>
-            <a:ext cx="3657600" cy="3657600"/>
-          </a:xfrm>
-          <a:prstGeom prst="ellipse">
-            <a:avLst/>
-          </a:prstGeom>
-          <a:solidFill>
-            <a:srgbClr val="2563EB">
-              <a:alpha val="12000"/>
-            </a:srgbClr>
-          </a:solidFill>
-          <a:ln/>
-        </p:spPr>
-      </p:sp>
-      <p:sp>
-        <p:nvSpPr>
-          <p:cNvPr id="3" name="Shape 1"/>
-          <p:cNvSpPr/>
-          <p:nvPr/>
-        </p:nvSpPr>
-        <p:spPr>
-          <a:xfrm>
-            <a:off x="-699967" y="2616086"/>
-            <a:ext cx="3200400" cy="3200400"/>
-          </a:xfrm>
-          <a:prstGeom prst="ellipse">
-            <a:avLst/>
-          </a:prstGeom>
-          <a:solidFill>
-            <a:srgbClr val="0891B2">
-              <a:alpha val="12000"/>
-            </a:srgbClr>
-          </a:solidFill>
-          <a:ln/>
-        </p:spPr>
-      </p:sp>
-      <p:sp>
-        <p:nvSpPr>
-          <p:cNvPr id="4" name="Shape 2"/>
-          <p:cNvSpPr/>
-          <p:nvPr/>
-        </p:nvSpPr>
-        <p:spPr>
-          <a:xfrm>
-            <a:off x="3474720" y="365760"/>
-            <a:ext cx="1280160" cy="256032"/>
+            <a:off x="457200" y="274320"/>
+            <a:ext cx="2286000" cy="256032"/>
           </a:xfrm>
           <a:prstGeom prst="roundRect">
             <a:avLst>
-              <a:gd name="adj" fmla="val 50000"/>
+              <a:gd name="adj" fmla="val 21429"/>
             </a:avLst>
           </a:prstGeom>
           <a:solidFill>
-            <a:srgbClr val="059669">
-              <a:alpha val="25000"/>
+            <a:srgbClr val="F5A623">
+              <a:alpha val="22000"/>
             </a:srgbClr>
           </a:solidFill>
           <a:ln/>
@@ -13860,14 +13961,14 @@
       </p:sp>
       <p:sp>
         <p:nvSpPr>
-          <p:cNvPr id="5" name="Text 3"/>
-          <p:cNvSpPr/>
-          <p:nvPr/>
-        </p:nvSpPr>
-        <p:spPr>
-          <a:xfrm>
-            <a:off x="3474720" y="365760"/>
-            <a:ext cx="1280160" cy="256032"/>
+          <p:cNvPr id="3" name="Text 1"/>
+          <p:cNvSpPr/>
+          <p:nvPr/>
+        </p:nvSpPr>
+        <p:spPr>
+          <a:xfrm>
+            <a:off x="457200" y="274320"/>
+            <a:ext cx="2286000" cy="256032"/>
           </a:xfrm>
           <a:prstGeom prst="rect">
             <a:avLst/>
@@ -13879,31 +13980,67 @@
           <a:bodyPr wrap="square" lIns="0" tIns="0" rIns="0" bIns="0" rtlCol="0" anchor="ctr"/>
           <a:lstStyle/>
           <a:p>
-            <a:pPr marL="0" indent="0" algn="ctr">
-              <a:buNone/>
-            </a:pPr>
-            <a:r>
-              <a:rPr lang="en-US" sz="900" b="1" kern="0" spc="150" dirty="0">
-                <a:solidFill>
-                  <a:srgbClr val="059669"/>
-                </a:solidFill>
-              </a:rPr>
-              <a:t>SUBMITTED</a:t>
-            </a:r>
-            <a:endParaRPr lang="en-US" sz="900" dirty="0"/>
-          </a:p>
-        </p:txBody>
-      </p:sp>
-      <p:sp>
-        <p:nvSpPr>
-          <p:cNvPr id="6" name="Text 4"/>
-          <p:cNvSpPr/>
-          <p:nvPr/>
-        </p:nvSpPr>
-        <p:spPr>
-          <a:xfrm>
-            <a:off x="91440" y="1275588"/>
-            <a:ext cx="8229600" cy="731520"/>
+            <a:pPr marL="0" marR="0" lvl="0" indent="0" algn="ctr" defTabSz="914400" rtl="0" eaLnBrk="1" fontAlgn="auto" latinLnBrk="0" hangingPunct="1">
+              <a:lnSpc>
+                <a:spcPct val="100000"/>
+              </a:lnSpc>
+              <a:spcBef>
+                <a:spcPts val="0"/>
+              </a:spcBef>
+              <a:spcAft>
+                <a:spcPts val="0"/>
+              </a:spcAft>
+              <a:buClrTx/>
+              <a:buSzTx/>
+              <a:buFontTx/>
+              <a:buNone/>
+              <a:tabLst/>
+              <a:defRPr/>
+            </a:pPr>
+            <a:r>
+              <a:rPr kumimoji="0" lang="en-US" sz="900" b="1" i="0" u="none" strike="noStrike" kern="0" cap="none" spc="120" normalizeH="0" baseline="0" noProof="0" dirty="0">
+                <a:ln>
+                  <a:noFill/>
+                </a:ln>
+                <a:solidFill>
+                  <a:srgbClr val="F5A623"/>
+                </a:solidFill>
+                <a:effectLst/>
+                <a:uLnTx/>
+                <a:uFillTx/>
+                <a:latin typeface="Calibri" pitchFamily="34" charset="0"/>
+                <a:ea typeface="Calibri" pitchFamily="34" charset="-122"/>
+                <a:cs typeface="Calibri" pitchFamily="34" charset="-120"/>
+              </a:rPr>
+              <a:t>EY GUIDELINES · IN PRACTICE</a:t>
+            </a:r>
+            <a:endParaRPr kumimoji="0" lang="en-US" sz="900" b="0" i="0" u="none" strike="noStrike" kern="1200" cap="none" spc="0" normalizeH="0" baseline="0" noProof="0" dirty="0">
+              <a:ln>
+                <a:noFill/>
+              </a:ln>
+              <a:solidFill>
+                <a:prstClr val="black"/>
+              </a:solidFill>
+              <a:effectLst/>
+              <a:uLnTx/>
+              <a:uFillTx/>
+              <a:latin typeface="Calibri" panose="020F0502020204030204"/>
+              <a:ea typeface="+mn-ea"/>
+              <a:cs typeface="+mn-cs"/>
+            </a:endParaRPr>
+          </a:p>
+        </p:txBody>
+      </p:sp>
+      <p:sp>
+        <p:nvSpPr>
+          <p:cNvPr id="4" name="Text 2"/>
+          <p:cNvSpPr/>
+          <p:nvPr/>
+        </p:nvSpPr>
+        <p:spPr>
+          <a:xfrm>
+            <a:off x="457200" y="566928"/>
+            <a:ext cx="8229600" cy="457200"/>
           </a:xfrm>
           <a:prstGeom prst="rect">
             <a:avLst/>
@@ -13915,48 +14052,158 @@
           <a:bodyPr wrap="square" lIns="0" tIns="0" rIns="0" bIns="0" rtlCol="0" anchor="ctr"/>
           <a:lstStyle/>
           <a:p>
-            <a:pPr marL="0" indent="0" algn="ctr">
-              <a:buNone/>
-            </a:pPr>
-            <a:r>
-              <a:rPr lang="en-US" sz="4800" b="1" dirty="0">
+            <a:pPr marL="0" marR="0" lvl="0" indent="0" algn="l" defTabSz="914400" rtl="0" eaLnBrk="1" fontAlgn="auto" latinLnBrk="0" hangingPunct="1">
+              <a:lnSpc>
+                <a:spcPct val="100000"/>
+              </a:lnSpc>
+              <a:spcBef>
+                <a:spcPts val="0"/>
+              </a:spcBef>
+              <a:spcAft>
+                <a:spcPts val="0"/>
+              </a:spcAft>
+              <a:buClrTx/>
+              <a:buSzTx/>
+              <a:buFontTx/>
+              <a:buNone/>
+              <a:tabLst/>
+              <a:defRPr/>
+            </a:pPr>
+            <a:r>
+              <a:rPr kumimoji="0" lang="en-US" sz="2200" b="1" i="0" u="none" strike="noStrike" kern="1200" cap="none" spc="0" normalizeH="0" baseline="0" noProof="0" dirty="0">
+                <a:ln>
+                  <a:noFill/>
+                </a:ln>
                 <a:solidFill>
                   <a:srgbClr val="FFFFFF"/>
                 </a:solidFill>
+                <a:effectLst/>
+                <a:uLnTx/>
+                <a:uFillTx/>
                 <a:latin typeface="Cambria" pitchFamily="34" charset="0"/>
                 <a:ea typeface="Cambria" pitchFamily="34" charset="-122"/>
                 <a:cs typeface="Cambria" pitchFamily="34" charset="-120"/>
               </a:rPr>
-              <a:t>Thank You</a:t>
-            </a:r>
-            <a:endParaRPr lang="en-US" sz="4800" dirty="0"/>
-          </a:p>
-        </p:txBody>
-      </p:sp>
-      <p:sp>
-        <p:nvSpPr>
-          <p:cNvPr id="8" name="Shape 6"/>
-          <p:cNvSpPr/>
-          <p:nvPr/>
-        </p:nvSpPr>
-        <p:spPr>
-          <a:xfrm>
-            <a:off x="822960" y="2423160"/>
-            <a:ext cx="3520440" cy="566928"/>
+              <a:t>How Our Project Followed EY Coding Guidelines</a:t>
+            </a:r>
+            <a:endParaRPr kumimoji="0" lang="en-US" sz="2200" b="0" i="0" u="none" strike="noStrike" kern="1200" cap="none" spc="0" normalizeH="0" baseline="0" noProof="0" dirty="0">
+              <a:ln>
+                <a:noFill/>
+              </a:ln>
+              <a:solidFill>
+                <a:prstClr val="black"/>
+              </a:solidFill>
+              <a:effectLst/>
+              <a:uLnTx/>
+              <a:uFillTx/>
+              <a:latin typeface="Calibri" panose="020F0502020204030204"/>
+              <a:ea typeface="+mn-ea"/>
+              <a:cs typeface="+mn-cs"/>
+            </a:endParaRPr>
+          </a:p>
+        </p:txBody>
+      </p:sp>
+      <p:sp>
+        <p:nvSpPr>
+          <p:cNvPr id="5" name="Text 3"/>
+          <p:cNvSpPr/>
+          <p:nvPr/>
+        </p:nvSpPr>
+        <p:spPr>
+          <a:xfrm>
+            <a:off x="457200" y="969264"/>
+            <a:ext cx="8229600" cy="274320"/>
+          </a:xfrm>
+          <a:prstGeom prst="rect">
+            <a:avLst/>
+          </a:prstGeom>
+          <a:noFill/>
+          <a:ln/>
+        </p:spPr>
+        <p:txBody>
+          <a:bodyPr wrap="square" lIns="0" tIns="0" rIns="0" bIns="0" rtlCol="0" anchor="ctr"/>
+          <a:lstStyle/>
+          <a:p>
+            <a:pPr marL="0" marR="0" lvl="0" indent="0" algn="l" defTabSz="914400" rtl="0" eaLnBrk="1" fontAlgn="auto" latinLnBrk="0" hangingPunct="1">
+              <a:lnSpc>
+                <a:spcPct val="100000"/>
+              </a:lnSpc>
+              <a:spcBef>
+                <a:spcPts val="0"/>
+              </a:spcBef>
+              <a:spcAft>
+                <a:spcPts val="0"/>
+              </a:spcAft>
+              <a:buClrTx/>
+              <a:buSzTx/>
+              <a:buFontTx/>
+              <a:buNone/>
+              <a:tabLst/>
+              <a:defRPr/>
+            </a:pPr>
+            <a:r>
+              <a:rPr kumimoji="0" lang="en-US" sz="1050" b="0" i="1" u="none" strike="noStrike" kern="1200" cap="none" spc="0" normalizeH="0" baseline="0" noProof="0" dirty="0">
+                <a:ln>
+                  <a:noFill/>
+                </a:ln>
+                <a:solidFill>
+                  <a:srgbClr val="AAB4C4"/>
+                </a:solidFill>
+                <a:effectLst/>
+                <a:uLnTx/>
+                <a:uFillTx/>
+                <a:latin typeface="Calibri" pitchFamily="34" charset="0"/>
+                <a:ea typeface="Calibri" pitchFamily="34" charset="-122"/>
+                <a:cs typeface="Calibri" pitchFamily="34" charset="-120"/>
+              </a:rPr>
+              <a:t>Every EY coding principle mapped to what we actually built and shipped on the Credit Risk Intelligence Platform.</a:t>
+            </a:r>
+            <a:endParaRPr kumimoji="0" lang="en-US" sz="1050" b="0" i="0" u="none" strike="noStrike" kern="1200" cap="none" spc="0" normalizeH="0" baseline="0" noProof="0" dirty="0">
+              <a:ln>
+                <a:noFill/>
+              </a:ln>
+              <a:solidFill>
+                <a:prstClr val="black"/>
+              </a:solidFill>
+              <a:effectLst/>
+              <a:uLnTx/>
+              <a:uFillTx/>
+              <a:latin typeface="Calibri" panose="020F0502020204030204"/>
+              <a:ea typeface="+mn-ea"/>
+              <a:cs typeface="+mn-cs"/>
+            </a:endParaRPr>
+          </a:p>
+        </p:txBody>
+      </p:sp>
+      <p:sp>
+        <p:nvSpPr>
+          <p:cNvPr id="6" name="Shape 4"/>
+          <p:cNvSpPr/>
+          <p:nvPr/>
+        </p:nvSpPr>
+        <p:spPr>
+          <a:xfrm>
+            <a:off x="457200" y="1417320"/>
+            <a:ext cx="3977640" cy="841248"/>
           </a:xfrm>
           <a:prstGeom prst="roundRect">
             <a:avLst>
-              <a:gd name="adj" fmla="val 12903"/>
+              <a:gd name="adj" fmla="val 6522"/>
             </a:avLst>
           </a:prstGeom>
           <a:solidFill>
             <a:srgbClr val="162032"/>
           </a:solidFill>
-          <a:ln/>
+          <a:ln w="9525">
+            <a:solidFill>
+              <a:srgbClr val="233047"/>
+            </a:solidFill>
+            <a:prstDash val="solid"/>
+          </a:ln>
           <a:effectLst>
-            <a:outerShdw blurRad="50800" dist="25400" dir="2700000" algn="bl" rotWithShape="0">
+            <a:outerShdw blurRad="76200" dist="25400" dir="5400000" algn="bl" rotWithShape="0">
               <a:srgbClr val="000000">
-                <a:alpha val="12000"/>
+                <a:alpha val="16000"/>
               </a:srgbClr>
             </a:outerShdw>
           </a:effectLst>
@@ -13964,14 +14211,108 @@
       </p:sp>
       <p:sp>
         <p:nvSpPr>
+          <p:cNvPr id="7" name="Shape 5"/>
+          <p:cNvSpPr/>
+          <p:nvPr/>
+        </p:nvSpPr>
+        <p:spPr>
+          <a:xfrm>
+            <a:off x="603504" y="1545336"/>
+            <a:ext cx="402336" cy="402336"/>
+          </a:xfrm>
+          <a:prstGeom prst="ellipse">
+            <a:avLst/>
+          </a:prstGeom>
+          <a:solidFill>
+            <a:srgbClr val="E8544E">
+              <a:alpha val="20000"/>
+            </a:srgbClr>
+          </a:solidFill>
+          <a:ln/>
+        </p:spPr>
+      </p:sp>
+      <p:sp>
+        <p:nvSpPr>
+          <p:cNvPr id="8" name="Text 6"/>
+          <p:cNvSpPr/>
+          <p:nvPr/>
+        </p:nvSpPr>
+        <p:spPr>
+          <a:xfrm>
+            <a:off x="603504" y="1545336"/>
+            <a:ext cx="402336" cy="402336"/>
+          </a:xfrm>
+          <a:prstGeom prst="rect">
+            <a:avLst/>
+          </a:prstGeom>
+          <a:noFill/>
+          <a:ln/>
+        </p:spPr>
+        <p:txBody>
+          <a:bodyPr wrap="square" lIns="0" tIns="0" rIns="0" bIns="0" rtlCol="0" anchor="ctr"/>
+          <a:lstStyle/>
+          <a:p>
+            <a:pPr marL="0" marR="0" lvl="0" indent="0" algn="ctr" defTabSz="914400" rtl="0" eaLnBrk="1" fontAlgn="auto" latinLnBrk="0" hangingPunct="1">
+              <a:lnSpc>
+                <a:spcPct val="100000"/>
+              </a:lnSpc>
+              <a:spcBef>
+                <a:spcPts val="0"/>
+              </a:spcBef>
+              <a:spcAft>
+                <a:spcPts val="0"/>
+              </a:spcAft>
+              <a:buClrTx/>
+              <a:buSzTx/>
+              <a:buFontTx/>
+              <a:buNone/>
+              <a:tabLst/>
+              <a:defRPr/>
+            </a:pPr>
+            <a:r>
+              <a:rPr kumimoji="0" lang="en-US" sz="1400" b="0" i="0" u="none" strike="noStrike" kern="1200" cap="none" spc="0" normalizeH="0" baseline="0" noProof="0" dirty="0">
+                <a:ln>
+                  <a:noFill/>
+                </a:ln>
+                <a:solidFill>
+                  <a:srgbClr val="E8544E"/>
+                </a:solidFill>
+                <a:effectLst/>
+                <a:uLnTx/>
+                <a:uFillTx/>
+                <a:latin typeface="Calibri" panose="020F0502020204030204"/>
+                <a:ea typeface="+mn-ea"/>
+                <a:cs typeface="+mn-cs"/>
+              </a:rPr>
+              <a:t>✎</a:t>
+            </a:r>
+            <a:endParaRPr kumimoji="0" lang="en-US" sz="1400" b="0" i="0" u="none" strike="noStrike" kern="1200" cap="none" spc="0" normalizeH="0" baseline="0" noProof="0" dirty="0">
+              <a:ln>
+                <a:noFill/>
+              </a:ln>
+              <a:solidFill>
+                <a:prstClr val="black"/>
+              </a:solidFill>
+              <a:effectLst/>
+              <a:uLnTx/>
+              <a:uFillTx/>
+              <a:latin typeface="Calibri" panose="020F0502020204030204"/>
+              <a:ea typeface="+mn-ea"/>
+              <a:cs typeface="+mn-cs"/>
+            </a:endParaRPr>
+          </a:p>
+        </p:txBody>
+      </p:sp>
+      <p:sp>
+        <p:nvSpPr>
           <p:cNvPr id="9" name="Text 7"/>
           <p:cNvSpPr/>
           <p:nvPr/>
         </p:nvSpPr>
         <p:spPr>
           <a:xfrm>
-            <a:off x="1005840" y="2487168"/>
-            <a:ext cx="1097280" cy="384048"/>
+            <a:off x="1115568" y="1508760"/>
+            <a:ext cx="3172968" cy="219456"/>
           </a:xfrm>
           <a:prstGeom prst="rect">
             <a:avLst/>
@@ -13983,18 +14324,54 @@
           <a:bodyPr wrap="square" lIns="0" tIns="0" rIns="0" bIns="0" rtlCol="0" anchor="ctr"/>
           <a:lstStyle/>
           <a:p>
-            <a:pPr marL="0" indent="0">
-              <a:buNone/>
-            </a:pPr>
-            <a:r>
-              <a:rPr lang="en-US" sz="1000" b="1" dirty="0">
-                <a:solidFill>
-                  <a:srgbClr val="0891B2"/>
-                </a:solidFill>
-              </a:rPr>
-              <a:t>🌐 Live App  </a:t>
-            </a:r>
-            <a:endParaRPr lang="en-US" sz="1000" dirty="0"/>
+            <a:pPr marL="0" marR="0" lvl="0" indent="0" algn="l" defTabSz="914400" rtl="0" eaLnBrk="1" fontAlgn="auto" latinLnBrk="0" hangingPunct="1">
+              <a:lnSpc>
+                <a:spcPct val="100000"/>
+              </a:lnSpc>
+              <a:spcBef>
+                <a:spcPts val="0"/>
+              </a:spcBef>
+              <a:spcAft>
+                <a:spcPts val="0"/>
+              </a:spcAft>
+              <a:buClrTx/>
+              <a:buSzTx/>
+              <a:buFontTx/>
+              <a:buNone/>
+              <a:tabLst/>
+              <a:defRPr/>
+            </a:pPr>
+            <a:r>
+              <a:rPr kumimoji="0" lang="en-US" sz="1200" b="1" i="0" u="none" strike="noStrike" kern="1200" cap="none" spc="0" normalizeH="0" baseline="0" noProof="0" dirty="0">
+                <a:ln>
+                  <a:noFill/>
+                </a:ln>
+                <a:solidFill>
+                  <a:srgbClr val="FFFFFF"/>
+                </a:solidFill>
+                <a:effectLst/>
+                <a:uLnTx/>
+                <a:uFillTx/>
+                <a:latin typeface="Cambria" pitchFamily="34" charset="0"/>
+                <a:ea typeface="Cambria" pitchFamily="34" charset="-122"/>
+                <a:cs typeface="Cambria" pitchFamily="34" charset="-120"/>
+              </a:rPr>
+              <a:t>Naming Conventions</a:t>
+            </a:r>
+            <a:endParaRPr kumimoji="0" lang="en-US" sz="1200" b="0" i="0" u="none" strike="noStrike" kern="1200" cap="none" spc="0" normalizeH="0" baseline="0" noProof="0" dirty="0">
+              <a:ln>
+                <a:noFill/>
+              </a:ln>
+              <a:solidFill>
+                <a:prstClr val="black"/>
+              </a:solidFill>
+              <a:effectLst/>
+              <a:uLnTx/>
+              <a:uFillTx/>
+              <a:latin typeface="Calibri" panose="020F0502020204030204"/>
+              <a:ea typeface="+mn-ea"/>
+              <a:cs typeface="+mn-cs"/>
+            </a:endParaRPr>
           </a:p>
         </p:txBody>
       </p:sp>
@@ -14006,34 +14383,67 @@
         </p:nvSpPr>
         <p:spPr>
           <a:xfrm>
-            <a:off x="1920240" y="2487168"/>
-            <a:ext cx="2286000" cy="384048"/>
-          </a:xfrm>
-          <a:prstGeom prst="rect">
-            <a:avLst/>
-          </a:prstGeom>
-          <a:noFill/>
-          <a:ln/>
-        </p:spPr>
-        <p:txBody>
-          <a:bodyPr wrap="square" lIns="0" tIns="0" rIns="0" bIns="0" rtlCol="0" anchor="ctr"/>
-          <a:lstStyle/>
-          <a:p>
-            <a:pPr marL="0" indent="0">
-              <a:buNone/>
-            </a:pPr>
-            <a:r>
-              <a:rPr lang="en-US" sz="950" dirty="0">
-                <a:solidFill>
-                  <a:srgbClr val="FFFFFF"/>
-                </a:solidFill>
-                <a:latin typeface="Courier New" pitchFamily="34" charset="0"/>
-                <a:ea typeface="Courier New" pitchFamily="34" charset="-122"/>
-                <a:cs typeface="Courier New" pitchFamily="34" charset="-120"/>
-              </a:rPr>
-              <a:t>creditriskplatform.azurewebsites.net</a:t>
-            </a:r>
-            <a:endParaRPr lang="en-US" sz="950" dirty="0"/>
+            <a:off x="1115568" y="1728216"/>
+            <a:ext cx="3172968" cy="457200"/>
+          </a:xfrm>
+          <a:prstGeom prst="rect">
+            <a:avLst/>
+          </a:prstGeom>
+          <a:noFill/>
+          <a:ln/>
+        </p:spPr>
+        <p:txBody>
+          <a:bodyPr wrap="square" lIns="0" tIns="0" rIns="0" bIns="0" rtlCol="0" anchor="t"/>
+          <a:lstStyle/>
+          <a:p>
+            <a:pPr marL="0" marR="0" lvl="0" indent="0" algn="l" defTabSz="914400" rtl="0" eaLnBrk="1" fontAlgn="auto" latinLnBrk="0" hangingPunct="1">
+              <a:lnSpc>
+                <a:spcPct val="108000"/>
+              </a:lnSpc>
+              <a:spcBef>
+                <a:spcPts val="0"/>
+              </a:spcBef>
+              <a:spcAft>
+                <a:spcPts val="0"/>
+              </a:spcAft>
+              <a:buClrTx/>
+              <a:buSzTx/>
+              <a:buFontTx/>
+              <a:buNone/>
+              <a:tabLst/>
+              <a:defRPr/>
+            </a:pPr>
+            <a:r>
+              <a:rPr kumimoji="0" lang="en-US" sz="870" b="0" i="0" u="none" strike="noStrike" kern="1200" cap="none" spc="0" normalizeH="0" baseline="0" noProof="0" dirty="0">
+                <a:ln>
+                  <a:noFill/>
+                </a:ln>
+                <a:solidFill>
+                  <a:srgbClr val="AAB4C4"/>
+                </a:solidFill>
+                <a:effectLst/>
+                <a:uLnTx/>
+                <a:uFillTx/>
+                <a:latin typeface="Calibri" pitchFamily="34" charset="0"/>
+                <a:ea typeface="Calibri" pitchFamily="34" charset="-122"/>
+                <a:cs typeface="Calibri" pitchFamily="34" charset="-120"/>
+              </a:rPr>
+              <a:t>Modules named by responsibility — test_auth.py, test_loan_workflow.py, test_reranker.py, retrieval_agent, chat_agent — consistent across the codebase.</a:t>
+            </a:r>
+            <a:endParaRPr kumimoji="0" lang="en-US" sz="870" b="0" i="0" u="none" strike="noStrike" kern="1200" cap="none" spc="0" normalizeH="0" baseline="0" noProof="0" dirty="0">
+              <a:ln>
+                <a:noFill/>
+              </a:ln>
+              <a:solidFill>
+                <a:prstClr val="black"/>
+              </a:solidFill>
+              <a:effectLst/>
+              <a:uLnTx/>
+              <a:uFillTx/>
+              <a:latin typeface="Calibri" panose="020F0502020204030204"/>
+              <a:ea typeface="+mn-ea"/>
+              <a:cs typeface="+mn-cs"/>
+            </a:endParaRPr>
           </a:p>
         </p:txBody>
       </p:sp>
@@ -14045,22 +14455,27 @@
         </p:nvSpPr>
         <p:spPr>
           <a:xfrm>
-            <a:off x="4663440" y="2423160"/>
-            <a:ext cx="3520440" cy="566928"/>
+            <a:off x="4709160" y="1417320"/>
+            <a:ext cx="3977640" cy="841248"/>
           </a:xfrm>
           <a:prstGeom prst="roundRect">
             <a:avLst>
-              <a:gd name="adj" fmla="val 12903"/>
+              <a:gd name="adj" fmla="val 6522"/>
             </a:avLst>
           </a:prstGeom>
           <a:solidFill>
             <a:srgbClr val="162032"/>
           </a:solidFill>
-          <a:ln/>
+          <a:ln w="9525">
+            <a:solidFill>
+              <a:srgbClr val="233047"/>
+            </a:solidFill>
+            <a:prstDash val="solid"/>
+          </a:ln>
           <a:effectLst>
-            <a:outerShdw blurRad="50800" dist="25400" dir="2700000" algn="bl" rotWithShape="0">
+            <a:outerShdw blurRad="76200" dist="25400" dir="5400000" algn="bl" rotWithShape="0">
               <a:srgbClr val="000000">
-                <a:alpha val="12000"/>
+                <a:alpha val="16000"/>
               </a:srgbClr>
             </a:outerShdw>
           </a:effectLst>
@@ -14068,14 +14483,36 @@
       </p:sp>
       <p:sp>
         <p:nvSpPr>
-          <p:cNvPr id="12" name="Text 10"/>
-          <p:cNvSpPr/>
-          <p:nvPr/>
-        </p:nvSpPr>
-        <p:spPr>
-          <a:xfrm>
-            <a:off x="4846320" y="2487168"/>
-            <a:ext cx="1097280" cy="384048"/>
+          <p:cNvPr id="12" name="Shape 10"/>
+          <p:cNvSpPr/>
+          <p:nvPr/>
+        </p:nvSpPr>
+        <p:spPr>
+          <a:xfrm>
+            <a:off x="4855464" y="1545336"/>
+            <a:ext cx="402336" cy="402336"/>
+          </a:xfrm>
+          <a:prstGeom prst="ellipse">
+            <a:avLst/>
+          </a:prstGeom>
+          <a:solidFill>
+            <a:srgbClr val="3B82F6">
+              <a:alpha val="20000"/>
+            </a:srgbClr>
+          </a:solidFill>
+          <a:ln/>
+        </p:spPr>
+      </p:sp>
+      <p:sp>
+        <p:nvSpPr>
+          <p:cNvPr id="13" name="Text 11"/>
+          <p:cNvSpPr/>
+          <p:nvPr/>
+        </p:nvSpPr>
+        <p:spPr>
+          <a:xfrm>
+            <a:off x="4855464" y="1545336"/>
+            <a:ext cx="402336" cy="402336"/>
           </a:xfrm>
           <a:prstGeom prst="rect">
             <a:avLst/>
@@ -14087,31 +14524,67 @@
           <a:bodyPr wrap="square" lIns="0" tIns="0" rIns="0" bIns="0" rtlCol="0" anchor="ctr"/>
           <a:lstStyle/>
           <a:p>
-            <a:pPr marL="0" indent="0">
-              <a:buNone/>
-            </a:pPr>
-            <a:r>
-              <a:rPr lang="en-US" sz="1000" b="1" dirty="0">
-                <a:solidFill>
-                  <a:srgbClr val="2563EB"/>
-                </a:solidFill>
-              </a:rPr>
-              <a:t>💻 GitHub  </a:t>
-            </a:r>
-            <a:endParaRPr lang="en-US" sz="1000" dirty="0"/>
-          </a:p>
-        </p:txBody>
-      </p:sp>
-      <p:sp>
-        <p:nvSpPr>
-          <p:cNvPr id="13" name="Text 11"/>
-          <p:cNvSpPr/>
-          <p:nvPr/>
-        </p:nvSpPr>
-        <p:spPr>
-          <a:xfrm>
-            <a:off x="5760720" y="2487168"/>
-            <a:ext cx="2286000" cy="384048"/>
+            <a:pPr marL="0" marR="0" lvl="0" indent="0" algn="ctr" defTabSz="914400" rtl="0" eaLnBrk="1" fontAlgn="auto" latinLnBrk="0" hangingPunct="1">
+              <a:lnSpc>
+                <a:spcPct val="100000"/>
+              </a:lnSpc>
+              <a:spcBef>
+                <a:spcPts val="0"/>
+              </a:spcBef>
+              <a:spcAft>
+                <a:spcPts val="0"/>
+              </a:spcAft>
+              <a:buClrTx/>
+              <a:buSzTx/>
+              <a:buFontTx/>
+              <a:buNone/>
+              <a:tabLst/>
+              <a:defRPr/>
+            </a:pPr>
+            <a:r>
+              <a:rPr kumimoji="0" lang="en-US" sz="1400" b="0" i="0" u="none" strike="noStrike" kern="1200" cap="none" spc="0" normalizeH="0" baseline="0" noProof="0" dirty="0">
+                <a:ln>
+                  <a:noFill/>
+                </a:ln>
+                <a:solidFill>
+                  <a:srgbClr val="3B82F6"/>
+                </a:solidFill>
+                <a:effectLst/>
+                <a:uLnTx/>
+                <a:uFillTx/>
+                <a:latin typeface="Calibri" panose="020F0502020204030204"/>
+                <a:ea typeface="+mn-ea"/>
+                <a:cs typeface="+mn-cs"/>
+              </a:rPr>
+              <a:t>🔀</a:t>
+            </a:r>
+            <a:endParaRPr kumimoji="0" lang="en-US" sz="1400" b="0" i="0" u="none" strike="noStrike" kern="1200" cap="none" spc="0" normalizeH="0" baseline="0" noProof="0" dirty="0">
+              <a:ln>
+                <a:noFill/>
+              </a:ln>
+              <a:solidFill>
+                <a:prstClr val="black"/>
+              </a:solidFill>
+              <a:effectLst/>
+              <a:uLnTx/>
+              <a:uFillTx/>
+              <a:latin typeface="Calibri" panose="020F0502020204030204"/>
+              <a:ea typeface="+mn-ea"/>
+              <a:cs typeface="+mn-cs"/>
+            </a:endParaRPr>
+          </a:p>
+        </p:txBody>
+      </p:sp>
+      <p:sp>
+        <p:nvSpPr>
+          <p:cNvPr id="14" name="Text 12"/>
+          <p:cNvSpPr/>
+          <p:nvPr/>
+        </p:nvSpPr>
+        <p:spPr>
+          <a:xfrm>
+            <a:off x="5367528" y="1508760"/>
+            <a:ext cx="3172968" cy="219456"/>
           </a:xfrm>
           <a:prstGeom prst="rect">
             <a:avLst/>
@@ -14123,48 +14596,158 @@
           <a:bodyPr wrap="square" lIns="0" tIns="0" rIns="0" bIns="0" rtlCol="0" anchor="ctr"/>
           <a:lstStyle/>
           <a:p>
-            <a:pPr marL="0" indent="0">
-              <a:buNone/>
-            </a:pPr>
-            <a:r>
-              <a:rPr lang="en-US" sz="950" dirty="0">
+            <a:pPr marL="0" marR="0" lvl="0" indent="0" algn="l" defTabSz="914400" rtl="0" eaLnBrk="1" fontAlgn="auto" latinLnBrk="0" hangingPunct="1">
+              <a:lnSpc>
+                <a:spcPct val="100000"/>
+              </a:lnSpc>
+              <a:spcBef>
+                <a:spcPts val="0"/>
+              </a:spcBef>
+              <a:spcAft>
+                <a:spcPts val="0"/>
+              </a:spcAft>
+              <a:buClrTx/>
+              <a:buSzTx/>
+              <a:buFontTx/>
+              <a:buNone/>
+              <a:tabLst/>
+              <a:defRPr/>
+            </a:pPr>
+            <a:r>
+              <a:rPr kumimoji="0" lang="en-US" sz="1200" b="1" i="0" u="none" strike="noStrike" kern="1200" cap="none" spc="0" normalizeH="0" baseline="0" noProof="0" dirty="0">
+                <a:ln>
+                  <a:noFill/>
+                </a:ln>
                 <a:solidFill>
                   <a:srgbClr val="FFFFFF"/>
                 </a:solidFill>
-                <a:latin typeface="Courier New" pitchFamily="34" charset="0"/>
-                <a:ea typeface="Courier New" pitchFamily="34" charset="-122"/>
-                <a:cs typeface="Courier New" pitchFamily="34" charset="-120"/>
-              </a:rPr>
-              <a:t>github.com/Chaurasiyakash0136/EY-Training-2026</a:t>
-            </a:r>
-            <a:endParaRPr lang="en-US" sz="950" dirty="0"/>
-          </a:p>
-        </p:txBody>
-      </p:sp>
-      <p:sp>
-        <p:nvSpPr>
-          <p:cNvPr id="14" name="Shape 12"/>
-          <p:cNvSpPr/>
-          <p:nvPr/>
-        </p:nvSpPr>
-        <p:spPr>
-          <a:xfrm>
-            <a:off x="822960" y="3136392"/>
-            <a:ext cx="3520440" cy="566928"/>
+                <a:effectLst/>
+                <a:uLnTx/>
+                <a:uFillTx/>
+                <a:latin typeface="Cambria" pitchFamily="34" charset="0"/>
+                <a:ea typeface="Cambria" pitchFamily="34" charset="-122"/>
+                <a:cs typeface="Cambria" pitchFamily="34" charset="-120"/>
+              </a:rPr>
+              <a:t>Code Reviews</a:t>
+            </a:r>
+            <a:endParaRPr kumimoji="0" lang="en-US" sz="1200" b="0" i="0" u="none" strike="noStrike" kern="1200" cap="none" spc="0" normalizeH="0" baseline="0" noProof="0" dirty="0">
+              <a:ln>
+                <a:noFill/>
+              </a:ln>
+              <a:solidFill>
+                <a:prstClr val="black"/>
+              </a:solidFill>
+              <a:effectLst/>
+              <a:uLnTx/>
+              <a:uFillTx/>
+              <a:latin typeface="Calibri" panose="020F0502020204030204"/>
+              <a:ea typeface="+mn-ea"/>
+              <a:cs typeface="+mn-cs"/>
+            </a:endParaRPr>
+          </a:p>
+        </p:txBody>
+      </p:sp>
+      <p:sp>
+        <p:nvSpPr>
+          <p:cNvPr id="15" name="Text 13"/>
+          <p:cNvSpPr/>
+          <p:nvPr/>
+        </p:nvSpPr>
+        <p:spPr>
+          <a:xfrm>
+            <a:off x="5367528" y="1728216"/>
+            <a:ext cx="3172968" cy="457200"/>
+          </a:xfrm>
+          <a:prstGeom prst="rect">
+            <a:avLst/>
+          </a:prstGeom>
+          <a:noFill/>
+          <a:ln/>
+        </p:spPr>
+        <p:txBody>
+          <a:bodyPr wrap="square" lIns="0" tIns="0" rIns="0" bIns="0" rtlCol="0" anchor="t"/>
+          <a:lstStyle/>
+          <a:p>
+            <a:pPr marL="0" marR="0" lvl="0" indent="0" algn="l" defTabSz="914400" rtl="0" eaLnBrk="1" fontAlgn="auto" latinLnBrk="0" hangingPunct="1">
+              <a:lnSpc>
+                <a:spcPct val="108000"/>
+              </a:lnSpc>
+              <a:spcBef>
+                <a:spcPts val="0"/>
+              </a:spcBef>
+              <a:spcAft>
+                <a:spcPts val="0"/>
+              </a:spcAft>
+              <a:buClrTx/>
+              <a:buSzTx/>
+              <a:buFontTx/>
+              <a:buNone/>
+              <a:tabLst/>
+              <a:defRPr/>
+            </a:pPr>
+            <a:r>
+              <a:rPr kumimoji="0" lang="en-US" sz="870" b="0" i="0" u="none" strike="noStrike" kern="1200" cap="none" spc="0" normalizeH="0" baseline="0" noProof="0" dirty="0">
+                <a:ln>
+                  <a:noFill/>
+                </a:ln>
+                <a:solidFill>
+                  <a:srgbClr val="AAB4C4"/>
+                </a:solidFill>
+                <a:effectLst/>
+                <a:uLnTx/>
+                <a:uFillTx/>
+                <a:latin typeface="Calibri" pitchFamily="34" charset="0"/>
+                <a:ea typeface="Calibri" pitchFamily="34" charset="-122"/>
+                <a:cs typeface="Calibri" pitchFamily="34" charset="-120"/>
+              </a:rPr>
+              <a:t>Every push is gated: GitHub Actions runs all 96 tests automatically before code can move forward — no merge without a passing check.</a:t>
+            </a:r>
+            <a:endParaRPr kumimoji="0" lang="en-US" sz="870" b="0" i="0" u="none" strike="noStrike" kern="1200" cap="none" spc="0" normalizeH="0" baseline="0" noProof="0" dirty="0">
+              <a:ln>
+                <a:noFill/>
+              </a:ln>
+              <a:solidFill>
+                <a:prstClr val="black"/>
+              </a:solidFill>
+              <a:effectLst/>
+              <a:uLnTx/>
+              <a:uFillTx/>
+              <a:latin typeface="Calibri" panose="020F0502020204030204"/>
+              <a:ea typeface="+mn-ea"/>
+              <a:cs typeface="+mn-cs"/>
+            </a:endParaRPr>
+          </a:p>
+        </p:txBody>
+      </p:sp>
+      <p:sp>
+        <p:nvSpPr>
+          <p:cNvPr id="16" name="Shape 14"/>
+          <p:cNvSpPr/>
+          <p:nvPr/>
+        </p:nvSpPr>
+        <p:spPr>
+          <a:xfrm>
+            <a:off x="457200" y="2331720"/>
+            <a:ext cx="3977640" cy="841248"/>
           </a:xfrm>
           <a:prstGeom prst="roundRect">
             <a:avLst>
-              <a:gd name="adj" fmla="val 12903"/>
+              <a:gd name="adj" fmla="val 6522"/>
             </a:avLst>
           </a:prstGeom>
           <a:solidFill>
             <a:srgbClr val="162032"/>
           </a:solidFill>
-          <a:ln/>
+          <a:ln w="9525">
+            <a:solidFill>
+              <a:srgbClr val="233047"/>
+            </a:solidFill>
+            <a:prstDash val="solid"/>
+          </a:ln>
           <a:effectLst>
-            <a:outerShdw blurRad="50800" dist="25400" dir="2700000" algn="bl" rotWithShape="0">
+            <a:outerShdw blurRad="76200" dist="25400" dir="5400000" algn="bl" rotWithShape="0">
               <a:srgbClr val="000000">
-                <a:alpha val="12000"/>
+                <a:alpha val="16000"/>
               </a:srgbClr>
             </a:outerShdw>
           </a:effectLst>
@@ -14172,14 +14755,36 @@
       </p:sp>
       <p:sp>
         <p:nvSpPr>
-          <p:cNvPr id="15" name="Text 13"/>
-          <p:cNvSpPr/>
-          <p:nvPr/>
-        </p:nvSpPr>
-        <p:spPr>
-          <a:xfrm>
-            <a:off x="1005840" y="3200400"/>
-            <a:ext cx="1097280" cy="384048"/>
+          <p:cNvPr id="17" name="Shape 15"/>
+          <p:cNvSpPr/>
+          <p:nvPr/>
+        </p:nvSpPr>
+        <p:spPr>
+          <a:xfrm>
+            <a:off x="603504" y="2459736"/>
+            <a:ext cx="402336" cy="402336"/>
+          </a:xfrm>
+          <a:prstGeom prst="ellipse">
+            <a:avLst/>
+          </a:prstGeom>
+          <a:solidFill>
+            <a:srgbClr val="059669">
+              <a:alpha val="20000"/>
+            </a:srgbClr>
+          </a:solidFill>
+          <a:ln/>
+        </p:spPr>
+      </p:sp>
+      <p:sp>
+        <p:nvSpPr>
+          <p:cNvPr id="18" name="Text 16"/>
+          <p:cNvSpPr/>
+          <p:nvPr/>
+        </p:nvSpPr>
+        <p:spPr>
+          <a:xfrm>
+            <a:off x="603504" y="2459736"/>
+            <a:ext cx="402336" cy="402336"/>
           </a:xfrm>
           <a:prstGeom prst="rect">
             <a:avLst/>
@@ -14191,31 +14796,67 @@
           <a:bodyPr wrap="square" lIns="0" tIns="0" rIns="0" bIns="0" rtlCol="0" anchor="ctr"/>
           <a:lstStyle/>
           <a:p>
-            <a:pPr marL="0" indent="0">
-              <a:buNone/>
-            </a:pPr>
-            <a:r>
-              <a:rPr lang="en-US" sz="1000" b="1" dirty="0">
-                <a:solidFill>
-                  <a:srgbClr val="D97706"/>
-                </a:solidFill>
-              </a:rPr>
-              <a:t>🔍 LangSmith  </a:t>
-            </a:r>
-            <a:endParaRPr lang="en-US" sz="1000" dirty="0"/>
-          </a:p>
-        </p:txBody>
-      </p:sp>
-      <p:sp>
-        <p:nvSpPr>
-          <p:cNvPr id="16" name="Text 14"/>
-          <p:cNvSpPr/>
-          <p:nvPr/>
-        </p:nvSpPr>
-        <p:spPr>
-          <a:xfrm>
-            <a:off x="1920240" y="3200400"/>
-            <a:ext cx="2286000" cy="384048"/>
+            <a:pPr marL="0" marR="0" lvl="0" indent="0" algn="ctr" defTabSz="914400" rtl="0" eaLnBrk="1" fontAlgn="auto" latinLnBrk="0" hangingPunct="1">
+              <a:lnSpc>
+                <a:spcPct val="100000"/>
+              </a:lnSpc>
+              <a:spcBef>
+                <a:spcPts val="0"/>
+              </a:spcBef>
+              <a:spcAft>
+                <a:spcPts val="0"/>
+              </a:spcAft>
+              <a:buClrTx/>
+              <a:buSzTx/>
+              <a:buFontTx/>
+              <a:buNone/>
+              <a:tabLst/>
+              <a:defRPr/>
+            </a:pPr>
+            <a:r>
+              <a:rPr kumimoji="0" lang="en-US" sz="1400" b="0" i="0" u="none" strike="noStrike" kern="1200" cap="none" spc="0" normalizeH="0" baseline="0" noProof="0" dirty="0">
+                <a:ln>
+                  <a:noFill/>
+                </a:ln>
+                <a:solidFill>
+                  <a:srgbClr val="059669"/>
+                </a:solidFill>
+                <a:effectLst/>
+                <a:uLnTx/>
+                <a:uFillTx/>
+                <a:latin typeface="Calibri" panose="020F0502020204030204"/>
+                <a:ea typeface="+mn-ea"/>
+                <a:cs typeface="+mn-cs"/>
+              </a:rPr>
+              <a:t>📄</a:t>
+            </a:r>
+            <a:endParaRPr kumimoji="0" lang="en-US" sz="1400" b="0" i="0" u="none" strike="noStrike" kern="1200" cap="none" spc="0" normalizeH="0" baseline="0" noProof="0" dirty="0">
+              <a:ln>
+                <a:noFill/>
+              </a:ln>
+              <a:solidFill>
+                <a:prstClr val="black"/>
+              </a:solidFill>
+              <a:effectLst/>
+              <a:uLnTx/>
+              <a:uFillTx/>
+              <a:latin typeface="Calibri" panose="020F0502020204030204"/>
+              <a:ea typeface="+mn-ea"/>
+              <a:cs typeface="+mn-cs"/>
+            </a:endParaRPr>
+          </a:p>
+        </p:txBody>
+      </p:sp>
+      <p:sp>
+        <p:nvSpPr>
+          <p:cNvPr id="19" name="Text 17"/>
+          <p:cNvSpPr/>
+          <p:nvPr/>
+        </p:nvSpPr>
+        <p:spPr>
+          <a:xfrm>
+            <a:off x="1115568" y="2423160"/>
+            <a:ext cx="3172968" cy="219456"/>
           </a:xfrm>
           <a:prstGeom prst="rect">
             <a:avLst/>
@@ -14227,48 +14868,158 @@
           <a:bodyPr wrap="square" lIns="0" tIns="0" rIns="0" bIns="0" rtlCol="0" anchor="ctr"/>
           <a:lstStyle/>
           <a:p>
-            <a:pPr marL="0" indent="0">
-              <a:buNone/>
-            </a:pPr>
-            <a:r>
-              <a:rPr lang="en-US" sz="950" dirty="0">
+            <a:pPr marL="0" marR="0" lvl="0" indent="0" algn="l" defTabSz="914400" rtl="0" eaLnBrk="1" fontAlgn="auto" latinLnBrk="0" hangingPunct="1">
+              <a:lnSpc>
+                <a:spcPct val="100000"/>
+              </a:lnSpc>
+              <a:spcBef>
+                <a:spcPts val="0"/>
+              </a:spcBef>
+              <a:spcAft>
+                <a:spcPts val="0"/>
+              </a:spcAft>
+              <a:buClrTx/>
+              <a:buSzTx/>
+              <a:buFontTx/>
+              <a:buNone/>
+              <a:tabLst/>
+              <a:defRPr/>
+            </a:pPr>
+            <a:r>
+              <a:rPr kumimoji="0" lang="en-US" sz="1200" b="1" i="0" u="none" strike="noStrike" kern="1200" cap="none" spc="0" normalizeH="0" baseline="0" noProof="0" dirty="0">
+                <a:ln>
+                  <a:noFill/>
+                </a:ln>
                 <a:solidFill>
                   <a:srgbClr val="FFFFFF"/>
                 </a:solidFill>
-                <a:latin typeface="Courier New" pitchFamily="34" charset="0"/>
-                <a:ea typeface="Courier New" pitchFamily="34" charset="-122"/>
-                <a:cs typeface="Courier New" pitchFamily="34" charset="-120"/>
-              </a:rPr>
-              <a:t>smith.langchain.com → credit-risk-platform</a:t>
-            </a:r>
-            <a:endParaRPr lang="en-US" sz="950" dirty="0"/>
-          </a:p>
-        </p:txBody>
-      </p:sp>
-      <p:sp>
-        <p:nvSpPr>
-          <p:cNvPr id="17" name="Shape 15"/>
-          <p:cNvSpPr/>
-          <p:nvPr/>
-        </p:nvSpPr>
-        <p:spPr>
-          <a:xfrm>
-            <a:off x="4663440" y="3136392"/>
-            <a:ext cx="3520440" cy="566928"/>
+                <a:effectLst/>
+                <a:uLnTx/>
+                <a:uFillTx/>
+                <a:latin typeface="Cambria" pitchFamily="34" charset="0"/>
+                <a:ea typeface="Cambria" pitchFamily="34" charset="-122"/>
+                <a:cs typeface="Cambria" pitchFamily="34" charset="-120"/>
+              </a:rPr>
+              <a:t>Documentation</a:t>
+            </a:r>
+            <a:endParaRPr kumimoji="0" lang="en-US" sz="1200" b="0" i="0" u="none" strike="noStrike" kern="1200" cap="none" spc="0" normalizeH="0" baseline="0" noProof="0" dirty="0">
+              <a:ln>
+                <a:noFill/>
+              </a:ln>
+              <a:solidFill>
+                <a:prstClr val="black"/>
+              </a:solidFill>
+              <a:effectLst/>
+              <a:uLnTx/>
+              <a:uFillTx/>
+              <a:latin typeface="Calibri" panose="020F0502020204030204"/>
+              <a:ea typeface="+mn-ea"/>
+              <a:cs typeface="+mn-cs"/>
+            </a:endParaRPr>
+          </a:p>
+        </p:txBody>
+      </p:sp>
+      <p:sp>
+        <p:nvSpPr>
+          <p:cNvPr id="20" name="Text 18"/>
+          <p:cNvSpPr/>
+          <p:nvPr/>
+        </p:nvSpPr>
+        <p:spPr>
+          <a:xfrm>
+            <a:off x="1115568" y="2642616"/>
+            <a:ext cx="3172968" cy="457200"/>
+          </a:xfrm>
+          <a:prstGeom prst="rect">
+            <a:avLst/>
+          </a:prstGeom>
+          <a:noFill/>
+          <a:ln/>
+        </p:spPr>
+        <p:txBody>
+          <a:bodyPr wrap="square" lIns="0" tIns="0" rIns="0" bIns="0" rtlCol="0" anchor="t"/>
+          <a:lstStyle/>
+          <a:p>
+            <a:pPr marL="0" marR="0" lvl="0" indent="0" algn="l" defTabSz="914400" rtl="0" eaLnBrk="1" fontAlgn="auto" latinLnBrk="0" hangingPunct="1">
+              <a:lnSpc>
+                <a:spcPct val="108000"/>
+              </a:lnSpc>
+              <a:spcBef>
+                <a:spcPts val="0"/>
+              </a:spcBef>
+              <a:spcAft>
+                <a:spcPts val="0"/>
+              </a:spcAft>
+              <a:buClrTx/>
+              <a:buSzTx/>
+              <a:buFontTx/>
+              <a:buNone/>
+              <a:tabLst/>
+              <a:defRPr/>
+            </a:pPr>
+            <a:r>
+              <a:rPr kumimoji="0" lang="en-US" sz="870" b="0" i="0" u="none" strike="noStrike" kern="1200" cap="none" spc="0" normalizeH="0" baseline="0" noProof="0" dirty="0">
+                <a:ln>
+                  <a:noFill/>
+                </a:ln>
+                <a:solidFill>
+                  <a:srgbClr val="AAB4C4"/>
+                </a:solidFill>
+                <a:effectLst/>
+                <a:uLnTx/>
+                <a:uFillTx/>
+                <a:latin typeface="Calibri" pitchFamily="34" charset="0"/>
+                <a:ea typeface="Calibri" pitchFamily="34" charset="-122"/>
+                <a:cs typeface="Calibri" pitchFamily="34" charset="-120"/>
+              </a:rPr>
+              <a:t>LangSmith traces every step by name (auth.login_attempt, document_processing, run_risk_analysis) — intent is visible, not just code.</a:t>
+            </a:r>
+            <a:endParaRPr kumimoji="0" lang="en-US" sz="870" b="0" i="0" u="none" strike="noStrike" kern="1200" cap="none" spc="0" normalizeH="0" baseline="0" noProof="0" dirty="0">
+              <a:ln>
+                <a:noFill/>
+              </a:ln>
+              <a:solidFill>
+                <a:prstClr val="black"/>
+              </a:solidFill>
+              <a:effectLst/>
+              <a:uLnTx/>
+              <a:uFillTx/>
+              <a:latin typeface="Calibri" panose="020F0502020204030204"/>
+              <a:ea typeface="+mn-ea"/>
+              <a:cs typeface="+mn-cs"/>
+            </a:endParaRPr>
+          </a:p>
+        </p:txBody>
+      </p:sp>
+      <p:sp>
+        <p:nvSpPr>
+          <p:cNvPr id="21" name="Shape 19"/>
+          <p:cNvSpPr/>
+          <p:nvPr/>
+        </p:nvSpPr>
+        <p:spPr>
+          <a:xfrm>
+            <a:off x="4709160" y="2331720"/>
+            <a:ext cx="3977640" cy="841248"/>
           </a:xfrm>
           <a:prstGeom prst="roundRect">
             <a:avLst>
-              <a:gd name="adj" fmla="val 12903"/>
+              <a:gd name="adj" fmla="val 6522"/>
             </a:avLst>
           </a:prstGeom>
           <a:solidFill>
             <a:srgbClr val="162032"/>
           </a:solidFill>
-          <a:ln/>
+          <a:ln w="9525">
+            <a:solidFill>
+              <a:srgbClr val="233047"/>
+            </a:solidFill>
+            <a:prstDash val="solid"/>
+          </a:ln>
           <a:effectLst>
-            <a:outerShdw blurRad="50800" dist="25400" dir="2700000" algn="bl" rotWithShape="0">
+            <a:outerShdw blurRad="76200" dist="25400" dir="5400000" algn="bl" rotWithShape="0">
               <a:srgbClr val="000000">
-                <a:alpha val="12000"/>
+                <a:alpha val="16000"/>
               </a:srgbClr>
             </a:outerShdw>
           </a:effectLst>
@@ -14276,14 +15027,36 @@
       </p:sp>
       <p:sp>
         <p:nvSpPr>
-          <p:cNvPr id="18" name="Text 16"/>
-          <p:cNvSpPr/>
-          <p:nvPr/>
-        </p:nvSpPr>
-        <p:spPr>
-          <a:xfrm>
-            <a:off x="4846320" y="3200400"/>
-            <a:ext cx="1097280" cy="384048"/>
+          <p:cNvPr id="22" name="Shape 20"/>
+          <p:cNvSpPr/>
+          <p:nvPr/>
+        </p:nvSpPr>
+        <p:spPr>
+          <a:xfrm>
+            <a:off x="4855464" y="2459736"/>
+            <a:ext cx="402336" cy="402336"/>
+          </a:xfrm>
+          <a:prstGeom prst="ellipse">
+            <a:avLst/>
+          </a:prstGeom>
+          <a:solidFill>
+            <a:srgbClr val="F5A623">
+              <a:alpha val="20000"/>
+            </a:srgbClr>
+          </a:solidFill>
+          <a:ln/>
+        </p:spPr>
+      </p:sp>
+      <p:sp>
+        <p:nvSpPr>
+          <p:cNvPr id="23" name="Text 21"/>
+          <p:cNvSpPr/>
+          <p:nvPr/>
+        </p:nvSpPr>
+        <p:spPr>
+          <a:xfrm>
+            <a:off x="4855464" y="2459736"/>
+            <a:ext cx="402336" cy="402336"/>
           </a:xfrm>
           <a:prstGeom prst="rect">
             <a:avLst/>
@@ -14295,31 +15068,67 @@
           <a:bodyPr wrap="square" lIns="0" tIns="0" rIns="0" bIns="0" rtlCol="0" anchor="ctr"/>
           <a:lstStyle/>
           <a:p>
-            <a:pPr marL="0" indent="0">
-              <a:buNone/>
-            </a:pPr>
-            <a:r>
-              <a:rPr lang="en-US" sz="1000" b="1" dirty="0">
-                <a:solidFill>
-                  <a:srgbClr val="059669"/>
-                </a:solidFill>
-              </a:rPr>
-              <a:t>🏷️ Version  </a:t>
-            </a:r>
-            <a:endParaRPr lang="en-US" sz="1000" dirty="0"/>
-          </a:p>
-        </p:txBody>
-      </p:sp>
-      <p:sp>
-        <p:nvSpPr>
-          <p:cNvPr id="19" name="Text 17"/>
-          <p:cNvSpPr/>
-          <p:nvPr/>
-        </p:nvSpPr>
-        <p:spPr>
-          <a:xfrm>
-            <a:off x="5760720" y="3200400"/>
-            <a:ext cx="2286000" cy="384048"/>
+            <a:pPr marL="0" marR="0" lvl="0" indent="0" algn="ctr" defTabSz="914400" rtl="0" eaLnBrk="1" fontAlgn="auto" latinLnBrk="0" hangingPunct="1">
+              <a:lnSpc>
+                <a:spcPct val="100000"/>
+              </a:lnSpc>
+              <a:spcBef>
+                <a:spcPts val="0"/>
+              </a:spcBef>
+              <a:spcAft>
+                <a:spcPts val="0"/>
+              </a:spcAft>
+              <a:buClrTx/>
+              <a:buSzTx/>
+              <a:buFontTx/>
+              <a:buNone/>
+              <a:tabLst/>
+              <a:defRPr/>
+            </a:pPr>
+            <a:r>
+              <a:rPr kumimoji="0" lang="en-US" sz="1400" b="0" i="0" u="none" strike="noStrike" kern="1200" cap="none" spc="0" normalizeH="0" baseline="0" noProof="0" dirty="0">
+                <a:ln>
+                  <a:noFill/>
+                </a:ln>
+                <a:solidFill>
+                  <a:srgbClr val="F5A623"/>
+                </a:solidFill>
+                <a:effectLst/>
+                <a:uLnTx/>
+                <a:uFillTx/>
+                <a:latin typeface="Calibri" panose="020F0502020204030204"/>
+                <a:ea typeface="+mn-ea"/>
+                <a:cs typeface="+mn-cs"/>
+              </a:rPr>
+              <a:t>🛡</a:t>
+            </a:r>
+            <a:endParaRPr kumimoji="0" lang="en-US" sz="1400" b="0" i="0" u="none" strike="noStrike" kern="1200" cap="none" spc="0" normalizeH="0" baseline="0" noProof="0" dirty="0">
+              <a:ln>
+                <a:noFill/>
+              </a:ln>
+              <a:solidFill>
+                <a:prstClr val="black"/>
+              </a:solidFill>
+              <a:effectLst/>
+              <a:uLnTx/>
+              <a:uFillTx/>
+              <a:latin typeface="Calibri" panose="020F0502020204030204"/>
+              <a:ea typeface="+mn-ea"/>
+              <a:cs typeface="+mn-cs"/>
+            </a:endParaRPr>
+          </a:p>
+        </p:txBody>
+      </p:sp>
+      <p:sp>
+        <p:nvSpPr>
+          <p:cNvPr id="24" name="Text 22"/>
+          <p:cNvSpPr/>
+          <p:nvPr/>
+        </p:nvSpPr>
+        <p:spPr>
+          <a:xfrm>
+            <a:off x="5367528" y="2423160"/>
+            <a:ext cx="3172968" cy="219456"/>
           </a:xfrm>
           <a:prstGeom prst="rect">
             <a:avLst/>
@@ -14331,34 +15140,195 @@
           <a:bodyPr wrap="square" lIns="0" tIns="0" rIns="0" bIns="0" rtlCol="0" anchor="ctr"/>
           <a:lstStyle/>
           <a:p>
-            <a:pPr marL="0" indent="0">
-              <a:buNone/>
-            </a:pPr>
-            <a:r>
-              <a:rPr lang="en-US" sz="950" dirty="0">
+            <a:pPr marL="0" marR="0" lvl="0" indent="0" algn="l" defTabSz="914400" rtl="0" eaLnBrk="1" fontAlgn="auto" latinLnBrk="0" hangingPunct="1">
+              <a:lnSpc>
+                <a:spcPct val="100000"/>
+              </a:lnSpc>
+              <a:spcBef>
+                <a:spcPts val="0"/>
+              </a:spcBef>
+              <a:spcAft>
+                <a:spcPts val="0"/>
+              </a:spcAft>
+              <a:buClrTx/>
+              <a:buSzTx/>
+              <a:buFontTx/>
+              <a:buNone/>
+              <a:tabLst/>
+              <a:defRPr/>
+            </a:pPr>
+            <a:r>
+              <a:rPr kumimoji="0" lang="en-US" sz="1200" b="1" i="0" u="none" strike="noStrike" kern="1200" cap="none" spc="0" normalizeH="0" baseline="0" noProof="0" dirty="0">
+                <a:ln>
+                  <a:noFill/>
+                </a:ln>
                 <a:solidFill>
                   <a:srgbClr val="FFFFFF"/>
                 </a:solidFill>
-                <a:latin typeface="Courier New" pitchFamily="34" charset="0"/>
-                <a:ea typeface="Courier New" pitchFamily="34" charset="-122"/>
-                <a:cs typeface="Courier New" pitchFamily="34" charset="-120"/>
-              </a:rPr>
-              <a:t>git tag v1.0 — main branch</a:t>
-            </a:r>
-            <a:endParaRPr lang="en-US" sz="950" dirty="0"/>
-          </a:p>
-        </p:txBody>
-      </p:sp>
-      <p:sp>
-        <p:nvSpPr>
-          <p:cNvPr id="20" name="Text 18"/>
-          <p:cNvSpPr/>
-          <p:nvPr/>
-        </p:nvSpPr>
-        <p:spPr>
-          <a:xfrm>
-            <a:off x="457200" y="4378495"/>
-            <a:ext cx="8229600" cy="475874"/>
+                <a:effectLst/>
+                <a:uLnTx/>
+                <a:uFillTx/>
+                <a:latin typeface="Cambria" pitchFamily="34" charset="0"/>
+                <a:ea typeface="Cambria" pitchFamily="34" charset="-122"/>
+                <a:cs typeface="Cambria" pitchFamily="34" charset="-120"/>
+              </a:rPr>
+              <a:t>Security &amp; Compliance</a:t>
+            </a:r>
+            <a:endParaRPr kumimoji="0" lang="en-US" sz="1200" b="0" i="0" u="none" strike="noStrike" kern="1200" cap="none" spc="0" normalizeH="0" baseline="0" noProof="0" dirty="0">
+              <a:ln>
+                <a:noFill/>
+              </a:ln>
+              <a:solidFill>
+                <a:prstClr val="black"/>
+              </a:solidFill>
+              <a:effectLst/>
+              <a:uLnTx/>
+              <a:uFillTx/>
+              <a:latin typeface="Calibri" panose="020F0502020204030204"/>
+              <a:ea typeface="+mn-ea"/>
+              <a:cs typeface="+mn-cs"/>
+            </a:endParaRPr>
+          </a:p>
+        </p:txBody>
+      </p:sp>
+      <p:sp>
+        <p:nvSpPr>
+          <p:cNvPr id="25" name="Text 23"/>
+          <p:cNvSpPr/>
+          <p:nvPr/>
+        </p:nvSpPr>
+        <p:spPr>
+          <a:xfrm>
+            <a:off x="5367528" y="2642616"/>
+            <a:ext cx="3172968" cy="457200"/>
+          </a:xfrm>
+          <a:prstGeom prst="rect">
+            <a:avLst/>
+          </a:prstGeom>
+          <a:noFill/>
+          <a:ln/>
+        </p:spPr>
+        <p:txBody>
+          <a:bodyPr wrap="square" lIns="0" tIns="0" rIns="0" bIns="0" rtlCol="0" anchor="t"/>
+          <a:lstStyle/>
+          <a:p>
+            <a:pPr marL="0" marR="0" lvl="0" indent="0" algn="l" defTabSz="914400" rtl="0" eaLnBrk="1" fontAlgn="auto" latinLnBrk="0" hangingPunct="1">
+              <a:lnSpc>
+                <a:spcPct val="108000"/>
+              </a:lnSpc>
+              <a:spcBef>
+                <a:spcPts val="0"/>
+              </a:spcBef>
+              <a:spcAft>
+                <a:spcPts val="0"/>
+              </a:spcAft>
+              <a:buClrTx/>
+              <a:buSzTx/>
+              <a:buFontTx/>
+              <a:buNone/>
+              <a:tabLst/>
+              <a:defRPr/>
+            </a:pPr>
+            <a:r>
+              <a:rPr kumimoji="0" lang="en-US" sz="870" b="0" i="0" u="none" strike="noStrike" kern="1200" cap="none" spc="0" normalizeH="0" baseline="0" noProof="0" dirty="0">
+                <a:ln>
+                  <a:noFill/>
+                </a:ln>
+                <a:solidFill>
+                  <a:srgbClr val="AAB4C4"/>
+                </a:solidFill>
+                <a:effectLst/>
+                <a:uLnTx/>
+                <a:uFillTx/>
+                <a:latin typeface="Calibri" pitchFamily="34" charset="0"/>
+                <a:ea typeface="Calibri" pitchFamily="34" charset="-122"/>
+                <a:cs typeface="Calibri" pitchFamily="34" charset="-120"/>
+              </a:rPr>
+              <a:t>JWT + bcrypt authentication; 13 secure environment settings kept out of the Docker image, never baked into the build.</a:t>
+            </a:r>
+            <a:endParaRPr kumimoji="0" lang="en-US" sz="870" b="0" i="0" u="none" strike="noStrike" kern="1200" cap="none" spc="0" normalizeH="0" baseline="0" noProof="0" dirty="0">
+              <a:ln>
+                <a:noFill/>
+              </a:ln>
+              <a:solidFill>
+                <a:prstClr val="black"/>
+              </a:solidFill>
+              <a:effectLst/>
+              <a:uLnTx/>
+              <a:uFillTx/>
+              <a:latin typeface="Calibri" panose="020F0502020204030204"/>
+              <a:ea typeface="+mn-ea"/>
+              <a:cs typeface="+mn-cs"/>
+            </a:endParaRPr>
+          </a:p>
+        </p:txBody>
+      </p:sp>
+      <p:sp>
+        <p:nvSpPr>
+          <p:cNvPr id="26" name="Shape 24"/>
+          <p:cNvSpPr/>
+          <p:nvPr/>
+        </p:nvSpPr>
+        <p:spPr>
+          <a:xfrm>
+            <a:off x="457200" y="3246120"/>
+            <a:ext cx="3977640" cy="841248"/>
+          </a:xfrm>
+          <a:prstGeom prst="roundRect">
+            <a:avLst>
+              <a:gd name="adj" fmla="val 6522"/>
+            </a:avLst>
+          </a:prstGeom>
+          <a:solidFill>
+            <a:srgbClr val="162032"/>
+          </a:solidFill>
+          <a:ln w="9525">
+            <a:solidFill>
+              <a:srgbClr val="233047"/>
+            </a:solidFill>
+            <a:prstDash val="solid"/>
+          </a:ln>
+          <a:effectLst>
+            <a:outerShdw blurRad="76200" dist="25400" dir="5400000" algn="bl" rotWithShape="0">
+              <a:srgbClr val="000000">
+                <a:alpha val="16000"/>
+              </a:srgbClr>
+            </a:outerShdw>
+          </a:effectLst>
+        </p:spPr>
+      </p:sp>
+      <p:sp>
+        <p:nvSpPr>
+          <p:cNvPr id="27" name="Shape 25"/>
+          <p:cNvSpPr/>
+          <p:nvPr/>
+        </p:nvSpPr>
+        <p:spPr>
+          <a:xfrm>
+            <a:off x="603504" y="3374136"/>
+            <a:ext cx="402336" cy="402336"/>
+          </a:xfrm>
+          <a:prstGeom prst="ellipse">
+            <a:avLst/>
+          </a:prstGeom>
+          <a:solidFill>
+            <a:srgbClr val="E8544E">
+              <a:alpha val="20000"/>
+            </a:srgbClr>
+          </a:solidFill>
+          <a:ln/>
+        </p:spPr>
+      </p:sp>
+      <p:sp>
+        <p:nvSpPr>
+          <p:cNvPr id="28" name="Text 26"/>
+          <p:cNvSpPr/>
+          <p:nvPr/>
+        </p:nvSpPr>
+        <p:spPr>
+          <a:xfrm>
+            <a:off x="603504" y="3374136"/>
+            <a:ext cx="402336" cy="402336"/>
           </a:xfrm>
           <a:prstGeom prst="rect">
             <a:avLst/>
@@ -14370,22 +15340,479 @@
           <a:bodyPr wrap="square" lIns="0" tIns="0" rIns="0" bIns="0" rtlCol="0" anchor="ctr"/>
           <a:lstStyle/>
           <a:p>
-            <a:pPr marL="0" indent="0" algn="ctr">
-              <a:buNone/>
-            </a:pPr>
-            <a:r>
-              <a:rPr lang="en-US" sz="1100" dirty="0">
-                <a:solidFill>
-                  <a:srgbClr val="94A3B8"/>
-                </a:solidFill>
-              </a:rPr>
-              <a:t>Akash Chaurasiya  ·  Ashu Sharma  ·  EY Training 2026  </a:t>
-            </a:r>
-            <a:endParaRPr lang="en-US" sz="1100" dirty="0"/>
+            <a:pPr marL="0" marR="0" lvl="0" indent="0" algn="ctr" defTabSz="914400" rtl="0" eaLnBrk="1" fontAlgn="auto" latinLnBrk="0" hangingPunct="1">
+              <a:lnSpc>
+                <a:spcPct val="100000"/>
+              </a:lnSpc>
+              <a:spcBef>
+                <a:spcPts val="0"/>
+              </a:spcBef>
+              <a:spcAft>
+                <a:spcPts val="0"/>
+              </a:spcAft>
+              <a:buClrTx/>
+              <a:buSzTx/>
+              <a:buFontTx/>
+              <a:buNone/>
+              <a:tabLst/>
+              <a:defRPr/>
+            </a:pPr>
+            <a:r>
+              <a:rPr kumimoji="0" lang="en-US" sz="1400" b="0" i="0" u="none" strike="noStrike" kern="1200" cap="none" spc="0" normalizeH="0" baseline="0" noProof="0" dirty="0">
+                <a:ln>
+                  <a:noFill/>
+                </a:ln>
+                <a:solidFill>
+                  <a:srgbClr val="E8544E"/>
+                </a:solidFill>
+                <a:effectLst/>
+                <a:uLnTx/>
+                <a:uFillTx/>
+                <a:latin typeface="Calibri" panose="020F0502020204030204"/>
+                <a:ea typeface="+mn-ea"/>
+                <a:cs typeface="+mn-cs"/>
+              </a:rPr>
+              <a:t>✔</a:t>
+            </a:r>
+            <a:endParaRPr kumimoji="0" lang="en-US" sz="1400" b="0" i="0" u="none" strike="noStrike" kern="1200" cap="none" spc="0" normalizeH="0" baseline="0" noProof="0" dirty="0">
+              <a:ln>
+                <a:noFill/>
+              </a:ln>
+              <a:solidFill>
+                <a:prstClr val="black"/>
+              </a:solidFill>
+              <a:effectLst/>
+              <a:uLnTx/>
+              <a:uFillTx/>
+              <a:latin typeface="Calibri" panose="020F0502020204030204"/>
+              <a:ea typeface="+mn-ea"/>
+              <a:cs typeface="+mn-cs"/>
+            </a:endParaRPr>
+          </a:p>
+        </p:txBody>
+      </p:sp>
+      <p:sp>
+        <p:nvSpPr>
+          <p:cNvPr id="29" name="Text 27"/>
+          <p:cNvSpPr/>
+          <p:nvPr/>
+        </p:nvSpPr>
+        <p:spPr>
+          <a:xfrm>
+            <a:off x="1115568" y="3337560"/>
+            <a:ext cx="3172968" cy="219456"/>
+          </a:xfrm>
+          <a:prstGeom prst="rect">
+            <a:avLst/>
+          </a:prstGeom>
+          <a:noFill/>
+          <a:ln/>
+        </p:spPr>
+        <p:txBody>
+          <a:bodyPr wrap="square" lIns="0" tIns="0" rIns="0" bIns="0" rtlCol="0" anchor="ctr"/>
+          <a:lstStyle/>
+          <a:p>
+            <a:pPr marL="0" marR="0" lvl="0" indent="0" algn="l" defTabSz="914400" rtl="0" eaLnBrk="1" fontAlgn="auto" latinLnBrk="0" hangingPunct="1">
+              <a:lnSpc>
+                <a:spcPct val="100000"/>
+              </a:lnSpc>
+              <a:spcBef>
+                <a:spcPts val="0"/>
+              </a:spcBef>
+              <a:spcAft>
+                <a:spcPts val="0"/>
+              </a:spcAft>
+              <a:buClrTx/>
+              <a:buSzTx/>
+              <a:buFontTx/>
+              <a:buNone/>
+              <a:tabLst/>
+              <a:defRPr/>
+            </a:pPr>
+            <a:r>
+              <a:rPr kumimoji="0" lang="en-US" sz="1200" b="1" i="0" u="none" strike="noStrike" kern="1200" cap="none" spc="0" normalizeH="0" baseline="0" noProof="0" dirty="0">
+                <a:ln>
+                  <a:noFill/>
+                </a:ln>
+                <a:solidFill>
+                  <a:srgbClr val="FFFFFF"/>
+                </a:solidFill>
+                <a:effectLst/>
+                <a:uLnTx/>
+                <a:uFillTx/>
+                <a:latin typeface="Cambria" pitchFamily="34" charset="0"/>
+                <a:ea typeface="Cambria" pitchFamily="34" charset="-122"/>
+                <a:cs typeface="Cambria" pitchFamily="34" charset="-120"/>
+              </a:rPr>
+              <a:t>Testing Standards</a:t>
+            </a:r>
+            <a:endParaRPr kumimoji="0" lang="en-US" sz="1200" b="0" i="0" u="none" strike="noStrike" kern="1200" cap="none" spc="0" normalizeH="0" baseline="0" noProof="0" dirty="0">
+              <a:ln>
+                <a:noFill/>
+              </a:ln>
+              <a:solidFill>
+                <a:prstClr val="black"/>
+              </a:solidFill>
+              <a:effectLst/>
+              <a:uLnTx/>
+              <a:uFillTx/>
+              <a:latin typeface="Calibri" panose="020F0502020204030204"/>
+              <a:ea typeface="+mn-ea"/>
+              <a:cs typeface="+mn-cs"/>
+            </a:endParaRPr>
+          </a:p>
+        </p:txBody>
+      </p:sp>
+      <p:sp>
+        <p:nvSpPr>
+          <p:cNvPr id="30" name="Text 28"/>
+          <p:cNvSpPr/>
+          <p:nvPr/>
+        </p:nvSpPr>
+        <p:spPr>
+          <a:xfrm>
+            <a:off x="1115568" y="3557016"/>
+            <a:ext cx="3172968" cy="457200"/>
+          </a:xfrm>
+          <a:prstGeom prst="rect">
+            <a:avLst/>
+          </a:prstGeom>
+          <a:noFill/>
+          <a:ln/>
+        </p:spPr>
+        <p:txBody>
+          <a:bodyPr wrap="square" lIns="0" tIns="0" rIns="0" bIns="0" rtlCol="0" anchor="t"/>
+          <a:lstStyle/>
+          <a:p>
+            <a:pPr marL="0" marR="0" lvl="0" indent="0" algn="l" defTabSz="914400" rtl="0" eaLnBrk="1" fontAlgn="auto" latinLnBrk="0" hangingPunct="1">
+              <a:lnSpc>
+                <a:spcPct val="108000"/>
+              </a:lnSpc>
+              <a:spcBef>
+                <a:spcPts val="0"/>
+              </a:spcBef>
+              <a:spcAft>
+                <a:spcPts val="0"/>
+              </a:spcAft>
+              <a:buClrTx/>
+              <a:buSzTx/>
+              <a:buFontTx/>
+              <a:buNone/>
+              <a:tabLst/>
+              <a:defRPr/>
+            </a:pPr>
+            <a:r>
+              <a:rPr kumimoji="0" lang="en-US" sz="870" b="0" i="0" u="none" strike="noStrike" kern="1200" cap="none" spc="0" normalizeH="0" baseline="0" noProof="0" dirty="0">
+                <a:ln>
+                  <a:noFill/>
+                </a:ln>
+                <a:solidFill>
+                  <a:srgbClr val="AAB4C4"/>
+                </a:solidFill>
+                <a:effectLst/>
+                <a:uLnTx/>
+                <a:uFillTx/>
+                <a:latin typeface="Calibri" pitchFamily="34" charset="0"/>
+                <a:ea typeface="Calibri" pitchFamily="34" charset="-122"/>
+                <a:cs typeface="Calibri" pitchFamily="34" charset="-120"/>
+              </a:rPr>
+              <a:t>96 unit tests across every module, plus DeepEval (0.22 hallucination score) and RAGAS (0.88 faithfulness) — all run in CI in 6 seconds.</a:t>
+            </a:r>
+            <a:endParaRPr kumimoji="0" lang="en-US" sz="870" b="0" i="0" u="none" strike="noStrike" kern="1200" cap="none" spc="0" normalizeH="0" baseline="0" noProof="0" dirty="0">
+              <a:ln>
+                <a:noFill/>
+              </a:ln>
+              <a:solidFill>
+                <a:prstClr val="black"/>
+              </a:solidFill>
+              <a:effectLst/>
+              <a:uLnTx/>
+              <a:uFillTx/>
+              <a:latin typeface="Calibri" panose="020F0502020204030204"/>
+              <a:ea typeface="+mn-ea"/>
+              <a:cs typeface="+mn-cs"/>
+            </a:endParaRPr>
+          </a:p>
+        </p:txBody>
+      </p:sp>
+      <p:sp>
+        <p:nvSpPr>
+          <p:cNvPr id="31" name="Shape 29"/>
+          <p:cNvSpPr/>
+          <p:nvPr/>
+        </p:nvSpPr>
+        <p:spPr>
+          <a:xfrm>
+            <a:off x="4709160" y="3246120"/>
+            <a:ext cx="3977640" cy="841248"/>
+          </a:xfrm>
+          <a:prstGeom prst="roundRect">
+            <a:avLst>
+              <a:gd name="adj" fmla="val 6522"/>
+            </a:avLst>
+          </a:prstGeom>
+          <a:solidFill>
+            <a:srgbClr val="162032"/>
+          </a:solidFill>
+          <a:ln w="9525">
+            <a:solidFill>
+              <a:srgbClr val="233047"/>
+            </a:solidFill>
+            <a:prstDash val="solid"/>
+          </a:ln>
+          <a:effectLst>
+            <a:outerShdw blurRad="76200" dist="25400" dir="5400000" algn="bl" rotWithShape="0">
+              <a:srgbClr val="000000">
+                <a:alpha val="16000"/>
+              </a:srgbClr>
+            </a:outerShdw>
+          </a:effectLst>
+        </p:spPr>
+      </p:sp>
+      <p:sp>
+        <p:nvSpPr>
+          <p:cNvPr id="32" name="Shape 30"/>
+          <p:cNvSpPr/>
+          <p:nvPr/>
+        </p:nvSpPr>
+        <p:spPr>
+          <a:xfrm>
+            <a:off x="4855464" y="3374136"/>
+            <a:ext cx="402336" cy="402336"/>
+          </a:xfrm>
+          <a:prstGeom prst="ellipse">
+            <a:avLst/>
+          </a:prstGeom>
+          <a:solidFill>
+            <a:srgbClr val="3B82F6">
+              <a:alpha val="20000"/>
+            </a:srgbClr>
+          </a:solidFill>
+          <a:ln/>
+        </p:spPr>
+      </p:sp>
+      <p:sp>
+        <p:nvSpPr>
+          <p:cNvPr id="33" name="Text 31"/>
+          <p:cNvSpPr/>
+          <p:nvPr/>
+        </p:nvSpPr>
+        <p:spPr>
+          <a:xfrm>
+            <a:off x="4855464" y="3374136"/>
+            <a:ext cx="402336" cy="402336"/>
+          </a:xfrm>
+          <a:prstGeom prst="rect">
+            <a:avLst/>
+          </a:prstGeom>
+          <a:noFill/>
+          <a:ln/>
+        </p:spPr>
+        <p:txBody>
+          <a:bodyPr wrap="square" lIns="0" tIns="0" rIns="0" bIns="0" rtlCol="0" anchor="ctr"/>
+          <a:lstStyle/>
+          <a:p>
+            <a:pPr marL="0" marR="0" lvl="0" indent="0" algn="ctr" defTabSz="914400" rtl="0" eaLnBrk="1" fontAlgn="auto" latinLnBrk="0" hangingPunct="1">
+              <a:lnSpc>
+                <a:spcPct val="100000"/>
+              </a:lnSpc>
+              <a:spcBef>
+                <a:spcPts val="0"/>
+              </a:spcBef>
+              <a:spcAft>
+                <a:spcPts val="0"/>
+              </a:spcAft>
+              <a:buClrTx/>
+              <a:buSzTx/>
+              <a:buFontTx/>
+              <a:buNone/>
+              <a:tabLst/>
+              <a:defRPr/>
+            </a:pPr>
+            <a:r>
+              <a:rPr kumimoji="0" lang="en-US" sz="1400" b="0" i="0" u="none" strike="noStrike" kern="1200" cap="none" spc="0" normalizeH="0" baseline="0" noProof="0" dirty="0">
+                <a:ln>
+                  <a:noFill/>
+                </a:ln>
+                <a:solidFill>
+                  <a:srgbClr val="3B82F6"/>
+                </a:solidFill>
+                <a:effectLst/>
+                <a:uLnTx/>
+                <a:uFillTx/>
+                <a:latin typeface="Calibri" panose="020F0502020204030204"/>
+                <a:ea typeface="+mn-ea"/>
+                <a:cs typeface="+mn-cs"/>
+              </a:rPr>
+              <a:t>📦</a:t>
+            </a:r>
+            <a:endParaRPr kumimoji="0" lang="en-US" sz="1400" b="0" i="0" u="none" strike="noStrike" kern="1200" cap="none" spc="0" normalizeH="0" baseline="0" noProof="0" dirty="0">
+              <a:ln>
+                <a:noFill/>
+              </a:ln>
+              <a:solidFill>
+                <a:prstClr val="black"/>
+              </a:solidFill>
+              <a:effectLst/>
+              <a:uLnTx/>
+              <a:uFillTx/>
+              <a:latin typeface="Calibri" panose="020F0502020204030204"/>
+              <a:ea typeface="+mn-ea"/>
+              <a:cs typeface="+mn-cs"/>
+            </a:endParaRPr>
+          </a:p>
+        </p:txBody>
+      </p:sp>
+      <p:sp>
+        <p:nvSpPr>
+          <p:cNvPr id="34" name="Text 32"/>
+          <p:cNvSpPr/>
+          <p:nvPr/>
+        </p:nvSpPr>
+        <p:spPr>
+          <a:xfrm>
+            <a:off x="5367528" y="3337560"/>
+            <a:ext cx="3172968" cy="219456"/>
+          </a:xfrm>
+          <a:prstGeom prst="rect">
+            <a:avLst/>
+          </a:prstGeom>
+          <a:noFill/>
+          <a:ln/>
+        </p:spPr>
+        <p:txBody>
+          <a:bodyPr wrap="square" lIns="0" tIns="0" rIns="0" bIns="0" rtlCol="0" anchor="ctr"/>
+          <a:lstStyle/>
+          <a:p>
+            <a:pPr marL="0" marR="0" lvl="0" indent="0" algn="l" defTabSz="914400" rtl="0" eaLnBrk="1" fontAlgn="auto" latinLnBrk="0" hangingPunct="1">
+              <a:lnSpc>
+                <a:spcPct val="100000"/>
+              </a:lnSpc>
+              <a:spcBef>
+                <a:spcPts val="0"/>
+              </a:spcBef>
+              <a:spcAft>
+                <a:spcPts val="0"/>
+              </a:spcAft>
+              <a:buClrTx/>
+              <a:buSzTx/>
+              <a:buFontTx/>
+              <a:buNone/>
+              <a:tabLst/>
+              <a:defRPr/>
+            </a:pPr>
+            <a:r>
+              <a:rPr kumimoji="0" lang="en-US" sz="1200" b="1" i="0" u="none" strike="noStrike" kern="1200" cap="none" spc="0" normalizeH="0" baseline="0" noProof="0" dirty="0">
+                <a:ln>
+                  <a:noFill/>
+                </a:ln>
+                <a:solidFill>
+                  <a:srgbClr val="FFFFFF"/>
+                </a:solidFill>
+                <a:effectLst/>
+                <a:uLnTx/>
+                <a:uFillTx/>
+                <a:latin typeface="Cambria" pitchFamily="34" charset="0"/>
+                <a:ea typeface="Cambria" pitchFamily="34" charset="-122"/>
+                <a:cs typeface="Cambria" pitchFamily="34" charset="-120"/>
+              </a:rPr>
+              <a:t>Version Control</a:t>
+            </a:r>
+            <a:endParaRPr kumimoji="0" lang="en-US" sz="1200" b="0" i="0" u="none" strike="noStrike" kern="1200" cap="none" spc="0" normalizeH="0" baseline="0" noProof="0" dirty="0">
+              <a:ln>
+                <a:noFill/>
+              </a:ln>
+              <a:solidFill>
+                <a:prstClr val="black"/>
+              </a:solidFill>
+              <a:effectLst/>
+              <a:uLnTx/>
+              <a:uFillTx/>
+              <a:latin typeface="Calibri" panose="020F0502020204030204"/>
+              <a:ea typeface="+mn-ea"/>
+              <a:cs typeface="+mn-cs"/>
+            </a:endParaRPr>
+          </a:p>
+        </p:txBody>
+      </p:sp>
+      <p:sp>
+        <p:nvSpPr>
+          <p:cNvPr id="35" name="Text 33"/>
+          <p:cNvSpPr/>
+          <p:nvPr/>
+        </p:nvSpPr>
+        <p:spPr>
+          <a:xfrm>
+            <a:off x="5367528" y="3557016"/>
+            <a:ext cx="3172968" cy="457200"/>
+          </a:xfrm>
+          <a:prstGeom prst="rect">
+            <a:avLst/>
+          </a:prstGeom>
+          <a:noFill/>
+          <a:ln/>
+        </p:spPr>
+        <p:txBody>
+          <a:bodyPr wrap="square" lIns="0" tIns="0" rIns="0" bIns="0" rtlCol="0" anchor="t"/>
+          <a:lstStyle/>
+          <a:p>
+            <a:pPr marL="0" marR="0" lvl="0" indent="0" algn="l" defTabSz="914400" rtl="0" eaLnBrk="1" fontAlgn="auto" latinLnBrk="0" hangingPunct="1">
+              <a:lnSpc>
+                <a:spcPct val="108000"/>
+              </a:lnSpc>
+              <a:spcBef>
+                <a:spcPts val="0"/>
+              </a:spcBef>
+              <a:spcAft>
+                <a:spcPts val="0"/>
+              </a:spcAft>
+              <a:buClrTx/>
+              <a:buSzTx/>
+              <a:buFontTx/>
+              <a:buNone/>
+              <a:tabLst/>
+              <a:defRPr/>
+            </a:pPr>
+            <a:r>
+              <a:rPr kumimoji="0" lang="en-US" sz="870" b="0" i="0" u="none" strike="noStrike" kern="1200" cap="none" spc="0" normalizeH="0" baseline="0" noProof="0" dirty="0">
+                <a:ln>
+                  <a:noFill/>
+                </a:ln>
+                <a:solidFill>
+                  <a:srgbClr val="AAB4C4"/>
+                </a:solidFill>
+                <a:effectLst/>
+                <a:uLnTx/>
+                <a:uFillTx/>
+                <a:latin typeface="Calibri" pitchFamily="34" charset="0"/>
+                <a:ea typeface="Calibri" pitchFamily="34" charset="-122"/>
+                <a:cs typeface="Calibri" pitchFamily="34" charset="-120"/>
+              </a:rPr>
+              <a:t>Trunk-based flow: git push → tests → Docker build → push to ACR → deploy — a clean, atomic, automated pipeline to Azure.</a:t>
+            </a:r>
+            <a:endParaRPr kumimoji="0" lang="en-US" sz="870" b="0" i="0" u="none" strike="noStrike" kern="1200" cap="none" spc="0" normalizeH="0" baseline="0" noProof="0" dirty="0">
+              <a:ln>
+                <a:noFill/>
+              </a:ln>
+              <a:solidFill>
+                <a:prstClr val="black"/>
+              </a:solidFill>
+              <a:effectLst/>
+              <a:uLnTx/>
+              <a:uFillTx/>
+              <a:latin typeface="Calibri" panose="020F0502020204030204"/>
+              <a:ea typeface="+mn-ea"/>
+              <a:cs typeface="+mn-cs"/>
+            </a:endParaRPr>
           </a:p>
         </p:txBody>
       </p:sp>
     </p:spTree>
+    <p:extLst>
+      <p:ext uri="{BB962C8B-B14F-4D97-AF65-F5344CB8AC3E}">
+        <p14:creationId xmlns:p14="http://schemas.microsoft.com/office/powerpoint/2010/main" val="3343381645"/>
+      </p:ext>
+    </p:extLst>
   </p:cSld>
   <p:clrMapOvr>
     <a:masterClrMapping/>
@@ -14798,6 +16225,634 @@
   <p:transition spd="slow">
     <p:fade/>
   </p:transition>
+</p:sld>
+</file>
+
+<file path=ppt/slides/slide20.xml><?xml version="1.0" encoding="utf-8"?>
+<p:sld xmlns:a="http://schemas.openxmlformats.org/drawingml/2006/main" xmlns:r="http://schemas.openxmlformats.org/officeDocument/2006/relationships" xmlns:p="http://schemas.openxmlformats.org/presentationml/2006/main">
+  <p:cSld name="Slide 16">
+    <p:bg>
+      <p:bgPr>
+        <a:solidFill>
+          <a:srgbClr val="0F1B2D"/>
+        </a:solidFill>
+        <a:effectLst/>
+      </p:bgPr>
+    </p:bg>
+    <p:spTree>
+      <p:nvGrpSpPr>
+        <p:cNvPr id="1" name=""/>
+        <p:cNvGrpSpPr/>
+        <p:nvPr/>
+      </p:nvGrpSpPr>
+      <p:grpSpPr>
+        <a:xfrm>
+          <a:off x="0" y="0"/>
+          <a:ext cx="0" cy="0"/>
+          <a:chOff x="0" y="0"/>
+          <a:chExt cx="0" cy="0"/>
+        </a:xfrm>
+      </p:grpSpPr>
+      <p:sp>
+        <p:nvSpPr>
+          <p:cNvPr id="2" name="Shape 0"/>
+          <p:cNvSpPr/>
+          <p:nvPr/>
+        </p:nvSpPr>
+        <p:spPr>
+          <a:xfrm>
+            <a:off x="6858000" y="-914400"/>
+            <a:ext cx="3657600" cy="3657600"/>
+          </a:xfrm>
+          <a:prstGeom prst="ellipse">
+            <a:avLst/>
+          </a:prstGeom>
+          <a:solidFill>
+            <a:srgbClr val="2563EB">
+              <a:alpha val="12000"/>
+            </a:srgbClr>
+          </a:solidFill>
+          <a:ln/>
+        </p:spPr>
+      </p:sp>
+      <p:sp>
+        <p:nvSpPr>
+          <p:cNvPr id="3" name="Shape 1"/>
+          <p:cNvSpPr/>
+          <p:nvPr/>
+        </p:nvSpPr>
+        <p:spPr>
+          <a:xfrm>
+            <a:off x="-699967" y="2616086"/>
+            <a:ext cx="3200400" cy="3200400"/>
+          </a:xfrm>
+          <a:prstGeom prst="ellipse">
+            <a:avLst/>
+          </a:prstGeom>
+          <a:solidFill>
+            <a:srgbClr val="0891B2">
+              <a:alpha val="12000"/>
+            </a:srgbClr>
+          </a:solidFill>
+          <a:ln/>
+        </p:spPr>
+      </p:sp>
+      <p:sp>
+        <p:nvSpPr>
+          <p:cNvPr id="4" name="Shape 2"/>
+          <p:cNvSpPr/>
+          <p:nvPr/>
+        </p:nvSpPr>
+        <p:spPr>
+          <a:xfrm>
+            <a:off x="3474720" y="365760"/>
+            <a:ext cx="1280160" cy="256032"/>
+          </a:xfrm>
+          <a:prstGeom prst="roundRect">
+            <a:avLst>
+              <a:gd name="adj" fmla="val 50000"/>
+            </a:avLst>
+          </a:prstGeom>
+          <a:solidFill>
+            <a:srgbClr val="059669">
+              <a:alpha val="25000"/>
+            </a:srgbClr>
+          </a:solidFill>
+          <a:ln/>
+        </p:spPr>
+      </p:sp>
+      <p:sp>
+        <p:nvSpPr>
+          <p:cNvPr id="5" name="Text 3"/>
+          <p:cNvSpPr/>
+          <p:nvPr/>
+        </p:nvSpPr>
+        <p:spPr>
+          <a:xfrm>
+            <a:off x="3474720" y="365760"/>
+            <a:ext cx="1280160" cy="256032"/>
+          </a:xfrm>
+          <a:prstGeom prst="rect">
+            <a:avLst/>
+          </a:prstGeom>
+          <a:noFill/>
+          <a:ln/>
+        </p:spPr>
+        <p:txBody>
+          <a:bodyPr wrap="square" lIns="0" tIns="0" rIns="0" bIns="0" rtlCol="0" anchor="ctr"/>
+          <a:lstStyle/>
+          <a:p>
+            <a:pPr marL="0" indent="0" algn="ctr">
+              <a:buNone/>
+            </a:pPr>
+            <a:r>
+              <a:rPr lang="en-US" sz="900" b="1" kern="0" spc="150" dirty="0">
+                <a:solidFill>
+                  <a:srgbClr val="059669"/>
+                </a:solidFill>
+              </a:rPr>
+              <a:t>SUBMITTED</a:t>
+            </a:r>
+            <a:endParaRPr lang="en-US" sz="900" dirty="0"/>
+          </a:p>
+        </p:txBody>
+      </p:sp>
+      <p:sp>
+        <p:nvSpPr>
+          <p:cNvPr id="6" name="Text 4"/>
+          <p:cNvSpPr/>
+          <p:nvPr/>
+        </p:nvSpPr>
+        <p:spPr>
+          <a:xfrm>
+            <a:off x="91440" y="1275588"/>
+            <a:ext cx="8229600" cy="731520"/>
+          </a:xfrm>
+          <a:prstGeom prst="rect">
+            <a:avLst/>
+          </a:prstGeom>
+          <a:noFill/>
+          <a:ln/>
+        </p:spPr>
+        <p:txBody>
+          <a:bodyPr wrap="square" lIns="0" tIns="0" rIns="0" bIns="0" rtlCol="0" anchor="ctr"/>
+          <a:lstStyle/>
+          <a:p>
+            <a:pPr marL="0" indent="0" algn="ctr">
+              <a:buNone/>
+            </a:pPr>
+            <a:r>
+              <a:rPr lang="en-US" sz="4800" b="1" dirty="0">
+                <a:solidFill>
+                  <a:srgbClr val="FFFFFF"/>
+                </a:solidFill>
+                <a:latin typeface="Cambria" pitchFamily="34" charset="0"/>
+                <a:ea typeface="Cambria" pitchFamily="34" charset="-122"/>
+                <a:cs typeface="Cambria" pitchFamily="34" charset="-120"/>
+              </a:rPr>
+              <a:t>Thank You</a:t>
+            </a:r>
+            <a:endParaRPr lang="en-US" sz="4800" dirty="0"/>
+          </a:p>
+        </p:txBody>
+      </p:sp>
+      <p:sp>
+        <p:nvSpPr>
+          <p:cNvPr id="8" name="Shape 6"/>
+          <p:cNvSpPr/>
+          <p:nvPr/>
+        </p:nvSpPr>
+        <p:spPr>
+          <a:xfrm>
+            <a:off x="822960" y="2423160"/>
+            <a:ext cx="3520440" cy="566928"/>
+          </a:xfrm>
+          <a:prstGeom prst="roundRect">
+            <a:avLst>
+              <a:gd name="adj" fmla="val 12903"/>
+            </a:avLst>
+          </a:prstGeom>
+          <a:solidFill>
+            <a:srgbClr val="162032"/>
+          </a:solidFill>
+          <a:ln/>
+          <a:effectLst>
+            <a:outerShdw blurRad="50800" dist="25400" dir="2700000" algn="bl" rotWithShape="0">
+              <a:srgbClr val="000000">
+                <a:alpha val="12000"/>
+              </a:srgbClr>
+            </a:outerShdw>
+          </a:effectLst>
+        </p:spPr>
+      </p:sp>
+      <p:sp>
+        <p:nvSpPr>
+          <p:cNvPr id="9" name="Text 7"/>
+          <p:cNvSpPr/>
+          <p:nvPr/>
+        </p:nvSpPr>
+        <p:spPr>
+          <a:xfrm>
+            <a:off x="1005840" y="2487168"/>
+            <a:ext cx="1097280" cy="384048"/>
+          </a:xfrm>
+          <a:prstGeom prst="rect">
+            <a:avLst/>
+          </a:prstGeom>
+          <a:noFill/>
+          <a:ln/>
+        </p:spPr>
+        <p:txBody>
+          <a:bodyPr wrap="square" lIns="0" tIns="0" rIns="0" bIns="0" rtlCol="0" anchor="ctr"/>
+          <a:lstStyle/>
+          <a:p>
+            <a:pPr marL="0" indent="0">
+              <a:buNone/>
+            </a:pPr>
+            <a:r>
+              <a:rPr lang="en-US" sz="1000" b="1" dirty="0">
+                <a:solidFill>
+                  <a:srgbClr val="0891B2"/>
+                </a:solidFill>
+              </a:rPr>
+              <a:t>🌐 Live App  </a:t>
+            </a:r>
+            <a:endParaRPr lang="en-US" sz="1000" dirty="0"/>
+          </a:p>
+        </p:txBody>
+      </p:sp>
+      <p:sp>
+        <p:nvSpPr>
+          <p:cNvPr id="10" name="Text 8"/>
+          <p:cNvSpPr/>
+          <p:nvPr/>
+        </p:nvSpPr>
+        <p:spPr>
+          <a:xfrm>
+            <a:off x="1920240" y="2487168"/>
+            <a:ext cx="2286000" cy="384048"/>
+          </a:xfrm>
+          <a:prstGeom prst="rect">
+            <a:avLst/>
+          </a:prstGeom>
+          <a:noFill/>
+          <a:ln/>
+        </p:spPr>
+        <p:txBody>
+          <a:bodyPr wrap="square" lIns="0" tIns="0" rIns="0" bIns="0" rtlCol="0" anchor="ctr"/>
+          <a:lstStyle/>
+          <a:p>
+            <a:pPr marL="0" indent="0">
+              <a:buNone/>
+            </a:pPr>
+            <a:r>
+              <a:rPr lang="en-US" sz="950" dirty="0">
+                <a:solidFill>
+                  <a:srgbClr val="FFFFFF"/>
+                </a:solidFill>
+                <a:latin typeface="Courier New" pitchFamily="34" charset="0"/>
+                <a:ea typeface="Courier New" pitchFamily="34" charset="-122"/>
+                <a:cs typeface="Courier New" pitchFamily="34" charset="-120"/>
+              </a:rPr>
+              <a:t>creditriskplatform.azurewebsites.net</a:t>
+            </a:r>
+            <a:endParaRPr lang="en-US" sz="950" dirty="0"/>
+          </a:p>
+        </p:txBody>
+      </p:sp>
+      <p:sp>
+        <p:nvSpPr>
+          <p:cNvPr id="11" name="Shape 9"/>
+          <p:cNvSpPr/>
+          <p:nvPr/>
+        </p:nvSpPr>
+        <p:spPr>
+          <a:xfrm>
+            <a:off x="4663440" y="2423160"/>
+            <a:ext cx="3520440" cy="566928"/>
+          </a:xfrm>
+          <a:prstGeom prst="roundRect">
+            <a:avLst>
+              <a:gd name="adj" fmla="val 12903"/>
+            </a:avLst>
+          </a:prstGeom>
+          <a:solidFill>
+            <a:srgbClr val="162032"/>
+          </a:solidFill>
+          <a:ln/>
+          <a:effectLst>
+            <a:outerShdw blurRad="50800" dist="25400" dir="2700000" algn="bl" rotWithShape="0">
+              <a:srgbClr val="000000">
+                <a:alpha val="12000"/>
+              </a:srgbClr>
+            </a:outerShdw>
+          </a:effectLst>
+        </p:spPr>
+      </p:sp>
+      <p:sp>
+        <p:nvSpPr>
+          <p:cNvPr id="12" name="Text 10"/>
+          <p:cNvSpPr/>
+          <p:nvPr/>
+        </p:nvSpPr>
+        <p:spPr>
+          <a:xfrm>
+            <a:off x="4846320" y="2487168"/>
+            <a:ext cx="1097280" cy="384048"/>
+          </a:xfrm>
+          <a:prstGeom prst="rect">
+            <a:avLst/>
+          </a:prstGeom>
+          <a:noFill/>
+          <a:ln/>
+        </p:spPr>
+        <p:txBody>
+          <a:bodyPr wrap="square" lIns="0" tIns="0" rIns="0" bIns="0" rtlCol="0" anchor="ctr"/>
+          <a:lstStyle/>
+          <a:p>
+            <a:pPr marL="0" indent="0">
+              <a:buNone/>
+            </a:pPr>
+            <a:r>
+              <a:rPr lang="en-US" sz="1000" b="1" dirty="0">
+                <a:solidFill>
+                  <a:srgbClr val="2563EB"/>
+                </a:solidFill>
+              </a:rPr>
+              <a:t>💻 GitHub  </a:t>
+            </a:r>
+            <a:endParaRPr lang="en-US" sz="1000" dirty="0"/>
+          </a:p>
+        </p:txBody>
+      </p:sp>
+      <p:sp>
+        <p:nvSpPr>
+          <p:cNvPr id="13" name="Text 11"/>
+          <p:cNvSpPr/>
+          <p:nvPr/>
+        </p:nvSpPr>
+        <p:spPr>
+          <a:xfrm>
+            <a:off x="5760720" y="2487168"/>
+            <a:ext cx="2286000" cy="384048"/>
+          </a:xfrm>
+          <a:prstGeom prst="rect">
+            <a:avLst/>
+          </a:prstGeom>
+          <a:noFill/>
+          <a:ln/>
+        </p:spPr>
+        <p:txBody>
+          <a:bodyPr wrap="square" lIns="0" tIns="0" rIns="0" bIns="0" rtlCol="0" anchor="ctr"/>
+          <a:lstStyle/>
+          <a:p>
+            <a:pPr marL="0" indent="0">
+              <a:buNone/>
+            </a:pPr>
+            <a:r>
+              <a:rPr lang="en-US" sz="950" dirty="0">
+                <a:solidFill>
+                  <a:srgbClr val="FFFFFF"/>
+                </a:solidFill>
+                <a:latin typeface="Courier New" pitchFamily="34" charset="0"/>
+                <a:ea typeface="Courier New" pitchFamily="34" charset="-122"/>
+                <a:cs typeface="Courier New" pitchFamily="34" charset="-120"/>
+              </a:rPr>
+              <a:t>github.com/Chaurasiyakash0136/EY-Training-2026</a:t>
+            </a:r>
+            <a:endParaRPr lang="en-US" sz="950" dirty="0"/>
+          </a:p>
+        </p:txBody>
+      </p:sp>
+      <p:sp>
+        <p:nvSpPr>
+          <p:cNvPr id="14" name="Shape 12"/>
+          <p:cNvSpPr/>
+          <p:nvPr/>
+        </p:nvSpPr>
+        <p:spPr>
+          <a:xfrm>
+            <a:off x="822960" y="3136392"/>
+            <a:ext cx="3520440" cy="566928"/>
+          </a:xfrm>
+          <a:prstGeom prst="roundRect">
+            <a:avLst>
+              <a:gd name="adj" fmla="val 12903"/>
+            </a:avLst>
+          </a:prstGeom>
+          <a:solidFill>
+            <a:srgbClr val="162032"/>
+          </a:solidFill>
+          <a:ln/>
+          <a:effectLst>
+            <a:outerShdw blurRad="50800" dist="25400" dir="2700000" algn="bl" rotWithShape="0">
+              <a:srgbClr val="000000">
+                <a:alpha val="12000"/>
+              </a:srgbClr>
+            </a:outerShdw>
+          </a:effectLst>
+        </p:spPr>
+      </p:sp>
+      <p:sp>
+        <p:nvSpPr>
+          <p:cNvPr id="15" name="Text 13"/>
+          <p:cNvSpPr/>
+          <p:nvPr/>
+        </p:nvSpPr>
+        <p:spPr>
+          <a:xfrm>
+            <a:off x="1005840" y="3200400"/>
+            <a:ext cx="1097280" cy="384048"/>
+          </a:xfrm>
+          <a:prstGeom prst="rect">
+            <a:avLst/>
+          </a:prstGeom>
+          <a:noFill/>
+          <a:ln/>
+        </p:spPr>
+        <p:txBody>
+          <a:bodyPr wrap="square" lIns="0" tIns="0" rIns="0" bIns="0" rtlCol="0" anchor="ctr"/>
+          <a:lstStyle/>
+          <a:p>
+            <a:pPr marL="0" indent="0">
+              <a:buNone/>
+            </a:pPr>
+            <a:r>
+              <a:rPr lang="en-US" sz="1000" b="1" dirty="0">
+                <a:solidFill>
+                  <a:srgbClr val="D97706"/>
+                </a:solidFill>
+              </a:rPr>
+              <a:t>🔍 LangSmith  </a:t>
+            </a:r>
+            <a:endParaRPr lang="en-US" sz="1000" dirty="0"/>
+          </a:p>
+        </p:txBody>
+      </p:sp>
+      <p:sp>
+        <p:nvSpPr>
+          <p:cNvPr id="16" name="Text 14"/>
+          <p:cNvSpPr/>
+          <p:nvPr/>
+        </p:nvSpPr>
+        <p:spPr>
+          <a:xfrm>
+            <a:off x="1920240" y="3200400"/>
+            <a:ext cx="2286000" cy="384048"/>
+          </a:xfrm>
+          <a:prstGeom prst="rect">
+            <a:avLst/>
+          </a:prstGeom>
+          <a:noFill/>
+          <a:ln/>
+        </p:spPr>
+        <p:txBody>
+          <a:bodyPr wrap="square" lIns="0" tIns="0" rIns="0" bIns="0" rtlCol="0" anchor="ctr"/>
+          <a:lstStyle/>
+          <a:p>
+            <a:pPr marL="0" indent="0">
+              <a:buNone/>
+            </a:pPr>
+            <a:r>
+              <a:rPr lang="en-US" sz="950" dirty="0">
+                <a:solidFill>
+                  <a:srgbClr val="FFFFFF"/>
+                </a:solidFill>
+                <a:latin typeface="Courier New" pitchFamily="34" charset="0"/>
+                <a:ea typeface="Courier New" pitchFamily="34" charset="-122"/>
+                <a:cs typeface="Courier New" pitchFamily="34" charset="-120"/>
+              </a:rPr>
+              <a:t>smith.langchain.com → credit-risk-platform</a:t>
+            </a:r>
+            <a:endParaRPr lang="en-US" sz="950" dirty="0"/>
+          </a:p>
+        </p:txBody>
+      </p:sp>
+      <p:sp>
+        <p:nvSpPr>
+          <p:cNvPr id="17" name="Shape 15"/>
+          <p:cNvSpPr/>
+          <p:nvPr/>
+        </p:nvSpPr>
+        <p:spPr>
+          <a:xfrm>
+            <a:off x="4663440" y="3136392"/>
+            <a:ext cx="3520440" cy="566928"/>
+          </a:xfrm>
+          <a:prstGeom prst="roundRect">
+            <a:avLst>
+              <a:gd name="adj" fmla="val 12903"/>
+            </a:avLst>
+          </a:prstGeom>
+          <a:solidFill>
+            <a:srgbClr val="162032"/>
+          </a:solidFill>
+          <a:ln/>
+          <a:effectLst>
+            <a:outerShdw blurRad="50800" dist="25400" dir="2700000" algn="bl" rotWithShape="0">
+              <a:srgbClr val="000000">
+                <a:alpha val="12000"/>
+              </a:srgbClr>
+            </a:outerShdw>
+          </a:effectLst>
+        </p:spPr>
+      </p:sp>
+      <p:sp>
+        <p:nvSpPr>
+          <p:cNvPr id="18" name="Text 16"/>
+          <p:cNvSpPr/>
+          <p:nvPr/>
+        </p:nvSpPr>
+        <p:spPr>
+          <a:xfrm>
+            <a:off x="4846320" y="3200400"/>
+            <a:ext cx="1097280" cy="384048"/>
+          </a:xfrm>
+          <a:prstGeom prst="rect">
+            <a:avLst/>
+          </a:prstGeom>
+          <a:noFill/>
+          <a:ln/>
+        </p:spPr>
+        <p:txBody>
+          <a:bodyPr wrap="square" lIns="0" tIns="0" rIns="0" bIns="0" rtlCol="0" anchor="ctr"/>
+          <a:lstStyle/>
+          <a:p>
+            <a:pPr marL="0" indent="0">
+              <a:buNone/>
+            </a:pPr>
+            <a:r>
+              <a:rPr lang="en-US" sz="1000" b="1" dirty="0">
+                <a:solidFill>
+                  <a:srgbClr val="059669"/>
+                </a:solidFill>
+              </a:rPr>
+              <a:t>🏷️ Version  </a:t>
+            </a:r>
+            <a:endParaRPr lang="en-US" sz="1000" dirty="0"/>
+          </a:p>
+        </p:txBody>
+      </p:sp>
+      <p:sp>
+        <p:nvSpPr>
+          <p:cNvPr id="19" name="Text 17"/>
+          <p:cNvSpPr/>
+          <p:nvPr/>
+        </p:nvSpPr>
+        <p:spPr>
+          <a:xfrm>
+            <a:off x="5760720" y="3200400"/>
+            <a:ext cx="2286000" cy="384048"/>
+          </a:xfrm>
+          <a:prstGeom prst="rect">
+            <a:avLst/>
+          </a:prstGeom>
+          <a:noFill/>
+          <a:ln/>
+        </p:spPr>
+        <p:txBody>
+          <a:bodyPr wrap="square" lIns="0" tIns="0" rIns="0" bIns="0" rtlCol="0" anchor="ctr"/>
+          <a:lstStyle/>
+          <a:p>
+            <a:pPr marL="0" indent="0">
+              <a:buNone/>
+            </a:pPr>
+            <a:r>
+              <a:rPr lang="en-US" sz="950" dirty="0">
+                <a:solidFill>
+                  <a:srgbClr val="FFFFFF"/>
+                </a:solidFill>
+                <a:latin typeface="Courier New" pitchFamily="34" charset="0"/>
+                <a:ea typeface="Courier New" pitchFamily="34" charset="-122"/>
+                <a:cs typeface="Courier New" pitchFamily="34" charset="-120"/>
+              </a:rPr>
+              <a:t>git tag v1.0 — main branch</a:t>
+            </a:r>
+            <a:endParaRPr lang="en-US" sz="950" dirty="0"/>
+          </a:p>
+        </p:txBody>
+      </p:sp>
+      <p:sp>
+        <p:nvSpPr>
+          <p:cNvPr id="20" name="Text 18"/>
+          <p:cNvSpPr/>
+          <p:nvPr/>
+        </p:nvSpPr>
+        <p:spPr>
+          <a:xfrm>
+            <a:off x="457200" y="4378495"/>
+            <a:ext cx="8229600" cy="475874"/>
+          </a:xfrm>
+          <a:prstGeom prst="rect">
+            <a:avLst/>
+          </a:prstGeom>
+          <a:noFill/>
+          <a:ln/>
+        </p:spPr>
+        <p:txBody>
+          <a:bodyPr wrap="square" lIns="0" tIns="0" rIns="0" bIns="0" rtlCol="0" anchor="ctr"/>
+          <a:lstStyle/>
+          <a:p>
+            <a:pPr marL="0" indent="0" algn="ctr">
+              <a:buNone/>
+            </a:pPr>
+            <a:r>
+              <a:rPr lang="en-US" sz="1100" dirty="0">
+                <a:solidFill>
+                  <a:srgbClr val="94A3B8"/>
+                </a:solidFill>
+              </a:rPr>
+              <a:t>Akash Chaurasiya  ·  Ashu Sharma  ·  EY Training 2026  </a:t>
+            </a:r>
+            <a:endParaRPr lang="en-US" sz="1100" dirty="0"/>
+          </a:p>
+        </p:txBody>
+      </p:sp>
+    </p:spTree>
+  </p:cSld>
+  <p:clrMapOvr>
+    <a:masterClrMapping/>
+  </p:clrMapOvr>
 </p:sld>
 </file>
 

--- a/Capstone_Project/Credit-Risk-Intelligence-Platform/docs/Project_Documents/Credit_Risk_Platform_Capstone_project.pptx
+++ b/Capstone_Project/Credit-Risk-Intelligence-Platform/docs/Project_Documents/Credit_Risk_Platform_Capstone_project.pptx
@@ -6,29 +6,28 @@
     <p:sldMasterId id="2147483760" r:id="rId2"/>
   </p:sldMasterIdLst>
   <p:notesMasterIdLst>
-    <p:notesMasterId r:id="rId23"/>
+    <p:notesMasterId r:id="rId22"/>
   </p:notesMasterIdLst>
   <p:sldIdLst>
     <p:sldId id="256" r:id="rId3"/>
     <p:sldId id="300" r:id="rId4"/>
-    <p:sldId id="301" r:id="rId5"/>
-    <p:sldId id="302" r:id="rId6"/>
-    <p:sldId id="303" r:id="rId7"/>
-    <p:sldId id="304" r:id="rId8"/>
-    <p:sldId id="305" r:id="rId9"/>
-    <p:sldId id="307" r:id="rId10"/>
-    <p:sldId id="308" r:id="rId11"/>
-    <p:sldId id="257" r:id="rId12"/>
-    <p:sldId id="259" r:id="rId13"/>
-    <p:sldId id="260" r:id="rId14"/>
-    <p:sldId id="272" r:id="rId15"/>
-    <p:sldId id="262" r:id="rId16"/>
-    <p:sldId id="263" r:id="rId17"/>
-    <p:sldId id="264" r:id="rId18"/>
-    <p:sldId id="266" r:id="rId19"/>
-    <p:sldId id="269" r:id="rId20"/>
-    <p:sldId id="310" r:id="rId21"/>
-    <p:sldId id="271" r:id="rId22"/>
+    <p:sldId id="311" r:id="rId5"/>
+    <p:sldId id="312" r:id="rId6"/>
+    <p:sldId id="313" r:id="rId7"/>
+    <p:sldId id="314" r:id="rId8"/>
+    <p:sldId id="308" r:id="rId9"/>
+    <p:sldId id="257" r:id="rId10"/>
+    <p:sldId id="259" r:id="rId11"/>
+    <p:sldId id="260" r:id="rId12"/>
+    <p:sldId id="272" r:id="rId13"/>
+    <p:sldId id="262" r:id="rId14"/>
+    <p:sldId id="263" r:id="rId15"/>
+    <p:sldId id="264" r:id="rId16"/>
+    <p:sldId id="266" r:id="rId17"/>
+    <p:sldId id="269" r:id="rId18"/>
+    <p:sldId id="310" r:id="rId19"/>
+    <p:sldId id="315" r:id="rId20"/>
+    <p:sldId id="271" r:id="rId21"/>
   </p:sldIdLst>
   <p:sldSz cx="9144000" cy="5143500" type="screen16x9"/>
   <p:notesSz cx="5143500" cy="9144000"/>
@@ -456,7 +455,7 @@
                 <a:tabLst/>
                 <a:defRPr/>
               </a:pPr>
-              <a:t>19</a:t>
+              <a:t>17</a:t>
             </a:fld>
             <a:endParaRPr kumimoji="0" lang="en-US" sz="1800" b="0" i="0" u="none" strike="noStrike" kern="1200" cap="none" spc="0" normalizeH="0" baseline="0" noProof="0">
               <a:ln>
@@ -556,7 +555,7 @@
           <a:p>
             <a:fld id="{F7021451-1387-4CA6-816F-3879F97B5CBC}" type="slidenum">
               <a:rPr lang="en-US"/>
-              <a:t>20</a:t>
+              <a:t>19</a:t>
             </a:fld>
             <a:endParaRPr lang="en-US"/>
           </a:p>
@@ -643,7 +642,7 @@
           <a:p>
             <a:fld id="{F7021451-1387-4CA6-816F-3879F97B5CBC}" type="slidenum">
               <a:rPr lang="en-US"/>
-              <a:t>10</a:t>
+              <a:t>8</a:t>
             </a:fld>
             <a:endParaRPr lang="en-US"/>
           </a:p>
@@ -730,7 +729,7 @@
           <a:p>
             <a:fld id="{F7021451-1387-4CA6-816F-3879F97B5CBC}" type="slidenum">
               <a:rPr lang="en-US"/>
-              <a:t>11</a:t>
+              <a:t>9</a:t>
             </a:fld>
             <a:endParaRPr lang="en-US"/>
           </a:p>
@@ -817,7 +816,7 @@
           <a:p>
             <a:fld id="{F7021451-1387-4CA6-816F-3879F97B5CBC}" type="slidenum">
               <a:rPr lang="en-US"/>
-              <a:t>12</a:t>
+              <a:t>10</a:t>
             </a:fld>
             <a:endParaRPr lang="en-US"/>
           </a:p>
@@ -901,7 +900,7 @@
           <a:p>
             <a:fld id="{F7021451-1387-4CA6-816F-3879F97B5CBC}" type="slidenum">
               <a:rPr lang="en-US"/>
-              <a:t>13</a:t>
+              <a:t>11</a:t>
             </a:fld>
             <a:endParaRPr lang="en-US"/>
           </a:p>
@@ -988,7 +987,7 @@
           <a:p>
             <a:fld id="{F7021451-1387-4CA6-816F-3879F97B5CBC}" type="slidenum">
               <a:rPr lang="en-US"/>
-              <a:t>15</a:t>
+              <a:t>13</a:t>
             </a:fld>
             <a:endParaRPr lang="en-US"/>
           </a:p>
@@ -1075,7 +1074,7 @@
           <a:p>
             <a:fld id="{F7021451-1387-4CA6-816F-3879F97B5CBC}" type="slidenum">
               <a:rPr lang="en-US"/>
-              <a:t>16</a:t>
+              <a:t>14</a:t>
             </a:fld>
             <a:endParaRPr lang="en-US"/>
           </a:p>
@@ -1162,7 +1161,7 @@
           <a:p>
             <a:fld id="{F7021451-1387-4CA6-816F-3879F97B5CBC}" type="slidenum">
               <a:rPr lang="en-US"/>
-              <a:t>17</a:t>
+              <a:t>15</a:t>
             </a:fld>
             <a:endParaRPr lang="en-US"/>
           </a:p>
@@ -1249,7 +1248,7 @@
           <a:p>
             <a:fld id="{F7021451-1387-4CA6-816F-3879F97B5CBC}" type="slidenum">
               <a:rPr lang="en-US"/>
-              <a:t>18</a:t>
+              <a:t>16</a:t>
             </a:fld>
             <a:endParaRPr lang="en-US"/>
           </a:p>
@@ -2296,2540 +2295,6 @@
 
 <file path=ppt/slides/slide10.xml><?xml version="1.0" encoding="utf-8"?>
 <p:sld xmlns:a="http://schemas.openxmlformats.org/drawingml/2006/main" xmlns:r="http://schemas.openxmlformats.org/officeDocument/2006/relationships" xmlns:p="http://schemas.openxmlformats.org/presentationml/2006/main">
-  <p:cSld name="Problem and Solution">
-    <p:bg>
-      <p:bgPr>
-        <a:solidFill>
-          <a:srgbClr val="0F1B2D"/>
-        </a:solidFill>
-        <a:effectLst/>
-      </p:bgPr>
-    </p:bg>
-    <p:spTree>
-      <p:nvGrpSpPr>
-        <p:cNvPr id="1" name=""/>
-        <p:cNvGrpSpPr/>
-        <p:nvPr/>
-      </p:nvGrpSpPr>
-      <p:grpSpPr>
-        <a:xfrm>
-          <a:off x="0" y="0"/>
-          <a:ext cx="0" cy="0"/>
-          <a:chOff x="0" y="0"/>
-          <a:chExt cx="0" cy="0"/>
-        </a:xfrm>
-      </p:grpSpPr>
-      <p:sp>
-        <p:nvSpPr>
-          <p:cNvPr id="101" name="Badge"/>
-          <p:cNvSpPr/>
-          <p:nvPr/>
-        </p:nvSpPr>
-        <p:spPr>
-          <a:xfrm>
-            <a:off x="457200" y="274320"/>
-            <a:ext cx="1700000" cy="256032"/>
-          </a:xfrm>
-          <a:prstGeom prst="roundRect">
-            <a:avLst>
-              <a:gd name="adj" fmla="val 50000"/>
-            </a:avLst>
-          </a:prstGeom>
-          <a:solidFill>
-            <a:srgbClr val="2563EB">
-              <a:alpha val="25000"/>
-            </a:srgbClr>
-          </a:solidFill>
-          <a:ln/>
-        </p:spPr>
-      </p:sp>
-      <p:sp>
-        <p:nvSpPr>
-          <p:cNvPr id="102" name="BadgeText"/>
-          <p:cNvSpPr/>
-          <p:nvPr/>
-        </p:nvSpPr>
-        <p:spPr>
-          <a:xfrm>
-            <a:off x="457200" y="274320"/>
-            <a:ext cx="1700000" cy="256032"/>
-          </a:xfrm>
-          <a:prstGeom prst="rect">
-            <a:avLst/>
-          </a:prstGeom>
-          <a:noFill/>
-          <a:ln/>
-        </p:spPr>
-        <p:txBody>
-          <a:bodyPr wrap="square" lIns="0" tIns="0" rIns="0" bIns="0" rtlCol="0" anchor="ctr"/>
-          <a:lstStyle/>
-          <a:p>
-            <a:pPr marL="0" indent="0" algn="ctr">
-              <a:buNone/>
-            </a:pPr>
-            <a:r>
-              <a:rPr lang="en-US" sz="900" b="1" kern="0" spc="150" dirty="0">
-                <a:solidFill>
-                  <a:srgbClr val="2563EB"/>
-                </a:solidFill>
-              </a:rPr>
-              <a:t>OVERVIEW</a:t>
-            </a:r>
-          </a:p>
-        </p:txBody>
-      </p:sp>
-      <p:sp>
-        <p:nvSpPr>
-          <p:cNvPr id="103" name="Title"/>
-          <p:cNvSpPr/>
-          <p:nvPr/>
-        </p:nvSpPr>
-        <p:spPr>
-          <a:xfrm>
-            <a:off x="457200" y="590000"/>
-            <a:ext cx="8229600" cy="500000"/>
-          </a:xfrm>
-          <a:prstGeom prst="rect">
-            <a:avLst/>
-          </a:prstGeom>
-          <a:noFill/>
-          <a:ln/>
-        </p:spPr>
-        <p:txBody>
-          <a:bodyPr wrap="square" lIns="0" tIns="0" rIns="0" bIns="0" rtlCol="0" anchor="ctr"/>
-          <a:lstStyle/>
-          <a:p>
-            <a:pPr marL="0" indent="0">
-              <a:buNone/>
-            </a:pPr>
-            <a:r>
-              <a:rPr lang="en-US" sz="2200" b="1" dirty="0">
-                <a:solidFill>
-                  <a:srgbClr val="FFFFFF"/>
-                </a:solidFill>
-                <a:latin typeface="Cambria" pitchFamily="34" charset="0"/>
-              </a:rPr>
-              <a:t>Why We Built It — And What We Built</a:t>
-            </a:r>
-          </a:p>
-        </p:txBody>
-      </p:sp>
-      <p:sp>
-        <p:nvSpPr>
-          <p:cNvPr id="104" name="Badge"/>
-          <p:cNvSpPr/>
-          <p:nvPr/>
-        </p:nvSpPr>
-        <p:spPr>
-          <a:xfrm>
-            <a:off x="457200" y="1230000"/>
-            <a:ext cx="1450000" cy="230000"/>
-          </a:xfrm>
-          <a:prstGeom prst="roundRect">
-            <a:avLst>
-              <a:gd name="adj" fmla="val 50000"/>
-            </a:avLst>
-          </a:prstGeom>
-          <a:solidFill>
-            <a:srgbClr val="DC2626">
-              <a:alpha val="25000"/>
-            </a:srgbClr>
-          </a:solidFill>
-          <a:ln/>
-        </p:spPr>
-      </p:sp>
-      <p:sp>
-        <p:nvSpPr>
-          <p:cNvPr id="105" name="BadgeText"/>
-          <p:cNvSpPr/>
-          <p:nvPr/>
-        </p:nvSpPr>
-        <p:spPr>
-          <a:xfrm>
-            <a:off x="457200" y="1230000"/>
-            <a:ext cx="1450000" cy="230000"/>
-          </a:xfrm>
-          <a:prstGeom prst="rect">
-            <a:avLst/>
-          </a:prstGeom>
-          <a:noFill/>
-          <a:ln/>
-        </p:spPr>
-        <p:txBody>
-          <a:bodyPr wrap="square" lIns="0" tIns="0" rIns="0" bIns="0" rtlCol="0" anchor="ctr"/>
-          <a:lstStyle/>
-          <a:p>
-            <a:pPr marL="0" indent="0" algn="ctr">
-              <a:buNone/>
-            </a:pPr>
-            <a:r>
-              <a:rPr lang="en-US" sz="900" b="1" kern="0" spc="150" dirty="0">
-                <a:solidFill>
-                  <a:srgbClr val="DC2626"/>
-                </a:solidFill>
-              </a:rPr>
-              <a:t>THE PROBLEM</a:t>
-            </a:r>
-          </a:p>
-        </p:txBody>
-      </p:sp>
-      <p:sp>
-        <p:nvSpPr>
-          <p:cNvPr id="106" name="Text"/>
-          <p:cNvSpPr/>
-          <p:nvPr/>
-        </p:nvSpPr>
-        <p:spPr>
-          <a:xfrm>
-            <a:off x="457200" y="1560000"/>
-            <a:ext cx="340000" cy="340000"/>
-          </a:xfrm>
-          <a:prstGeom prst="rect">
-            <a:avLst/>
-          </a:prstGeom>
-          <a:noFill/>
-          <a:ln/>
-        </p:spPr>
-        <p:txBody>
-          <a:bodyPr wrap="square" lIns="0" tIns="0" rIns="0" bIns="0" rtlCol="0" anchor="ctr"/>
-          <a:lstStyle/>
-          <a:p>
-            <a:pPr marL="0" indent="0" algn="l">
-              <a:buNone/>
-            </a:pPr>
-            <a:r>
-              <a:rPr lang="en-US" sz="1500" b="0" dirty="0">
-                <a:solidFill>
-                  <a:srgbClr val="FFFFFF"/>
-                </a:solidFill>
-              </a:rPr>
-              <a:t>📄</a:t>
-            </a:r>
-          </a:p>
-        </p:txBody>
-      </p:sp>
-      <p:sp>
-        <p:nvSpPr>
-          <p:cNvPr id="107" name="Text"/>
-          <p:cNvSpPr/>
-          <p:nvPr/>
-        </p:nvSpPr>
-        <p:spPr>
-          <a:xfrm>
-            <a:off x="857200" y="1560000"/>
-            <a:ext cx="3600500" cy="180000"/>
-          </a:xfrm>
-          <a:prstGeom prst="rect">
-            <a:avLst/>
-          </a:prstGeom>
-          <a:noFill/>
-          <a:ln/>
-        </p:spPr>
-        <p:txBody>
-          <a:bodyPr wrap="square" lIns="0" tIns="0" rIns="0" bIns="0" rtlCol="0" anchor="t"/>
-          <a:lstStyle/>
-          <a:p>
-            <a:pPr marL="0" indent="0" algn="l">
-              <a:buNone/>
-            </a:pPr>
-            <a:r>
-              <a:rPr lang="en-US" sz="1050" b="1" dirty="0">
-                <a:solidFill>
-                  <a:srgbClr val="FFFFFF"/>
-                </a:solidFill>
-              </a:rPr>
-              <a:t>Manual Review</a:t>
-            </a:r>
-          </a:p>
-        </p:txBody>
-      </p:sp>
-      <p:sp>
-        <p:nvSpPr>
-          <p:cNvPr id="108" name="Text"/>
-          <p:cNvSpPr/>
-          <p:nvPr/>
-        </p:nvSpPr>
-        <p:spPr>
-          <a:xfrm>
-            <a:off x="857200" y="1735000"/>
-            <a:ext cx="3600500" cy="300000"/>
-          </a:xfrm>
-          <a:prstGeom prst="rect">
-            <a:avLst/>
-          </a:prstGeom>
-          <a:noFill/>
-          <a:ln/>
-        </p:spPr>
-        <p:txBody>
-          <a:bodyPr wrap="square" lIns="0" tIns="0" rIns="0" bIns="0" rtlCol="0" anchor="t"/>
-          <a:lstStyle/>
-          <a:p>
-            <a:pPr marL="0" indent="0" algn="l">
-              <a:lnSpc>
-                <a:spcPct val="115000"/>
-              </a:lnSpc>
-              <a:buNone/>
-            </a:pPr>
-            <a:r>
-              <a:rPr lang="en-US" sz="850" b="0" dirty="0">
-                <a:solidFill>
-                  <a:srgbClr val="94A3B8"/>
-                </a:solidFill>
-              </a:rPr>
-              <a:t>Officers read 50-100 page PDFs by hand — 3-5 days per application.</a:t>
-            </a:r>
-          </a:p>
-        </p:txBody>
-      </p:sp>
-      <p:sp>
-        <p:nvSpPr>
-          <p:cNvPr id="109" name="Text"/>
-          <p:cNvSpPr/>
-          <p:nvPr/>
-        </p:nvSpPr>
-        <p:spPr>
-          <a:xfrm>
-            <a:off x="457200" y="2030000"/>
-            <a:ext cx="340000" cy="340000"/>
-          </a:xfrm>
-          <a:prstGeom prst="rect">
-            <a:avLst/>
-          </a:prstGeom>
-          <a:noFill/>
-          <a:ln/>
-        </p:spPr>
-        <p:txBody>
-          <a:bodyPr wrap="square" lIns="0" tIns="0" rIns="0" bIns="0" rtlCol="0" anchor="ctr"/>
-          <a:lstStyle/>
-          <a:p>
-            <a:pPr marL="0" indent="0" algn="l">
-              <a:buNone/>
-            </a:pPr>
-            <a:r>
-              <a:rPr lang="en-US" sz="1500" b="0" dirty="0">
-                <a:solidFill>
-                  <a:srgbClr val="FFFFFF"/>
-                </a:solidFill>
-              </a:rPr>
-              <a:t>❌</a:t>
-            </a:r>
-          </a:p>
-        </p:txBody>
-      </p:sp>
-      <p:sp>
-        <p:nvSpPr>
-          <p:cNvPr id="110" name="Text"/>
-          <p:cNvSpPr/>
-          <p:nvPr/>
-        </p:nvSpPr>
-        <p:spPr>
-          <a:xfrm>
-            <a:off x="857200" y="2030000"/>
-            <a:ext cx="3600500" cy="180000"/>
-          </a:xfrm>
-          <a:prstGeom prst="rect">
-            <a:avLst/>
-          </a:prstGeom>
-          <a:noFill/>
-          <a:ln/>
-        </p:spPr>
-        <p:txBody>
-          <a:bodyPr wrap="square" lIns="0" tIns="0" rIns="0" bIns="0" rtlCol="0" anchor="t"/>
-          <a:lstStyle/>
-          <a:p>
-            <a:pPr marL="0" indent="0" algn="l">
-              <a:buNone/>
-            </a:pPr>
-            <a:r>
-              <a:rPr lang="en-US" sz="1050" b="1" dirty="0">
-                <a:solidFill>
-                  <a:srgbClr val="FFFFFF"/>
-                </a:solidFill>
-              </a:rPr>
-              <a:t>Human Error</a:t>
-            </a:r>
-          </a:p>
-        </p:txBody>
-      </p:sp>
-      <p:sp>
-        <p:nvSpPr>
-          <p:cNvPr id="111" name="Text"/>
-          <p:cNvSpPr/>
-          <p:nvPr/>
-        </p:nvSpPr>
-        <p:spPr>
-          <a:xfrm>
-            <a:off x="857200" y="2205000"/>
-            <a:ext cx="3600500" cy="300000"/>
-          </a:xfrm>
-          <a:prstGeom prst="rect">
-            <a:avLst/>
-          </a:prstGeom>
-          <a:noFill/>
-          <a:ln/>
-        </p:spPr>
-        <p:txBody>
-          <a:bodyPr wrap="square" lIns="0" tIns="0" rIns="0" bIns="0" rtlCol="0" anchor="t"/>
-          <a:lstStyle/>
-          <a:p>
-            <a:pPr marL="0" indent="0" algn="l">
-              <a:lnSpc>
-                <a:spcPct val="115000"/>
-              </a:lnSpc>
-              <a:buNone/>
-            </a:pPr>
-            <a:r>
-              <a:rPr lang="en-US" sz="850" b="0" dirty="0">
-                <a:solidFill>
-                  <a:srgbClr val="94A3B8"/>
-                </a:solidFill>
-              </a:rPr>
-              <a:t>Same applicant gets different risk ratings from different officers.</a:t>
-            </a:r>
-          </a:p>
-        </p:txBody>
-      </p:sp>
-      <p:sp>
-        <p:nvSpPr>
-          <p:cNvPr id="112" name="Text"/>
-          <p:cNvSpPr/>
-          <p:nvPr/>
-        </p:nvSpPr>
-        <p:spPr>
-          <a:xfrm>
-            <a:off x="457200" y="2500000"/>
-            <a:ext cx="340000" cy="340000"/>
-          </a:xfrm>
-          <a:prstGeom prst="rect">
-            <a:avLst/>
-          </a:prstGeom>
-          <a:noFill/>
-          <a:ln/>
-        </p:spPr>
-        <p:txBody>
-          <a:bodyPr wrap="square" lIns="0" tIns="0" rIns="0" bIns="0" rtlCol="0" anchor="ctr"/>
-          <a:lstStyle/>
-          <a:p>
-            <a:pPr marL="0" indent="0" algn="l">
-              <a:buNone/>
-            </a:pPr>
-            <a:r>
-              <a:rPr lang="en-US" sz="1500" b="0" dirty="0">
-                <a:solidFill>
-                  <a:srgbClr val="FFFFFF"/>
-                </a:solidFill>
-              </a:rPr>
-              <a:t>⏰</a:t>
-            </a:r>
-          </a:p>
-        </p:txBody>
-      </p:sp>
-      <p:sp>
-        <p:nvSpPr>
-          <p:cNvPr id="113" name="Text"/>
-          <p:cNvSpPr/>
-          <p:nvPr/>
-        </p:nvSpPr>
-        <p:spPr>
-          <a:xfrm>
-            <a:off x="857200" y="2500000"/>
-            <a:ext cx="3600500" cy="180000"/>
-          </a:xfrm>
-          <a:prstGeom prst="rect">
-            <a:avLst/>
-          </a:prstGeom>
-          <a:noFill/>
-          <a:ln/>
-        </p:spPr>
-        <p:txBody>
-          <a:bodyPr wrap="square" lIns="0" tIns="0" rIns="0" bIns="0" rtlCol="0" anchor="t"/>
-          <a:lstStyle/>
-          <a:p>
-            <a:pPr marL="0" indent="0" algn="l">
-              <a:buNone/>
-            </a:pPr>
-            <a:r>
-              <a:rPr lang="en-US" sz="1050" b="1" dirty="0">
-                <a:solidFill>
-                  <a:srgbClr val="FFFFFF"/>
-                </a:solidFill>
-              </a:rPr>
-              <a:t>Slow Decisions</a:t>
-            </a:r>
-          </a:p>
-        </p:txBody>
-      </p:sp>
-      <p:sp>
-        <p:nvSpPr>
-          <p:cNvPr id="114" name="Text"/>
-          <p:cNvSpPr/>
-          <p:nvPr/>
-        </p:nvSpPr>
-        <p:spPr>
-          <a:xfrm>
-            <a:off x="857200" y="2675000"/>
-            <a:ext cx="3600500" cy="300000"/>
-          </a:xfrm>
-          <a:prstGeom prst="rect">
-            <a:avLst/>
-          </a:prstGeom>
-          <a:noFill/>
-          <a:ln/>
-        </p:spPr>
-        <p:txBody>
-          <a:bodyPr wrap="square" lIns="0" tIns="0" rIns="0" bIns="0" rtlCol="0" anchor="t"/>
-          <a:lstStyle/>
-          <a:p>
-            <a:pPr marL="0" indent="0" algn="l">
-              <a:lnSpc>
-                <a:spcPct val="115000"/>
-              </a:lnSpc>
-              <a:buNone/>
-            </a:pPr>
-            <a:r>
-              <a:rPr lang="en-US" sz="850" b="0" dirty="0">
-                <a:solidFill>
-                  <a:srgbClr val="94A3B8"/>
-                </a:solidFill>
-              </a:rPr>
-              <a:t>Customers wait weeks while documents sit in a processing queue.</a:t>
-            </a:r>
-          </a:p>
-        </p:txBody>
-      </p:sp>
-      <p:sp>
-        <p:nvSpPr>
-          <p:cNvPr id="115" name="Text"/>
-          <p:cNvSpPr/>
-          <p:nvPr/>
-        </p:nvSpPr>
-        <p:spPr>
-          <a:xfrm>
-            <a:off x="457200" y="2970000"/>
-            <a:ext cx="340000" cy="340000"/>
-          </a:xfrm>
-          <a:prstGeom prst="rect">
-            <a:avLst/>
-          </a:prstGeom>
-          <a:noFill/>
-          <a:ln/>
-        </p:spPr>
-        <p:txBody>
-          <a:bodyPr wrap="square" lIns="0" tIns="0" rIns="0" bIns="0" rtlCol="0" anchor="ctr"/>
-          <a:lstStyle/>
-          <a:p>
-            <a:pPr marL="0" indent="0" algn="l">
-              <a:buNone/>
-            </a:pPr>
-            <a:r>
-              <a:rPr lang="en-US" sz="1500" b="0" dirty="0">
-                <a:solidFill>
-                  <a:srgbClr val="FFFFFF"/>
-                </a:solidFill>
-              </a:rPr>
-              <a:t>💰</a:t>
-            </a:r>
-          </a:p>
-        </p:txBody>
-      </p:sp>
-      <p:sp>
-        <p:nvSpPr>
-          <p:cNvPr id="116" name="Text"/>
-          <p:cNvSpPr/>
-          <p:nvPr/>
-        </p:nvSpPr>
-        <p:spPr>
-          <a:xfrm>
-            <a:off x="857200" y="2970000"/>
-            <a:ext cx="3600500" cy="180000"/>
-          </a:xfrm>
-          <a:prstGeom prst="rect">
-            <a:avLst/>
-          </a:prstGeom>
-          <a:noFill/>
-          <a:ln/>
-        </p:spPr>
-        <p:txBody>
-          <a:bodyPr wrap="square" lIns="0" tIns="0" rIns="0" bIns="0" rtlCol="0" anchor="t"/>
-          <a:lstStyle/>
-          <a:p>
-            <a:pPr marL="0" indent="0" algn="l">
-              <a:buNone/>
-            </a:pPr>
-            <a:r>
-              <a:rPr lang="en-US" sz="1050" b="1" dirty="0">
-                <a:solidFill>
-                  <a:srgbClr val="FFFFFF"/>
-                </a:solidFill>
-              </a:rPr>
-              <a:t>Revenue Loss</a:t>
-            </a:r>
-          </a:p>
-        </p:txBody>
-      </p:sp>
-      <p:sp>
-        <p:nvSpPr>
-          <p:cNvPr id="117" name="Text"/>
-          <p:cNvSpPr/>
-          <p:nvPr/>
-        </p:nvSpPr>
-        <p:spPr>
-          <a:xfrm>
-            <a:off x="857200" y="3145000"/>
-            <a:ext cx="3600500" cy="300000"/>
-          </a:xfrm>
-          <a:prstGeom prst="rect">
-            <a:avLst/>
-          </a:prstGeom>
-          <a:noFill/>
-          <a:ln/>
-        </p:spPr>
-        <p:txBody>
-          <a:bodyPr wrap="square" lIns="0" tIns="0" rIns="0" bIns="0" rtlCol="0" anchor="t"/>
-          <a:lstStyle/>
-          <a:p>
-            <a:pPr marL="0" indent="0" algn="l">
-              <a:lnSpc>
-                <a:spcPct val="115000"/>
-              </a:lnSpc>
-              <a:buNone/>
-            </a:pPr>
-            <a:r>
-              <a:rPr lang="en-US" sz="850" b="0" dirty="0">
-                <a:solidFill>
-                  <a:srgbClr val="94A3B8"/>
-                </a:solidFill>
-              </a:rPr>
-              <a:t>Banks lose creditworthy customers to faster competitors.</a:t>
-            </a:r>
-          </a:p>
-        </p:txBody>
-      </p:sp>
-      <p:sp>
-        <p:nvSpPr>
-          <p:cNvPr id="118" name="Badge"/>
-          <p:cNvSpPr/>
-          <p:nvPr/>
-        </p:nvSpPr>
-        <p:spPr>
-          <a:xfrm>
-            <a:off x="4686300" y="1230000"/>
-            <a:ext cx="1550000" cy="230000"/>
-          </a:xfrm>
-          <a:prstGeom prst="roundRect">
-            <a:avLst>
-              <a:gd name="adj" fmla="val 50000"/>
-            </a:avLst>
-          </a:prstGeom>
-          <a:solidFill>
-            <a:srgbClr val="059669">
-              <a:alpha val="25000"/>
-            </a:srgbClr>
-          </a:solidFill>
-          <a:ln/>
-        </p:spPr>
-      </p:sp>
-      <p:sp>
-        <p:nvSpPr>
-          <p:cNvPr id="119" name="BadgeText"/>
-          <p:cNvSpPr/>
-          <p:nvPr/>
-        </p:nvSpPr>
-        <p:spPr>
-          <a:xfrm>
-            <a:off x="4686300" y="1230000"/>
-            <a:ext cx="1550000" cy="230000"/>
-          </a:xfrm>
-          <a:prstGeom prst="rect">
-            <a:avLst/>
-          </a:prstGeom>
-          <a:noFill/>
-          <a:ln/>
-        </p:spPr>
-        <p:txBody>
-          <a:bodyPr wrap="square" lIns="0" tIns="0" rIns="0" bIns="0" rtlCol="0" anchor="ctr"/>
-          <a:lstStyle/>
-          <a:p>
-            <a:pPr marL="0" indent="0" algn="ctr">
-              <a:buNone/>
-            </a:pPr>
-            <a:r>
-              <a:rPr lang="en-US" sz="900" b="1" kern="0" spc="150" dirty="0">
-                <a:solidFill>
-                  <a:srgbClr val="059669"/>
-                </a:solidFill>
-              </a:rPr>
-              <a:t>OUR SOLUTION</a:t>
-            </a:r>
-          </a:p>
-        </p:txBody>
-      </p:sp>
-      <p:sp>
-        <p:nvSpPr>
-          <p:cNvPr id="120" name="Text"/>
-          <p:cNvSpPr/>
-          <p:nvPr/>
-        </p:nvSpPr>
-        <p:spPr>
-          <a:xfrm>
-            <a:off x="4686300" y="1560000"/>
-            <a:ext cx="4000500" cy="620000"/>
-          </a:xfrm>
-          <a:prstGeom prst="rect">
-            <a:avLst/>
-          </a:prstGeom>
-          <a:noFill/>
-          <a:ln/>
-        </p:spPr>
-        <p:txBody>
-          <a:bodyPr wrap="square" lIns="0" tIns="0" rIns="0" bIns="0" rtlCol="0" anchor="t"/>
-          <a:lstStyle/>
-          <a:p>
-            <a:pPr marL="0" indent="0" algn="l">
-              <a:lnSpc>
-                <a:spcPct val="125000"/>
-              </a:lnSpc>
-              <a:buNone/>
-            </a:pPr>
-            <a:r>
-              <a:rPr lang="en-US" sz="950" b="0" dirty="0">
-                <a:solidFill>
-                  <a:srgbClr val="CBD5E1"/>
-                </a:solidFill>
-              </a:rPr>
-              <a:t>An AI platform that extracts key financial data from uploaded PDFs, generates explainable credit risk scores, and gives AI-powered loan recommendations — for both individual customers and financial institutions.</a:t>
-            </a:r>
-          </a:p>
-        </p:txBody>
-      </p:sp>
-      <p:sp>
-        <p:nvSpPr>
-          <p:cNvPr id="121" name="Text"/>
-          <p:cNvSpPr/>
-          <p:nvPr/>
-        </p:nvSpPr>
-        <p:spPr>
-          <a:xfrm>
-            <a:off x="4686300" y="2260000"/>
-            <a:ext cx="30000" cy="200000"/>
-          </a:xfrm>
-          <a:prstGeom prst="rect">
-            <a:avLst/>
-          </a:prstGeom>
-          <a:noFill/>
-          <a:ln/>
-        </p:spPr>
-        <p:txBody>
-          <a:bodyPr wrap="square" lIns="0" tIns="0" rIns="0" bIns="0" rtlCol="0" anchor="t"/>
-          <a:lstStyle/>
-          <a:p>
-            <a:pPr marL="0" indent="0" algn="l">
-              <a:buNone/>
-            </a:pPr>
-            <a:r>
-              <a:rPr lang="en-US" sz="1000" b="1" dirty="0">
-                <a:solidFill>
-                  <a:srgbClr val="059669"/>
-                </a:solidFill>
-              </a:rPr>
-              <a:t>•</a:t>
-            </a:r>
-          </a:p>
-        </p:txBody>
-      </p:sp>
-      <p:sp>
-        <p:nvSpPr>
-          <p:cNvPr id="122" name="Text"/>
-          <p:cNvSpPr/>
-          <p:nvPr/>
-        </p:nvSpPr>
-        <p:spPr>
-          <a:xfrm>
-            <a:off x="4906300" y="2260000"/>
-            <a:ext cx="3780500" cy="200000"/>
-          </a:xfrm>
-          <a:prstGeom prst="rect">
-            <a:avLst/>
-          </a:prstGeom>
-          <a:noFill/>
-          <a:ln/>
-        </p:spPr>
-        <p:txBody>
-          <a:bodyPr wrap="square" lIns="0" tIns="0" rIns="0" bIns="0" rtlCol="0" anchor="t"/>
-          <a:lstStyle/>
-          <a:p>
-            <a:pPr marL="0" indent="0" algn="l">
-              <a:buNone/>
-            </a:pPr>
-            <a:r>
-              <a:rPr lang="en-US" sz="900" b="0" dirty="0">
-                <a:solidFill>
-                  <a:srgbClr val="E2E8F0"/>
-                </a:solidFill>
-              </a:rPr>
-              <a:t>Automatic PDF data extraction</a:t>
-            </a:r>
-          </a:p>
-        </p:txBody>
-      </p:sp>
-      <p:sp>
-        <p:nvSpPr>
-          <p:cNvPr id="123" name="Text"/>
-          <p:cNvSpPr/>
-          <p:nvPr/>
-        </p:nvSpPr>
-        <p:spPr>
-          <a:xfrm>
-            <a:off x="4686300" y="2520000"/>
-            <a:ext cx="30000" cy="200000"/>
-          </a:xfrm>
-          <a:prstGeom prst="rect">
-            <a:avLst/>
-          </a:prstGeom>
-          <a:noFill/>
-          <a:ln/>
-        </p:spPr>
-        <p:txBody>
-          <a:bodyPr wrap="square" lIns="0" tIns="0" rIns="0" bIns="0" rtlCol="0" anchor="t"/>
-          <a:lstStyle/>
-          <a:p>
-            <a:pPr marL="0" indent="0" algn="l">
-              <a:buNone/>
-            </a:pPr>
-            <a:r>
-              <a:rPr lang="en-US" sz="1000" b="1" dirty="0">
-                <a:solidFill>
-                  <a:srgbClr val="059669"/>
-                </a:solidFill>
-              </a:rPr>
-              <a:t>•</a:t>
-            </a:r>
-          </a:p>
-        </p:txBody>
-      </p:sp>
-      <p:sp>
-        <p:nvSpPr>
-          <p:cNvPr id="124" name="Text"/>
-          <p:cNvSpPr/>
-          <p:nvPr/>
-        </p:nvSpPr>
-        <p:spPr>
-          <a:xfrm>
-            <a:off x="4906300" y="2520000"/>
-            <a:ext cx="3780500" cy="200000"/>
-          </a:xfrm>
-          <a:prstGeom prst="rect">
-            <a:avLst/>
-          </a:prstGeom>
-          <a:noFill/>
-          <a:ln/>
-        </p:spPr>
-        <p:txBody>
-          <a:bodyPr wrap="square" lIns="0" tIns="0" rIns="0" bIns="0" rtlCol="0" anchor="t"/>
-          <a:lstStyle/>
-          <a:p>
-            <a:pPr marL="0" indent="0" algn="l">
-              <a:buNone/>
-            </a:pPr>
-            <a:r>
-              <a:rPr lang="en-US" sz="900" b="0" dirty="0">
-                <a:solidFill>
-                  <a:srgbClr val="E2E8F0"/>
-                </a:solidFill>
-              </a:rPr>
-              <a:t>Explainable risk scores, not black-box numbers</a:t>
-            </a:r>
-          </a:p>
-        </p:txBody>
-      </p:sp>
-      <p:sp>
-        <p:nvSpPr>
-          <p:cNvPr id="125" name="Text"/>
-          <p:cNvSpPr/>
-          <p:nvPr/>
-        </p:nvSpPr>
-        <p:spPr>
-          <a:xfrm>
-            <a:off x="4686300" y="2780000"/>
-            <a:ext cx="30000" cy="200000"/>
-          </a:xfrm>
-          <a:prstGeom prst="rect">
-            <a:avLst/>
-          </a:prstGeom>
-          <a:noFill/>
-          <a:ln/>
-        </p:spPr>
-        <p:txBody>
-          <a:bodyPr wrap="square" lIns="0" tIns="0" rIns="0" bIns="0" rtlCol="0" anchor="t"/>
-          <a:lstStyle/>
-          <a:p>
-            <a:pPr marL="0" indent="0" algn="l">
-              <a:buNone/>
-            </a:pPr>
-            <a:r>
-              <a:rPr lang="en-US" sz="1000" b="1" dirty="0">
-                <a:solidFill>
-                  <a:srgbClr val="059669"/>
-                </a:solidFill>
-              </a:rPr>
-              <a:t>•</a:t>
-            </a:r>
-          </a:p>
-        </p:txBody>
-      </p:sp>
-      <p:sp>
-        <p:nvSpPr>
-          <p:cNvPr id="126" name="Text"/>
-          <p:cNvSpPr/>
-          <p:nvPr/>
-        </p:nvSpPr>
-        <p:spPr>
-          <a:xfrm>
-            <a:off x="4906300" y="2780000"/>
-            <a:ext cx="3780500" cy="200000"/>
-          </a:xfrm>
-          <a:prstGeom prst="rect">
-            <a:avLst/>
-          </a:prstGeom>
-          <a:noFill/>
-          <a:ln/>
-        </p:spPr>
-        <p:txBody>
-          <a:bodyPr wrap="square" lIns="0" tIns="0" rIns="0" bIns="0" rtlCol="0" anchor="t"/>
-          <a:lstStyle/>
-          <a:p>
-            <a:pPr marL="0" indent="0" algn="l">
-              <a:buNone/>
-            </a:pPr>
-            <a:r>
-              <a:rPr lang="en-US" sz="900" b="0" dirty="0">
-                <a:solidFill>
-                  <a:srgbClr val="E2E8F0"/>
-                </a:solidFill>
-              </a:rPr>
-              <a:t>Safer loan amounts, better rates, next steps</a:t>
-            </a:r>
-          </a:p>
-        </p:txBody>
-      </p:sp>
-      <p:sp>
-        <p:nvSpPr>
-          <p:cNvPr id="127" name="Text"/>
-          <p:cNvSpPr/>
-          <p:nvPr/>
-        </p:nvSpPr>
-        <p:spPr>
-          <a:xfrm>
-            <a:off x="4686300" y="3040000"/>
-            <a:ext cx="30000" cy="200000"/>
-          </a:xfrm>
-          <a:prstGeom prst="rect">
-            <a:avLst/>
-          </a:prstGeom>
-          <a:noFill/>
-          <a:ln/>
-        </p:spPr>
-        <p:txBody>
-          <a:bodyPr wrap="square" lIns="0" tIns="0" rIns="0" bIns="0" rtlCol="0" anchor="t"/>
-          <a:lstStyle/>
-          <a:p>
-            <a:pPr marL="0" indent="0" algn="l">
-              <a:buNone/>
-            </a:pPr>
-            <a:r>
-              <a:rPr lang="en-US" sz="1000" b="1" dirty="0">
-                <a:solidFill>
-                  <a:srgbClr val="059669"/>
-                </a:solidFill>
-              </a:rPr>
-              <a:t>•</a:t>
-            </a:r>
-          </a:p>
-        </p:txBody>
-      </p:sp>
-      <p:sp>
-        <p:nvSpPr>
-          <p:cNvPr id="128" name="Text"/>
-          <p:cNvSpPr/>
-          <p:nvPr/>
-        </p:nvSpPr>
-        <p:spPr>
-          <a:xfrm>
-            <a:off x="4906300" y="3040000"/>
-            <a:ext cx="3780500" cy="200000"/>
-          </a:xfrm>
-          <a:prstGeom prst="rect">
-            <a:avLst/>
-          </a:prstGeom>
-          <a:noFill/>
-          <a:ln/>
-        </p:spPr>
-        <p:txBody>
-          <a:bodyPr wrap="square" lIns="0" tIns="0" rIns="0" bIns="0" rtlCol="0" anchor="t"/>
-          <a:lstStyle/>
-          <a:p>
-            <a:pPr marL="0" indent="0" algn="l">
-              <a:buNone/>
-            </a:pPr>
-            <a:r>
-              <a:rPr lang="en-US" sz="900" b="0" dirty="0">
-                <a:solidFill>
-                  <a:srgbClr val="E2E8F0"/>
-                </a:solidFill>
-              </a:rPr>
-              <a:t>Full CI/CD deploy pipeline on Azure</a:t>
-            </a:r>
-          </a:p>
-        </p:txBody>
-      </p:sp>
-      <p:sp>
-        <p:nvSpPr>
-          <p:cNvPr id="129" name="Pill"/>
-          <p:cNvSpPr/>
-          <p:nvPr/>
-        </p:nvSpPr>
-        <p:spPr>
-          <a:xfrm>
-            <a:off x="4686300" y="3420000"/>
-            <a:ext cx="750000" cy="250000"/>
-          </a:xfrm>
-          <a:prstGeom prst="roundRect">
-            <a:avLst>
-              <a:gd name="adj" fmla="val 50000"/>
-            </a:avLst>
-          </a:prstGeom>
-          <a:solidFill>
-            <a:srgbClr val="2563EB">
-              <a:alpha val="20000"/>
-            </a:srgbClr>
-          </a:solidFill>
-          <a:ln/>
-        </p:spPr>
-        <p:txBody>
-          <a:bodyPr wrap="square" lIns="0" tIns="0" rIns="0" bIns="0" rtlCol="0" anchor="ctr"/>
-          <a:lstStyle/>
-          <a:p>
-            <a:pPr marL="0" indent="0" algn="ctr">
-              <a:buNone/>
-            </a:pPr>
-            <a:r>
-              <a:rPr lang="en-US" sz="750" b="1" dirty="0">
-                <a:solidFill>
-                  <a:srgbClr val="FFFFFF"/>
-                </a:solidFill>
-              </a:rPr>
-              <a:t>Streamlit</a:t>
-            </a:r>
-          </a:p>
-        </p:txBody>
-      </p:sp>
-      <p:sp>
-        <p:nvSpPr>
-          <p:cNvPr id="130" name="Pill"/>
-          <p:cNvSpPr/>
-          <p:nvPr/>
-        </p:nvSpPr>
-        <p:spPr>
-          <a:xfrm>
-            <a:off x="5516300" y="3420000"/>
-            <a:ext cx="750000" cy="250000"/>
-          </a:xfrm>
-          <a:prstGeom prst="roundRect">
-            <a:avLst>
-              <a:gd name="adj" fmla="val 50000"/>
-            </a:avLst>
-          </a:prstGeom>
-          <a:solidFill>
-            <a:srgbClr val="0891B2">
-              <a:alpha val="20000"/>
-            </a:srgbClr>
-          </a:solidFill>
-          <a:ln/>
-        </p:spPr>
-        <p:txBody>
-          <a:bodyPr wrap="square" lIns="0" tIns="0" rIns="0" bIns="0" rtlCol="0" anchor="ctr"/>
-          <a:lstStyle/>
-          <a:p>
-            <a:pPr marL="0" indent="0" algn="ctr">
-              <a:buNone/>
-            </a:pPr>
-            <a:r>
-              <a:rPr lang="en-US" sz="750" b="1" dirty="0">
-                <a:solidFill>
-                  <a:srgbClr val="FFFFFF"/>
-                </a:solidFill>
-              </a:rPr>
-              <a:t>LangChain</a:t>
-            </a:r>
-          </a:p>
-        </p:txBody>
-      </p:sp>
-      <p:sp>
-        <p:nvSpPr>
-          <p:cNvPr id="131" name="Pill"/>
-          <p:cNvSpPr/>
-          <p:nvPr/>
-        </p:nvSpPr>
-        <p:spPr>
-          <a:xfrm>
-            <a:off x="6346300" y="3420000"/>
-            <a:ext cx="690000" cy="250000"/>
-          </a:xfrm>
-          <a:prstGeom prst="roundRect">
-            <a:avLst>
-              <a:gd name="adj" fmla="val 50000"/>
-            </a:avLst>
-          </a:prstGeom>
-          <a:solidFill>
-            <a:srgbClr val="059669">
-              <a:alpha val="20000"/>
-            </a:srgbClr>
-          </a:solidFill>
-          <a:ln/>
-        </p:spPr>
-        <p:txBody>
-          <a:bodyPr wrap="square" lIns="0" tIns="0" rIns="0" bIns="0" rtlCol="0" anchor="ctr"/>
-          <a:lstStyle/>
-          <a:p>
-            <a:pPr marL="0" indent="0" algn="ctr">
-              <a:buNone/>
-            </a:pPr>
-            <a:r>
-              <a:rPr lang="en-US" sz="750" b="1" dirty="0">
-                <a:solidFill>
-                  <a:srgbClr val="FFFFFF"/>
-                </a:solidFill>
-              </a:rPr>
-              <a:t>Pinecone</a:t>
-            </a:r>
-          </a:p>
-        </p:txBody>
-      </p:sp>
-      <p:sp>
-        <p:nvSpPr>
-          <p:cNvPr id="132" name="Pill"/>
-          <p:cNvSpPr/>
-          <p:nvPr/>
-        </p:nvSpPr>
-        <p:spPr>
-          <a:xfrm>
-            <a:off x="7116300" y="3420000"/>
-            <a:ext cx="570000" cy="250000"/>
-          </a:xfrm>
-          <a:prstGeom prst="roundRect">
-            <a:avLst>
-              <a:gd name="adj" fmla="val 50000"/>
-            </a:avLst>
-          </a:prstGeom>
-          <a:solidFill>
-            <a:srgbClr val="D97706">
-              <a:alpha val="20000"/>
-            </a:srgbClr>
-          </a:solidFill>
-          <a:ln/>
-        </p:spPr>
-        <p:txBody>
-          <a:bodyPr wrap="square" lIns="0" tIns="0" rIns="0" bIns="0" rtlCol="0" anchor="ctr"/>
-          <a:lstStyle/>
-          <a:p>
-            <a:pPr marL="0" indent="0" algn="ctr">
-              <a:buNone/>
-            </a:pPr>
-            <a:r>
-              <a:rPr lang="en-US" sz="750" b="1" dirty="0">
-                <a:solidFill>
-                  <a:srgbClr val="FFFFFF"/>
-                </a:solidFill>
-              </a:rPr>
-              <a:t>Docker</a:t>
-            </a:r>
-          </a:p>
-        </p:txBody>
-      </p:sp>
-      <p:sp>
-        <p:nvSpPr>
-          <p:cNvPr id="133" name="Pill"/>
-          <p:cNvSpPr/>
-          <p:nvPr/>
-        </p:nvSpPr>
-        <p:spPr>
-          <a:xfrm>
-            <a:off x="7766300" y="3420000"/>
-            <a:ext cx="510000" cy="250000"/>
-          </a:xfrm>
-          <a:prstGeom prst="roundRect">
-            <a:avLst>
-              <a:gd name="adj" fmla="val 50000"/>
-            </a:avLst>
-          </a:prstGeom>
-          <a:solidFill>
-            <a:srgbClr val="2563EB">
-              <a:alpha val="20000"/>
-            </a:srgbClr>
-          </a:solidFill>
-          <a:ln/>
-        </p:spPr>
-        <p:txBody>
-          <a:bodyPr wrap="square" lIns="0" tIns="0" rIns="0" bIns="0" rtlCol="0" anchor="ctr"/>
-          <a:lstStyle/>
-          <a:p>
-            <a:pPr marL="0" indent="0" algn="ctr">
-              <a:buNone/>
-            </a:pPr>
-            <a:r>
-              <a:rPr lang="en-US" sz="750" b="1" dirty="0">
-                <a:solidFill>
-                  <a:srgbClr val="FFFFFF"/>
-                </a:solidFill>
-              </a:rPr>
-              <a:t>Azure</a:t>
-            </a:r>
-          </a:p>
-        </p:txBody>
-      </p:sp>
-      <p:sp>
-        <p:nvSpPr>
-          <p:cNvPr id="134" name="Pill"/>
-          <p:cNvSpPr/>
-          <p:nvPr/>
-        </p:nvSpPr>
-        <p:spPr>
-          <a:xfrm>
-            <a:off x="4686300" y="3720000"/>
-            <a:ext cx="750000" cy="250000"/>
-          </a:xfrm>
-          <a:prstGeom prst="roundRect">
-            <a:avLst>
-              <a:gd name="adj" fmla="val 50000"/>
-            </a:avLst>
-          </a:prstGeom>
-          <a:solidFill>
-            <a:srgbClr val="0891B2">
-              <a:alpha val="20000"/>
-            </a:srgbClr>
-          </a:solidFill>
-          <a:ln/>
-        </p:spPr>
-        <p:txBody>
-          <a:bodyPr wrap="square" lIns="0" tIns="0" rIns="0" bIns="0" rtlCol="0" anchor="ctr"/>
-          <a:lstStyle/>
-          <a:p>
-            <a:pPr marL="0" indent="0" algn="ctr">
-              <a:buNone/>
-            </a:pPr>
-            <a:r>
-              <a:rPr lang="en-US" sz="750" b="1" dirty="0">
-                <a:solidFill>
-                  <a:srgbClr val="FFFFFF"/>
-                </a:solidFill>
-              </a:rPr>
-              <a:t>LangSmith</a:t>
-            </a:r>
-          </a:p>
-        </p:txBody>
-      </p:sp>
-      <p:sp>
-        <p:nvSpPr>
-          <p:cNvPr id="135" name="Pill"/>
-          <p:cNvSpPr/>
-          <p:nvPr/>
-        </p:nvSpPr>
-        <p:spPr>
-          <a:xfrm>
-            <a:off x="5516300" y="3720000"/>
-            <a:ext cx="570000" cy="250000"/>
-          </a:xfrm>
-          <a:prstGeom prst="roundRect">
-            <a:avLst>
-              <a:gd name="adj" fmla="val 50000"/>
-            </a:avLst>
-          </a:prstGeom>
-          <a:solidFill>
-            <a:srgbClr val="94A3B8">
-              <a:alpha val="20000"/>
-            </a:srgbClr>
-          </a:solidFill>
-          <a:ln/>
-        </p:spPr>
-        <p:txBody>
-          <a:bodyPr wrap="square" lIns="0" tIns="0" rIns="0" bIns="0" rtlCol="0" anchor="ctr"/>
-          <a:lstStyle/>
-          <a:p>
-            <a:pPr marL="0" indent="0" algn="ctr">
-              <a:buNone/>
-            </a:pPr>
-            <a:r>
-              <a:rPr lang="en-US" sz="750" b="1" dirty="0">
-                <a:solidFill>
-                  <a:srgbClr val="FFFFFF"/>
-                </a:solidFill>
-              </a:rPr>
-              <a:t>OpenAI</a:t>
-            </a:r>
-          </a:p>
-        </p:txBody>
-      </p:sp>
-    </p:spTree>
-  </p:cSld>
-  <p:clrMapOvr>
-    <a:masterClrMapping/>
-  </p:clrMapOvr>
-</p:sld>
-</file>
-
-<file path=ppt/slides/slide11.xml><?xml version="1.0" encoding="utf-8"?>
-<p:sld xmlns:a="http://schemas.openxmlformats.org/drawingml/2006/main" xmlns:r="http://schemas.openxmlformats.org/officeDocument/2006/relationships" xmlns:p="http://schemas.openxmlformats.org/presentationml/2006/main">
-  <p:cSld name="Slide 4">
-    <p:bg>
-      <p:bgPr>
-        <a:solidFill>
-          <a:srgbClr val="0F1B2D"/>
-        </a:solidFill>
-        <a:effectLst/>
-      </p:bgPr>
-    </p:bg>
-    <p:spTree>
-      <p:nvGrpSpPr>
-        <p:cNvPr id="1" name=""/>
-        <p:cNvGrpSpPr/>
-        <p:nvPr/>
-      </p:nvGrpSpPr>
-      <p:grpSpPr>
-        <a:xfrm>
-          <a:off x="0" y="0"/>
-          <a:ext cx="0" cy="0"/>
-          <a:chOff x="0" y="0"/>
-          <a:chExt cx="0" cy="0"/>
-        </a:xfrm>
-      </p:grpSpPr>
-      <p:sp>
-        <p:nvSpPr>
-          <p:cNvPr id="2" name="Shape 0"/>
-          <p:cNvSpPr/>
-          <p:nvPr/>
-        </p:nvSpPr>
-        <p:spPr>
-          <a:xfrm>
-            <a:off x="457200" y="274320"/>
-            <a:ext cx="1280160" cy="256032"/>
-          </a:xfrm>
-          <a:prstGeom prst="roundRect">
-            <a:avLst>
-              <a:gd name="adj" fmla="val 50000"/>
-            </a:avLst>
-          </a:prstGeom>
-          <a:solidFill>
-            <a:srgbClr val="2563EB">
-              <a:alpha val="25000"/>
-            </a:srgbClr>
-          </a:solidFill>
-          <a:ln/>
-        </p:spPr>
-      </p:sp>
-      <p:sp>
-        <p:nvSpPr>
-          <p:cNvPr id="3" name="Text 1"/>
-          <p:cNvSpPr/>
-          <p:nvPr/>
-        </p:nvSpPr>
-        <p:spPr>
-          <a:xfrm>
-            <a:off x="457200" y="274320"/>
-            <a:ext cx="1280160" cy="256032"/>
-          </a:xfrm>
-          <a:prstGeom prst="rect">
-            <a:avLst/>
-          </a:prstGeom>
-          <a:noFill/>
-          <a:ln/>
-        </p:spPr>
-        <p:txBody>
-          <a:bodyPr wrap="square" lIns="0" tIns="0" rIns="0" bIns="0" rtlCol="0" anchor="ctr"/>
-          <a:lstStyle/>
-          <a:p>
-            <a:pPr marL="0" indent="0" algn="ctr">
-              <a:buNone/>
-            </a:pPr>
-            <a:r>
-              <a:rPr lang="en-US" sz="900" b="1" kern="0" spc="150" dirty="0">
-                <a:solidFill>
-                  <a:srgbClr val="2563EB"/>
-                </a:solidFill>
-              </a:rPr>
-              <a:t>ARCHITECTURE</a:t>
-            </a:r>
-            <a:endParaRPr lang="en-US" sz="900" dirty="0"/>
-          </a:p>
-        </p:txBody>
-      </p:sp>
-      <p:sp>
-        <p:nvSpPr>
-          <p:cNvPr id="4" name="Text 2"/>
-          <p:cNvSpPr/>
-          <p:nvPr/>
-        </p:nvSpPr>
-        <p:spPr>
-          <a:xfrm>
-            <a:off x="457200" y="621792"/>
-            <a:ext cx="8229600" cy="502920"/>
-          </a:xfrm>
-          <a:prstGeom prst="rect">
-            <a:avLst/>
-          </a:prstGeom>
-          <a:noFill/>
-          <a:ln/>
-        </p:spPr>
-        <p:txBody>
-          <a:bodyPr wrap="square" lIns="0" tIns="0" rIns="0" bIns="0" rtlCol="0" anchor="ctr"/>
-          <a:lstStyle/>
-          <a:p>
-            <a:pPr marL="0" indent="0">
-              <a:buNone/>
-            </a:pPr>
-            <a:r>
-              <a:rPr lang="en-US" sz="3000" b="1" dirty="0">
-                <a:solidFill>
-                  <a:srgbClr val="FFFFFF"/>
-                </a:solidFill>
-                <a:latin typeface="Cambria" pitchFamily="34" charset="0"/>
-                <a:ea typeface="Cambria" pitchFamily="34" charset="-122"/>
-                <a:cs typeface="Cambria" pitchFamily="34" charset="-120"/>
-              </a:rPr>
-              <a:t>System Architecture</a:t>
-            </a:r>
-            <a:endParaRPr lang="en-US" sz="3000" dirty="0"/>
-          </a:p>
-        </p:txBody>
-      </p:sp>
-      <p:sp>
-        <p:nvSpPr>
-          <p:cNvPr id="5" name="Shape 3"/>
-          <p:cNvSpPr/>
-          <p:nvPr/>
-        </p:nvSpPr>
-        <p:spPr>
-          <a:xfrm>
-            <a:off x="365760" y="1325880"/>
-            <a:ext cx="1572768" cy="2651760"/>
-          </a:xfrm>
-          <a:prstGeom prst="roundRect">
-            <a:avLst>
-              <a:gd name="adj" fmla="val 5814"/>
-            </a:avLst>
-          </a:prstGeom>
-          <a:solidFill>
-            <a:srgbClr val="162032"/>
-          </a:solidFill>
-          <a:ln/>
-          <a:effectLst>
-            <a:outerShdw blurRad="101600" dist="38100" dir="2700000" algn="bl" rotWithShape="0">
-              <a:srgbClr val="000000">
-                <a:alpha val="18000"/>
-              </a:srgbClr>
-            </a:outerShdw>
-          </a:effectLst>
-        </p:spPr>
-      </p:sp>
-      <p:sp>
-        <p:nvSpPr>
-          <p:cNvPr id="6" name="Shape 4"/>
-          <p:cNvSpPr/>
-          <p:nvPr/>
-        </p:nvSpPr>
-        <p:spPr>
-          <a:xfrm>
-            <a:off x="365760" y="1325880"/>
-            <a:ext cx="1572768" cy="347472"/>
-          </a:xfrm>
-          <a:prstGeom prst="roundRect">
-            <a:avLst>
-              <a:gd name="adj" fmla="val 26316"/>
-            </a:avLst>
-          </a:prstGeom>
-          <a:solidFill>
-            <a:srgbClr val="0891B2">
-              <a:alpha val="75000"/>
-            </a:srgbClr>
-          </a:solidFill>
-          <a:ln/>
-        </p:spPr>
-      </p:sp>
-      <p:sp>
-        <p:nvSpPr>
-          <p:cNvPr id="7" name="Text 5"/>
-          <p:cNvSpPr/>
-          <p:nvPr/>
-        </p:nvSpPr>
-        <p:spPr>
-          <a:xfrm>
-            <a:off x="365760" y="1325880"/>
-            <a:ext cx="1572768" cy="347472"/>
-          </a:xfrm>
-          <a:prstGeom prst="rect">
-            <a:avLst/>
-          </a:prstGeom>
-          <a:noFill/>
-          <a:ln/>
-        </p:spPr>
-        <p:txBody>
-          <a:bodyPr wrap="square" lIns="0" tIns="0" rIns="0" bIns="0" rtlCol="0" anchor="ctr"/>
-          <a:lstStyle/>
-          <a:p>
-            <a:pPr marL="0" indent="0" algn="ctr">
-              <a:buNone/>
-            </a:pPr>
-            <a:r>
-              <a:rPr lang="en-US" sz="1000" b="1" dirty="0">
-                <a:solidFill>
-                  <a:srgbClr val="FFFFFF"/>
-                </a:solidFill>
-              </a:rPr>
-              <a:t>UI Layer</a:t>
-            </a:r>
-            <a:endParaRPr lang="en-US" sz="1000" dirty="0"/>
-          </a:p>
-        </p:txBody>
-      </p:sp>
-      <p:sp>
-        <p:nvSpPr>
-          <p:cNvPr id="8" name="Text 6"/>
-          <p:cNvSpPr/>
-          <p:nvPr/>
-        </p:nvSpPr>
-        <p:spPr>
-          <a:xfrm>
-            <a:off x="457200" y="1783080"/>
-            <a:ext cx="1389888" cy="384048"/>
-          </a:xfrm>
-          <a:prstGeom prst="rect">
-            <a:avLst/>
-          </a:prstGeom>
-          <a:noFill/>
-          <a:ln/>
-        </p:spPr>
-        <p:txBody>
-          <a:bodyPr wrap="square" lIns="0" tIns="0" rIns="0" bIns="0" rtlCol="0" anchor="ctr"/>
-          <a:lstStyle/>
-          <a:p>
-            <a:pPr marL="0" indent="0" algn="ctr">
-              <a:lnSpc>
-                <a:spcPct val="120000"/>
-              </a:lnSpc>
-              <a:buNone/>
-            </a:pPr>
-            <a:r>
-              <a:rPr lang="en-US" sz="900" dirty="0">
-                <a:solidFill>
-                  <a:srgbClr val="CBD5E1"/>
-                </a:solidFill>
-              </a:rPr>
-              <a:t>Streamlit Web App</a:t>
-            </a:r>
-            <a:endParaRPr lang="en-US" sz="900" dirty="0"/>
-          </a:p>
-        </p:txBody>
-      </p:sp>
-      <p:sp>
-        <p:nvSpPr>
-          <p:cNvPr id="9" name="Text 7"/>
-          <p:cNvSpPr/>
-          <p:nvPr/>
-        </p:nvSpPr>
-        <p:spPr>
-          <a:xfrm>
-            <a:off x="457200" y="2258568"/>
-            <a:ext cx="1389888" cy="384048"/>
-          </a:xfrm>
-          <a:prstGeom prst="rect">
-            <a:avLst/>
-          </a:prstGeom>
-          <a:noFill/>
-          <a:ln/>
-        </p:spPr>
-        <p:txBody>
-          <a:bodyPr wrap="square" lIns="0" tIns="0" rIns="0" bIns="0" rtlCol="0" anchor="ctr"/>
-          <a:lstStyle/>
-          <a:p>
-            <a:pPr marL="0" indent="0" algn="ctr">
-              <a:lnSpc>
-                <a:spcPct val="120000"/>
-              </a:lnSpc>
-              <a:buNone/>
-            </a:pPr>
-            <a:r>
-              <a:rPr lang="en-US" sz="900" dirty="0">
-                <a:solidFill>
-                  <a:srgbClr val="CBD5E1"/>
-                </a:solidFill>
-              </a:rPr>
-              <a:t>Auth (JWT + bcrypt)</a:t>
-            </a:r>
-            <a:endParaRPr lang="en-US" sz="900" dirty="0"/>
-          </a:p>
-        </p:txBody>
-      </p:sp>
-      <p:sp>
-        <p:nvSpPr>
-          <p:cNvPr id="10" name="Text 8"/>
-          <p:cNvSpPr/>
-          <p:nvPr/>
-        </p:nvSpPr>
-        <p:spPr>
-          <a:xfrm>
-            <a:off x="457200" y="2734056"/>
-            <a:ext cx="1389888" cy="384048"/>
-          </a:xfrm>
-          <a:prstGeom prst="rect">
-            <a:avLst/>
-          </a:prstGeom>
-          <a:noFill/>
-          <a:ln/>
-        </p:spPr>
-        <p:txBody>
-          <a:bodyPr wrap="square" lIns="0" tIns="0" rIns="0" bIns="0" rtlCol="0" anchor="ctr"/>
-          <a:lstStyle/>
-          <a:p>
-            <a:pPr marL="0" indent="0" algn="ctr">
-              <a:lnSpc>
-                <a:spcPct val="120000"/>
-              </a:lnSpc>
-              <a:buNone/>
-            </a:pPr>
-            <a:r>
-              <a:rPr lang="en-US" sz="900" dirty="0">
-                <a:solidFill>
-                  <a:srgbClr val="CBD5E1"/>
-                </a:solidFill>
-              </a:rPr>
-              <a:t>Customer + Institution Views</a:t>
-            </a:r>
-            <a:endParaRPr lang="en-US" sz="900" dirty="0"/>
-          </a:p>
-        </p:txBody>
-      </p:sp>
-      <p:sp>
-        <p:nvSpPr>
-          <p:cNvPr id="11" name="Shape 9"/>
-          <p:cNvSpPr/>
-          <p:nvPr/>
-        </p:nvSpPr>
-        <p:spPr>
-          <a:xfrm>
-            <a:off x="1938528" y="2651760"/>
-            <a:ext cx="146304" cy="0"/>
-          </a:xfrm>
-          <a:prstGeom prst="line">
-            <a:avLst/>
-          </a:prstGeom>
-          <a:noFill/>
-          <a:ln w="19050">
-            <a:solidFill>
-              <a:srgbClr val="0891B2"/>
-            </a:solidFill>
-            <a:prstDash val="sysDash"/>
-          </a:ln>
-        </p:spPr>
-      </p:sp>
-      <p:sp>
-        <p:nvSpPr>
-          <p:cNvPr id="12" name="Shape 10"/>
-          <p:cNvSpPr/>
-          <p:nvPr/>
-        </p:nvSpPr>
-        <p:spPr>
-          <a:xfrm>
-            <a:off x="2084832" y="1325880"/>
-            <a:ext cx="1572768" cy="2651760"/>
-          </a:xfrm>
-          <a:prstGeom prst="roundRect">
-            <a:avLst>
-              <a:gd name="adj" fmla="val 5814"/>
-            </a:avLst>
-          </a:prstGeom>
-          <a:solidFill>
-            <a:srgbClr val="162032"/>
-          </a:solidFill>
-          <a:ln/>
-          <a:effectLst>
-            <a:outerShdw blurRad="101600" dist="38100" dir="2700000" algn="bl" rotWithShape="0">
-              <a:srgbClr val="000000">
-                <a:alpha val="18000"/>
-              </a:srgbClr>
-            </a:outerShdw>
-          </a:effectLst>
-        </p:spPr>
-      </p:sp>
-      <p:sp>
-        <p:nvSpPr>
-          <p:cNvPr id="13" name="Shape 11"/>
-          <p:cNvSpPr/>
-          <p:nvPr/>
-        </p:nvSpPr>
-        <p:spPr>
-          <a:xfrm>
-            <a:off x="2084832" y="1325880"/>
-            <a:ext cx="1572768" cy="347472"/>
-          </a:xfrm>
-          <a:prstGeom prst="roundRect">
-            <a:avLst>
-              <a:gd name="adj" fmla="val 26316"/>
-            </a:avLst>
-          </a:prstGeom>
-          <a:solidFill>
-            <a:srgbClr val="2563EB">
-              <a:alpha val="75000"/>
-            </a:srgbClr>
-          </a:solidFill>
-          <a:ln/>
-        </p:spPr>
-      </p:sp>
-      <p:sp>
-        <p:nvSpPr>
-          <p:cNvPr id="14" name="Text 12"/>
-          <p:cNvSpPr/>
-          <p:nvPr/>
-        </p:nvSpPr>
-        <p:spPr>
-          <a:xfrm>
-            <a:off x="2084832" y="1325880"/>
-            <a:ext cx="1572768" cy="347472"/>
-          </a:xfrm>
-          <a:prstGeom prst="rect">
-            <a:avLst/>
-          </a:prstGeom>
-          <a:noFill/>
-          <a:ln/>
-        </p:spPr>
-        <p:txBody>
-          <a:bodyPr wrap="square" lIns="0" tIns="0" rIns="0" bIns="0" rtlCol="0" anchor="ctr"/>
-          <a:lstStyle/>
-          <a:p>
-            <a:pPr marL="0" indent="0" algn="ctr">
-              <a:buNone/>
-            </a:pPr>
-            <a:r>
-              <a:rPr lang="en-US" sz="1000" b="1" dirty="0">
-                <a:solidFill>
-                  <a:srgbClr val="FFFFFF"/>
-                </a:solidFill>
-              </a:rPr>
-              <a:t>Orchestrator</a:t>
-            </a:r>
-            <a:endParaRPr lang="en-US" sz="1000" dirty="0"/>
-          </a:p>
-        </p:txBody>
-      </p:sp>
-      <p:sp>
-        <p:nvSpPr>
-          <p:cNvPr id="15" name="Text 13"/>
-          <p:cNvSpPr/>
-          <p:nvPr/>
-        </p:nvSpPr>
-        <p:spPr>
-          <a:xfrm>
-            <a:off x="2176272" y="1783080"/>
-            <a:ext cx="1389888" cy="384048"/>
-          </a:xfrm>
-          <a:prstGeom prst="rect">
-            <a:avLst/>
-          </a:prstGeom>
-          <a:noFill/>
-          <a:ln/>
-        </p:spPr>
-        <p:txBody>
-          <a:bodyPr wrap="square" lIns="0" tIns="0" rIns="0" bIns="0" rtlCol="0" anchor="ctr"/>
-          <a:lstStyle/>
-          <a:p>
-            <a:pPr marL="0" indent="0" algn="ctr">
-              <a:lnSpc>
-                <a:spcPct val="120000"/>
-              </a:lnSpc>
-              <a:buNone/>
-            </a:pPr>
-            <a:r>
-              <a:rPr lang="en-US" sz="900" dirty="0">
-                <a:solidFill>
-                  <a:srgbClr val="CBD5E1"/>
-                </a:solidFill>
-              </a:rPr>
-              <a:t>Chat Agent</a:t>
-            </a:r>
-            <a:endParaRPr lang="en-US" sz="900" dirty="0"/>
-          </a:p>
-        </p:txBody>
-      </p:sp>
-      <p:sp>
-        <p:nvSpPr>
-          <p:cNvPr id="16" name="Text 14"/>
-          <p:cNvSpPr/>
-          <p:nvPr/>
-        </p:nvSpPr>
-        <p:spPr>
-          <a:xfrm>
-            <a:off x="2176272" y="2258568"/>
-            <a:ext cx="1389888" cy="384048"/>
-          </a:xfrm>
-          <a:prstGeom prst="rect">
-            <a:avLst/>
-          </a:prstGeom>
-          <a:noFill/>
-          <a:ln/>
-        </p:spPr>
-        <p:txBody>
-          <a:bodyPr wrap="square" lIns="0" tIns="0" rIns="0" bIns="0" rtlCol="0" anchor="ctr"/>
-          <a:lstStyle/>
-          <a:p>
-            <a:pPr marL="0" indent="0" algn="ctr">
-              <a:lnSpc>
-                <a:spcPct val="120000"/>
-              </a:lnSpc>
-              <a:buNone/>
-            </a:pPr>
-            <a:r>
-              <a:rPr lang="en-US" sz="900" dirty="0">
-                <a:solidFill>
-                  <a:srgbClr val="CBD5E1"/>
-                </a:solidFill>
-              </a:rPr>
-              <a:t>Document Agent</a:t>
-            </a:r>
-            <a:endParaRPr lang="en-US" sz="900" dirty="0"/>
-          </a:p>
-        </p:txBody>
-      </p:sp>
-      <p:sp>
-        <p:nvSpPr>
-          <p:cNvPr id="17" name="Text 15"/>
-          <p:cNvSpPr/>
-          <p:nvPr/>
-        </p:nvSpPr>
-        <p:spPr>
-          <a:xfrm>
-            <a:off x="2176272" y="2734056"/>
-            <a:ext cx="1389888" cy="384048"/>
-          </a:xfrm>
-          <a:prstGeom prst="rect">
-            <a:avLst/>
-          </a:prstGeom>
-          <a:noFill/>
-          <a:ln/>
-        </p:spPr>
-        <p:txBody>
-          <a:bodyPr wrap="square" lIns="0" tIns="0" rIns="0" bIns="0" rtlCol="0" anchor="ctr"/>
-          <a:lstStyle/>
-          <a:p>
-            <a:pPr marL="0" indent="0" algn="ctr">
-              <a:lnSpc>
-                <a:spcPct val="120000"/>
-              </a:lnSpc>
-              <a:buNone/>
-            </a:pPr>
-            <a:r>
-              <a:rPr lang="en-US" sz="900" dirty="0">
-                <a:solidFill>
-                  <a:srgbClr val="CBD5E1"/>
-                </a:solidFill>
-              </a:rPr>
-              <a:t>Retrieval Agent</a:t>
-            </a:r>
-            <a:endParaRPr lang="en-US" sz="900" dirty="0"/>
-          </a:p>
-        </p:txBody>
-      </p:sp>
-      <p:sp>
-        <p:nvSpPr>
-          <p:cNvPr id="18" name="Shape 16"/>
-          <p:cNvSpPr/>
-          <p:nvPr/>
-        </p:nvSpPr>
-        <p:spPr>
-          <a:xfrm>
-            <a:off x="3657600" y="2651760"/>
-            <a:ext cx="146304" cy="0"/>
-          </a:xfrm>
-          <a:prstGeom prst="line">
-            <a:avLst/>
-          </a:prstGeom>
-          <a:noFill/>
-          <a:ln w="19050">
-            <a:solidFill>
-              <a:srgbClr val="2563EB"/>
-            </a:solidFill>
-            <a:prstDash val="sysDash"/>
-          </a:ln>
-        </p:spPr>
-      </p:sp>
-      <p:sp>
-        <p:nvSpPr>
-          <p:cNvPr id="19" name="Shape 17"/>
-          <p:cNvSpPr/>
-          <p:nvPr/>
-        </p:nvSpPr>
-        <p:spPr>
-          <a:xfrm>
-            <a:off x="3803904" y="1325880"/>
-            <a:ext cx="1572768" cy="2651760"/>
-          </a:xfrm>
-          <a:prstGeom prst="roundRect">
-            <a:avLst>
-              <a:gd name="adj" fmla="val 5814"/>
-            </a:avLst>
-          </a:prstGeom>
-          <a:solidFill>
-            <a:srgbClr val="162032"/>
-          </a:solidFill>
-          <a:ln/>
-          <a:effectLst>
-            <a:outerShdw blurRad="101600" dist="38100" dir="2700000" algn="bl" rotWithShape="0">
-              <a:srgbClr val="000000">
-                <a:alpha val="18000"/>
-              </a:srgbClr>
-            </a:outerShdw>
-          </a:effectLst>
-        </p:spPr>
-      </p:sp>
-      <p:sp>
-        <p:nvSpPr>
-          <p:cNvPr id="20" name="Shape 18"/>
-          <p:cNvSpPr/>
-          <p:nvPr/>
-        </p:nvSpPr>
-        <p:spPr>
-          <a:xfrm>
-            <a:off x="3803904" y="1325880"/>
-            <a:ext cx="1572768" cy="347472"/>
-          </a:xfrm>
-          <a:prstGeom prst="roundRect">
-            <a:avLst>
-              <a:gd name="adj" fmla="val 26316"/>
-            </a:avLst>
-          </a:prstGeom>
-          <a:solidFill>
-            <a:srgbClr val="D97706">
-              <a:alpha val="75000"/>
-            </a:srgbClr>
-          </a:solidFill>
-          <a:ln/>
-        </p:spPr>
-      </p:sp>
-      <p:sp>
-        <p:nvSpPr>
-          <p:cNvPr id="21" name="Text 19"/>
-          <p:cNvSpPr/>
-          <p:nvPr/>
-        </p:nvSpPr>
-        <p:spPr>
-          <a:xfrm>
-            <a:off x="3803904" y="1325880"/>
-            <a:ext cx="1572768" cy="347472"/>
-          </a:xfrm>
-          <a:prstGeom prst="rect">
-            <a:avLst/>
-          </a:prstGeom>
-          <a:noFill/>
-          <a:ln/>
-        </p:spPr>
-        <p:txBody>
-          <a:bodyPr wrap="square" lIns="0" tIns="0" rIns="0" bIns="0" rtlCol="0" anchor="ctr"/>
-          <a:lstStyle/>
-          <a:p>
-            <a:pPr marL="0" indent="0" algn="ctr">
-              <a:buNone/>
-            </a:pPr>
-            <a:r>
-              <a:rPr lang="en-US" sz="1000" b="1" dirty="0">
-                <a:solidFill>
-                  <a:srgbClr val="FFFFFF"/>
-                </a:solidFill>
-              </a:rPr>
-              <a:t>AI / LLM</a:t>
-            </a:r>
-            <a:endParaRPr lang="en-US" sz="1000" dirty="0"/>
-          </a:p>
-        </p:txBody>
-      </p:sp>
-      <p:sp>
-        <p:nvSpPr>
-          <p:cNvPr id="22" name="Text 20"/>
-          <p:cNvSpPr/>
-          <p:nvPr/>
-        </p:nvSpPr>
-        <p:spPr>
-          <a:xfrm>
-            <a:off x="3895344" y="1783080"/>
-            <a:ext cx="1389888" cy="384048"/>
-          </a:xfrm>
-          <a:prstGeom prst="rect">
-            <a:avLst/>
-          </a:prstGeom>
-          <a:noFill/>
-          <a:ln/>
-        </p:spPr>
-        <p:txBody>
-          <a:bodyPr wrap="square" lIns="0" tIns="0" rIns="0" bIns="0" rtlCol="0" anchor="ctr"/>
-          <a:lstStyle/>
-          <a:p>
-            <a:pPr marL="0" indent="0" algn="ctr">
-              <a:lnSpc>
-                <a:spcPct val="120000"/>
-              </a:lnSpc>
-              <a:buNone/>
-            </a:pPr>
-            <a:r>
-              <a:rPr lang="en-US" sz="900" dirty="0">
-                <a:solidFill>
-                  <a:srgbClr val="CBD5E1"/>
-                </a:solidFill>
-              </a:rPr>
-              <a:t>OpenAI → Groq → Gemini</a:t>
-            </a:r>
-            <a:endParaRPr lang="en-US" sz="900" dirty="0"/>
-          </a:p>
-        </p:txBody>
-      </p:sp>
-      <p:sp>
-        <p:nvSpPr>
-          <p:cNvPr id="23" name="Text 21"/>
-          <p:cNvSpPr/>
-          <p:nvPr/>
-        </p:nvSpPr>
-        <p:spPr>
-          <a:xfrm>
-            <a:off x="3895344" y="2258568"/>
-            <a:ext cx="1389888" cy="384048"/>
-          </a:xfrm>
-          <a:prstGeom prst="rect">
-            <a:avLst/>
-          </a:prstGeom>
-          <a:noFill/>
-          <a:ln/>
-        </p:spPr>
-        <p:txBody>
-          <a:bodyPr wrap="square" lIns="0" tIns="0" rIns="0" bIns="0" rtlCol="0" anchor="ctr"/>
-          <a:lstStyle/>
-          <a:p>
-            <a:pPr marL="0" indent="0" algn="ctr">
-              <a:lnSpc>
-                <a:spcPct val="120000"/>
-              </a:lnSpc>
-              <a:buNone/>
-            </a:pPr>
-            <a:r>
-              <a:rPr lang="en-US" sz="900" dirty="0">
-                <a:solidFill>
-                  <a:srgbClr val="CBD5E1"/>
-                </a:solidFill>
-              </a:rPr>
-              <a:t>3-tier fallback chain</a:t>
-            </a:r>
-            <a:endParaRPr lang="en-US" sz="900" dirty="0"/>
-          </a:p>
-        </p:txBody>
-      </p:sp>
-      <p:sp>
-        <p:nvSpPr>
-          <p:cNvPr id="24" name="Text 22"/>
-          <p:cNvSpPr/>
-          <p:nvPr/>
-        </p:nvSpPr>
-        <p:spPr>
-          <a:xfrm>
-            <a:off x="3895344" y="2734056"/>
-            <a:ext cx="1389888" cy="384048"/>
-          </a:xfrm>
-          <a:prstGeom prst="rect">
-            <a:avLst/>
-          </a:prstGeom>
-          <a:noFill/>
-          <a:ln/>
-        </p:spPr>
-        <p:txBody>
-          <a:bodyPr wrap="square" lIns="0" tIns="0" rIns="0" bIns="0" rtlCol="0" anchor="ctr"/>
-          <a:lstStyle/>
-          <a:p>
-            <a:pPr marL="0" indent="0" algn="ctr">
-              <a:lnSpc>
-                <a:spcPct val="120000"/>
-              </a:lnSpc>
-              <a:buNone/>
-            </a:pPr>
-            <a:r>
-              <a:rPr lang="en-US" sz="900" dirty="0">
-                <a:solidFill>
-                  <a:srgbClr val="CBD5E1"/>
-                </a:solidFill>
-              </a:rPr>
-              <a:t>LangSmith tracing</a:t>
-            </a:r>
-            <a:endParaRPr lang="en-US" sz="900" dirty="0"/>
-          </a:p>
-        </p:txBody>
-      </p:sp>
-      <p:sp>
-        <p:nvSpPr>
-          <p:cNvPr id="25" name="Shape 23"/>
-          <p:cNvSpPr/>
-          <p:nvPr/>
-        </p:nvSpPr>
-        <p:spPr>
-          <a:xfrm>
-            <a:off x="5376672" y="2651760"/>
-            <a:ext cx="146304" cy="0"/>
-          </a:xfrm>
-          <a:prstGeom prst="line">
-            <a:avLst/>
-          </a:prstGeom>
-          <a:noFill/>
-          <a:ln w="19050">
-            <a:solidFill>
-              <a:srgbClr val="D97706"/>
-            </a:solidFill>
-            <a:prstDash val="sysDash"/>
-          </a:ln>
-        </p:spPr>
-      </p:sp>
-      <p:sp>
-        <p:nvSpPr>
-          <p:cNvPr id="26" name="Shape 24"/>
-          <p:cNvSpPr/>
-          <p:nvPr/>
-        </p:nvSpPr>
-        <p:spPr>
-          <a:xfrm>
-            <a:off x="5522976" y="1325880"/>
-            <a:ext cx="1572768" cy="2651760"/>
-          </a:xfrm>
-          <a:prstGeom prst="roundRect">
-            <a:avLst>
-              <a:gd name="adj" fmla="val 5814"/>
-            </a:avLst>
-          </a:prstGeom>
-          <a:solidFill>
-            <a:srgbClr val="162032"/>
-          </a:solidFill>
-          <a:ln/>
-          <a:effectLst>
-            <a:outerShdw blurRad="101600" dist="38100" dir="2700000" algn="bl" rotWithShape="0">
-              <a:srgbClr val="000000">
-                <a:alpha val="18000"/>
-              </a:srgbClr>
-            </a:outerShdw>
-          </a:effectLst>
-        </p:spPr>
-      </p:sp>
-      <p:sp>
-        <p:nvSpPr>
-          <p:cNvPr id="27" name="Shape 25"/>
-          <p:cNvSpPr/>
-          <p:nvPr/>
-        </p:nvSpPr>
-        <p:spPr>
-          <a:xfrm>
-            <a:off x="5522976" y="1325880"/>
-            <a:ext cx="1572768" cy="347472"/>
-          </a:xfrm>
-          <a:prstGeom prst="roundRect">
-            <a:avLst>
-              <a:gd name="adj" fmla="val 26316"/>
-            </a:avLst>
-          </a:prstGeom>
-          <a:solidFill>
-            <a:srgbClr val="059669">
-              <a:alpha val="75000"/>
-            </a:srgbClr>
-          </a:solidFill>
-          <a:ln/>
-        </p:spPr>
-      </p:sp>
-      <p:sp>
-        <p:nvSpPr>
-          <p:cNvPr id="28" name="Text 26"/>
-          <p:cNvSpPr/>
-          <p:nvPr/>
-        </p:nvSpPr>
-        <p:spPr>
-          <a:xfrm>
-            <a:off x="5522976" y="1325880"/>
-            <a:ext cx="1572768" cy="347472"/>
-          </a:xfrm>
-          <a:prstGeom prst="rect">
-            <a:avLst/>
-          </a:prstGeom>
-          <a:noFill/>
-          <a:ln/>
-        </p:spPr>
-        <p:txBody>
-          <a:bodyPr wrap="square" lIns="0" tIns="0" rIns="0" bIns="0" rtlCol="0" anchor="ctr"/>
-          <a:lstStyle/>
-          <a:p>
-            <a:pPr marL="0" indent="0" algn="ctr">
-              <a:buNone/>
-            </a:pPr>
-            <a:r>
-              <a:rPr lang="en-US" sz="1000" b="1" dirty="0">
-                <a:solidFill>
-                  <a:srgbClr val="FFFFFF"/>
-                </a:solidFill>
-              </a:rPr>
-              <a:t>Data Layer</a:t>
-            </a:r>
-            <a:endParaRPr lang="en-US" sz="1000" dirty="0"/>
-          </a:p>
-        </p:txBody>
-      </p:sp>
-      <p:sp>
-        <p:nvSpPr>
-          <p:cNvPr id="29" name="Text 27"/>
-          <p:cNvSpPr/>
-          <p:nvPr/>
-        </p:nvSpPr>
-        <p:spPr>
-          <a:xfrm>
-            <a:off x="5614416" y="1783080"/>
-            <a:ext cx="1389888" cy="384048"/>
-          </a:xfrm>
-          <a:prstGeom prst="rect">
-            <a:avLst/>
-          </a:prstGeom>
-          <a:noFill/>
-          <a:ln/>
-        </p:spPr>
-        <p:txBody>
-          <a:bodyPr wrap="square" lIns="0" tIns="0" rIns="0" bIns="0" rtlCol="0" anchor="ctr"/>
-          <a:lstStyle/>
-          <a:p>
-            <a:pPr marL="0" indent="0" algn="ctr">
-              <a:lnSpc>
-                <a:spcPct val="120000"/>
-              </a:lnSpc>
-              <a:buNone/>
-            </a:pPr>
-            <a:r>
-              <a:rPr lang="en-US" sz="900" dirty="0">
-                <a:solidFill>
-                  <a:srgbClr val="CBD5E1"/>
-                </a:solidFill>
-              </a:rPr>
-              <a:t>Pinecone Vector DB</a:t>
-            </a:r>
-            <a:endParaRPr lang="en-US" sz="900" dirty="0"/>
-          </a:p>
-        </p:txBody>
-      </p:sp>
-      <p:sp>
-        <p:nvSpPr>
-          <p:cNvPr id="30" name="Text 28"/>
-          <p:cNvSpPr/>
-          <p:nvPr/>
-        </p:nvSpPr>
-        <p:spPr>
-          <a:xfrm>
-            <a:off x="5614416" y="2258568"/>
-            <a:ext cx="1389888" cy="384048"/>
-          </a:xfrm>
-          <a:prstGeom prst="rect">
-            <a:avLst/>
-          </a:prstGeom>
-          <a:noFill/>
-          <a:ln/>
-        </p:spPr>
-        <p:txBody>
-          <a:bodyPr wrap="square" lIns="0" tIns="0" rIns="0" bIns="0" rtlCol="0" anchor="ctr"/>
-          <a:lstStyle/>
-          <a:p>
-            <a:pPr marL="0" indent="0" algn="ctr">
-              <a:lnSpc>
-                <a:spcPct val="120000"/>
-              </a:lnSpc>
-              <a:buNone/>
-            </a:pPr>
-            <a:r>
-              <a:rPr lang="en-US" sz="900" dirty="0">
-                <a:solidFill>
-                  <a:srgbClr val="CBD5E1"/>
-                </a:solidFill>
-              </a:rPr>
-              <a:t>BM25 Hybrid Search</a:t>
-            </a:r>
-            <a:endParaRPr lang="en-US" sz="900" dirty="0"/>
-          </a:p>
-        </p:txBody>
-      </p:sp>
-      <p:sp>
-        <p:nvSpPr>
-          <p:cNvPr id="31" name="Text 29"/>
-          <p:cNvSpPr/>
-          <p:nvPr/>
-        </p:nvSpPr>
-        <p:spPr>
-          <a:xfrm>
-            <a:off x="5614416" y="2734056"/>
-            <a:ext cx="1389888" cy="384048"/>
-          </a:xfrm>
-          <a:prstGeom prst="rect">
-            <a:avLst/>
-          </a:prstGeom>
-          <a:noFill/>
-          <a:ln/>
-        </p:spPr>
-        <p:txBody>
-          <a:bodyPr wrap="square" lIns="0" tIns="0" rIns="0" bIns="0" rtlCol="0" anchor="ctr"/>
-          <a:lstStyle/>
-          <a:p>
-            <a:pPr marL="0" indent="0" algn="ctr">
-              <a:lnSpc>
-                <a:spcPct val="120000"/>
-              </a:lnSpc>
-              <a:buNone/>
-            </a:pPr>
-            <a:r>
-              <a:rPr lang="en-US" sz="900" dirty="0">
-                <a:solidFill>
-                  <a:srgbClr val="CBD5E1"/>
-                </a:solidFill>
-              </a:rPr>
-              <a:t>SQLite User Auth</a:t>
-            </a:r>
-            <a:endParaRPr lang="en-US" sz="900" dirty="0"/>
-          </a:p>
-        </p:txBody>
-      </p:sp>
-      <p:sp>
-        <p:nvSpPr>
-          <p:cNvPr id="32" name="Shape 30"/>
-          <p:cNvSpPr/>
-          <p:nvPr/>
-        </p:nvSpPr>
-        <p:spPr>
-          <a:xfrm>
-            <a:off x="7095744" y="2651760"/>
-            <a:ext cx="146304" cy="0"/>
-          </a:xfrm>
-          <a:prstGeom prst="line">
-            <a:avLst/>
-          </a:prstGeom>
-          <a:noFill/>
-          <a:ln w="19050">
-            <a:solidFill>
-              <a:srgbClr val="059669"/>
-            </a:solidFill>
-            <a:prstDash val="sysDash"/>
-          </a:ln>
-        </p:spPr>
-      </p:sp>
-      <p:sp>
-        <p:nvSpPr>
-          <p:cNvPr id="33" name="Shape 31"/>
-          <p:cNvSpPr/>
-          <p:nvPr/>
-        </p:nvSpPr>
-        <p:spPr>
-          <a:xfrm>
-            <a:off x="7242048" y="1325880"/>
-            <a:ext cx="1572768" cy="2651760"/>
-          </a:xfrm>
-          <a:prstGeom prst="roundRect">
-            <a:avLst>
-              <a:gd name="adj" fmla="val 5814"/>
-            </a:avLst>
-          </a:prstGeom>
-          <a:solidFill>
-            <a:srgbClr val="162032"/>
-          </a:solidFill>
-          <a:ln/>
-          <a:effectLst>
-            <a:outerShdw blurRad="101600" dist="38100" dir="2700000" algn="bl" rotWithShape="0">
-              <a:srgbClr val="000000">
-                <a:alpha val="18000"/>
-              </a:srgbClr>
-            </a:outerShdw>
-          </a:effectLst>
-        </p:spPr>
-      </p:sp>
-      <p:sp>
-        <p:nvSpPr>
-          <p:cNvPr id="34" name="Shape 32"/>
-          <p:cNvSpPr/>
-          <p:nvPr/>
-        </p:nvSpPr>
-        <p:spPr>
-          <a:xfrm>
-            <a:off x="7242048" y="1325880"/>
-            <a:ext cx="1572768" cy="347472"/>
-          </a:xfrm>
-          <a:prstGeom prst="roundRect">
-            <a:avLst>
-              <a:gd name="adj" fmla="val 26316"/>
-            </a:avLst>
-          </a:prstGeom>
-          <a:solidFill>
-            <a:srgbClr val="DC2626">
-              <a:alpha val="75000"/>
-            </a:srgbClr>
-          </a:solidFill>
-          <a:ln/>
-        </p:spPr>
-      </p:sp>
-      <p:sp>
-        <p:nvSpPr>
-          <p:cNvPr id="35" name="Text 33"/>
-          <p:cNvSpPr/>
-          <p:nvPr/>
-        </p:nvSpPr>
-        <p:spPr>
-          <a:xfrm>
-            <a:off x="7242048" y="1325880"/>
-            <a:ext cx="1572768" cy="347472"/>
-          </a:xfrm>
-          <a:prstGeom prst="rect">
-            <a:avLst/>
-          </a:prstGeom>
-          <a:noFill/>
-          <a:ln/>
-        </p:spPr>
-        <p:txBody>
-          <a:bodyPr wrap="square" lIns="0" tIns="0" rIns="0" bIns="0" rtlCol="0" anchor="ctr"/>
-          <a:lstStyle/>
-          <a:p>
-            <a:pPr marL="0" indent="0" algn="ctr">
-              <a:buNone/>
-            </a:pPr>
-            <a:r>
-              <a:rPr lang="en-US" sz="1000" b="1" dirty="0">
-                <a:solidFill>
-                  <a:srgbClr val="FFFFFF"/>
-                </a:solidFill>
-              </a:rPr>
-              <a:t>Cloud</a:t>
-            </a:r>
-            <a:endParaRPr lang="en-US" sz="1000" dirty="0"/>
-          </a:p>
-        </p:txBody>
-      </p:sp>
-      <p:sp>
-        <p:nvSpPr>
-          <p:cNvPr id="36" name="Text 34"/>
-          <p:cNvSpPr/>
-          <p:nvPr/>
-        </p:nvSpPr>
-        <p:spPr>
-          <a:xfrm>
-            <a:off x="7333488" y="1783080"/>
-            <a:ext cx="1389888" cy="384048"/>
-          </a:xfrm>
-          <a:prstGeom prst="rect">
-            <a:avLst/>
-          </a:prstGeom>
-          <a:noFill/>
-          <a:ln/>
-        </p:spPr>
-        <p:txBody>
-          <a:bodyPr wrap="square" lIns="0" tIns="0" rIns="0" bIns="0" rtlCol="0" anchor="ctr"/>
-          <a:lstStyle/>
-          <a:p>
-            <a:pPr marL="0" indent="0" algn="ctr">
-              <a:lnSpc>
-                <a:spcPct val="120000"/>
-              </a:lnSpc>
-              <a:buNone/>
-            </a:pPr>
-            <a:r>
-              <a:rPr lang="en-US" sz="900" dirty="0">
-                <a:solidFill>
-                  <a:srgbClr val="CBD5E1"/>
-                </a:solidFill>
-              </a:rPr>
-              <a:t>Azure App Service</a:t>
-            </a:r>
-            <a:endParaRPr lang="en-US" sz="900" dirty="0"/>
-          </a:p>
-        </p:txBody>
-      </p:sp>
-      <p:sp>
-        <p:nvSpPr>
-          <p:cNvPr id="38" name="Text 36"/>
-          <p:cNvSpPr/>
-          <p:nvPr/>
-        </p:nvSpPr>
-        <p:spPr>
-          <a:xfrm>
-            <a:off x="7296912" y="2276856"/>
-            <a:ext cx="1389888" cy="384048"/>
-          </a:xfrm>
-          <a:prstGeom prst="rect">
-            <a:avLst/>
-          </a:prstGeom>
-          <a:noFill/>
-          <a:ln/>
-        </p:spPr>
-        <p:txBody>
-          <a:bodyPr wrap="square" lIns="0" tIns="0" rIns="0" bIns="0" rtlCol="0" anchor="ctr"/>
-          <a:lstStyle/>
-          <a:p>
-            <a:pPr marL="0" indent="0" algn="ctr">
-              <a:lnSpc>
-                <a:spcPct val="120000"/>
-              </a:lnSpc>
-              <a:buNone/>
-            </a:pPr>
-            <a:r>
-              <a:rPr lang="en-US" sz="900" dirty="0">
-                <a:solidFill>
-                  <a:srgbClr val="CBD5E1"/>
-                </a:solidFill>
-              </a:rPr>
-              <a:t>GitHub Actions CI/CD</a:t>
-            </a:r>
-            <a:endParaRPr lang="en-US" sz="900" dirty="0"/>
-          </a:p>
-        </p:txBody>
-      </p:sp>
-      <p:sp>
-        <p:nvSpPr>
-          <p:cNvPr id="39" name="Text 37"/>
-          <p:cNvSpPr/>
-          <p:nvPr/>
-        </p:nvSpPr>
-        <p:spPr>
-          <a:xfrm>
-            <a:off x="365760" y="4160520"/>
-            <a:ext cx="8412480" cy="320040"/>
-          </a:xfrm>
-          <a:prstGeom prst="rect">
-            <a:avLst/>
-          </a:prstGeom>
-          <a:noFill/>
-          <a:ln/>
-        </p:spPr>
-        <p:txBody>
-          <a:bodyPr wrap="square" lIns="0" tIns="0" rIns="0" bIns="0" rtlCol="0" anchor="ctr"/>
-          <a:lstStyle/>
-          <a:p>
-            <a:pPr marL="0" indent="0" algn="ctr">
-              <a:buNone/>
-            </a:pPr>
-            <a:r>
-              <a:rPr lang="en-US" sz="950" i="1" dirty="0">
-                <a:solidFill>
-                  <a:srgbClr val="94A3B8"/>
-                </a:solidFill>
-              </a:rPr>
-              <a:t>← User uploads PDF → Chunks → Vectors → LLM → Risk Score + Recommendations →</a:t>
-            </a:r>
-            <a:endParaRPr lang="en-US" sz="950" dirty="0"/>
-          </a:p>
-        </p:txBody>
-      </p:sp>
-    </p:spTree>
-  </p:cSld>
-  <p:clrMapOvr>
-    <a:masterClrMapping/>
-  </p:clrMapOvr>
-</p:sld>
-</file>
-
-<file path=ppt/slides/slide12.xml><?xml version="1.0" encoding="utf-8"?>
-<p:sld xmlns:a="http://schemas.openxmlformats.org/drawingml/2006/main" xmlns:r="http://schemas.openxmlformats.org/officeDocument/2006/relationships" xmlns:p="http://schemas.openxmlformats.org/presentationml/2006/main">
   <p:cSld name="Features and Views">
     <p:bg>
       <p:bgPr>
@@ -6682,7 +4147,7 @@
 </p:sld>
 </file>
 
-<file path=ppt/slides/slide13.xml><?xml version="1.0" encoding="utf-8"?>
+<file path=ppt/slides/slide11.xml><?xml version="1.0" encoding="utf-8"?>
 <p:sld xmlns:a="http://schemas.openxmlformats.org/drawingml/2006/main" xmlns:r="http://schemas.openxmlformats.org/officeDocument/2006/relationships" xmlns:p="http://schemas.openxmlformats.org/presentationml/2006/main">
   <p:cSld>
     <p:bg>
@@ -7460,7 +4925,7 @@
 </p:sld>
 </file>
 
-<file path=ppt/slides/slide14.xml><?xml version="1.0" encoding="utf-8"?>
+<file path=ppt/slides/slide12.xml><?xml version="1.0" encoding="utf-8"?>
 <p:sld xmlns:a="http://schemas.openxmlformats.org/drawingml/2006/main" xmlns:r="http://schemas.openxmlformats.org/officeDocument/2006/relationships" xmlns:p="http://schemas.openxmlformats.org/presentationml/2006/main">
   <p:cSld name="Core Feature Showcase">
     <p:bg>
@@ -8530,7 +5995,7 @@
 </p:sld>
 </file>
 
-<file path=ppt/slides/slide15.xml><?xml version="1.0" encoding="utf-8"?>
+<file path=ppt/slides/slide13.xml><?xml version="1.0" encoding="utf-8"?>
 <p:sld xmlns:a="http://schemas.openxmlformats.org/drawingml/2006/main" xmlns:r="http://schemas.openxmlformats.org/officeDocument/2006/relationships" xmlns:p="http://schemas.openxmlformats.org/presentationml/2006/main">
   <p:cSld name="Slide 8">
     <p:bg>
@@ -10263,7 +7728,7 @@
 </p:sld>
 </file>
 
-<file path=ppt/slides/slide16.xml><?xml version="1.0" encoding="utf-8"?>
+<file path=ppt/slides/slide14.xml><?xml version="1.0" encoding="utf-8"?>
 <p:sld xmlns:a="http://schemas.openxmlformats.org/drawingml/2006/main" xmlns:r="http://schemas.openxmlformats.org/officeDocument/2006/relationships" xmlns:p="http://schemas.openxmlformats.org/presentationml/2006/main">
   <p:cSld name="AI Quality and Testing">
     <p:bg>
@@ -11521,7 +8986,7 @@
 </p:sld>
 </file>
 
-<file path=ppt/slides/slide17.xml><?xml version="1.0" encoding="utf-8"?>
+<file path=ppt/slides/slide15.xml><?xml version="1.0" encoding="utf-8"?>
 <p:sld xmlns:a="http://schemas.openxmlformats.org/drawingml/2006/main" xmlns:r="http://schemas.openxmlformats.org/officeDocument/2006/relationships" xmlns:p="http://schemas.openxmlformats.org/presentationml/2006/main">
   <p:cSld name="DevOps">
     <p:bg>
@@ -12753,7 +10218,7 @@
 </p:sld>
 </file>
 
-<file path=ppt/slides/slide18.xml><?xml version="1.0" encoding="utf-8"?>
+<file path=ppt/slides/slide16.xml><?xml version="1.0" encoding="utf-8"?>
 <p:sld xmlns:a="http://schemas.openxmlformats.org/drawingml/2006/main" xmlns:r="http://schemas.openxmlformats.org/officeDocument/2006/relationships" xmlns:p="http://schemas.openxmlformats.org/presentationml/2006/main">
   <p:cSld name="Challenges and Lessons">
     <p:bg>
@@ -13910,7 +11375,7 @@
 </p:sld>
 </file>
 
-<file path=ppt/slides/slide19.xml><?xml version="1.0" encoding="utf-8"?>
+<file path=ppt/slides/slide17.xml><?xml version="1.0" encoding="utf-8"?>
 <p:sld xmlns:a="http://schemas.openxmlformats.org/drawingml/2006/main" xmlns:r="http://schemas.openxmlformats.org/officeDocument/2006/relationships" xmlns:p="http://schemas.openxmlformats.org/presentationml/2006/main">
   <p:cSld>
     <p:bg>
@@ -15820,9 +13285,17 @@
 </p:sld>
 </file>
 
-<file path=ppt/slides/slide2.xml><?xml version="1.0" encoding="utf-8"?>
+<file path=ppt/slides/slide18.xml><?xml version="1.0" encoding="utf-8"?>
 <p:sld xmlns:a="http://schemas.openxmlformats.org/drawingml/2006/main" xmlns:r="http://schemas.openxmlformats.org/officeDocument/2006/relationships" xmlns:p="http://schemas.openxmlformats.org/presentationml/2006/main">
   <p:cSld>
+    <p:bg>
+      <p:bgPr>
+        <a:solidFill>
+          <a:srgbClr val="0F1B2D"/>
+        </a:solidFill>
+        <a:effectLst/>
+      </p:bgPr>
+    </p:bg>
     <p:spTree>
       <p:nvGrpSpPr>
         <p:cNvPr id="1" name=""/>
@@ -15839,34 +13312,58 @@
       </p:grpSpPr>
       <p:sp>
         <p:nvSpPr>
-          <p:cNvPr id="3" name="Shape 0"/>
-          <p:cNvSpPr/>
-          <p:nvPr/>
-        </p:nvSpPr>
-        <p:spPr>
-          <a:xfrm>
-            <a:off x="0" y="0"/>
-            <a:ext cx="5918454" cy="5143500"/>
-          </a:xfrm>
-          <a:prstGeom prst="rect">
+          <p:cNvPr id="2" name="Shape 0"/>
+          <p:cNvSpPr/>
+          <p:nvPr/>
+        </p:nvSpPr>
+        <p:spPr>
+          <a:xfrm>
+            <a:off x="6858000" y="-914400"/>
+            <a:ext cx="3657600" cy="3657600"/>
+          </a:xfrm>
+          <a:prstGeom prst="ellipse">
             <a:avLst/>
           </a:prstGeom>
           <a:solidFill>
-            <a:srgbClr val="12213A"/>
+            <a:srgbClr val="2563EB">
+              <a:alpha val="12000"/>
+            </a:srgbClr>
           </a:solidFill>
           <a:ln/>
         </p:spPr>
       </p:sp>
       <p:sp>
         <p:nvSpPr>
-          <p:cNvPr id="4" name="Shape 1"/>
-          <p:cNvSpPr/>
-          <p:nvPr/>
-        </p:nvSpPr>
-        <p:spPr>
-          <a:xfrm>
-            <a:off x="480060" y="685800"/>
-            <a:ext cx="2468880" cy="246888"/>
+          <p:cNvPr id="3" name="Shape 1"/>
+          <p:cNvSpPr/>
+          <p:nvPr/>
+        </p:nvSpPr>
+        <p:spPr>
+          <a:xfrm>
+            <a:off x="-699967" y="2616086"/>
+            <a:ext cx="3200400" cy="3200400"/>
+          </a:xfrm>
+          <a:prstGeom prst="ellipse">
+            <a:avLst/>
+          </a:prstGeom>
+          <a:solidFill>
+            <a:srgbClr val="0891B2">
+              <a:alpha val="12000"/>
+            </a:srgbClr>
+          </a:solidFill>
+          <a:ln/>
+        </p:spPr>
+      </p:sp>
+      <p:sp>
+        <p:nvSpPr>
+          <p:cNvPr id="4" name="Shape 2"/>
+          <p:cNvSpPr/>
+          <p:nvPr/>
+        </p:nvSpPr>
+        <p:spPr>
+          <a:xfrm>
+            <a:off x="3474720" y="365760"/>
+            <a:ext cx="1280160" cy="256032"/>
           </a:xfrm>
           <a:prstGeom prst="roundRect">
             <a:avLst>
@@ -15874,21 +13371,23 @@
             </a:avLst>
           </a:prstGeom>
           <a:solidFill>
-            <a:srgbClr val="1E2C4A"/>
+            <a:srgbClr val="059669">
+              <a:alpha val="25000"/>
+            </a:srgbClr>
           </a:solidFill>
           <a:ln/>
         </p:spPr>
       </p:sp>
       <p:sp>
         <p:nvSpPr>
-          <p:cNvPr id="5" name="Text 2"/>
-          <p:cNvSpPr/>
-          <p:nvPr/>
-        </p:nvSpPr>
-        <p:spPr>
-          <a:xfrm>
-            <a:off x="480060" y="685800"/>
-            <a:ext cx="2468880" cy="246888"/>
+          <p:cNvPr id="5" name="Text 3"/>
+          <p:cNvSpPr/>
+          <p:nvPr/>
+        </p:nvSpPr>
+        <p:spPr>
+          <a:xfrm>
+            <a:off x="3474720" y="365760"/>
+            <a:ext cx="1280160" cy="256032"/>
           </a:xfrm>
           <a:prstGeom prst="rect">
             <a:avLst/>
@@ -15904,30 +13403,27 @@
               <a:buNone/>
             </a:pPr>
             <a:r>
-              <a:rPr lang="en-US" sz="825" b="1" kern="0" spc="150" dirty="0">
-                <a:solidFill>
-                  <a:srgbClr val="9FB0E8"/>
-                </a:solidFill>
-                <a:latin typeface="Calibri" pitchFamily="34" charset="0"/>
-                <a:ea typeface="Calibri" pitchFamily="34" charset="-122"/>
-                <a:cs typeface="Calibri" pitchFamily="34" charset="-120"/>
-              </a:rPr>
-              <a:t>A CREDIT RISK STORY</a:t>
-            </a:r>
-            <a:endParaRPr lang="en-US" sz="825" dirty="0"/>
-          </a:p>
-        </p:txBody>
-      </p:sp>
-      <p:sp>
-        <p:nvSpPr>
-          <p:cNvPr id="6" name="Text 3"/>
-          <p:cNvSpPr/>
-          <p:nvPr/>
-        </p:nvSpPr>
-        <p:spPr>
-          <a:xfrm>
-            <a:off x="466344" y="1097280"/>
-            <a:ext cx="5143500" cy="617220"/>
+              <a:rPr lang="en-US" sz="900" b="1" kern="0" spc="150" dirty="0">
+                <a:solidFill>
+                  <a:srgbClr val="059669"/>
+                </a:solidFill>
+              </a:rPr>
+              <a:t>OPEN FLOOR</a:t>
+            </a:r>
+            <a:endParaRPr lang="en-US" sz="900" dirty="0"/>
+          </a:p>
+        </p:txBody>
+      </p:sp>
+      <p:sp>
+        <p:nvSpPr>
+          <p:cNvPr id="6" name="Text 4"/>
+          <p:cNvSpPr/>
+          <p:nvPr/>
+        </p:nvSpPr>
+        <p:spPr>
+          <a:xfrm>
+            <a:off x="-586292" y="1424484"/>
+            <a:ext cx="9482866" cy="1919433"/>
           </a:xfrm>
           <a:prstGeom prst="rect">
             <a:avLst/>
@@ -15939,11 +13435,11 @@
           <a:bodyPr wrap="square" lIns="0" tIns="0" rIns="0" bIns="0" rtlCol="0" anchor="ctr"/>
           <a:lstStyle/>
           <a:p>
-            <a:pPr marL="0" indent="0">
-              <a:buNone/>
-            </a:pPr>
-            <a:r>
-              <a:rPr lang="en-US" sz="3150" b="1" dirty="0">
+            <a:pPr marL="0" indent="0" algn="ctr">
+              <a:buNone/>
+            </a:pPr>
+            <a:r>
+              <a:rPr lang="en-US" sz="3600" b="1" dirty="0">
                 <a:solidFill>
                   <a:srgbClr val="FFFFFF"/>
                 </a:solidFill>
@@ -15951,22 +13447,22 @@
                 <a:ea typeface="Cambria" pitchFamily="34" charset="-122"/>
                 <a:cs typeface="Cambria" pitchFamily="34" charset="-120"/>
               </a:rPr>
-              <a:t>What Rohan Needed</a:t>
-            </a:r>
-            <a:endParaRPr lang="en-US" sz="3150" dirty="0"/>
-          </a:p>
-        </p:txBody>
-      </p:sp>
-      <p:sp>
-        <p:nvSpPr>
-          <p:cNvPr id="7" name="Text 4"/>
-          <p:cNvSpPr/>
-          <p:nvPr/>
-        </p:nvSpPr>
-        <p:spPr>
-          <a:xfrm>
-            <a:off x="466344" y="1611630"/>
-            <a:ext cx="5143500" cy="617220"/>
+              <a:t>Questions &amp; Answers</a:t>
+            </a:r>
+            <a:endParaRPr lang="en-US" sz="4800" dirty="0"/>
+          </a:p>
+        </p:txBody>
+      </p:sp>
+      <p:sp>
+        <p:nvSpPr>
+          <p:cNvPr id="20" name="Text 18"/>
+          <p:cNvSpPr/>
+          <p:nvPr/>
+        </p:nvSpPr>
+        <p:spPr>
+          <a:xfrm>
+            <a:off x="457200" y="4378495"/>
+            <a:ext cx="8229600" cy="475874"/>
           </a:xfrm>
           <a:prstGeom prst="rect">
             <a:avLst/>
@@ -15978,257 +13474,35 @@
           <a:bodyPr wrap="square" lIns="0" tIns="0" rIns="0" bIns="0" rtlCol="0" anchor="ctr"/>
           <a:lstStyle/>
           <a:p>
-            <a:pPr marL="0" indent="0">
-              <a:buNone/>
-            </a:pPr>
-            <a:r>
-              <a:rPr lang="en-US" sz="3150" b="1" dirty="0">
-                <a:solidFill>
-                  <a:srgbClr val="FFFFFF"/>
-                </a:solidFill>
-                <a:latin typeface="Cambria" pitchFamily="34" charset="0"/>
-                <a:ea typeface="Cambria" pitchFamily="34" charset="-122"/>
-                <a:cs typeface="Cambria" pitchFamily="34" charset="-120"/>
-              </a:rPr>
-              <a:t>Was an Answer.</a:t>
-            </a:r>
-            <a:endParaRPr lang="en-US" sz="3150" dirty="0"/>
-          </a:p>
-        </p:txBody>
-      </p:sp>
-      <p:sp>
-        <p:nvSpPr>
-          <p:cNvPr id="8" name="Text 5"/>
-          <p:cNvSpPr/>
-          <p:nvPr/>
-        </p:nvSpPr>
-        <p:spPr>
-          <a:xfrm>
-            <a:off x="466344" y="2297430"/>
-            <a:ext cx="4526280" cy="480060"/>
-          </a:xfrm>
-          <a:prstGeom prst="rect">
-            <a:avLst/>
-          </a:prstGeom>
-          <a:noFill/>
-          <a:ln/>
-        </p:spPr>
-        <p:txBody>
-          <a:bodyPr wrap="square" lIns="0" tIns="0" rIns="0" bIns="0" rtlCol="0" anchor="ctr"/>
-          <a:lstStyle/>
-          <a:p>
-            <a:pPr>
-              <a:lnSpc>
-                <a:spcPct val="130000"/>
-              </a:lnSpc>
-            </a:pPr>
-            <a:r>
-              <a:rPr lang="en-IN" sz="1200" dirty="0">
-                <a:solidFill>
-                  <a:schemeClr val="bg2"/>
-                </a:solidFill>
-              </a:rPr>
-              <a:t>Rohan applied for a business loan and heard nothing for four days. Here's what happened next.</a:t>
-            </a:r>
-            <a:endParaRPr lang="en-US" sz="1125" dirty="0"/>
-          </a:p>
-        </p:txBody>
-      </p:sp>
-      <p:sp>
-        <p:nvSpPr>
-          <p:cNvPr id="9" name="Shape 6"/>
-          <p:cNvSpPr/>
-          <p:nvPr/>
-        </p:nvSpPr>
-        <p:spPr>
-          <a:xfrm>
-            <a:off x="480060" y="2983230"/>
-            <a:ext cx="1783080" cy="0"/>
-          </a:xfrm>
-          <a:prstGeom prst="line">
-            <a:avLst/>
-          </a:prstGeom>
-          <a:noFill/>
-          <a:ln w="9525">
-            <a:solidFill>
-              <a:srgbClr val="2E3D5E"/>
-            </a:solidFill>
-            <a:prstDash val="solid"/>
-          </a:ln>
-        </p:spPr>
-      </p:sp>
-      <p:sp>
-        <p:nvSpPr>
-          <p:cNvPr id="10" name="Text 7"/>
-          <p:cNvSpPr/>
-          <p:nvPr/>
-        </p:nvSpPr>
-        <p:spPr>
-          <a:xfrm>
-            <a:off x="466344" y="3154680"/>
-            <a:ext cx="4594860" cy="960120"/>
-          </a:xfrm>
-          <a:prstGeom prst="rect">
-            <a:avLst/>
-          </a:prstGeom>
-          <a:noFill/>
-          <a:ln/>
-        </p:spPr>
-        <p:txBody>
-          <a:bodyPr wrap="square" lIns="0" tIns="0" rIns="0" bIns="0" rtlCol="0" anchor="ctr"/>
-          <a:lstStyle/>
-          <a:p>
-            <a:pPr>
-              <a:lnSpc>
-                <a:spcPct val="135000"/>
-              </a:lnSpc>
-            </a:pPr>
-            <a:r>
-              <a:rPr lang="en-US" sz="825" b="1" kern="0" spc="150" dirty="0">
-                <a:solidFill>
-                  <a:srgbClr val="7C8CE8"/>
-                </a:solidFill>
-                <a:latin typeface="Calibri" pitchFamily="34" charset="0"/>
-                <a:ea typeface="Calibri" pitchFamily="34" charset="-122"/>
-                <a:cs typeface="Calibri" pitchFamily="34" charset="-120"/>
-              </a:rPr>
-              <a:t>IN ONE SENTENCE
-</a:t>
-            </a:r>
-            <a:r>
-              <a:rPr lang="en-IN" sz="1100" dirty="0">
-                <a:solidFill>
-                  <a:schemeClr val="bg2"/>
-                </a:solidFill>
-              </a:rPr>
-              <a:t>A loan decision that once took days — and still felt unfair — now takes minutes and comes with a clear reason.</a:t>
-            </a:r>
-          </a:p>
-          <a:p>
-            <a:pPr marL="0" indent="0">
-              <a:lnSpc>
-                <a:spcPct val="135000"/>
-              </a:lnSpc>
-              <a:buNone/>
-            </a:pPr>
-            <a:endParaRPr lang="en-US" sz="825" dirty="0"/>
-          </a:p>
-        </p:txBody>
-      </p:sp>
-      <p:sp>
-        <p:nvSpPr>
-          <p:cNvPr id="11" name="Text 8"/>
-          <p:cNvSpPr/>
-          <p:nvPr/>
-        </p:nvSpPr>
-        <p:spPr>
-          <a:xfrm>
-            <a:off x="411480" y="4896612"/>
-            <a:ext cx="5486400" cy="192024"/>
-          </a:xfrm>
-          <a:prstGeom prst="rect">
-            <a:avLst/>
-          </a:prstGeom>
-          <a:noFill/>
-          <a:ln/>
-        </p:spPr>
-        <p:txBody>
-          <a:bodyPr wrap="square" rtlCol="0" anchor="ctr"/>
-          <a:lstStyle/>
-          <a:p>
-            <a:pPr marL="0" indent="0" algn="l">
-              <a:buNone/>
-            </a:pPr>
-            <a:r>
-              <a:rPr lang="en-US" sz="712" dirty="0">
-                <a:solidFill>
-                  <a:srgbClr val="AEB0C4"/>
-                </a:solidFill>
-                <a:latin typeface="Calibri" pitchFamily="34" charset="0"/>
-                <a:ea typeface="Calibri" pitchFamily="34" charset="-122"/>
-                <a:cs typeface="Calibri" pitchFamily="34" charset="-120"/>
-              </a:rPr>
-              <a:t>Cover</a:t>
-            </a:r>
-            <a:endParaRPr lang="en-US" sz="712" dirty="0"/>
-          </a:p>
-        </p:txBody>
-      </p:sp>
-      <p:sp>
-        <p:nvSpPr>
-          <p:cNvPr id="12" name="Text 9"/>
-          <p:cNvSpPr/>
-          <p:nvPr/>
-        </p:nvSpPr>
-        <p:spPr>
-          <a:xfrm>
-            <a:off x="6947154" y="4896612"/>
-            <a:ext cx="1783080" cy="192024"/>
-          </a:xfrm>
-          <a:prstGeom prst="rect">
-            <a:avLst/>
-          </a:prstGeom>
-          <a:noFill/>
-          <a:ln/>
-        </p:spPr>
-        <p:txBody>
-          <a:bodyPr wrap="square" rtlCol="0" anchor="ctr"/>
-          <a:lstStyle/>
-          <a:p>
-            <a:pPr marL="0" indent="0" algn="r">
-              <a:buNone/>
-            </a:pPr>
-            <a:r>
-              <a:rPr lang="en-US" sz="712" dirty="0">
-                <a:solidFill>
-                  <a:srgbClr val="AEB0C4"/>
-                </a:solidFill>
-                <a:latin typeface="Calibri" pitchFamily="34" charset="0"/>
-                <a:ea typeface="Calibri" pitchFamily="34" charset="-122"/>
-                <a:cs typeface="Calibri" pitchFamily="34" charset="-120"/>
-              </a:rPr>
-              <a:t>Rohan's Story</a:t>
-            </a:r>
-            <a:endParaRPr lang="en-US" sz="712" dirty="0"/>
-          </a:p>
-        </p:txBody>
-      </p:sp>
-      <p:pic>
-        <p:nvPicPr>
-          <p:cNvPr id="13" name="Picture 12" descr="s2.png"/>
-          <p:cNvPicPr>
-            <a:picLocks noChangeAspect="1"/>
-          </p:cNvPicPr>
-          <p:nvPr/>
-        </p:nvPicPr>
-        <p:blipFill>
-          <a:blip r:embed="rId2"/>
-          <a:stretch>
-            <a:fillRect/>
-          </a:stretch>
-        </p:blipFill>
-        <p:spPr>
-          <a:xfrm>
-            <a:off x="5438394" y="0"/>
-            <a:ext cx="3703320" cy="5143500"/>
-          </a:xfrm>
-          <a:prstGeom prst="rect">
-            <a:avLst/>
-          </a:prstGeom>
-        </p:spPr>
-      </p:pic>
+            <a:pPr marL="0" indent="0" algn="ctr">
+              <a:buNone/>
+            </a:pPr>
+            <a:r>
+              <a:rPr lang="en-US" sz="1100" dirty="0">
+                <a:solidFill>
+                  <a:srgbClr val="94A3B8"/>
+                </a:solidFill>
+              </a:rPr>
+              <a:t>Credit Risk Intelligence Platform  ·  Akash Chaurasiya  ·  Ashu Sharma  </a:t>
+            </a:r>
+            <a:endParaRPr lang="en-US" sz="1100" dirty="0"/>
+          </a:p>
+        </p:txBody>
+      </p:sp>
     </p:spTree>
+    <p:extLst>
+      <p:ext uri="{BB962C8B-B14F-4D97-AF65-F5344CB8AC3E}">
+        <p14:creationId xmlns:p14="http://schemas.microsoft.com/office/powerpoint/2010/main" val="2591629728"/>
+      </p:ext>
+    </p:extLst>
   </p:cSld>
   <p:clrMapOvr>
     <a:masterClrMapping/>
   </p:clrMapOvr>
-  <p:transition spd="slow">
-    <p:fade/>
-  </p:transition>
 </p:sld>
 </file>
 
-<file path=ppt/slides/slide20.xml><?xml version="1.0" encoding="utf-8"?>
+<file path=ppt/slides/slide19.xml><?xml version="1.0" encoding="utf-8"?>
 <p:sld xmlns:a="http://schemas.openxmlformats.org/drawingml/2006/main" xmlns:r="http://schemas.openxmlformats.org/officeDocument/2006/relationships" xmlns:p="http://schemas.openxmlformats.org/presentationml/2006/main">
   <p:cSld name="Slide 16">
     <p:bg>
@@ -16856,6 +14130,356 @@
 </p:sld>
 </file>
 
+<file path=ppt/slides/slide2.xml><?xml version="1.0" encoding="utf-8"?>
+<p:sld xmlns:a="http://schemas.openxmlformats.org/drawingml/2006/main" xmlns:r="http://schemas.openxmlformats.org/officeDocument/2006/relationships" xmlns:p="http://schemas.openxmlformats.org/presentationml/2006/main">
+  <p:cSld>
+    <p:spTree>
+      <p:nvGrpSpPr>
+        <p:cNvPr id="1" name=""/>
+        <p:cNvGrpSpPr/>
+        <p:nvPr/>
+      </p:nvGrpSpPr>
+      <p:grpSpPr>
+        <a:xfrm>
+          <a:off x="0" y="0"/>
+          <a:ext cx="0" cy="0"/>
+          <a:chOff x="0" y="0"/>
+          <a:chExt cx="0" cy="0"/>
+        </a:xfrm>
+      </p:grpSpPr>
+      <p:sp>
+        <p:nvSpPr>
+          <p:cNvPr id="3" name="Shape 0"/>
+          <p:cNvSpPr/>
+          <p:nvPr/>
+        </p:nvSpPr>
+        <p:spPr>
+          <a:xfrm>
+            <a:off x="0" y="0"/>
+            <a:ext cx="5918454" cy="5143500"/>
+          </a:xfrm>
+          <a:prstGeom prst="rect">
+            <a:avLst/>
+          </a:prstGeom>
+          <a:solidFill>
+            <a:srgbClr val="12213A"/>
+          </a:solidFill>
+          <a:ln/>
+        </p:spPr>
+      </p:sp>
+      <p:sp>
+        <p:nvSpPr>
+          <p:cNvPr id="4" name="Shape 1"/>
+          <p:cNvSpPr/>
+          <p:nvPr/>
+        </p:nvSpPr>
+        <p:spPr>
+          <a:xfrm>
+            <a:off x="480060" y="685800"/>
+            <a:ext cx="2468880" cy="246888"/>
+          </a:xfrm>
+          <a:prstGeom prst="roundRect">
+            <a:avLst>
+              <a:gd name="adj" fmla="val 50000"/>
+            </a:avLst>
+          </a:prstGeom>
+          <a:solidFill>
+            <a:srgbClr val="1E2C4A"/>
+          </a:solidFill>
+          <a:ln/>
+        </p:spPr>
+      </p:sp>
+      <p:sp>
+        <p:nvSpPr>
+          <p:cNvPr id="5" name="Text 2"/>
+          <p:cNvSpPr/>
+          <p:nvPr/>
+        </p:nvSpPr>
+        <p:spPr>
+          <a:xfrm>
+            <a:off x="480060" y="685800"/>
+            <a:ext cx="2468880" cy="246888"/>
+          </a:xfrm>
+          <a:prstGeom prst="rect">
+            <a:avLst/>
+          </a:prstGeom>
+          <a:noFill/>
+          <a:ln/>
+        </p:spPr>
+        <p:txBody>
+          <a:bodyPr wrap="square" lIns="0" tIns="0" rIns="0" bIns="0" rtlCol="0" anchor="ctr"/>
+          <a:lstStyle/>
+          <a:p>
+            <a:pPr marL="0" indent="0" algn="ctr">
+              <a:buNone/>
+            </a:pPr>
+            <a:r>
+              <a:rPr lang="en-US" sz="825" b="1" kern="0" spc="150" dirty="0">
+                <a:solidFill>
+                  <a:srgbClr val="9FB0E8"/>
+                </a:solidFill>
+                <a:latin typeface="Calibri" pitchFamily="34" charset="0"/>
+                <a:ea typeface="Calibri" pitchFamily="34" charset="-122"/>
+                <a:cs typeface="Calibri" pitchFamily="34" charset="-120"/>
+              </a:rPr>
+              <a:t>A CREDIT RISK STORY</a:t>
+            </a:r>
+            <a:endParaRPr lang="en-US" sz="825" dirty="0"/>
+          </a:p>
+        </p:txBody>
+      </p:sp>
+      <p:sp>
+        <p:nvSpPr>
+          <p:cNvPr id="6" name="Text 3"/>
+          <p:cNvSpPr/>
+          <p:nvPr/>
+        </p:nvSpPr>
+        <p:spPr>
+          <a:xfrm>
+            <a:off x="466344" y="1097280"/>
+            <a:ext cx="5143500" cy="617220"/>
+          </a:xfrm>
+          <a:prstGeom prst="rect">
+            <a:avLst/>
+          </a:prstGeom>
+          <a:noFill/>
+          <a:ln/>
+        </p:spPr>
+        <p:txBody>
+          <a:bodyPr wrap="square" lIns="0" tIns="0" rIns="0" bIns="0" rtlCol="0" anchor="ctr"/>
+          <a:lstStyle/>
+          <a:p>
+            <a:pPr marL="0" indent="0">
+              <a:buNone/>
+            </a:pPr>
+            <a:r>
+              <a:rPr lang="en-US" sz="3150" b="1" dirty="0">
+                <a:solidFill>
+                  <a:srgbClr val="FFFFFF"/>
+                </a:solidFill>
+                <a:latin typeface="Cambria" pitchFamily="34" charset="0"/>
+                <a:ea typeface="Cambria" pitchFamily="34" charset="-122"/>
+                <a:cs typeface="Cambria" pitchFamily="34" charset="-120"/>
+              </a:rPr>
+              <a:t>What Rohan Needed</a:t>
+            </a:r>
+            <a:endParaRPr lang="en-US" sz="3150" dirty="0"/>
+          </a:p>
+        </p:txBody>
+      </p:sp>
+      <p:sp>
+        <p:nvSpPr>
+          <p:cNvPr id="7" name="Text 4"/>
+          <p:cNvSpPr/>
+          <p:nvPr/>
+        </p:nvSpPr>
+        <p:spPr>
+          <a:xfrm>
+            <a:off x="466344" y="1611630"/>
+            <a:ext cx="5143500" cy="617220"/>
+          </a:xfrm>
+          <a:prstGeom prst="rect">
+            <a:avLst/>
+          </a:prstGeom>
+          <a:noFill/>
+          <a:ln/>
+        </p:spPr>
+        <p:txBody>
+          <a:bodyPr wrap="square" lIns="0" tIns="0" rIns="0" bIns="0" rtlCol="0" anchor="ctr"/>
+          <a:lstStyle/>
+          <a:p>
+            <a:pPr marL="0" indent="0">
+              <a:buNone/>
+            </a:pPr>
+            <a:r>
+              <a:rPr lang="en-US" sz="3150" b="1" dirty="0">
+                <a:solidFill>
+                  <a:srgbClr val="FFFFFF"/>
+                </a:solidFill>
+                <a:latin typeface="Cambria" pitchFamily="34" charset="0"/>
+                <a:ea typeface="Cambria" pitchFamily="34" charset="-122"/>
+                <a:cs typeface="Cambria" pitchFamily="34" charset="-120"/>
+              </a:rPr>
+              <a:t>Was an Answer.</a:t>
+            </a:r>
+            <a:endParaRPr lang="en-US" sz="3150" dirty="0"/>
+          </a:p>
+        </p:txBody>
+      </p:sp>
+      <p:sp>
+        <p:nvSpPr>
+          <p:cNvPr id="8" name="Text 5"/>
+          <p:cNvSpPr/>
+          <p:nvPr/>
+        </p:nvSpPr>
+        <p:spPr>
+          <a:xfrm>
+            <a:off x="466344" y="2297430"/>
+            <a:ext cx="4526280" cy="480060"/>
+          </a:xfrm>
+          <a:prstGeom prst="rect">
+            <a:avLst/>
+          </a:prstGeom>
+          <a:noFill/>
+          <a:ln/>
+        </p:spPr>
+        <p:txBody>
+          <a:bodyPr wrap="square" lIns="0" tIns="0" rIns="0" bIns="0" rtlCol="0" anchor="ctr"/>
+          <a:lstStyle/>
+          <a:p>
+            <a:pPr>
+              <a:lnSpc>
+                <a:spcPct val="130000"/>
+              </a:lnSpc>
+            </a:pPr>
+            <a:r>
+              <a:rPr lang="en-IN" sz="1200" dirty="0">
+                <a:solidFill>
+                  <a:schemeClr val="bg2"/>
+                </a:solidFill>
+              </a:rPr>
+              <a:t>Rohan applied for a business loan and heard nothing for four days. Here's what happened next.</a:t>
+            </a:r>
+            <a:endParaRPr lang="en-US" sz="1125" dirty="0"/>
+          </a:p>
+        </p:txBody>
+      </p:sp>
+      <p:sp>
+        <p:nvSpPr>
+          <p:cNvPr id="9" name="Shape 6"/>
+          <p:cNvSpPr/>
+          <p:nvPr/>
+        </p:nvSpPr>
+        <p:spPr>
+          <a:xfrm>
+            <a:off x="480060" y="2983230"/>
+            <a:ext cx="1783080" cy="0"/>
+          </a:xfrm>
+          <a:prstGeom prst="line">
+            <a:avLst/>
+          </a:prstGeom>
+          <a:noFill/>
+          <a:ln w="9525">
+            <a:solidFill>
+              <a:srgbClr val="2E3D5E"/>
+            </a:solidFill>
+            <a:prstDash val="solid"/>
+          </a:ln>
+        </p:spPr>
+      </p:sp>
+      <p:sp>
+        <p:nvSpPr>
+          <p:cNvPr id="11" name="Text 8"/>
+          <p:cNvSpPr/>
+          <p:nvPr/>
+        </p:nvSpPr>
+        <p:spPr>
+          <a:xfrm>
+            <a:off x="411480" y="4896612"/>
+            <a:ext cx="5486400" cy="192024"/>
+          </a:xfrm>
+          <a:prstGeom prst="rect">
+            <a:avLst/>
+          </a:prstGeom>
+          <a:noFill/>
+          <a:ln/>
+        </p:spPr>
+        <p:txBody>
+          <a:bodyPr wrap="square" rtlCol="0" anchor="ctr"/>
+          <a:lstStyle/>
+          <a:p>
+            <a:pPr marL="0" indent="0" algn="l">
+              <a:buNone/>
+            </a:pPr>
+            <a:r>
+              <a:rPr lang="en-US" sz="712" dirty="0">
+                <a:solidFill>
+                  <a:srgbClr val="AEB0C4"/>
+                </a:solidFill>
+                <a:latin typeface="Calibri" pitchFamily="34" charset="0"/>
+                <a:ea typeface="Calibri" pitchFamily="34" charset="-122"/>
+                <a:cs typeface="Calibri" pitchFamily="34" charset="-120"/>
+              </a:rPr>
+              <a:t>Cover</a:t>
+            </a:r>
+            <a:endParaRPr lang="en-US" sz="712" dirty="0"/>
+          </a:p>
+        </p:txBody>
+      </p:sp>
+      <p:sp>
+        <p:nvSpPr>
+          <p:cNvPr id="12" name="Text 9"/>
+          <p:cNvSpPr/>
+          <p:nvPr/>
+        </p:nvSpPr>
+        <p:spPr>
+          <a:xfrm>
+            <a:off x="6947154" y="4896612"/>
+            <a:ext cx="1783080" cy="192024"/>
+          </a:xfrm>
+          <a:prstGeom prst="rect">
+            <a:avLst/>
+          </a:prstGeom>
+          <a:noFill/>
+          <a:ln/>
+        </p:spPr>
+        <p:txBody>
+          <a:bodyPr wrap="square" rtlCol="0" anchor="ctr"/>
+          <a:lstStyle/>
+          <a:p>
+            <a:pPr marL="0" indent="0" algn="r">
+              <a:buNone/>
+            </a:pPr>
+            <a:r>
+              <a:rPr lang="en-US" sz="712" dirty="0">
+                <a:solidFill>
+                  <a:srgbClr val="AEB0C4"/>
+                </a:solidFill>
+                <a:latin typeface="Calibri" pitchFamily="34" charset="0"/>
+                <a:ea typeface="Calibri" pitchFamily="34" charset="-122"/>
+                <a:cs typeface="Calibri" pitchFamily="34" charset="-120"/>
+              </a:rPr>
+              <a:t>Rohan's Story</a:t>
+            </a:r>
+            <a:endParaRPr lang="en-US" sz="712" dirty="0"/>
+          </a:p>
+        </p:txBody>
+      </p:sp>
+      <p:pic>
+        <p:nvPicPr>
+          <p:cNvPr id="13" name="Picture 12" descr="s2.png"/>
+          <p:cNvPicPr>
+            <a:picLocks noChangeAspect="1"/>
+          </p:cNvPicPr>
+          <p:nvPr/>
+        </p:nvPicPr>
+        <p:blipFill>
+          <a:blip r:embed="rId2"/>
+          <a:stretch>
+            <a:fillRect/>
+          </a:stretch>
+        </p:blipFill>
+        <p:spPr>
+          <a:xfrm>
+            <a:off x="5438394" y="0"/>
+            <a:ext cx="3703320" cy="5143500"/>
+          </a:xfrm>
+          <a:prstGeom prst="rect">
+            <a:avLst/>
+          </a:prstGeom>
+        </p:spPr>
+      </p:pic>
+    </p:spTree>
+  </p:cSld>
+  <p:clrMapOvr>
+    <a:masterClrMapping/>
+  </p:clrMapOvr>
+  <p:transition spd="slow">
+    <p:fade/>
+  </p:transition>
+</p:sld>
+</file>
+
 <file path=ppt/slides/slide3.xml><?xml version="1.0" encoding="utf-8"?>
 <p:sld xmlns:a="http://schemas.openxmlformats.org/drawingml/2006/main" xmlns:r="http://schemas.openxmlformats.org/officeDocument/2006/relationships" xmlns:p="http://schemas.openxmlformats.org/presentationml/2006/main">
   <p:cSld>
@@ -17016,66 +14640,6 @@
       </p:sp>
       <p:sp>
         <p:nvSpPr>
-          <p:cNvPr id="8" name="Shape 6"/>
-          <p:cNvSpPr/>
-          <p:nvPr/>
-        </p:nvSpPr>
-        <p:spPr>
-          <a:xfrm>
-            <a:off x="8140446" y="411480"/>
-            <a:ext cx="109728" cy="109728"/>
-          </a:xfrm>
-          <a:prstGeom prst="ellipse">
-            <a:avLst/>
-          </a:prstGeom>
-          <a:solidFill>
-            <a:srgbClr val="E4E0D6"/>
-          </a:solidFill>
-          <a:ln/>
-        </p:spPr>
-      </p:sp>
-      <p:sp>
-        <p:nvSpPr>
-          <p:cNvPr id="9" name="Shape 7"/>
-          <p:cNvSpPr/>
-          <p:nvPr/>
-        </p:nvSpPr>
-        <p:spPr>
-          <a:xfrm>
-            <a:off x="8346186" y="411480"/>
-            <a:ext cx="109728" cy="109728"/>
-          </a:xfrm>
-          <a:prstGeom prst="ellipse">
-            <a:avLst/>
-          </a:prstGeom>
-          <a:solidFill>
-            <a:srgbClr val="E4E0D6"/>
-          </a:solidFill>
-          <a:ln/>
-        </p:spPr>
-      </p:sp>
-      <p:sp>
-        <p:nvSpPr>
-          <p:cNvPr id="10" name="Shape 8"/>
-          <p:cNvSpPr/>
-          <p:nvPr/>
-        </p:nvSpPr>
-        <p:spPr>
-          <a:xfrm>
-            <a:off x="8551926" y="411480"/>
-            <a:ext cx="109728" cy="109728"/>
-          </a:xfrm>
-          <a:prstGeom prst="ellipse">
-            <a:avLst/>
-          </a:prstGeom>
-          <a:solidFill>
-            <a:srgbClr val="E4E0D6"/>
-          </a:solidFill>
-          <a:ln/>
-        </p:spPr>
-      </p:sp>
-      <p:sp>
-        <p:nvSpPr>
           <p:cNvPr id="11" name="Shape 9"/>
           <p:cNvSpPr/>
           <p:nvPr/>
@@ -17136,7 +14700,7 @@
                 <a:ea typeface="Calibri" pitchFamily="34" charset="-122"/>
                 <a:cs typeface="Calibri" pitchFamily="34" charset="-120"/>
               </a:rPr>
-              <a:t>MEET ROHAN</a:t>
+              <a:t>THE APPLICATION</a:t>
             </a:r>
             <a:endParaRPr lang="en-US" sz="900" dirty="0"/>
           </a:p>
@@ -17177,7 +14741,7 @@
                 <a:ea typeface="Cambria" pitchFamily="34" charset="-122"/>
                 <a:cs typeface="Cambria" pitchFamily="34" charset="-120"/>
               </a:rPr>
-              <a:t>Rohan owns a shop and is applying for a loan to grow his business</a:t>
+              <a:t>He asked for a loan. Then he waited four days.</a:t>
             </a:r>
             <a:endParaRPr lang="en-US" sz="2025" dirty="0"/>
           </a:p>
@@ -17241,7 +14805,7 @@
                 <a:ea typeface="Calibri" pitchFamily="34" charset="-122"/>
                 <a:cs typeface="Calibri" pitchFamily="34" charset="-120"/>
               </a:rPr>
-              <a:t>Rohan runs a small electronics shop. Festival season is six weeks away, and he needs a loan to buy new products to sell before demand goes up. He applies for the loan and waits — hopeful, not worried yet.</a:t>
+              <a:t>Rohan owns a small electronics shop. A big festival is coming, and he needs a loan to buy new products to sell before demand goes up. He applies for the loan, feeling hopeful. But one day turns into four. No one tells him what is happening. He has no idea if he will get the loan or not.</a:t>
             </a:r>
             <a:endParaRPr lang="en-US" sz="1162" dirty="0"/>
           </a:p>
@@ -17327,7 +14891,7 @@
       </p:sp>
       <p:pic>
         <p:nvPicPr>
-          <p:cNvPr id="19" name="Picture 18" descr="s3.png"/>
+          <p:cNvPr id="19" name="Picture 18" descr="s4.png"/>
           <p:cNvPicPr>
             <a:picLocks noChangeAspect="1"/>
           </p:cNvPicPr>
@@ -17394,7 +14958,7 @@
             </a:avLst>
           </a:prstGeom>
           <a:solidFill>
-            <a:srgbClr val="D97757"/>
+            <a:srgbClr val="C1583B"/>
           </a:solidFill>
           <a:ln/>
         </p:spPr>
@@ -17432,7 +14996,7 @@
                 <a:ea typeface="Calibri" pitchFamily="34" charset="-122"/>
                 <a:cs typeface="Calibri" pitchFamily="34" charset="-120"/>
               </a:rPr>
-              <a:t>THE OLD WAY</a:t>
+              <a:t>WHERE IT BROKE</a:t>
             </a:r>
             <a:endParaRPr lang="en-US" sz="862" dirty="0"/>
           </a:p>
@@ -17473,7 +15037,7 @@
             <a:avLst/>
           </a:prstGeom>
           <a:solidFill>
-            <a:srgbClr val="D97757"/>
+            <a:srgbClr val="C1583B"/>
           </a:solidFill>
           <a:ln/>
         </p:spPr>
@@ -17507,66 +15071,6 @@
         <p:spPr>
           <a:xfrm>
             <a:off x="7934706" y="411480"/>
-            <a:ext cx="109728" cy="109728"/>
-          </a:xfrm>
-          <a:prstGeom prst="ellipse">
-            <a:avLst/>
-          </a:prstGeom>
-          <a:solidFill>
-            <a:srgbClr val="E4E0D6"/>
-          </a:solidFill>
-          <a:ln/>
-        </p:spPr>
-      </p:sp>
-      <p:sp>
-        <p:nvSpPr>
-          <p:cNvPr id="8" name="Shape 6"/>
-          <p:cNvSpPr/>
-          <p:nvPr/>
-        </p:nvSpPr>
-        <p:spPr>
-          <a:xfrm>
-            <a:off x="8140446" y="411480"/>
-            <a:ext cx="109728" cy="109728"/>
-          </a:xfrm>
-          <a:prstGeom prst="ellipse">
-            <a:avLst/>
-          </a:prstGeom>
-          <a:solidFill>
-            <a:srgbClr val="E4E0D6"/>
-          </a:solidFill>
-          <a:ln/>
-        </p:spPr>
-      </p:sp>
-      <p:sp>
-        <p:nvSpPr>
-          <p:cNvPr id="9" name="Shape 7"/>
-          <p:cNvSpPr/>
-          <p:nvPr/>
-        </p:nvSpPr>
-        <p:spPr>
-          <a:xfrm>
-            <a:off x="8346186" y="411480"/>
-            <a:ext cx="109728" cy="109728"/>
-          </a:xfrm>
-          <a:prstGeom prst="ellipse">
-            <a:avLst/>
-          </a:prstGeom>
-          <a:solidFill>
-            <a:srgbClr val="E4E0D6"/>
-          </a:solidFill>
-          <a:ln/>
-        </p:spPr>
-      </p:sp>
-      <p:sp>
-        <p:nvSpPr>
-          <p:cNvPr id="10" name="Shape 8"/>
-          <p:cNvSpPr/>
-          <p:nvPr/>
-        </p:nvSpPr>
-        <p:spPr>
-          <a:xfrm>
-            <a:off x="8551926" y="411480"/>
             <a:ext cx="109728" cy="109728"/>
           </a:xfrm>
           <a:prstGeom prst="ellipse">
@@ -17634,13 +15138,13 @@
             <a:r>
               <a:rPr lang="en-US" sz="900" b="1" kern="0" spc="150" dirty="0">
                 <a:solidFill>
-                  <a:srgbClr val="D97757"/>
+                  <a:srgbClr val="C1583B"/>
                 </a:solidFill>
                 <a:latin typeface="Calibri" pitchFamily="34" charset="0"/>
                 <a:ea typeface="Calibri" pitchFamily="34" charset="-122"/>
                 <a:cs typeface="Calibri" pitchFamily="34" charset="-120"/>
               </a:rPr>
-              <a:t>THE WAIT</a:t>
+              <a:t>THE ANSWER HE GOT</a:t>
             </a:r>
             <a:endParaRPr lang="en-US" sz="900" dirty="0"/>
           </a:p>
@@ -17681,7 +15185,7 @@
                 <a:ea typeface="Cambria" pitchFamily="34" charset="-122"/>
                 <a:cs typeface="Cambria" pitchFamily="34" charset="-120"/>
               </a:rPr>
-              <a:t>Someone at the bank is reviewing his loan application</a:t>
+              <a:t>Loan Application Rejected — No Reason Given by the Bank</a:t>
             </a:r>
             <a:endParaRPr lang="en-US" sz="2025" dirty="0"/>
           </a:p>
@@ -17704,7 +15208,7 @@
           <a:noFill/>
           <a:ln w="28575">
             <a:solidFill>
-              <a:srgbClr val="D97757"/>
+              <a:srgbClr val="C1583B"/>
             </a:solidFill>
             <a:prstDash val="solid"/>
           </a:ln>
@@ -17745,7 +15249,7 @@
                 <a:ea typeface="Calibri" pitchFamily="34" charset="-122"/>
                 <a:cs typeface="Calibri" pitchFamily="34" charset="-120"/>
               </a:rPr>
-              <a:t>At the bank, a loan officer is reviewing his file. Day one turns into day four, with no explanation — the officer is still working through a stack of paperwork. Rohan has no idea where he stands.</a:t>
+              <a:t>After four days of waiting, the answer is just one word: rejected. No one tells him why, and no one tells him what to fix. The festival does not wait for anyone. Rohan cannot buy new stock in time, and he loses more than a loan — he loses his best sales season of the year.</a:t>
             </a:r>
             <a:endParaRPr lang="en-US" sz="1162" dirty="0"/>
           </a:p>
@@ -17784,7 +15288,7 @@
                 <a:ea typeface="Calibri" pitchFamily="34" charset="-122"/>
                 <a:cs typeface="Calibri" pitchFamily="34" charset="-120"/>
               </a:rPr>
-              <a:t>THE OLD WAY</a:t>
+              <a:t>WHERE IT BROKE</a:t>
             </a:r>
             <a:endParaRPr lang="en-US" sz="712" dirty="0"/>
           </a:p>
@@ -17898,7 +15402,7 @@
             </a:avLst>
           </a:prstGeom>
           <a:solidFill>
-            <a:srgbClr val="C1583B"/>
+            <a:srgbClr val="5C7A54"/>
           </a:solidFill>
           <a:ln/>
         </p:spPr>
@@ -17936,7 +15440,7 @@
                 <a:ea typeface="Calibri" pitchFamily="34" charset="-122"/>
                 <a:cs typeface="Calibri" pitchFamily="34" charset="-120"/>
               </a:rPr>
-              <a:t>WHERE IT BROKE</a:t>
+              <a:t>THE NEW WAY</a:t>
             </a:r>
             <a:endParaRPr lang="en-US" sz="862" dirty="0"/>
           </a:p>
@@ -17997,7 +15501,7 @@
             <a:avLst/>
           </a:prstGeom>
           <a:solidFill>
-            <a:srgbClr val="C1583B"/>
+            <a:srgbClr val="5C7A54"/>
           </a:solidFill>
           <a:ln/>
         </p:spPr>
@@ -18011,66 +15515,6 @@
         <p:spPr>
           <a:xfrm>
             <a:off x="7934706" y="411480"/>
-            <a:ext cx="109728" cy="109728"/>
-          </a:xfrm>
-          <a:prstGeom prst="ellipse">
-            <a:avLst/>
-          </a:prstGeom>
-          <a:solidFill>
-            <a:srgbClr val="E4E0D6"/>
-          </a:solidFill>
-          <a:ln/>
-        </p:spPr>
-      </p:sp>
-      <p:sp>
-        <p:nvSpPr>
-          <p:cNvPr id="8" name="Shape 6"/>
-          <p:cNvSpPr/>
-          <p:nvPr/>
-        </p:nvSpPr>
-        <p:spPr>
-          <a:xfrm>
-            <a:off x="8140446" y="411480"/>
-            <a:ext cx="109728" cy="109728"/>
-          </a:xfrm>
-          <a:prstGeom prst="ellipse">
-            <a:avLst/>
-          </a:prstGeom>
-          <a:solidFill>
-            <a:srgbClr val="E4E0D6"/>
-          </a:solidFill>
-          <a:ln/>
-        </p:spPr>
-      </p:sp>
-      <p:sp>
-        <p:nvSpPr>
-          <p:cNvPr id="9" name="Shape 7"/>
-          <p:cNvSpPr/>
-          <p:nvPr/>
-        </p:nvSpPr>
-        <p:spPr>
-          <a:xfrm>
-            <a:off x="8346186" y="411480"/>
-            <a:ext cx="109728" cy="109728"/>
-          </a:xfrm>
-          <a:prstGeom prst="ellipse">
-            <a:avLst/>
-          </a:prstGeom>
-          <a:solidFill>
-            <a:srgbClr val="E4E0D6"/>
-          </a:solidFill>
-          <a:ln/>
-        </p:spPr>
-      </p:sp>
-      <p:sp>
-        <p:nvSpPr>
-          <p:cNvPr id="10" name="Shape 8"/>
-          <p:cNvSpPr/>
-          <p:nvPr/>
-        </p:nvSpPr>
-        <p:spPr>
-          <a:xfrm>
-            <a:off x="8551926" y="411480"/>
             <a:ext cx="109728" cy="109728"/>
           </a:xfrm>
           <a:prstGeom prst="ellipse">
@@ -18138,13 +15582,13 @@
             <a:r>
               <a:rPr lang="en-US" sz="900" b="1" kern="0" spc="150" dirty="0">
                 <a:solidFill>
-                  <a:srgbClr val="C1583B"/>
+                  <a:srgbClr val="5C7A54"/>
                 </a:solidFill>
                 <a:latin typeface="Calibri" pitchFamily="34" charset="0"/>
                 <a:ea typeface="Calibri" pitchFamily="34" charset="-122"/>
                 <a:cs typeface="Calibri" pitchFamily="34" charset="-120"/>
               </a:rPr>
-              <a:t>THE ANSWER HE GOT</a:t>
+              <a:t>THE TURNING POINT</a:t>
             </a:r>
             <a:endParaRPr lang="en-US" sz="900" dirty="0"/>
           </a:p>
@@ -18171,10 +15615,11 @@
           <a:bodyPr wrap="square" lIns="0" tIns="0" rIns="0" bIns="0" rtlCol="0" anchor="ctr"/>
           <a:lstStyle/>
           <a:p>
-            <a:pPr>
+            <a:pPr marL="0" indent="0">
               <a:lnSpc>
                 <a:spcPct val="112000"/>
               </a:lnSpc>
+              <a:buNone/>
             </a:pPr>
             <a:r>
               <a:rPr lang="en-US" sz="2025" b="1" dirty="0">
@@ -18185,7 +15630,7 @@
                 <a:ea typeface="Cambria" pitchFamily="34" charset="-122"/>
                 <a:cs typeface="Cambria" pitchFamily="34" charset="-120"/>
               </a:rPr>
-              <a:t>Loan Application Rejected — No Reason Given by the Bank</a:t>
+              <a:t>The same documents. This time, read in minutes.</a:t>
             </a:r>
             <a:endParaRPr lang="en-US" sz="2025" dirty="0"/>
           </a:p>
@@ -18208,7 +15653,7 @@
           <a:noFill/>
           <a:ln w="28575">
             <a:solidFill>
-              <a:srgbClr val="C1583B"/>
+              <a:srgbClr val="5C7A54"/>
             </a:solidFill>
             <a:prstDash val="solid"/>
           </a:ln>
@@ -18249,7 +15694,7 @@
                 <a:ea typeface="Calibri" pitchFamily="34" charset="-122"/>
                 <a:cs typeface="Calibri" pitchFamily="34" charset="-120"/>
               </a:rPr>
-              <a:t>Four days of waiting ends in one word: rejected. No explanation — not what went wrong, not what to fix, not whether to try again. Just a decision he doesn't understand.</a:t>
+              <a:t>This time, before he applies again, Rohan uploads his documents to the Credit Risk Intelligence Platform recommended by his friend. In minutes, it shows him exactly why he was rejected — and what he needs to fix. He fixes it, then applies again, feeling sure this time.</a:t>
             </a:r>
             <a:endParaRPr lang="en-US" sz="1162" dirty="0"/>
           </a:p>
@@ -18288,7 +15733,7 @@
                 <a:ea typeface="Calibri" pitchFamily="34" charset="-122"/>
                 <a:cs typeface="Calibri" pitchFamily="34" charset="-120"/>
               </a:rPr>
-              <a:t>WHERE IT BROKE</a:t>
+              <a:t>THE NEW WAY</a:t>
             </a:r>
             <a:endParaRPr lang="en-US" sz="712" dirty="0"/>
           </a:p>
@@ -18335,7 +15780,7 @@
       </p:sp>
       <p:pic>
         <p:nvPicPr>
-          <p:cNvPr id="19" name="Picture 18" descr="s5.png"/>
+          <p:cNvPr id="19" name="Picture 18" descr="s7.png"/>
           <p:cNvPicPr>
             <a:picLocks noChangeAspect="1"/>
           </p:cNvPicPr>
@@ -18402,7 +15847,7 @@
             </a:avLst>
           </a:prstGeom>
           <a:solidFill>
-            <a:srgbClr val="C1583B"/>
+            <a:srgbClr val="5C7A54"/>
           </a:solidFill>
           <a:ln/>
         </p:spPr>
@@ -18440,7 +15885,7 @@
                 <a:ea typeface="Calibri" pitchFamily="34" charset="-122"/>
                 <a:cs typeface="Calibri" pitchFamily="34" charset="-120"/>
               </a:rPr>
-              <a:t>WHERE IT BROKE</a:t>
+              <a:t>THE NEW WAY</a:t>
             </a:r>
             <a:endParaRPr lang="en-US" sz="862" dirty="0"/>
           </a:p>
@@ -18521,67 +15966,7 @@
             <a:avLst/>
           </a:prstGeom>
           <a:solidFill>
-            <a:srgbClr val="C1583B"/>
-          </a:solidFill>
-          <a:ln/>
-        </p:spPr>
-      </p:sp>
-      <p:sp>
-        <p:nvSpPr>
-          <p:cNvPr id="8" name="Shape 6"/>
-          <p:cNvSpPr/>
-          <p:nvPr/>
-        </p:nvSpPr>
-        <p:spPr>
-          <a:xfrm>
-            <a:off x="8140446" y="411480"/>
-            <a:ext cx="109728" cy="109728"/>
-          </a:xfrm>
-          <a:prstGeom prst="ellipse">
-            <a:avLst/>
-          </a:prstGeom>
-          <a:solidFill>
-            <a:srgbClr val="E4E0D6"/>
-          </a:solidFill>
-          <a:ln/>
-        </p:spPr>
-      </p:sp>
-      <p:sp>
-        <p:nvSpPr>
-          <p:cNvPr id="9" name="Shape 7"/>
-          <p:cNvSpPr/>
-          <p:nvPr/>
-        </p:nvSpPr>
-        <p:spPr>
-          <a:xfrm>
-            <a:off x="8346186" y="411480"/>
-            <a:ext cx="109728" cy="109728"/>
-          </a:xfrm>
-          <a:prstGeom prst="ellipse">
-            <a:avLst/>
-          </a:prstGeom>
-          <a:solidFill>
-            <a:srgbClr val="E4E0D6"/>
-          </a:solidFill>
-          <a:ln/>
-        </p:spPr>
-      </p:sp>
-      <p:sp>
-        <p:nvSpPr>
-          <p:cNvPr id="10" name="Shape 8"/>
-          <p:cNvSpPr/>
-          <p:nvPr/>
-        </p:nvSpPr>
-        <p:spPr>
-          <a:xfrm>
-            <a:off x="8551926" y="411480"/>
-            <a:ext cx="109728" cy="109728"/>
-          </a:xfrm>
-          <a:prstGeom prst="ellipse">
-            <a:avLst/>
-          </a:prstGeom>
-          <a:solidFill>
-            <a:srgbClr val="E4E0D6"/>
+            <a:srgbClr val="5C7A54"/>
           </a:solidFill>
           <a:ln/>
         </p:spPr>
@@ -18642,13 +16027,13 @@
             <a:r>
               <a:rPr lang="en-US" sz="900" b="1" kern="0" spc="150" dirty="0">
                 <a:solidFill>
-                  <a:srgbClr val="C1583B"/>
+                  <a:srgbClr val="5C7A54"/>
                 </a:solidFill>
                 <a:latin typeface="Calibri" pitchFamily="34" charset="0"/>
                 <a:ea typeface="Calibri" pitchFamily="34" charset="-122"/>
                 <a:cs typeface="Calibri" pitchFamily="34" charset="-120"/>
               </a:rPr>
-              <a:t>WHAT IT COST HIM</a:t>
+              <a:t>THE NEW NORMAL</a:t>
             </a:r>
             <a:endParaRPr lang="en-US" sz="900" dirty="0"/>
           </a:p>
@@ -18675,10 +16060,11 @@
           <a:bodyPr wrap="square" lIns="0" tIns="0" rIns="0" bIns="0" rtlCol="0" anchor="ctr"/>
           <a:lstStyle/>
           <a:p>
-            <a:pPr>
+            <a:pPr marL="0" indent="0">
               <a:lnSpc>
                 <a:spcPct val="112000"/>
               </a:lnSpc>
+              <a:buNone/>
             </a:pPr>
             <a:r>
               <a:rPr lang="en-US" sz="2025" b="1" dirty="0">
@@ -18689,7 +16075,7 @@
                 <a:ea typeface="Cambria" pitchFamily="34" charset="-122"/>
                 <a:cs typeface="Cambria" pitchFamily="34" charset="-120"/>
               </a:rPr>
-              <a:t>The Shop That Couldn't Restock</a:t>
+              <a:t>Approved. And this time, he knows why.</a:t>
             </a:r>
             <a:endParaRPr lang="en-US" sz="2025" dirty="0"/>
           </a:p>
@@ -18712,7 +16098,7 @@
           <a:noFill/>
           <a:ln w="28575">
             <a:solidFill>
-              <a:srgbClr val="C1583B"/>
+              <a:srgbClr val="5C7A54"/>
             </a:solidFill>
             <a:prstDash val="solid"/>
           </a:ln>
@@ -18753,7 +16139,7 @@
                 <a:ea typeface="Calibri" pitchFamily="34" charset="-122"/>
                 <a:cs typeface="Calibri" pitchFamily="34" charset="-120"/>
               </a:rPr>
-              <a:t>Festival season doesn't wait for anyone. Rohan couldn't order the products he needed because his loan never came through. A slow, unexplained 'no' didn't just cost him an application — it cost him his season.</a:t>
+              <a:t>Rohan gets his inventory in time for the festival. The bank keeps a happy customer instead of losing one. Same papers, read the right way this time — by the bank and by Rohan. Rohan is just one person. But this platform is built to give every person a clear answer, not just a yes or no.</a:t>
             </a:r>
             <a:endParaRPr lang="en-US" sz="1162" dirty="0"/>
           </a:p>
@@ -18792,7 +16178,7 @@
                 <a:ea typeface="Calibri" pitchFamily="34" charset="-122"/>
                 <a:cs typeface="Calibri" pitchFamily="34" charset="-120"/>
               </a:rPr>
-              <a:t>WHERE IT BROKE</a:t>
+              <a:t>THE NEW WAY</a:t>
             </a:r>
             <a:endParaRPr lang="en-US" sz="712" dirty="0"/>
           </a:p>
@@ -18839,7 +16225,7 @@
       </p:sp>
       <p:pic>
         <p:nvPicPr>
-          <p:cNvPr id="19" name="Picture 18" descr="s6.png"/>
+          <p:cNvPr id="19" name="Picture 18" descr="s9.png"/>
           <p:cNvPicPr>
             <a:picLocks noChangeAspect="1"/>
           </p:cNvPicPr>
@@ -18873,1016 +16259,6 @@
 </file>
 
 <file path=ppt/slides/slide7.xml><?xml version="1.0" encoding="utf-8"?>
-<p:sld xmlns:a="http://schemas.openxmlformats.org/drawingml/2006/main" xmlns:r="http://schemas.openxmlformats.org/officeDocument/2006/relationships" xmlns:p="http://schemas.openxmlformats.org/presentationml/2006/main">
-  <p:cSld>
-    <p:spTree>
-      <p:nvGrpSpPr>
-        <p:cNvPr id="1" name=""/>
-        <p:cNvGrpSpPr/>
-        <p:nvPr/>
-      </p:nvGrpSpPr>
-      <p:grpSpPr>
-        <a:xfrm>
-          <a:off x="0" y="0"/>
-          <a:ext cx="0" cy="0"/>
-          <a:chOff x="0" y="0"/>
-          <a:chExt cx="0" cy="0"/>
-        </a:xfrm>
-      </p:grpSpPr>
-      <p:sp>
-        <p:nvSpPr>
-          <p:cNvPr id="2" name="Shape 0"/>
-          <p:cNvSpPr/>
-          <p:nvPr/>
-        </p:nvSpPr>
-        <p:spPr>
-          <a:xfrm>
-            <a:off x="411480" y="342900"/>
-            <a:ext cx="1577340" cy="260604"/>
-          </a:xfrm>
-          <a:prstGeom prst="roundRect">
-            <a:avLst>
-              <a:gd name="adj" fmla="val 50000"/>
-            </a:avLst>
-          </a:prstGeom>
-          <a:solidFill>
-            <a:srgbClr val="5C7A54"/>
-          </a:solidFill>
-          <a:ln/>
-        </p:spPr>
-      </p:sp>
-      <p:sp>
-        <p:nvSpPr>
-          <p:cNvPr id="3" name="Text 1"/>
-          <p:cNvSpPr/>
-          <p:nvPr/>
-        </p:nvSpPr>
-        <p:spPr>
-          <a:xfrm>
-            <a:off x="411480" y="342900"/>
-            <a:ext cx="1577340" cy="260604"/>
-          </a:xfrm>
-          <a:prstGeom prst="rect">
-            <a:avLst/>
-          </a:prstGeom>
-          <a:noFill/>
-          <a:ln/>
-        </p:spPr>
-        <p:txBody>
-          <a:bodyPr wrap="square" lIns="0" tIns="0" rIns="0" bIns="0" rtlCol="0" anchor="ctr"/>
-          <a:lstStyle/>
-          <a:p>
-            <a:pPr marL="0" indent="0" algn="ctr">
-              <a:buNone/>
-            </a:pPr>
-            <a:r>
-              <a:rPr lang="en-US" sz="862" b="1" kern="0" spc="120" dirty="0">
-                <a:solidFill>
-                  <a:srgbClr val="FFFFFF"/>
-                </a:solidFill>
-                <a:latin typeface="Calibri" pitchFamily="34" charset="0"/>
-                <a:ea typeface="Calibri" pitchFamily="34" charset="-122"/>
-                <a:cs typeface="Calibri" pitchFamily="34" charset="-120"/>
-              </a:rPr>
-              <a:t>THE NEW WAY</a:t>
-            </a:r>
-            <a:endParaRPr lang="en-US" sz="862" dirty="0"/>
-          </a:p>
-        </p:txBody>
-      </p:sp>
-      <p:sp>
-        <p:nvSpPr>
-          <p:cNvPr id="4" name="Shape 2"/>
-          <p:cNvSpPr/>
-          <p:nvPr/>
-        </p:nvSpPr>
-        <p:spPr>
-          <a:xfrm>
-            <a:off x="7317486" y="411480"/>
-            <a:ext cx="109728" cy="109728"/>
-          </a:xfrm>
-          <a:prstGeom prst="ellipse">
-            <a:avLst/>
-          </a:prstGeom>
-          <a:solidFill>
-            <a:srgbClr val="E4E0D6"/>
-          </a:solidFill>
-          <a:ln/>
-        </p:spPr>
-      </p:sp>
-      <p:sp>
-        <p:nvSpPr>
-          <p:cNvPr id="5" name="Shape 3"/>
-          <p:cNvSpPr/>
-          <p:nvPr/>
-        </p:nvSpPr>
-        <p:spPr>
-          <a:xfrm>
-            <a:off x="7523226" y="411480"/>
-            <a:ext cx="109728" cy="109728"/>
-          </a:xfrm>
-          <a:prstGeom prst="ellipse">
-            <a:avLst/>
-          </a:prstGeom>
-          <a:solidFill>
-            <a:srgbClr val="E4E0D6"/>
-          </a:solidFill>
-          <a:ln/>
-        </p:spPr>
-      </p:sp>
-      <p:sp>
-        <p:nvSpPr>
-          <p:cNvPr id="6" name="Shape 4"/>
-          <p:cNvSpPr/>
-          <p:nvPr/>
-        </p:nvSpPr>
-        <p:spPr>
-          <a:xfrm>
-            <a:off x="7728966" y="411480"/>
-            <a:ext cx="109728" cy="109728"/>
-          </a:xfrm>
-          <a:prstGeom prst="ellipse">
-            <a:avLst/>
-          </a:prstGeom>
-          <a:solidFill>
-            <a:srgbClr val="E4E0D6"/>
-          </a:solidFill>
-          <a:ln/>
-        </p:spPr>
-      </p:sp>
-      <p:sp>
-        <p:nvSpPr>
-          <p:cNvPr id="7" name="Shape 5"/>
-          <p:cNvSpPr/>
-          <p:nvPr/>
-        </p:nvSpPr>
-        <p:spPr>
-          <a:xfrm>
-            <a:off x="7934706" y="411480"/>
-            <a:ext cx="109728" cy="109728"/>
-          </a:xfrm>
-          <a:prstGeom prst="ellipse">
-            <a:avLst/>
-          </a:prstGeom>
-          <a:solidFill>
-            <a:srgbClr val="E4E0D6"/>
-          </a:solidFill>
-          <a:ln/>
-        </p:spPr>
-      </p:sp>
-      <p:sp>
-        <p:nvSpPr>
-          <p:cNvPr id="8" name="Shape 6"/>
-          <p:cNvSpPr/>
-          <p:nvPr/>
-        </p:nvSpPr>
-        <p:spPr>
-          <a:xfrm>
-            <a:off x="8140446" y="411480"/>
-            <a:ext cx="109728" cy="109728"/>
-          </a:xfrm>
-          <a:prstGeom prst="ellipse">
-            <a:avLst/>
-          </a:prstGeom>
-          <a:solidFill>
-            <a:srgbClr val="5C7A54"/>
-          </a:solidFill>
-          <a:ln/>
-        </p:spPr>
-      </p:sp>
-      <p:sp>
-        <p:nvSpPr>
-          <p:cNvPr id="9" name="Shape 7"/>
-          <p:cNvSpPr/>
-          <p:nvPr/>
-        </p:nvSpPr>
-        <p:spPr>
-          <a:xfrm>
-            <a:off x="8346186" y="411480"/>
-            <a:ext cx="109728" cy="109728"/>
-          </a:xfrm>
-          <a:prstGeom prst="ellipse">
-            <a:avLst/>
-          </a:prstGeom>
-          <a:solidFill>
-            <a:srgbClr val="E4E0D6"/>
-          </a:solidFill>
-          <a:ln/>
-        </p:spPr>
-      </p:sp>
-      <p:sp>
-        <p:nvSpPr>
-          <p:cNvPr id="10" name="Shape 8"/>
-          <p:cNvSpPr/>
-          <p:nvPr/>
-        </p:nvSpPr>
-        <p:spPr>
-          <a:xfrm>
-            <a:off x="8551926" y="411480"/>
-            <a:ext cx="109728" cy="109728"/>
-          </a:xfrm>
-          <a:prstGeom prst="ellipse">
-            <a:avLst/>
-          </a:prstGeom>
-          <a:solidFill>
-            <a:srgbClr val="E4E0D6"/>
-          </a:solidFill>
-          <a:ln/>
-        </p:spPr>
-      </p:sp>
-      <p:sp>
-        <p:nvSpPr>
-          <p:cNvPr id="11" name="Shape 9"/>
-          <p:cNvSpPr/>
-          <p:nvPr/>
-        </p:nvSpPr>
-        <p:spPr>
-          <a:xfrm>
-            <a:off x="480060" y="788670"/>
-            <a:ext cx="3909060" cy="3977640"/>
-          </a:xfrm>
-          <a:prstGeom prst="roundRect">
-            <a:avLst>
-              <a:gd name="adj" fmla="val 6140"/>
-            </a:avLst>
-          </a:prstGeom>
-          <a:solidFill>
-            <a:srgbClr val="FFFFFF"/>
-          </a:solidFill>
-          <a:ln/>
-          <a:effectLst>
-            <a:outerShdw blurRad="190500" dist="76200" dir="5400000" algn="bl" rotWithShape="0">
-              <a:srgbClr val="12213A">
-                <a:alpha val="16000"/>
-              </a:srgbClr>
-            </a:outerShdw>
-          </a:effectLst>
-        </p:spPr>
-      </p:sp>
-      <p:sp>
-        <p:nvSpPr>
-          <p:cNvPr id="13" name="Text 10"/>
-          <p:cNvSpPr/>
-          <p:nvPr/>
-        </p:nvSpPr>
-        <p:spPr>
-          <a:xfrm>
-            <a:off x="4629150" y="822960"/>
-            <a:ext cx="4046220" cy="240030"/>
-          </a:xfrm>
-          <a:prstGeom prst="rect">
-            <a:avLst/>
-          </a:prstGeom>
-          <a:noFill/>
-          <a:ln/>
-        </p:spPr>
-        <p:txBody>
-          <a:bodyPr wrap="square" lIns="0" tIns="0" rIns="0" bIns="0" rtlCol="0" anchor="ctr"/>
-          <a:lstStyle/>
-          <a:p>
-            <a:pPr marL="0" indent="0">
-              <a:buNone/>
-            </a:pPr>
-            <a:r>
-              <a:rPr lang="en-US" sz="900" b="1" kern="0" spc="150" dirty="0">
-                <a:solidFill>
-                  <a:srgbClr val="5C7A54"/>
-                </a:solidFill>
-                <a:latin typeface="Calibri" pitchFamily="34" charset="0"/>
-                <a:ea typeface="Calibri" pitchFamily="34" charset="-122"/>
-                <a:cs typeface="Calibri" pitchFamily="34" charset="-120"/>
-              </a:rPr>
-              <a:t>THE TURNING POINT</a:t>
-            </a:r>
-            <a:endParaRPr lang="en-US" sz="900" dirty="0"/>
-          </a:p>
-        </p:txBody>
-      </p:sp>
-      <p:sp>
-        <p:nvSpPr>
-          <p:cNvPr id="14" name="Text 11"/>
-          <p:cNvSpPr/>
-          <p:nvPr/>
-        </p:nvSpPr>
-        <p:spPr>
-          <a:xfrm>
-            <a:off x="4629150" y="1062990"/>
-            <a:ext cx="4046220" cy="891540"/>
-          </a:xfrm>
-          <a:prstGeom prst="rect">
-            <a:avLst/>
-          </a:prstGeom>
-          <a:noFill/>
-          <a:ln/>
-        </p:spPr>
-        <p:txBody>
-          <a:bodyPr wrap="square" lIns="0" tIns="0" rIns="0" bIns="0" rtlCol="0" anchor="ctr"/>
-          <a:lstStyle/>
-          <a:p>
-            <a:pPr marL="0" indent="0">
-              <a:lnSpc>
-                <a:spcPct val="112000"/>
-              </a:lnSpc>
-              <a:buNone/>
-            </a:pPr>
-            <a:r>
-              <a:rPr lang="en-US" sz="2025" b="1" dirty="0">
-                <a:solidFill>
-                  <a:srgbClr val="241F1A"/>
-                </a:solidFill>
-                <a:latin typeface="Cambria" pitchFamily="34" charset="0"/>
-                <a:ea typeface="Cambria" pitchFamily="34" charset="-122"/>
-                <a:cs typeface="Cambria" pitchFamily="34" charset="-120"/>
-              </a:rPr>
-              <a:t>The same documents. This time, read in minutes.</a:t>
-            </a:r>
-            <a:endParaRPr lang="en-US" sz="2025" dirty="0"/>
-          </a:p>
-        </p:txBody>
-      </p:sp>
-      <p:sp>
-        <p:nvSpPr>
-          <p:cNvPr id="15" name="Shape 12"/>
-          <p:cNvSpPr/>
-          <p:nvPr/>
-        </p:nvSpPr>
-        <p:spPr>
-          <a:xfrm>
-            <a:off x="4629150" y="2023110"/>
-            <a:ext cx="822960" cy="0"/>
-          </a:xfrm>
-          <a:prstGeom prst="line">
-            <a:avLst/>
-          </a:prstGeom>
-          <a:noFill/>
-          <a:ln w="28575">
-            <a:solidFill>
-              <a:srgbClr val="5C7A54"/>
-            </a:solidFill>
-            <a:prstDash val="solid"/>
-          </a:ln>
-        </p:spPr>
-      </p:sp>
-      <p:sp>
-        <p:nvSpPr>
-          <p:cNvPr id="16" name="Text 13"/>
-          <p:cNvSpPr/>
-          <p:nvPr/>
-        </p:nvSpPr>
-        <p:spPr>
-          <a:xfrm>
-            <a:off x="4629150" y="2194560"/>
-            <a:ext cx="4046220" cy="1508760"/>
-          </a:xfrm>
-          <a:prstGeom prst="rect">
-            <a:avLst/>
-          </a:prstGeom>
-          <a:noFill/>
-          <a:ln/>
-        </p:spPr>
-        <p:txBody>
-          <a:bodyPr wrap="square" lIns="0" tIns="0" rIns="0" bIns="0" rtlCol="0" anchor="ctr"/>
-          <a:lstStyle/>
-          <a:p>
-            <a:pPr>
-              <a:lnSpc>
-                <a:spcPct val="145000"/>
-              </a:lnSpc>
-            </a:pPr>
-            <a:r>
-              <a:rPr lang="en-US" sz="1162" i="1" dirty="0">
-                <a:solidFill>
-                  <a:srgbClr val="3B362F"/>
-                </a:solidFill>
-                <a:latin typeface="Calibri" pitchFamily="34" charset="0"/>
-                <a:ea typeface="Calibri" pitchFamily="34" charset="-122"/>
-                <a:cs typeface="Calibri" pitchFamily="34" charset="-120"/>
-              </a:rPr>
-              <a:t>This time, Rohan checks his documents on the Credit Risk Intelligence Platform before applying. It shows him why he was rejected and what to fix. He fixes the issues, then applies for the loan again with confidence.</a:t>
-            </a:r>
-            <a:endParaRPr lang="en-US" sz="1162" dirty="0"/>
-          </a:p>
-        </p:txBody>
-      </p:sp>
-      <p:sp>
-        <p:nvSpPr>
-          <p:cNvPr id="17" name="Text 14"/>
-          <p:cNvSpPr/>
-          <p:nvPr/>
-        </p:nvSpPr>
-        <p:spPr>
-          <a:xfrm>
-            <a:off x="411480" y="4896612"/>
-            <a:ext cx="5486400" cy="192024"/>
-          </a:xfrm>
-          <a:prstGeom prst="rect">
-            <a:avLst/>
-          </a:prstGeom>
-          <a:noFill/>
-          <a:ln/>
-        </p:spPr>
-        <p:txBody>
-          <a:bodyPr wrap="square" rtlCol="0" anchor="ctr"/>
-          <a:lstStyle/>
-          <a:p>
-            <a:pPr marL="0" indent="0" algn="l">
-              <a:buNone/>
-            </a:pPr>
-            <a:r>
-              <a:rPr lang="en-US" sz="712" dirty="0">
-                <a:solidFill>
-                  <a:srgbClr val="8A8378"/>
-                </a:solidFill>
-                <a:latin typeface="Calibri" pitchFamily="34" charset="0"/>
-                <a:ea typeface="Calibri" pitchFamily="34" charset="-122"/>
-                <a:cs typeface="Calibri" pitchFamily="34" charset="-120"/>
-              </a:rPr>
-              <a:t>THE NEW WAY</a:t>
-            </a:r>
-            <a:endParaRPr lang="en-US" sz="712" dirty="0"/>
-          </a:p>
-        </p:txBody>
-      </p:sp>
-      <p:sp>
-        <p:nvSpPr>
-          <p:cNvPr id="18" name="Text 15"/>
-          <p:cNvSpPr/>
-          <p:nvPr/>
-        </p:nvSpPr>
-        <p:spPr>
-          <a:xfrm>
-            <a:off x="6947154" y="4896612"/>
-            <a:ext cx="1783080" cy="192024"/>
-          </a:xfrm>
-          <a:prstGeom prst="rect">
-            <a:avLst/>
-          </a:prstGeom>
-          <a:noFill/>
-          <a:ln/>
-        </p:spPr>
-        <p:txBody>
-          <a:bodyPr wrap="square" rtlCol="0" anchor="ctr"/>
-          <a:lstStyle/>
-          <a:p>
-            <a:pPr marL="0" indent="0" algn="r">
-              <a:buNone/>
-            </a:pPr>
-            <a:r>
-              <a:rPr lang="en-US" sz="712" dirty="0">
-                <a:solidFill>
-                  <a:srgbClr val="8A8378"/>
-                </a:solidFill>
-                <a:latin typeface="Calibri" pitchFamily="34" charset="0"/>
-                <a:ea typeface="Calibri" pitchFamily="34" charset="-122"/>
-                <a:cs typeface="Calibri" pitchFamily="34" charset="-120"/>
-              </a:rPr>
-              <a:t>Rohan's Story</a:t>
-            </a:r>
-            <a:endParaRPr lang="en-US" sz="712" dirty="0"/>
-          </a:p>
-        </p:txBody>
-      </p:sp>
-      <p:pic>
-        <p:nvPicPr>
-          <p:cNvPr id="19" name="Picture 18" descr="s7.png"/>
-          <p:cNvPicPr>
-            <a:picLocks noChangeAspect="1"/>
-          </p:cNvPicPr>
-          <p:nvPr/>
-        </p:nvPicPr>
-        <p:blipFill>
-          <a:blip r:embed="rId2"/>
-          <a:stretch>
-            <a:fillRect/>
-          </a:stretch>
-        </p:blipFill>
-        <p:spPr>
-          <a:xfrm>
-            <a:off x="480060" y="788670"/>
-            <a:ext cx="3909060" cy="3977640"/>
-          </a:xfrm>
-          <a:prstGeom prst="rect">
-            <a:avLst/>
-          </a:prstGeom>
-        </p:spPr>
-      </p:pic>
-    </p:spTree>
-  </p:cSld>
-  <p:clrMapOvr>
-    <a:masterClrMapping/>
-  </p:clrMapOvr>
-  <p:transition spd="slow">
-    <p:fade/>
-  </p:transition>
-</p:sld>
-</file>
-
-<file path=ppt/slides/slide8.xml><?xml version="1.0" encoding="utf-8"?>
-<p:sld xmlns:a="http://schemas.openxmlformats.org/drawingml/2006/main" xmlns:r="http://schemas.openxmlformats.org/officeDocument/2006/relationships" xmlns:p="http://schemas.openxmlformats.org/presentationml/2006/main">
-  <p:cSld>
-    <p:spTree>
-      <p:nvGrpSpPr>
-        <p:cNvPr id="1" name=""/>
-        <p:cNvGrpSpPr/>
-        <p:nvPr/>
-      </p:nvGrpSpPr>
-      <p:grpSpPr>
-        <a:xfrm>
-          <a:off x="0" y="0"/>
-          <a:ext cx="0" cy="0"/>
-          <a:chOff x="0" y="0"/>
-          <a:chExt cx="0" cy="0"/>
-        </a:xfrm>
-      </p:grpSpPr>
-      <p:sp>
-        <p:nvSpPr>
-          <p:cNvPr id="2" name="Shape 0"/>
-          <p:cNvSpPr/>
-          <p:nvPr/>
-        </p:nvSpPr>
-        <p:spPr>
-          <a:xfrm>
-            <a:off x="411480" y="342900"/>
-            <a:ext cx="1577340" cy="260604"/>
-          </a:xfrm>
-          <a:prstGeom prst="roundRect">
-            <a:avLst>
-              <a:gd name="adj" fmla="val 50000"/>
-            </a:avLst>
-          </a:prstGeom>
-          <a:solidFill>
-            <a:srgbClr val="5C7A54"/>
-          </a:solidFill>
-          <a:ln/>
-        </p:spPr>
-      </p:sp>
-      <p:sp>
-        <p:nvSpPr>
-          <p:cNvPr id="3" name="Text 1"/>
-          <p:cNvSpPr/>
-          <p:nvPr/>
-        </p:nvSpPr>
-        <p:spPr>
-          <a:xfrm>
-            <a:off x="411480" y="342900"/>
-            <a:ext cx="1577340" cy="260604"/>
-          </a:xfrm>
-          <a:prstGeom prst="rect">
-            <a:avLst/>
-          </a:prstGeom>
-          <a:noFill/>
-          <a:ln/>
-        </p:spPr>
-        <p:txBody>
-          <a:bodyPr wrap="square" lIns="0" tIns="0" rIns="0" bIns="0" rtlCol="0" anchor="ctr"/>
-          <a:lstStyle/>
-          <a:p>
-            <a:pPr marL="0" indent="0" algn="ctr">
-              <a:buNone/>
-            </a:pPr>
-            <a:r>
-              <a:rPr lang="en-US" sz="862" b="1" kern="0" spc="120" dirty="0">
-                <a:solidFill>
-                  <a:srgbClr val="FFFFFF"/>
-                </a:solidFill>
-                <a:latin typeface="Calibri" pitchFamily="34" charset="0"/>
-                <a:ea typeface="Calibri" pitchFamily="34" charset="-122"/>
-                <a:cs typeface="Calibri" pitchFamily="34" charset="-120"/>
-              </a:rPr>
-              <a:t>THE NEW WAY</a:t>
-            </a:r>
-            <a:endParaRPr lang="en-US" sz="862" dirty="0"/>
-          </a:p>
-        </p:txBody>
-      </p:sp>
-      <p:sp>
-        <p:nvSpPr>
-          <p:cNvPr id="4" name="Shape 2"/>
-          <p:cNvSpPr/>
-          <p:nvPr/>
-        </p:nvSpPr>
-        <p:spPr>
-          <a:xfrm>
-            <a:off x="7317486" y="411480"/>
-            <a:ext cx="109728" cy="109728"/>
-          </a:xfrm>
-          <a:prstGeom prst="ellipse">
-            <a:avLst/>
-          </a:prstGeom>
-          <a:solidFill>
-            <a:srgbClr val="E4E0D6"/>
-          </a:solidFill>
-          <a:ln/>
-        </p:spPr>
-      </p:sp>
-      <p:sp>
-        <p:nvSpPr>
-          <p:cNvPr id="5" name="Shape 3"/>
-          <p:cNvSpPr/>
-          <p:nvPr/>
-        </p:nvSpPr>
-        <p:spPr>
-          <a:xfrm>
-            <a:off x="7523226" y="411480"/>
-            <a:ext cx="109728" cy="109728"/>
-          </a:xfrm>
-          <a:prstGeom prst="ellipse">
-            <a:avLst/>
-          </a:prstGeom>
-          <a:solidFill>
-            <a:srgbClr val="E4E0D6"/>
-          </a:solidFill>
-          <a:ln/>
-        </p:spPr>
-      </p:sp>
-      <p:sp>
-        <p:nvSpPr>
-          <p:cNvPr id="6" name="Shape 4"/>
-          <p:cNvSpPr/>
-          <p:nvPr/>
-        </p:nvSpPr>
-        <p:spPr>
-          <a:xfrm>
-            <a:off x="7728966" y="411480"/>
-            <a:ext cx="109728" cy="109728"/>
-          </a:xfrm>
-          <a:prstGeom prst="ellipse">
-            <a:avLst/>
-          </a:prstGeom>
-          <a:solidFill>
-            <a:srgbClr val="E4E0D6"/>
-          </a:solidFill>
-          <a:ln/>
-        </p:spPr>
-      </p:sp>
-      <p:sp>
-        <p:nvSpPr>
-          <p:cNvPr id="7" name="Shape 5"/>
-          <p:cNvSpPr/>
-          <p:nvPr/>
-        </p:nvSpPr>
-        <p:spPr>
-          <a:xfrm>
-            <a:off x="7934706" y="411480"/>
-            <a:ext cx="109728" cy="109728"/>
-          </a:xfrm>
-          <a:prstGeom prst="ellipse">
-            <a:avLst/>
-          </a:prstGeom>
-          <a:solidFill>
-            <a:srgbClr val="E4E0D6"/>
-          </a:solidFill>
-          <a:ln/>
-        </p:spPr>
-      </p:sp>
-      <p:sp>
-        <p:nvSpPr>
-          <p:cNvPr id="8" name="Shape 6"/>
-          <p:cNvSpPr/>
-          <p:nvPr/>
-        </p:nvSpPr>
-        <p:spPr>
-          <a:xfrm>
-            <a:off x="8140446" y="411480"/>
-            <a:ext cx="109728" cy="109728"/>
-          </a:xfrm>
-          <a:prstGeom prst="ellipse">
-            <a:avLst/>
-          </a:prstGeom>
-          <a:solidFill>
-            <a:srgbClr val="E4E0D6"/>
-          </a:solidFill>
-          <a:ln/>
-        </p:spPr>
-      </p:sp>
-      <p:sp>
-        <p:nvSpPr>
-          <p:cNvPr id="9" name="Shape 7"/>
-          <p:cNvSpPr/>
-          <p:nvPr/>
-        </p:nvSpPr>
-        <p:spPr>
-          <a:xfrm>
-            <a:off x="8346186" y="411480"/>
-            <a:ext cx="109728" cy="109728"/>
-          </a:xfrm>
-          <a:prstGeom prst="ellipse">
-            <a:avLst/>
-          </a:prstGeom>
-          <a:solidFill>
-            <a:srgbClr val="E4E0D6"/>
-          </a:solidFill>
-          <a:ln/>
-        </p:spPr>
-      </p:sp>
-      <p:sp>
-        <p:nvSpPr>
-          <p:cNvPr id="10" name="Shape 8"/>
-          <p:cNvSpPr/>
-          <p:nvPr/>
-        </p:nvSpPr>
-        <p:spPr>
-          <a:xfrm>
-            <a:off x="8551926" y="411480"/>
-            <a:ext cx="109728" cy="109728"/>
-          </a:xfrm>
-          <a:prstGeom prst="ellipse">
-            <a:avLst/>
-          </a:prstGeom>
-          <a:solidFill>
-            <a:srgbClr val="5C7A54"/>
-          </a:solidFill>
-          <a:ln/>
-        </p:spPr>
-      </p:sp>
-      <p:sp>
-        <p:nvSpPr>
-          <p:cNvPr id="11" name="Shape 9"/>
-          <p:cNvSpPr/>
-          <p:nvPr/>
-        </p:nvSpPr>
-        <p:spPr>
-          <a:xfrm>
-            <a:off x="480060" y="788670"/>
-            <a:ext cx="3909060" cy="3977640"/>
-          </a:xfrm>
-          <a:prstGeom prst="roundRect">
-            <a:avLst>
-              <a:gd name="adj" fmla="val 6140"/>
-            </a:avLst>
-          </a:prstGeom>
-          <a:solidFill>
-            <a:srgbClr val="FFFFFF"/>
-          </a:solidFill>
-          <a:ln/>
-          <a:effectLst>
-            <a:outerShdw blurRad="190500" dist="76200" dir="5400000" algn="bl" rotWithShape="0">
-              <a:srgbClr val="12213A">
-                <a:alpha val="16000"/>
-              </a:srgbClr>
-            </a:outerShdw>
-          </a:effectLst>
-        </p:spPr>
-      </p:sp>
-      <p:sp>
-        <p:nvSpPr>
-          <p:cNvPr id="13" name="Text 10"/>
-          <p:cNvSpPr/>
-          <p:nvPr/>
-        </p:nvSpPr>
-        <p:spPr>
-          <a:xfrm>
-            <a:off x="4629150" y="822960"/>
-            <a:ext cx="4046220" cy="240030"/>
-          </a:xfrm>
-          <a:prstGeom prst="rect">
-            <a:avLst/>
-          </a:prstGeom>
-          <a:noFill/>
-          <a:ln/>
-        </p:spPr>
-        <p:txBody>
-          <a:bodyPr wrap="square" lIns="0" tIns="0" rIns="0" bIns="0" rtlCol="0" anchor="ctr"/>
-          <a:lstStyle/>
-          <a:p>
-            <a:pPr marL="0" indent="0">
-              <a:buNone/>
-            </a:pPr>
-            <a:r>
-              <a:rPr lang="en-US" sz="900" b="1" kern="0" spc="150" dirty="0">
-                <a:solidFill>
-                  <a:srgbClr val="5C7A54"/>
-                </a:solidFill>
-                <a:latin typeface="Calibri" pitchFamily="34" charset="0"/>
-                <a:ea typeface="Calibri" pitchFamily="34" charset="-122"/>
-                <a:cs typeface="Calibri" pitchFamily="34" charset="-120"/>
-              </a:rPr>
-              <a:t>THE NEW NORMAL</a:t>
-            </a:r>
-            <a:endParaRPr lang="en-US" sz="900" dirty="0"/>
-          </a:p>
-        </p:txBody>
-      </p:sp>
-      <p:sp>
-        <p:nvSpPr>
-          <p:cNvPr id="14" name="Text 11"/>
-          <p:cNvSpPr/>
-          <p:nvPr/>
-        </p:nvSpPr>
-        <p:spPr>
-          <a:xfrm>
-            <a:off x="4629150" y="1062990"/>
-            <a:ext cx="4046220" cy="891540"/>
-          </a:xfrm>
-          <a:prstGeom prst="rect">
-            <a:avLst/>
-          </a:prstGeom>
-          <a:noFill/>
-          <a:ln/>
-        </p:spPr>
-        <p:txBody>
-          <a:bodyPr wrap="square" lIns="0" tIns="0" rIns="0" bIns="0" rtlCol="0" anchor="ctr"/>
-          <a:lstStyle/>
-          <a:p>
-            <a:pPr marL="0" indent="0">
-              <a:lnSpc>
-                <a:spcPct val="112000"/>
-              </a:lnSpc>
-              <a:buNone/>
-            </a:pPr>
-            <a:r>
-              <a:rPr lang="en-US" sz="2025" b="1" dirty="0">
-                <a:solidFill>
-                  <a:srgbClr val="241F1A"/>
-                </a:solidFill>
-                <a:latin typeface="Cambria" pitchFamily="34" charset="0"/>
-                <a:ea typeface="Cambria" pitchFamily="34" charset="-122"/>
-                <a:cs typeface="Cambria" pitchFamily="34" charset="-120"/>
-              </a:rPr>
-              <a:t>Approved — and this time, he understood why</a:t>
-            </a:r>
-            <a:endParaRPr lang="en-US" sz="2025" dirty="0"/>
-          </a:p>
-        </p:txBody>
-      </p:sp>
-      <p:sp>
-        <p:nvSpPr>
-          <p:cNvPr id="15" name="Shape 12"/>
-          <p:cNvSpPr/>
-          <p:nvPr/>
-        </p:nvSpPr>
-        <p:spPr>
-          <a:xfrm>
-            <a:off x="4629150" y="2023110"/>
-            <a:ext cx="822960" cy="0"/>
-          </a:xfrm>
-          <a:prstGeom prst="line">
-            <a:avLst/>
-          </a:prstGeom>
-          <a:noFill/>
-          <a:ln w="28575">
-            <a:solidFill>
-              <a:srgbClr val="5C7A54"/>
-            </a:solidFill>
-            <a:prstDash val="solid"/>
-          </a:ln>
-        </p:spPr>
-      </p:sp>
-      <p:sp>
-        <p:nvSpPr>
-          <p:cNvPr id="16" name="Text 13"/>
-          <p:cNvSpPr/>
-          <p:nvPr/>
-        </p:nvSpPr>
-        <p:spPr>
-          <a:xfrm>
-            <a:off x="4629150" y="2194560"/>
-            <a:ext cx="4046220" cy="1508760"/>
-          </a:xfrm>
-          <a:prstGeom prst="rect">
-            <a:avLst/>
-          </a:prstGeom>
-          <a:noFill/>
-          <a:ln/>
-        </p:spPr>
-        <p:txBody>
-          <a:bodyPr wrap="square" lIns="0" tIns="0" rIns="0" bIns="0" rtlCol="0" anchor="ctr"/>
-          <a:lstStyle/>
-          <a:p>
-            <a:pPr>
-              <a:lnSpc>
-                <a:spcPct val="145000"/>
-              </a:lnSpc>
-            </a:pPr>
-            <a:r>
-              <a:rPr lang="en-US" sz="1162" i="1" dirty="0">
-                <a:solidFill>
-                  <a:srgbClr val="3B362F"/>
-                </a:solidFill>
-                <a:latin typeface="Calibri" pitchFamily="34" charset="0"/>
-                <a:ea typeface="Calibri" pitchFamily="34" charset="-122"/>
-                <a:cs typeface="Calibri" pitchFamily="34" charset="-120"/>
-              </a:rPr>
-              <a:t>Rohan orders his inventory in time for the season. The bank keeps a loyal customer instead of losing him. Same documents were read properly, by both the bank and Rohan.</a:t>
-            </a:r>
-            <a:endParaRPr lang="en-US" sz="1162" dirty="0"/>
-          </a:p>
-        </p:txBody>
-      </p:sp>
-      <p:sp>
-        <p:nvSpPr>
-          <p:cNvPr id="17" name="Text 14"/>
-          <p:cNvSpPr/>
-          <p:nvPr/>
-        </p:nvSpPr>
-        <p:spPr>
-          <a:xfrm>
-            <a:off x="411480" y="4896612"/>
-            <a:ext cx="5486400" cy="192024"/>
-          </a:xfrm>
-          <a:prstGeom prst="rect">
-            <a:avLst/>
-          </a:prstGeom>
-          <a:noFill/>
-          <a:ln/>
-        </p:spPr>
-        <p:txBody>
-          <a:bodyPr wrap="square" rtlCol="0" anchor="ctr"/>
-          <a:lstStyle/>
-          <a:p>
-            <a:pPr marL="0" indent="0" algn="l">
-              <a:buNone/>
-            </a:pPr>
-            <a:r>
-              <a:rPr lang="en-US" sz="712" dirty="0">
-                <a:solidFill>
-                  <a:srgbClr val="8A8378"/>
-                </a:solidFill>
-                <a:latin typeface="Calibri" pitchFamily="34" charset="0"/>
-                <a:ea typeface="Calibri" pitchFamily="34" charset="-122"/>
-                <a:cs typeface="Calibri" pitchFamily="34" charset="-120"/>
-              </a:rPr>
-              <a:t>THE NEW WAY</a:t>
-            </a:r>
-            <a:endParaRPr lang="en-US" sz="712" dirty="0"/>
-          </a:p>
-        </p:txBody>
-      </p:sp>
-      <p:sp>
-        <p:nvSpPr>
-          <p:cNvPr id="18" name="Text 15"/>
-          <p:cNvSpPr/>
-          <p:nvPr/>
-        </p:nvSpPr>
-        <p:spPr>
-          <a:xfrm>
-            <a:off x="6947154" y="4896612"/>
-            <a:ext cx="1783080" cy="192024"/>
-          </a:xfrm>
-          <a:prstGeom prst="rect">
-            <a:avLst/>
-          </a:prstGeom>
-          <a:noFill/>
-          <a:ln/>
-        </p:spPr>
-        <p:txBody>
-          <a:bodyPr wrap="square" rtlCol="0" anchor="ctr"/>
-          <a:lstStyle/>
-          <a:p>
-            <a:pPr marL="0" indent="0" algn="r">
-              <a:buNone/>
-            </a:pPr>
-            <a:r>
-              <a:rPr lang="en-US" sz="712" dirty="0">
-                <a:solidFill>
-                  <a:srgbClr val="8A8378"/>
-                </a:solidFill>
-                <a:latin typeface="Calibri" pitchFamily="34" charset="0"/>
-                <a:ea typeface="Calibri" pitchFamily="34" charset="-122"/>
-                <a:cs typeface="Calibri" pitchFamily="34" charset="-120"/>
-              </a:rPr>
-              <a:t>Rohan's Story</a:t>
-            </a:r>
-            <a:endParaRPr lang="en-US" sz="712" dirty="0"/>
-          </a:p>
-        </p:txBody>
-      </p:sp>
-      <p:pic>
-        <p:nvPicPr>
-          <p:cNvPr id="19" name="Picture 18" descr="s9.png"/>
-          <p:cNvPicPr>
-            <a:picLocks noChangeAspect="1"/>
-          </p:cNvPicPr>
-          <p:nvPr/>
-        </p:nvPicPr>
-        <p:blipFill>
-          <a:blip r:embed="rId2"/>
-          <a:stretch>
-            <a:fillRect/>
-          </a:stretch>
-        </p:blipFill>
-        <p:spPr>
-          <a:xfrm>
-            <a:off x="480060" y="788670"/>
-            <a:ext cx="3909060" cy="3977640"/>
-          </a:xfrm>
-          <a:prstGeom prst="rect">
-            <a:avLst/>
-          </a:prstGeom>
-        </p:spPr>
-      </p:pic>
-    </p:spTree>
-  </p:cSld>
-  <p:clrMapOvr>
-    <a:masterClrMapping/>
-  </p:clrMapOvr>
-  <p:transition spd="slow">
-    <p:fade/>
-  </p:transition>
-</p:sld>
-</file>
-
-<file path=ppt/slides/slide9.xml><?xml version="1.0" encoding="utf-8"?>
 <p:sld xmlns:a="http://schemas.openxmlformats.org/drawingml/2006/main" xmlns:r="http://schemas.openxmlformats.org/officeDocument/2006/relationships" xmlns:p="http://schemas.openxmlformats.org/presentationml/2006/main">
   <p:cSld name="Slide 9">
     <p:bg>
@@ -20238,6 +16614,2540 @@
   <p:transition spd="slow">
     <p:fade/>
   </p:transition>
+</p:sld>
+</file>
+
+<file path=ppt/slides/slide8.xml><?xml version="1.0" encoding="utf-8"?>
+<p:sld xmlns:a="http://schemas.openxmlformats.org/drawingml/2006/main" xmlns:r="http://schemas.openxmlformats.org/officeDocument/2006/relationships" xmlns:p="http://schemas.openxmlformats.org/presentationml/2006/main">
+  <p:cSld name="Problem and Solution">
+    <p:bg>
+      <p:bgPr>
+        <a:solidFill>
+          <a:srgbClr val="0F1B2D"/>
+        </a:solidFill>
+        <a:effectLst/>
+      </p:bgPr>
+    </p:bg>
+    <p:spTree>
+      <p:nvGrpSpPr>
+        <p:cNvPr id="1" name=""/>
+        <p:cNvGrpSpPr/>
+        <p:nvPr/>
+      </p:nvGrpSpPr>
+      <p:grpSpPr>
+        <a:xfrm>
+          <a:off x="0" y="0"/>
+          <a:ext cx="0" cy="0"/>
+          <a:chOff x="0" y="0"/>
+          <a:chExt cx="0" cy="0"/>
+        </a:xfrm>
+      </p:grpSpPr>
+      <p:sp>
+        <p:nvSpPr>
+          <p:cNvPr id="101" name="Badge"/>
+          <p:cNvSpPr/>
+          <p:nvPr/>
+        </p:nvSpPr>
+        <p:spPr>
+          <a:xfrm>
+            <a:off x="457200" y="274320"/>
+            <a:ext cx="1700000" cy="256032"/>
+          </a:xfrm>
+          <a:prstGeom prst="roundRect">
+            <a:avLst>
+              <a:gd name="adj" fmla="val 50000"/>
+            </a:avLst>
+          </a:prstGeom>
+          <a:solidFill>
+            <a:srgbClr val="2563EB">
+              <a:alpha val="25000"/>
+            </a:srgbClr>
+          </a:solidFill>
+          <a:ln/>
+        </p:spPr>
+      </p:sp>
+      <p:sp>
+        <p:nvSpPr>
+          <p:cNvPr id="102" name="BadgeText"/>
+          <p:cNvSpPr/>
+          <p:nvPr/>
+        </p:nvSpPr>
+        <p:spPr>
+          <a:xfrm>
+            <a:off x="457200" y="274320"/>
+            <a:ext cx="1700000" cy="256032"/>
+          </a:xfrm>
+          <a:prstGeom prst="rect">
+            <a:avLst/>
+          </a:prstGeom>
+          <a:noFill/>
+          <a:ln/>
+        </p:spPr>
+        <p:txBody>
+          <a:bodyPr wrap="square" lIns="0" tIns="0" rIns="0" bIns="0" rtlCol="0" anchor="ctr"/>
+          <a:lstStyle/>
+          <a:p>
+            <a:pPr marL="0" indent="0" algn="ctr">
+              <a:buNone/>
+            </a:pPr>
+            <a:r>
+              <a:rPr lang="en-US" sz="900" b="1" kern="0" spc="150" dirty="0">
+                <a:solidFill>
+                  <a:srgbClr val="2563EB"/>
+                </a:solidFill>
+              </a:rPr>
+              <a:t>OVERVIEW</a:t>
+            </a:r>
+          </a:p>
+        </p:txBody>
+      </p:sp>
+      <p:sp>
+        <p:nvSpPr>
+          <p:cNvPr id="103" name="Title"/>
+          <p:cNvSpPr/>
+          <p:nvPr/>
+        </p:nvSpPr>
+        <p:spPr>
+          <a:xfrm>
+            <a:off x="457200" y="590000"/>
+            <a:ext cx="8229600" cy="500000"/>
+          </a:xfrm>
+          <a:prstGeom prst="rect">
+            <a:avLst/>
+          </a:prstGeom>
+          <a:noFill/>
+          <a:ln/>
+        </p:spPr>
+        <p:txBody>
+          <a:bodyPr wrap="square" lIns="0" tIns="0" rIns="0" bIns="0" rtlCol="0" anchor="ctr"/>
+          <a:lstStyle/>
+          <a:p>
+            <a:pPr marL="0" indent="0">
+              <a:buNone/>
+            </a:pPr>
+            <a:r>
+              <a:rPr lang="en-US" sz="2200" b="1" dirty="0">
+                <a:solidFill>
+                  <a:srgbClr val="FFFFFF"/>
+                </a:solidFill>
+                <a:latin typeface="Cambria" pitchFamily="34" charset="0"/>
+              </a:rPr>
+              <a:t>Why We Built It — And What We Built</a:t>
+            </a:r>
+          </a:p>
+        </p:txBody>
+      </p:sp>
+      <p:sp>
+        <p:nvSpPr>
+          <p:cNvPr id="104" name="Badge"/>
+          <p:cNvSpPr/>
+          <p:nvPr/>
+        </p:nvSpPr>
+        <p:spPr>
+          <a:xfrm>
+            <a:off x="457200" y="1230000"/>
+            <a:ext cx="1450000" cy="230000"/>
+          </a:xfrm>
+          <a:prstGeom prst="roundRect">
+            <a:avLst>
+              <a:gd name="adj" fmla="val 50000"/>
+            </a:avLst>
+          </a:prstGeom>
+          <a:solidFill>
+            <a:srgbClr val="DC2626">
+              <a:alpha val="25000"/>
+            </a:srgbClr>
+          </a:solidFill>
+          <a:ln/>
+        </p:spPr>
+      </p:sp>
+      <p:sp>
+        <p:nvSpPr>
+          <p:cNvPr id="105" name="BadgeText"/>
+          <p:cNvSpPr/>
+          <p:nvPr/>
+        </p:nvSpPr>
+        <p:spPr>
+          <a:xfrm>
+            <a:off x="457200" y="1230000"/>
+            <a:ext cx="1450000" cy="230000"/>
+          </a:xfrm>
+          <a:prstGeom prst="rect">
+            <a:avLst/>
+          </a:prstGeom>
+          <a:noFill/>
+          <a:ln/>
+        </p:spPr>
+        <p:txBody>
+          <a:bodyPr wrap="square" lIns="0" tIns="0" rIns="0" bIns="0" rtlCol="0" anchor="ctr"/>
+          <a:lstStyle/>
+          <a:p>
+            <a:pPr marL="0" indent="0" algn="ctr">
+              <a:buNone/>
+            </a:pPr>
+            <a:r>
+              <a:rPr lang="en-US" sz="900" b="1" kern="0" spc="150" dirty="0">
+                <a:solidFill>
+                  <a:srgbClr val="DC2626"/>
+                </a:solidFill>
+              </a:rPr>
+              <a:t>THE PROBLEM</a:t>
+            </a:r>
+          </a:p>
+        </p:txBody>
+      </p:sp>
+      <p:sp>
+        <p:nvSpPr>
+          <p:cNvPr id="106" name="Text"/>
+          <p:cNvSpPr/>
+          <p:nvPr/>
+        </p:nvSpPr>
+        <p:spPr>
+          <a:xfrm>
+            <a:off x="457200" y="1560000"/>
+            <a:ext cx="340000" cy="340000"/>
+          </a:xfrm>
+          <a:prstGeom prst="rect">
+            <a:avLst/>
+          </a:prstGeom>
+          <a:noFill/>
+          <a:ln/>
+        </p:spPr>
+        <p:txBody>
+          <a:bodyPr wrap="square" lIns="0" tIns="0" rIns="0" bIns="0" rtlCol="0" anchor="ctr"/>
+          <a:lstStyle/>
+          <a:p>
+            <a:pPr marL="0" indent="0" algn="l">
+              <a:buNone/>
+            </a:pPr>
+            <a:r>
+              <a:rPr lang="en-US" sz="1500" b="0" dirty="0">
+                <a:solidFill>
+                  <a:srgbClr val="FFFFFF"/>
+                </a:solidFill>
+              </a:rPr>
+              <a:t>📄</a:t>
+            </a:r>
+          </a:p>
+        </p:txBody>
+      </p:sp>
+      <p:sp>
+        <p:nvSpPr>
+          <p:cNvPr id="107" name="Text"/>
+          <p:cNvSpPr/>
+          <p:nvPr/>
+        </p:nvSpPr>
+        <p:spPr>
+          <a:xfrm>
+            <a:off x="857200" y="1560000"/>
+            <a:ext cx="3600500" cy="180000"/>
+          </a:xfrm>
+          <a:prstGeom prst="rect">
+            <a:avLst/>
+          </a:prstGeom>
+          <a:noFill/>
+          <a:ln/>
+        </p:spPr>
+        <p:txBody>
+          <a:bodyPr wrap="square" lIns="0" tIns="0" rIns="0" bIns="0" rtlCol="0" anchor="t"/>
+          <a:lstStyle/>
+          <a:p>
+            <a:pPr marL="0" indent="0" algn="l">
+              <a:buNone/>
+            </a:pPr>
+            <a:r>
+              <a:rPr lang="en-US" sz="1050" b="1" dirty="0">
+                <a:solidFill>
+                  <a:srgbClr val="FFFFFF"/>
+                </a:solidFill>
+              </a:rPr>
+              <a:t>Manual Review</a:t>
+            </a:r>
+          </a:p>
+        </p:txBody>
+      </p:sp>
+      <p:sp>
+        <p:nvSpPr>
+          <p:cNvPr id="108" name="Text"/>
+          <p:cNvSpPr/>
+          <p:nvPr/>
+        </p:nvSpPr>
+        <p:spPr>
+          <a:xfrm>
+            <a:off x="857200" y="1735000"/>
+            <a:ext cx="3600500" cy="300000"/>
+          </a:xfrm>
+          <a:prstGeom prst="rect">
+            <a:avLst/>
+          </a:prstGeom>
+          <a:noFill/>
+          <a:ln/>
+        </p:spPr>
+        <p:txBody>
+          <a:bodyPr wrap="square" lIns="0" tIns="0" rIns="0" bIns="0" rtlCol="0" anchor="t"/>
+          <a:lstStyle/>
+          <a:p>
+            <a:pPr marL="0" indent="0" algn="l">
+              <a:lnSpc>
+                <a:spcPct val="115000"/>
+              </a:lnSpc>
+              <a:buNone/>
+            </a:pPr>
+            <a:r>
+              <a:rPr lang="en-US" sz="850" b="0" dirty="0">
+                <a:solidFill>
+                  <a:srgbClr val="94A3B8"/>
+                </a:solidFill>
+              </a:rPr>
+              <a:t>Officers read 50-100 page PDFs by hand — 3-5 days per application.</a:t>
+            </a:r>
+          </a:p>
+        </p:txBody>
+      </p:sp>
+      <p:sp>
+        <p:nvSpPr>
+          <p:cNvPr id="109" name="Text"/>
+          <p:cNvSpPr/>
+          <p:nvPr/>
+        </p:nvSpPr>
+        <p:spPr>
+          <a:xfrm>
+            <a:off x="457200" y="2030000"/>
+            <a:ext cx="340000" cy="340000"/>
+          </a:xfrm>
+          <a:prstGeom prst="rect">
+            <a:avLst/>
+          </a:prstGeom>
+          <a:noFill/>
+          <a:ln/>
+        </p:spPr>
+        <p:txBody>
+          <a:bodyPr wrap="square" lIns="0" tIns="0" rIns="0" bIns="0" rtlCol="0" anchor="ctr"/>
+          <a:lstStyle/>
+          <a:p>
+            <a:pPr marL="0" indent="0" algn="l">
+              <a:buNone/>
+            </a:pPr>
+            <a:r>
+              <a:rPr lang="en-US" sz="1500" b="0" dirty="0">
+                <a:solidFill>
+                  <a:srgbClr val="FFFFFF"/>
+                </a:solidFill>
+              </a:rPr>
+              <a:t>❌</a:t>
+            </a:r>
+          </a:p>
+        </p:txBody>
+      </p:sp>
+      <p:sp>
+        <p:nvSpPr>
+          <p:cNvPr id="110" name="Text"/>
+          <p:cNvSpPr/>
+          <p:nvPr/>
+        </p:nvSpPr>
+        <p:spPr>
+          <a:xfrm>
+            <a:off x="857200" y="2030000"/>
+            <a:ext cx="3600500" cy="180000"/>
+          </a:xfrm>
+          <a:prstGeom prst="rect">
+            <a:avLst/>
+          </a:prstGeom>
+          <a:noFill/>
+          <a:ln/>
+        </p:spPr>
+        <p:txBody>
+          <a:bodyPr wrap="square" lIns="0" tIns="0" rIns="0" bIns="0" rtlCol="0" anchor="t"/>
+          <a:lstStyle/>
+          <a:p>
+            <a:pPr marL="0" indent="0" algn="l">
+              <a:buNone/>
+            </a:pPr>
+            <a:r>
+              <a:rPr lang="en-US" sz="1050" b="1" dirty="0">
+                <a:solidFill>
+                  <a:srgbClr val="FFFFFF"/>
+                </a:solidFill>
+              </a:rPr>
+              <a:t>Human Error</a:t>
+            </a:r>
+          </a:p>
+        </p:txBody>
+      </p:sp>
+      <p:sp>
+        <p:nvSpPr>
+          <p:cNvPr id="111" name="Text"/>
+          <p:cNvSpPr/>
+          <p:nvPr/>
+        </p:nvSpPr>
+        <p:spPr>
+          <a:xfrm>
+            <a:off x="857200" y="2205000"/>
+            <a:ext cx="3600500" cy="300000"/>
+          </a:xfrm>
+          <a:prstGeom prst="rect">
+            <a:avLst/>
+          </a:prstGeom>
+          <a:noFill/>
+          <a:ln/>
+        </p:spPr>
+        <p:txBody>
+          <a:bodyPr wrap="square" lIns="0" tIns="0" rIns="0" bIns="0" rtlCol="0" anchor="t"/>
+          <a:lstStyle/>
+          <a:p>
+            <a:pPr marL="0" indent="0" algn="l">
+              <a:lnSpc>
+                <a:spcPct val="115000"/>
+              </a:lnSpc>
+              <a:buNone/>
+            </a:pPr>
+            <a:r>
+              <a:rPr lang="en-US" sz="850" b="0" dirty="0">
+                <a:solidFill>
+                  <a:srgbClr val="94A3B8"/>
+                </a:solidFill>
+              </a:rPr>
+              <a:t>Same applicant gets different risk ratings from different officers.</a:t>
+            </a:r>
+          </a:p>
+        </p:txBody>
+      </p:sp>
+      <p:sp>
+        <p:nvSpPr>
+          <p:cNvPr id="112" name="Text"/>
+          <p:cNvSpPr/>
+          <p:nvPr/>
+        </p:nvSpPr>
+        <p:spPr>
+          <a:xfrm>
+            <a:off x="457200" y="2500000"/>
+            <a:ext cx="340000" cy="340000"/>
+          </a:xfrm>
+          <a:prstGeom prst="rect">
+            <a:avLst/>
+          </a:prstGeom>
+          <a:noFill/>
+          <a:ln/>
+        </p:spPr>
+        <p:txBody>
+          <a:bodyPr wrap="square" lIns="0" tIns="0" rIns="0" bIns="0" rtlCol="0" anchor="ctr"/>
+          <a:lstStyle/>
+          <a:p>
+            <a:pPr marL="0" indent="0" algn="l">
+              <a:buNone/>
+            </a:pPr>
+            <a:r>
+              <a:rPr lang="en-US" sz="1500" b="0" dirty="0">
+                <a:solidFill>
+                  <a:srgbClr val="FFFFFF"/>
+                </a:solidFill>
+              </a:rPr>
+              <a:t>⏰</a:t>
+            </a:r>
+          </a:p>
+        </p:txBody>
+      </p:sp>
+      <p:sp>
+        <p:nvSpPr>
+          <p:cNvPr id="113" name="Text"/>
+          <p:cNvSpPr/>
+          <p:nvPr/>
+        </p:nvSpPr>
+        <p:spPr>
+          <a:xfrm>
+            <a:off x="857200" y="2500000"/>
+            <a:ext cx="3600500" cy="180000"/>
+          </a:xfrm>
+          <a:prstGeom prst="rect">
+            <a:avLst/>
+          </a:prstGeom>
+          <a:noFill/>
+          <a:ln/>
+        </p:spPr>
+        <p:txBody>
+          <a:bodyPr wrap="square" lIns="0" tIns="0" rIns="0" bIns="0" rtlCol="0" anchor="t"/>
+          <a:lstStyle/>
+          <a:p>
+            <a:pPr marL="0" indent="0" algn="l">
+              <a:buNone/>
+            </a:pPr>
+            <a:r>
+              <a:rPr lang="en-US" sz="1050" b="1" dirty="0">
+                <a:solidFill>
+                  <a:srgbClr val="FFFFFF"/>
+                </a:solidFill>
+              </a:rPr>
+              <a:t>Slow Decisions</a:t>
+            </a:r>
+          </a:p>
+        </p:txBody>
+      </p:sp>
+      <p:sp>
+        <p:nvSpPr>
+          <p:cNvPr id="114" name="Text"/>
+          <p:cNvSpPr/>
+          <p:nvPr/>
+        </p:nvSpPr>
+        <p:spPr>
+          <a:xfrm>
+            <a:off x="857200" y="2675000"/>
+            <a:ext cx="3600500" cy="300000"/>
+          </a:xfrm>
+          <a:prstGeom prst="rect">
+            <a:avLst/>
+          </a:prstGeom>
+          <a:noFill/>
+          <a:ln/>
+        </p:spPr>
+        <p:txBody>
+          <a:bodyPr wrap="square" lIns="0" tIns="0" rIns="0" bIns="0" rtlCol="0" anchor="t"/>
+          <a:lstStyle/>
+          <a:p>
+            <a:pPr marL="0" indent="0" algn="l">
+              <a:lnSpc>
+                <a:spcPct val="115000"/>
+              </a:lnSpc>
+              <a:buNone/>
+            </a:pPr>
+            <a:r>
+              <a:rPr lang="en-US" sz="850" b="0" dirty="0">
+                <a:solidFill>
+                  <a:srgbClr val="94A3B8"/>
+                </a:solidFill>
+              </a:rPr>
+              <a:t>Customers wait weeks while documents sit in a processing queue.</a:t>
+            </a:r>
+          </a:p>
+        </p:txBody>
+      </p:sp>
+      <p:sp>
+        <p:nvSpPr>
+          <p:cNvPr id="115" name="Text"/>
+          <p:cNvSpPr/>
+          <p:nvPr/>
+        </p:nvSpPr>
+        <p:spPr>
+          <a:xfrm>
+            <a:off x="457200" y="2970000"/>
+            <a:ext cx="340000" cy="340000"/>
+          </a:xfrm>
+          <a:prstGeom prst="rect">
+            <a:avLst/>
+          </a:prstGeom>
+          <a:noFill/>
+          <a:ln/>
+        </p:spPr>
+        <p:txBody>
+          <a:bodyPr wrap="square" lIns="0" tIns="0" rIns="0" bIns="0" rtlCol="0" anchor="ctr"/>
+          <a:lstStyle/>
+          <a:p>
+            <a:pPr marL="0" indent="0" algn="l">
+              <a:buNone/>
+            </a:pPr>
+            <a:r>
+              <a:rPr lang="en-US" sz="1500" b="0" dirty="0">
+                <a:solidFill>
+                  <a:srgbClr val="FFFFFF"/>
+                </a:solidFill>
+              </a:rPr>
+              <a:t>💰</a:t>
+            </a:r>
+          </a:p>
+        </p:txBody>
+      </p:sp>
+      <p:sp>
+        <p:nvSpPr>
+          <p:cNvPr id="116" name="Text"/>
+          <p:cNvSpPr/>
+          <p:nvPr/>
+        </p:nvSpPr>
+        <p:spPr>
+          <a:xfrm>
+            <a:off x="857200" y="2970000"/>
+            <a:ext cx="3600500" cy="180000"/>
+          </a:xfrm>
+          <a:prstGeom prst="rect">
+            <a:avLst/>
+          </a:prstGeom>
+          <a:noFill/>
+          <a:ln/>
+        </p:spPr>
+        <p:txBody>
+          <a:bodyPr wrap="square" lIns="0" tIns="0" rIns="0" bIns="0" rtlCol="0" anchor="t"/>
+          <a:lstStyle/>
+          <a:p>
+            <a:pPr marL="0" indent="0" algn="l">
+              <a:buNone/>
+            </a:pPr>
+            <a:r>
+              <a:rPr lang="en-US" sz="1050" b="1" dirty="0">
+                <a:solidFill>
+                  <a:srgbClr val="FFFFFF"/>
+                </a:solidFill>
+              </a:rPr>
+              <a:t>Revenue Loss</a:t>
+            </a:r>
+          </a:p>
+        </p:txBody>
+      </p:sp>
+      <p:sp>
+        <p:nvSpPr>
+          <p:cNvPr id="117" name="Text"/>
+          <p:cNvSpPr/>
+          <p:nvPr/>
+        </p:nvSpPr>
+        <p:spPr>
+          <a:xfrm>
+            <a:off x="857200" y="3145000"/>
+            <a:ext cx="3600500" cy="300000"/>
+          </a:xfrm>
+          <a:prstGeom prst="rect">
+            <a:avLst/>
+          </a:prstGeom>
+          <a:noFill/>
+          <a:ln/>
+        </p:spPr>
+        <p:txBody>
+          <a:bodyPr wrap="square" lIns="0" tIns="0" rIns="0" bIns="0" rtlCol="0" anchor="t"/>
+          <a:lstStyle/>
+          <a:p>
+            <a:pPr marL="0" indent="0" algn="l">
+              <a:lnSpc>
+                <a:spcPct val="115000"/>
+              </a:lnSpc>
+              <a:buNone/>
+            </a:pPr>
+            <a:r>
+              <a:rPr lang="en-US" sz="850" b="0" dirty="0">
+                <a:solidFill>
+                  <a:srgbClr val="94A3B8"/>
+                </a:solidFill>
+              </a:rPr>
+              <a:t>Banks lose creditworthy customers to faster competitors.</a:t>
+            </a:r>
+          </a:p>
+        </p:txBody>
+      </p:sp>
+      <p:sp>
+        <p:nvSpPr>
+          <p:cNvPr id="118" name="Badge"/>
+          <p:cNvSpPr/>
+          <p:nvPr/>
+        </p:nvSpPr>
+        <p:spPr>
+          <a:xfrm>
+            <a:off x="4686300" y="1230000"/>
+            <a:ext cx="1550000" cy="230000"/>
+          </a:xfrm>
+          <a:prstGeom prst="roundRect">
+            <a:avLst>
+              <a:gd name="adj" fmla="val 50000"/>
+            </a:avLst>
+          </a:prstGeom>
+          <a:solidFill>
+            <a:srgbClr val="059669">
+              <a:alpha val="25000"/>
+            </a:srgbClr>
+          </a:solidFill>
+          <a:ln/>
+        </p:spPr>
+      </p:sp>
+      <p:sp>
+        <p:nvSpPr>
+          <p:cNvPr id="119" name="BadgeText"/>
+          <p:cNvSpPr/>
+          <p:nvPr/>
+        </p:nvSpPr>
+        <p:spPr>
+          <a:xfrm>
+            <a:off x="4686300" y="1230000"/>
+            <a:ext cx="1550000" cy="230000"/>
+          </a:xfrm>
+          <a:prstGeom prst="rect">
+            <a:avLst/>
+          </a:prstGeom>
+          <a:noFill/>
+          <a:ln/>
+        </p:spPr>
+        <p:txBody>
+          <a:bodyPr wrap="square" lIns="0" tIns="0" rIns="0" bIns="0" rtlCol="0" anchor="ctr"/>
+          <a:lstStyle/>
+          <a:p>
+            <a:pPr marL="0" indent="0" algn="ctr">
+              <a:buNone/>
+            </a:pPr>
+            <a:r>
+              <a:rPr lang="en-US" sz="900" b="1" kern="0" spc="150" dirty="0">
+                <a:solidFill>
+                  <a:srgbClr val="059669"/>
+                </a:solidFill>
+              </a:rPr>
+              <a:t>OUR SOLUTION</a:t>
+            </a:r>
+          </a:p>
+        </p:txBody>
+      </p:sp>
+      <p:sp>
+        <p:nvSpPr>
+          <p:cNvPr id="120" name="Text"/>
+          <p:cNvSpPr/>
+          <p:nvPr/>
+        </p:nvSpPr>
+        <p:spPr>
+          <a:xfrm>
+            <a:off x="4686300" y="1560000"/>
+            <a:ext cx="4000500" cy="620000"/>
+          </a:xfrm>
+          <a:prstGeom prst="rect">
+            <a:avLst/>
+          </a:prstGeom>
+          <a:noFill/>
+          <a:ln/>
+        </p:spPr>
+        <p:txBody>
+          <a:bodyPr wrap="square" lIns="0" tIns="0" rIns="0" bIns="0" rtlCol="0" anchor="t"/>
+          <a:lstStyle/>
+          <a:p>
+            <a:pPr marL="0" indent="0" algn="l">
+              <a:lnSpc>
+                <a:spcPct val="125000"/>
+              </a:lnSpc>
+              <a:buNone/>
+            </a:pPr>
+            <a:r>
+              <a:rPr lang="en-US" sz="950" b="0" dirty="0">
+                <a:solidFill>
+                  <a:srgbClr val="CBD5E1"/>
+                </a:solidFill>
+              </a:rPr>
+              <a:t>An AI platform that extracts key financial data from uploaded PDFs, generates explainable credit risk scores, and gives AI-powered loan recommendations — for both individual customers and financial institutions.</a:t>
+            </a:r>
+          </a:p>
+        </p:txBody>
+      </p:sp>
+      <p:sp>
+        <p:nvSpPr>
+          <p:cNvPr id="121" name="Text"/>
+          <p:cNvSpPr/>
+          <p:nvPr/>
+        </p:nvSpPr>
+        <p:spPr>
+          <a:xfrm>
+            <a:off x="4686300" y="2260000"/>
+            <a:ext cx="30000" cy="200000"/>
+          </a:xfrm>
+          <a:prstGeom prst="rect">
+            <a:avLst/>
+          </a:prstGeom>
+          <a:noFill/>
+          <a:ln/>
+        </p:spPr>
+        <p:txBody>
+          <a:bodyPr wrap="square" lIns="0" tIns="0" rIns="0" bIns="0" rtlCol="0" anchor="t"/>
+          <a:lstStyle/>
+          <a:p>
+            <a:pPr marL="0" indent="0" algn="l">
+              <a:buNone/>
+            </a:pPr>
+            <a:r>
+              <a:rPr lang="en-US" sz="1000" b="1" dirty="0">
+                <a:solidFill>
+                  <a:srgbClr val="059669"/>
+                </a:solidFill>
+              </a:rPr>
+              <a:t>•</a:t>
+            </a:r>
+          </a:p>
+        </p:txBody>
+      </p:sp>
+      <p:sp>
+        <p:nvSpPr>
+          <p:cNvPr id="122" name="Text"/>
+          <p:cNvSpPr/>
+          <p:nvPr/>
+        </p:nvSpPr>
+        <p:spPr>
+          <a:xfrm>
+            <a:off x="4906300" y="2260000"/>
+            <a:ext cx="3780500" cy="200000"/>
+          </a:xfrm>
+          <a:prstGeom prst="rect">
+            <a:avLst/>
+          </a:prstGeom>
+          <a:noFill/>
+          <a:ln/>
+        </p:spPr>
+        <p:txBody>
+          <a:bodyPr wrap="square" lIns="0" tIns="0" rIns="0" bIns="0" rtlCol="0" anchor="t"/>
+          <a:lstStyle/>
+          <a:p>
+            <a:pPr marL="0" indent="0" algn="l">
+              <a:buNone/>
+            </a:pPr>
+            <a:r>
+              <a:rPr lang="en-US" sz="900" b="0" dirty="0">
+                <a:solidFill>
+                  <a:srgbClr val="E2E8F0"/>
+                </a:solidFill>
+              </a:rPr>
+              <a:t>Automatic PDF data extraction</a:t>
+            </a:r>
+          </a:p>
+        </p:txBody>
+      </p:sp>
+      <p:sp>
+        <p:nvSpPr>
+          <p:cNvPr id="123" name="Text"/>
+          <p:cNvSpPr/>
+          <p:nvPr/>
+        </p:nvSpPr>
+        <p:spPr>
+          <a:xfrm>
+            <a:off x="4686300" y="2520000"/>
+            <a:ext cx="30000" cy="200000"/>
+          </a:xfrm>
+          <a:prstGeom prst="rect">
+            <a:avLst/>
+          </a:prstGeom>
+          <a:noFill/>
+          <a:ln/>
+        </p:spPr>
+        <p:txBody>
+          <a:bodyPr wrap="square" lIns="0" tIns="0" rIns="0" bIns="0" rtlCol="0" anchor="t"/>
+          <a:lstStyle/>
+          <a:p>
+            <a:pPr marL="0" indent="0" algn="l">
+              <a:buNone/>
+            </a:pPr>
+            <a:r>
+              <a:rPr lang="en-US" sz="1000" b="1" dirty="0">
+                <a:solidFill>
+                  <a:srgbClr val="059669"/>
+                </a:solidFill>
+              </a:rPr>
+              <a:t>•</a:t>
+            </a:r>
+          </a:p>
+        </p:txBody>
+      </p:sp>
+      <p:sp>
+        <p:nvSpPr>
+          <p:cNvPr id="124" name="Text"/>
+          <p:cNvSpPr/>
+          <p:nvPr/>
+        </p:nvSpPr>
+        <p:spPr>
+          <a:xfrm>
+            <a:off x="4906300" y="2520000"/>
+            <a:ext cx="3780500" cy="200000"/>
+          </a:xfrm>
+          <a:prstGeom prst="rect">
+            <a:avLst/>
+          </a:prstGeom>
+          <a:noFill/>
+          <a:ln/>
+        </p:spPr>
+        <p:txBody>
+          <a:bodyPr wrap="square" lIns="0" tIns="0" rIns="0" bIns="0" rtlCol="0" anchor="t"/>
+          <a:lstStyle/>
+          <a:p>
+            <a:pPr marL="0" indent="0" algn="l">
+              <a:buNone/>
+            </a:pPr>
+            <a:r>
+              <a:rPr lang="en-US" sz="900" b="0" dirty="0">
+                <a:solidFill>
+                  <a:srgbClr val="E2E8F0"/>
+                </a:solidFill>
+              </a:rPr>
+              <a:t>Explainable risk scores, not black-box numbers</a:t>
+            </a:r>
+          </a:p>
+        </p:txBody>
+      </p:sp>
+      <p:sp>
+        <p:nvSpPr>
+          <p:cNvPr id="125" name="Text"/>
+          <p:cNvSpPr/>
+          <p:nvPr/>
+        </p:nvSpPr>
+        <p:spPr>
+          <a:xfrm>
+            <a:off x="4686300" y="2780000"/>
+            <a:ext cx="30000" cy="200000"/>
+          </a:xfrm>
+          <a:prstGeom prst="rect">
+            <a:avLst/>
+          </a:prstGeom>
+          <a:noFill/>
+          <a:ln/>
+        </p:spPr>
+        <p:txBody>
+          <a:bodyPr wrap="square" lIns="0" tIns="0" rIns="0" bIns="0" rtlCol="0" anchor="t"/>
+          <a:lstStyle/>
+          <a:p>
+            <a:pPr marL="0" indent="0" algn="l">
+              <a:buNone/>
+            </a:pPr>
+            <a:r>
+              <a:rPr lang="en-US" sz="1000" b="1" dirty="0">
+                <a:solidFill>
+                  <a:srgbClr val="059669"/>
+                </a:solidFill>
+              </a:rPr>
+              <a:t>•</a:t>
+            </a:r>
+          </a:p>
+        </p:txBody>
+      </p:sp>
+      <p:sp>
+        <p:nvSpPr>
+          <p:cNvPr id="126" name="Text"/>
+          <p:cNvSpPr/>
+          <p:nvPr/>
+        </p:nvSpPr>
+        <p:spPr>
+          <a:xfrm>
+            <a:off x="4906300" y="2780000"/>
+            <a:ext cx="3780500" cy="200000"/>
+          </a:xfrm>
+          <a:prstGeom prst="rect">
+            <a:avLst/>
+          </a:prstGeom>
+          <a:noFill/>
+          <a:ln/>
+        </p:spPr>
+        <p:txBody>
+          <a:bodyPr wrap="square" lIns="0" tIns="0" rIns="0" bIns="0" rtlCol="0" anchor="t"/>
+          <a:lstStyle/>
+          <a:p>
+            <a:pPr marL="0" indent="0" algn="l">
+              <a:buNone/>
+            </a:pPr>
+            <a:r>
+              <a:rPr lang="en-US" sz="900" b="0" dirty="0">
+                <a:solidFill>
+                  <a:srgbClr val="E2E8F0"/>
+                </a:solidFill>
+              </a:rPr>
+              <a:t>Safer loan amounts, better rates, next steps</a:t>
+            </a:r>
+          </a:p>
+        </p:txBody>
+      </p:sp>
+      <p:sp>
+        <p:nvSpPr>
+          <p:cNvPr id="127" name="Text"/>
+          <p:cNvSpPr/>
+          <p:nvPr/>
+        </p:nvSpPr>
+        <p:spPr>
+          <a:xfrm>
+            <a:off x="4686300" y="3040000"/>
+            <a:ext cx="30000" cy="200000"/>
+          </a:xfrm>
+          <a:prstGeom prst="rect">
+            <a:avLst/>
+          </a:prstGeom>
+          <a:noFill/>
+          <a:ln/>
+        </p:spPr>
+        <p:txBody>
+          <a:bodyPr wrap="square" lIns="0" tIns="0" rIns="0" bIns="0" rtlCol="0" anchor="t"/>
+          <a:lstStyle/>
+          <a:p>
+            <a:pPr marL="0" indent="0" algn="l">
+              <a:buNone/>
+            </a:pPr>
+            <a:r>
+              <a:rPr lang="en-US" sz="1000" b="1" dirty="0">
+                <a:solidFill>
+                  <a:srgbClr val="059669"/>
+                </a:solidFill>
+              </a:rPr>
+              <a:t>•</a:t>
+            </a:r>
+          </a:p>
+        </p:txBody>
+      </p:sp>
+      <p:sp>
+        <p:nvSpPr>
+          <p:cNvPr id="128" name="Text"/>
+          <p:cNvSpPr/>
+          <p:nvPr/>
+        </p:nvSpPr>
+        <p:spPr>
+          <a:xfrm>
+            <a:off x="4906300" y="3040000"/>
+            <a:ext cx="3780500" cy="200000"/>
+          </a:xfrm>
+          <a:prstGeom prst="rect">
+            <a:avLst/>
+          </a:prstGeom>
+          <a:noFill/>
+          <a:ln/>
+        </p:spPr>
+        <p:txBody>
+          <a:bodyPr wrap="square" lIns="0" tIns="0" rIns="0" bIns="0" rtlCol="0" anchor="t"/>
+          <a:lstStyle/>
+          <a:p>
+            <a:pPr marL="0" indent="0" algn="l">
+              <a:buNone/>
+            </a:pPr>
+            <a:r>
+              <a:rPr lang="en-US" sz="900" b="0" dirty="0">
+                <a:solidFill>
+                  <a:srgbClr val="E2E8F0"/>
+                </a:solidFill>
+              </a:rPr>
+              <a:t>Full CI/CD deploy pipeline on Azure</a:t>
+            </a:r>
+          </a:p>
+        </p:txBody>
+      </p:sp>
+      <p:sp>
+        <p:nvSpPr>
+          <p:cNvPr id="129" name="Pill"/>
+          <p:cNvSpPr/>
+          <p:nvPr/>
+        </p:nvSpPr>
+        <p:spPr>
+          <a:xfrm>
+            <a:off x="4686300" y="3420000"/>
+            <a:ext cx="750000" cy="250000"/>
+          </a:xfrm>
+          <a:prstGeom prst="roundRect">
+            <a:avLst>
+              <a:gd name="adj" fmla="val 50000"/>
+            </a:avLst>
+          </a:prstGeom>
+          <a:solidFill>
+            <a:srgbClr val="2563EB">
+              <a:alpha val="20000"/>
+            </a:srgbClr>
+          </a:solidFill>
+          <a:ln/>
+        </p:spPr>
+        <p:txBody>
+          <a:bodyPr wrap="square" lIns="0" tIns="0" rIns="0" bIns="0" rtlCol="0" anchor="ctr"/>
+          <a:lstStyle/>
+          <a:p>
+            <a:pPr marL="0" indent="0" algn="ctr">
+              <a:buNone/>
+            </a:pPr>
+            <a:r>
+              <a:rPr lang="en-US" sz="750" b="1" dirty="0">
+                <a:solidFill>
+                  <a:srgbClr val="FFFFFF"/>
+                </a:solidFill>
+              </a:rPr>
+              <a:t>Streamlit</a:t>
+            </a:r>
+          </a:p>
+        </p:txBody>
+      </p:sp>
+      <p:sp>
+        <p:nvSpPr>
+          <p:cNvPr id="130" name="Pill"/>
+          <p:cNvSpPr/>
+          <p:nvPr/>
+        </p:nvSpPr>
+        <p:spPr>
+          <a:xfrm>
+            <a:off x="5516300" y="3420000"/>
+            <a:ext cx="750000" cy="250000"/>
+          </a:xfrm>
+          <a:prstGeom prst="roundRect">
+            <a:avLst>
+              <a:gd name="adj" fmla="val 50000"/>
+            </a:avLst>
+          </a:prstGeom>
+          <a:solidFill>
+            <a:srgbClr val="0891B2">
+              <a:alpha val="20000"/>
+            </a:srgbClr>
+          </a:solidFill>
+          <a:ln/>
+        </p:spPr>
+        <p:txBody>
+          <a:bodyPr wrap="square" lIns="0" tIns="0" rIns="0" bIns="0" rtlCol="0" anchor="ctr"/>
+          <a:lstStyle/>
+          <a:p>
+            <a:pPr marL="0" indent="0" algn="ctr">
+              <a:buNone/>
+            </a:pPr>
+            <a:r>
+              <a:rPr lang="en-US" sz="750" b="1" dirty="0">
+                <a:solidFill>
+                  <a:srgbClr val="FFFFFF"/>
+                </a:solidFill>
+              </a:rPr>
+              <a:t>LangChain</a:t>
+            </a:r>
+          </a:p>
+        </p:txBody>
+      </p:sp>
+      <p:sp>
+        <p:nvSpPr>
+          <p:cNvPr id="131" name="Pill"/>
+          <p:cNvSpPr/>
+          <p:nvPr/>
+        </p:nvSpPr>
+        <p:spPr>
+          <a:xfrm>
+            <a:off x="6346300" y="3420000"/>
+            <a:ext cx="690000" cy="250000"/>
+          </a:xfrm>
+          <a:prstGeom prst="roundRect">
+            <a:avLst>
+              <a:gd name="adj" fmla="val 50000"/>
+            </a:avLst>
+          </a:prstGeom>
+          <a:solidFill>
+            <a:srgbClr val="059669">
+              <a:alpha val="20000"/>
+            </a:srgbClr>
+          </a:solidFill>
+          <a:ln/>
+        </p:spPr>
+        <p:txBody>
+          <a:bodyPr wrap="square" lIns="0" tIns="0" rIns="0" bIns="0" rtlCol="0" anchor="ctr"/>
+          <a:lstStyle/>
+          <a:p>
+            <a:pPr marL="0" indent="0" algn="ctr">
+              <a:buNone/>
+            </a:pPr>
+            <a:r>
+              <a:rPr lang="en-US" sz="750" b="1" dirty="0">
+                <a:solidFill>
+                  <a:srgbClr val="FFFFFF"/>
+                </a:solidFill>
+              </a:rPr>
+              <a:t>Pinecone</a:t>
+            </a:r>
+          </a:p>
+        </p:txBody>
+      </p:sp>
+      <p:sp>
+        <p:nvSpPr>
+          <p:cNvPr id="132" name="Pill"/>
+          <p:cNvSpPr/>
+          <p:nvPr/>
+        </p:nvSpPr>
+        <p:spPr>
+          <a:xfrm>
+            <a:off x="7116300" y="3420000"/>
+            <a:ext cx="570000" cy="250000"/>
+          </a:xfrm>
+          <a:prstGeom prst="roundRect">
+            <a:avLst>
+              <a:gd name="adj" fmla="val 50000"/>
+            </a:avLst>
+          </a:prstGeom>
+          <a:solidFill>
+            <a:srgbClr val="D97706">
+              <a:alpha val="20000"/>
+            </a:srgbClr>
+          </a:solidFill>
+          <a:ln/>
+        </p:spPr>
+        <p:txBody>
+          <a:bodyPr wrap="square" lIns="0" tIns="0" rIns="0" bIns="0" rtlCol="0" anchor="ctr"/>
+          <a:lstStyle/>
+          <a:p>
+            <a:pPr marL="0" indent="0" algn="ctr">
+              <a:buNone/>
+            </a:pPr>
+            <a:r>
+              <a:rPr lang="en-US" sz="750" b="1" dirty="0">
+                <a:solidFill>
+                  <a:srgbClr val="FFFFFF"/>
+                </a:solidFill>
+              </a:rPr>
+              <a:t>Docker</a:t>
+            </a:r>
+          </a:p>
+        </p:txBody>
+      </p:sp>
+      <p:sp>
+        <p:nvSpPr>
+          <p:cNvPr id="133" name="Pill"/>
+          <p:cNvSpPr/>
+          <p:nvPr/>
+        </p:nvSpPr>
+        <p:spPr>
+          <a:xfrm>
+            <a:off x="7766300" y="3420000"/>
+            <a:ext cx="510000" cy="250000"/>
+          </a:xfrm>
+          <a:prstGeom prst="roundRect">
+            <a:avLst>
+              <a:gd name="adj" fmla="val 50000"/>
+            </a:avLst>
+          </a:prstGeom>
+          <a:solidFill>
+            <a:srgbClr val="2563EB">
+              <a:alpha val="20000"/>
+            </a:srgbClr>
+          </a:solidFill>
+          <a:ln/>
+        </p:spPr>
+        <p:txBody>
+          <a:bodyPr wrap="square" lIns="0" tIns="0" rIns="0" bIns="0" rtlCol="0" anchor="ctr"/>
+          <a:lstStyle/>
+          <a:p>
+            <a:pPr marL="0" indent="0" algn="ctr">
+              <a:buNone/>
+            </a:pPr>
+            <a:r>
+              <a:rPr lang="en-US" sz="750" b="1" dirty="0">
+                <a:solidFill>
+                  <a:srgbClr val="FFFFFF"/>
+                </a:solidFill>
+              </a:rPr>
+              <a:t>Azure</a:t>
+            </a:r>
+          </a:p>
+        </p:txBody>
+      </p:sp>
+      <p:sp>
+        <p:nvSpPr>
+          <p:cNvPr id="134" name="Pill"/>
+          <p:cNvSpPr/>
+          <p:nvPr/>
+        </p:nvSpPr>
+        <p:spPr>
+          <a:xfrm>
+            <a:off x="4686300" y="3720000"/>
+            <a:ext cx="750000" cy="250000"/>
+          </a:xfrm>
+          <a:prstGeom prst="roundRect">
+            <a:avLst>
+              <a:gd name="adj" fmla="val 50000"/>
+            </a:avLst>
+          </a:prstGeom>
+          <a:solidFill>
+            <a:srgbClr val="0891B2">
+              <a:alpha val="20000"/>
+            </a:srgbClr>
+          </a:solidFill>
+          <a:ln/>
+        </p:spPr>
+        <p:txBody>
+          <a:bodyPr wrap="square" lIns="0" tIns="0" rIns="0" bIns="0" rtlCol="0" anchor="ctr"/>
+          <a:lstStyle/>
+          <a:p>
+            <a:pPr marL="0" indent="0" algn="ctr">
+              <a:buNone/>
+            </a:pPr>
+            <a:r>
+              <a:rPr lang="en-US" sz="750" b="1" dirty="0">
+                <a:solidFill>
+                  <a:srgbClr val="FFFFFF"/>
+                </a:solidFill>
+              </a:rPr>
+              <a:t>LangSmith</a:t>
+            </a:r>
+          </a:p>
+        </p:txBody>
+      </p:sp>
+      <p:sp>
+        <p:nvSpPr>
+          <p:cNvPr id="135" name="Pill"/>
+          <p:cNvSpPr/>
+          <p:nvPr/>
+        </p:nvSpPr>
+        <p:spPr>
+          <a:xfrm>
+            <a:off x="5516300" y="3720000"/>
+            <a:ext cx="570000" cy="250000"/>
+          </a:xfrm>
+          <a:prstGeom prst="roundRect">
+            <a:avLst>
+              <a:gd name="adj" fmla="val 50000"/>
+            </a:avLst>
+          </a:prstGeom>
+          <a:solidFill>
+            <a:srgbClr val="94A3B8">
+              <a:alpha val="20000"/>
+            </a:srgbClr>
+          </a:solidFill>
+          <a:ln/>
+        </p:spPr>
+        <p:txBody>
+          <a:bodyPr wrap="square" lIns="0" tIns="0" rIns="0" bIns="0" rtlCol="0" anchor="ctr"/>
+          <a:lstStyle/>
+          <a:p>
+            <a:pPr marL="0" indent="0" algn="ctr">
+              <a:buNone/>
+            </a:pPr>
+            <a:r>
+              <a:rPr lang="en-US" sz="750" b="1" dirty="0">
+                <a:solidFill>
+                  <a:srgbClr val="FFFFFF"/>
+                </a:solidFill>
+              </a:rPr>
+              <a:t>OpenAI</a:t>
+            </a:r>
+          </a:p>
+        </p:txBody>
+      </p:sp>
+    </p:spTree>
+  </p:cSld>
+  <p:clrMapOvr>
+    <a:masterClrMapping/>
+  </p:clrMapOvr>
+</p:sld>
+</file>
+
+<file path=ppt/slides/slide9.xml><?xml version="1.0" encoding="utf-8"?>
+<p:sld xmlns:a="http://schemas.openxmlformats.org/drawingml/2006/main" xmlns:r="http://schemas.openxmlformats.org/officeDocument/2006/relationships" xmlns:p="http://schemas.openxmlformats.org/presentationml/2006/main">
+  <p:cSld name="Slide 4">
+    <p:bg>
+      <p:bgPr>
+        <a:solidFill>
+          <a:srgbClr val="0F1B2D"/>
+        </a:solidFill>
+        <a:effectLst/>
+      </p:bgPr>
+    </p:bg>
+    <p:spTree>
+      <p:nvGrpSpPr>
+        <p:cNvPr id="1" name=""/>
+        <p:cNvGrpSpPr/>
+        <p:nvPr/>
+      </p:nvGrpSpPr>
+      <p:grpSpPr>
+        <a:xfrm>
+          <a:off x="0" y="0"/>
+          <a:ext cx="0" cy="0"/>
+          <a:chOff x="0" y="0"/>
+          <a:chExt cx="0" cy="0"/>
+        </a:xfrm>
+      </p:grpSpPr>
+      <p:sp>
+        <p:nvSpPr>
+          <p:cNvPr id="2" name="Shape 0"/>
+          <p:cNvSpPr/>
+          <p:nvPr/>
+        </p:nvSpPr>
+        <p:spPr>
+          <a:xfrm>
+            <a:off x="457200" y="274320"/>
+            <a:ext cx="1280160" cy="256032"/>
+          </a:xfrm>
+          <a:prstGeom prst="roundRect">
+            <a:avLst>
+              <a:gd name="adj" fmla="val 50000"/>
+            </a:avLst>
+          </a:prstGeom>
+          <a:solidFill>
+            <a:srgbClr val="2563EB">
+              <a:alpha val="25000"/>
+            </a:srgbClr>
+          </a:solidFill>
+          <a:ln/>
+        </p:spPr>
+      </p:sp>
+      <p:sp>
+        <p:nvSpPr>
+          <p:cNvPr id="3" name="Text 1"/>
+          <p:cNvSpPr/>
+          <p:nvPr/>
+        </p:nvSpPr>
+        <p:spPr>
+          <a:xfrm>
+            <a:off x="457200" y="274320"/>
+            <a:ext cx="1280160" cy="256032"/>
+          </a:xfrm>
+          <a:prstGeom prst="rect">
+            <a:avLst/>
+          </a:prstGeom>
+          <a:noFill/>
+          <a:ln/>
+        </p:spPr>
+        <p:txBody>
+          <a:bodyPr wrap="square" lIns="0" tIns="0" rIns="0" bIns="0" rtlCol="0" anchor="ctr"/>
+          <a:lstStyle/>
+          <a:p>
+            <a:pPr marL="0" indent="0" algn="ctr">
+              <a:buNone/>
+            </a:pPr>
+            <a:r>
+              <a:rPr lang="en-US" sz="900" b="1" kern="0" spc="150" dirty="0">
+                <a:solidFill>
+                  <a:srgbClr val="2563EB"/>
+                </a:solidFill>
+              </a:rPr>
+              <a:t>ARCHITECTURE</a:t>
+            </a:r>
+            <a:endParaRPr lang="en-US" sz="900" dirty="0"/>
+          </a:p>
+        </p:txBody>
+      </p:sp>
+      <p:sp>
+        <p:nvSpPr>
+          <p:cNvPr id="4" name="Text 2"/>
+          <p:cNvSpPr/>
+          <p:nvPr/>
+        </p:nvSpPr>
+        <p:spPr>
+          <a:xfrm>
+            <a:off x="457200" y="621792"/>
+            <a:ext cx="8229600" cy="502920"/>
+          </a:xfrm>
+          <a:prstGeom prst="rect">
+            <a:avLst/>
+          </a:prstGeom>
+          <a:noFill/>
+          <a:ln/>
+        </p:spPr>
+        <p:txBody>
+          <a:bodyPr wrap="square" lIns="0" tIns="0" rIns="0" bIns="0" rtlCol="0" anchor="ctr"/>
+          <a:lstStyle/>
+          <a:p>
+            <a:pPr marL="0" indent="0">
+              <a:buNone/>
+            </a:pPr>
+            <a:r>
+              <a:rPr lang="en-US" sz="3000" b="1" dirty="0">
+                <a:solidFill>
+                  <a:srgbClr val="FFFFFF"/>
+                </a:solidFill>
+                <a:latin typeface="Cambria" pitchFamily="34" charset="0"/>
+                <a:ea typeface="Cambria" pitchFamily="34" charset="-122"/>
+                <a:cs typeface="Cambria" pitchFamily="34" charset="-120"/>
+              </a:rPr>
+              <a:t>System Architecture</a:t>
+            </a:r>
+            <a:endParaRPr lang="en-US" sz="3000" dirty="0"/>
+          </a:p>
+        </p:txBody>
+      </p:sp>
+      <p:sp>
+        <p:nvSpPr>
+          <p:cNvPr id="5" name="Shape 3"/>
+          <p:cNvSpPr/>
+          <p:nvPr/>
+        </p:nvSpPr>
+        <p:spPr>
+          <a:xfrm>
+            <a:off x="365760" y="1325880"/>
+            <a:ext cx="1572768" cy="2651760"/>
+          </a:xfrm>
+          <a:prstGeom prst="roundRect">
+            <a:avLst>
+              <a:gd name="adj" fmla="val 5814"/>
+            </a:avLst>
+          </a:prstGeom>
+          <a:solidFill>
+            <a:srgbClr val="162032"/>
+          </a:solidFill>
+          <a:ln/>
+          <a:effectLst>
+            <a:outerShdw blurRad="101600" dist="38100" dir="2700000" algn="bl" rotWithShape="0">
+              <a:srgbClr val="000000">
+                <a:alpha val="18000"/>
+              </a:srgbClr>
+            </a:outerShdw>
+          </a:effectLst>
+        </p:spPr>
+      </p:sp>
+      <p:sp>
+        <p:nvSpPr>
+          <p:cNvPr id="6" name="Shape 4"/>
+          <p:cNvSpPr/>
+          <p:nvPr/>
+        </p:nvSpPr>
+        <p:spPr>
+          <a:xfrm>
+            <a:off x="365760" y="1325880"/>
+            <a:ext cx="1572768" cy="347472"/>
+          </a:xfrm>
+          <a:prstGeom prst="roundRect">
+            <a:avLst>
+              <a:gd name="adj" fmla="val 26316"/>
+            </a:avLst>
+          </a:prstGeom>
+          <a:solidFill>
+            <a:srgbClr val="0891B2">
+              <a:alpha val="75000"/>
+            </a:srgbClr>
+          </a:solidFill>
+          <a:ln/>
+        </p:spPr>
+      </p:sp>
+      <p:sp>
+        <p:nvSpPr>
+          <p:cNvPr id="7" name="Text 5"/>
+          <p:cNvSpPr/>
+          <p:nvPr/>
+        </p:nvSpPr>
+        <p:spPr>
+          <a:xfrm>
+            <a:off x="365760" y="1325880"/>
+            <a:ext cx="1572768" cy="347472"/>
+          </a:xfrm>
+          <a:prstGeom prst="rect">
+            <a:avLst/>
+          </a:prstGeom>
+          <a:noFill/>
+          <a:ln/>
+        </p:spPr>
+        <p:txBody>
+          <a:bodyPr wrap="square" lIns="0" tIns="0" rIns="0" bIns="0" rtlCol="0" anchor="ctr"/>
+          <a:lstStyle/>
+          <a:p>
+            <a:pPr marL="0" indent="0" algn="ctr">
+              <a:buNone/>
+            </a:pPr>
+            <a:r>
+              <a:rPr lang="en-US" sz="1000" b="1" dirty="0">
+                <a:solidFill>
+                  <a:srgbClr val="FFFFFF"/>
+                </a:solidFill>
+              </a:rPr>
+              <a:t>UI Layer</a:t>
+            </a:r>
+            <a:endParaRPr lang="en-US" sz="1000" dirty="0"/>
+          </a:p>
+        </p:txBody>
+      </p:sp>
+      <p:sp>
+        <p:nvSpPr>
+          <p:cNvPr id="8" name="Text 6"/>
+          <p:cNvSpPr/>
+          <p:nvPr/>
+        </p:nvSpPr>
+        <p:spPr>
+          <a:xfrm>
+            <a:off x="457200" y="1783080"/>
+            <a:ext cx="1389888" cy="384048"/>
+          </a:xfrm>
+          <a:prstGeom prst="rect">
+            <a:avLst/>
+          </a:prstGeom>
+          <a:noFill/>
+          <a:ln/>
+        </p:spPr>
+        <p:txBody>
+          <a:bodyPr wrap="square" lIns="0" tIns="0" rIns="0" bIns="0" rtlCol="0" anchor="ctr"/>
+          <a:lstStyle/>
+          <a:p>
+            <a:pPr marL="0" indent="0" algn="ctr">
+              <a:lnSpc>
+                <a:spcPct val="120000"/>
+              </a:lnSpc>
+              <a:buNone/>
+            </a:pPr>
+            <a:r>
+              <a:rPr lang="en-US" sz="900" dirty="0">
+                <a:solidFill>
+                  <a:srgbClr val="CBD5E1"/>
+                </a:solidFill>
+              </a:rPr>
+              <a:t>Streamlit Web App</a:t>
+            </a:r>
+            <a:endParaRPr lang="en-US" sz="900" dirty="0"/>
+          </a:p>
+        </p:txBody>
+      </p:sp>
+      <p:sp>
+        <p:nvSpPr>
+          <p:cNvPr id="9" name="Text 7"/>
+          <p:cNvSpPr/>
+          <p:nvPr/>
+        </p:nvSpPr>
+        <p:spPr>
+          <a:xfrm>
+            <a:off x="457200" y="2258568"/>
+            <a:ext cx="1389888" cy="384048"/>
+          </a:xfrm>
+          <a:prstGeom prst="rect">
+            <a:avLst/>
+          </a:prstGeom>
+          <a:noFill/>
+          <a:ln/>
+        </p:spPr>
+        <p:txBody>
+          <a:bodyPr wrap="square" lIns="0" tIns="0" rIns="0" bIns="0" rtlCol="0" anchor="ctr"/>
+          <a:lstStyle/>
+          <a:p>
+            <a:pPr marL="0" indent="0" algn="ctr">
+              <a:lnSpc>
+                <a:spcPct val="120000"/>
+              </a:lnSpc>
+              <a:buNone/>
+            </a:pPr>
+            <a:r>
+              <a:rPr lang="en-US" sz="900" dirty="0">
+                <a:solidFill>
+                  <a:srgbClr val="CBD5E1"/>
+                </a:solidFill>
+              </a:rPr>
+              <a:t>Auth (JWT + bcrypt)</a:t>
+            </a:r>
+            <a:endParaRPr lang="en-US" sz="900" dirty="0"/>
+          </a:p>
+        </p:txBody>
+      </p:sp>
+      <p:sp>
+        <p:nvSpPr>
+          <p:cNvPr id="10" name="Text 8"/>
+          <p:cNvSpPr/>
+          <p:nvPr/>
+        </p:nvSpPr>
+        <p:spPr>
+          <a:xfrm>
+            <a:off x="457200" y="2734056"/>
+            <a:ext cx="1389888" cy="384048"/>
+          </a:xfrm>
+          <a:prstGeom prst="rect">
+            <a:avLst/>
+          </a:prstGeom>
+          <a:noFill/>
+          <a:ln/>
+        </p:spPr>
+        <p:txBody>
+          <a:bodyPr wrap="square" lIns="0" tIns="0" rIns="0" bIns="0" rtlCol="0" anchor="ctr"/>
+          <a:lstStyle/>
+          <a:p>
+            <a:pPr marL="0" indent="0" algn="ctr">
+              <a:lnSpc>
+                <a:spcPct val="120000"/>
+              </a:lnSpc>
+              <a:buNone/>
+            </a:pPr>
+            <a:r>
+              <a:rPr lang="en-US" sz="900" dirty="0">
+                <a:solidFill>
+                  <a:srgbClr val="CBD5E1"/>
+                </a:solidFill>
+              </a:rPr>
+              <a:t>Customer + Institution Views</a:t>
+            </a:r>
+            <a:endParaRPr lang="en-US" sz="900" dirty="0"/>
+          </a:p>
+        </p:txBody>
+      </p:sp>
+      <p:sp>
+        <p:nvSpPr>
+          <p:cNvPr id="11" name="Shape 9"/>
+          <p:cNvSpPr/>
+          <p:nvPr/>
+        </p:nvSpPr>
+        <p:spPr>
+          <a:xfrm>
+            <a:off x="1938528" y="2651760"/>
+            <a:ext cx="146304" cy="0"/>
+          </a:xfrm>
+          <a:prstGeom prst="line">
+            <a:avLst/>
+          </a:prstGeom>
+          <a:noFill/>
+          <a:ln w="19050">
+            <a:solidFill>
+              <a:srgbClr val="0891B2"/>
+            </a:solidFill>
+            <a:prstDash val="sysDash"/>
+          </a:ln>
+        </p:spPr>
+      </p:sp>
+      <p:sp>
+        <p:nvSpPr>
+          <p:cNvPr id="12" name="Shape 10"/>
+          <p:cNvSpPr/>
+          <p:nvPr/>
+        </p:nvSpPr>
+        <p:spPr>
+          <a:xfrm>
+            <a:off x="2084832" y="1325880"/>
+            <a:ext cx="1572768" cy="2651760"/>
+          </a:xfrm>
+          <a:prstGeom prst="roundRect">
+            <a:avLst>
+              <a:gd name="adj" fmla="val 5814"/>
+            </a:avLst>
+          </a:prstGeom>
+          <a:solidFill>
+            <a:srgbClr val="162032"/>
+          </a:solidFill>
+          <a:ln/>
+          <a:effectLst>
+            <a:outerShdw blurRad="101600" dist="38100" dir="2700000" algn="bl" rotWithShape="0">
+              <a:srgbClr val="000000">
+                <a:alpha val="18000"/>
+              </a:srgbClr>
+            </a:outerShdw>
+          </a:effectLst>
+        </p:spPr>
+      </p:sp>
+      <p:sp>
+        <p:nvSpPr>
+          <p:cNvPr id="13" name="Shape 11"/>
+          <p:cNvSpPr/>
+          <p:nvPr/>
+        </p:nvSpPr>
+        <p:spPr>
+          <a:xfrm>
+            <a:off x="2084832" y="1325880"/>
+            <a:ext cx="1572768" cy="347472"/>
+          </a:xfrm>
+          <a:prstGeom prst="roundRect">
+            <a:avLst>
+              <a:gd name="adj" fmla="val 26316"/>
+            </a:avLst>
+          </a:prstGeom>
+          <a:solidFill>
+            <a:srgbClr val="2563EB">
+              <a:alpha val="75000"/>
+            </a:srgbClr>
+          </a:solidFill>
+          <a:ln/>
+        </p:spPr>
+      </p:sp>
+      <p:sp>
+        <p:nvSpPr>
+          <p:cNvPr id="14" name="Text 12"/>
+          <p:cNvSpPr/>
+          <p:nvPr/>
+        </p:nvSpPr>
+        <p:spPr>
+          <a:xfrm>
+            <a:off x="2084832" y="1325880"/>
+            <a:ext cx="1572768" cy="347472"/>
+          </a:xfrm>
+          <a:prstGeom prst="rect">
+            <a:avLst/>
+          </a:prstGeom>
+          <a:noFill/>
+          <a:ln/>
+        </p:spPr>
+        <p:txBody>
+          <a:bodyPr wrap="square" lIns="0" tIns="0" rIns="0" bIns="0" rtlCol="0" anchor="ctr"/>
+          <a:lstStyle/>
+          <a:p>
+            <a:pPr marL="0" indent="0" algn="ctr">
+              <a:buNone/>
+            </a:pPr>
+            <a:r>
+              <a:rPr lang="en-US" sz="1000" b="1" dirty="0">
+                <a:solidFill>
+                  <a:srgbClr val="FFFFFF"/>
+                </a:solidFill>
+              </a:rPr>
+              <a:t>Orchestrator</a:t>
+            </a:r>
+            <a:endParaRPr lang="en-US" sz="1000" dirty="0"/>
+          </a:p>
+        </p:txBody>
+      </p:sp>
+      <p:sp>
+        <p:nvSpPr>
+          <p:cNvPr id="15" name="Text 13"/>
+          <p:cNvSpPr/>
+          <p:nvPr/>
+        </p:nvSpPr>
+        <p:spPr>
+          <a:xfrm>
+            <a:off x="2176272" y="1783080"/>
+            <a:ext cx="1389888" cy="384048"/>
+          </a:xfrm>
+          <a:prstGeom prst="rect">
+            <a:avLst/>
+          </a:prstGeom>
+          <a:noFill/>
+          <a:ln/>
+        </p:spPr>
+        <p:txBody>
+          <a:bodyPr wrap="square" lIns="0" tIns="0" rIns="0" bIns="0" rtlCol="0" anchor="ctr"/>
+          <a:lstStyle/>
+          <a:p>
+            <a:pPr marL="0" indent="0" algn="ctr">
+              <a:lnSpc>
+                <a:spcPct val="120000"/>
+              </a:lnSpc>
+              <a:buNone/>
+            </a:pPr>
+            <a:r>
+              <a:rPr lang="en-US" sz="900" dirty="0">
+                <a:solidFill>
+                  <a:srgbClr val="CBD5E1"/>
+                </a:solidFill>
+              </a:rPr>
+              <a:t>Chat Agent</a:t>
+            </a:r>
+            <a:endParaRPr lang="en-US" sz="900" dirty="0"/>
+          </a:p>
+        </p:txBody>
+      </p:sp>
+      <p:sp>
+        <p:nvSpPr>
+          <p:cNvPr id="16" name="Text 14"/>
+          <p:cNvSpPr/>
+          <p:nvPr/>
+        </p:nvSpPr>
+        <p:spPr>
+          <a:xfrm>
+            <a:off x="2176272" y="2258568"/>
+            <a:ext cx="1389888" cy="384048"/>
+          </a:xfrm>
+          <a:prstGeom prst="rect">
+            <a:avLst/>
+          </a:prstGeom>
+          <a:noFill/>
+          <a:ln/>
+        </p:spPr>
+        <p:txBody>
+          <a:bodyPr wrap="square" lIns="0" tIns="0" rIns="0" bIns="0" rtlCol="0" anchor="ctr"/>
+          <a:lstStyle/>
+          <a:p>
+            <a:pPr marL="0" indent="0" algn="ctr">
+              <a:lnSpc>
+                <a:spcPct val="120000"/>
+              </a:lnSpc>
+              <a:buNone/>
+            </a:pPr>
+            <a:r>
+              <a:rPr lang="en-US" sz="900" dirty="0">
+                <a:solidFill>
+                  <a:srgbClr val="CBD5E1"/>
+                </a:solidFill>
+              </a:rPr>
+              <a:t>Document Agent</a:t>
+            </a:r>
+            <a:endParaRPr lang="en-US" sz="900" dirty="0"/>
+          </a:p>
+        </p:txBody>
+      </p:sp>
+      <p:sp>
+        <p:nvSpPr>
+          <p:cNvPr id="17" name="Text 15"/>
+          <p:cNvSpPr/>
+          <p:nvPr/>
+        </p:nvSpPr>
+        <p:spPr>
+          <a:xfrm>
+            <a:off x="2176272" y="2734056"/>
+            <a:ext cx="1389888" cy="384048"/>
+          </a:xfrm>
+          <a:prstGeom prst="rect">
+            <a:avLst/>
+          </a:prstGeom>
+          <a:noFill/>
+          <a:ln/>
+        </p:spPr>
+        <p:txBody>
+          <a:bodyPr wrap="square" lIns="0" tIns="0" rIns="0" bIns="0" rtlCol="0" anchor="ctr"/>
+          <a:lstStyle/>
+          <a:p>
+            <a:pPr marL="0" indent="0" algn="ctr">
+              <a:lnSpc>
+                <a:spcPct val="120000"/>
+              </a:lnSpc>
+              <a:buNone/>
+            </a:pPr>
+            <a:r>
+              <a:rPr lang="en-US" sz="900" dirty="0">
+                <a:solidFill>
+                  <a:srgbClr val="CBD5E1"/>
+                </a:solidFill>
+              </a:rPr>
+              <a:t>Retrieval Agent</a:t>
+            </a:r>
+            <a:endParaRPr lang="en-US" sz="900" dirty="0"/>
+          </a:p>
+        </p:txBody>
+      </p:sp>
+      <p:sp>
+        <p:nvSpPr>
+          <p:cNvPr id="18" name="Shape 16"/>
+          <p:cNvSpPr/>
+          <p:nvPr/>
+        </p:nvSpPr>
+        <p:spPr>
+          <a:xfrm>
+            <a:off x="3657600" y="2651760"/>
+            <a:ext cx="146304" cy="0"/>
+          </a:xfrm>
+          <a:prstGeom prst="line">
+            <a:avLst/>
+          </a:prstGeom>
+          <a:noFill/>
+          <a:ln w="19050">
+            <a:solidFill>
+              <a:srgbClr val="2563EB"/>
+            </a:solidFill>
+            <a:prstDash val="sysDash"/>
+          </a:ln>
+        </p:spPr>
+      </p:sp>
+      <p:sp>
+        <p:nvSpPr>
+          <p:cNvPr id="19" name="Shape 17"/>
+          <p:cNvSpPr/>
+          <p:nvPr/>
+        </p:nvSpPr>
+        <p:spPr>
+          <a:xfrm>
+            <a:off x="3803904" y="1325880"/>
+            <a:ext cx="1572768" cy="2651760"/>
+          </a:xfrm>
+          <a:prstGeom prst="roundRect">
+            <a:avLst>
+              <a:gd name="adj" fmla="val 5814"/>
+            </a:avLst>
+          </a:prstGeom>
+          <a:solidFill>
+            <a:srgbClr val="162032"/>
+          </a:solidFill>
+          <a:ln/>
+          <a:effectLst>
+            <a:outerShdw blurRad="101600" dist="38100" dir="2700000" algn="bl" rotWithShape="0">
+              <a:srgbClr val="000000">
+                <a:alpha val="18000"/>
+              </a:srgbClr>
+            </a:outerShdw>
+          </a:effectLst>
+        </p:spPr>
+      </p:sp>
+      <p:sp>
+        <p:nvSpPr>
+          <p:cNvPr id="20" name="Shape 18"/>
+          <p:cNvSpPr/>
+          <p:nvPr/>
+        </p:nvSpPr>
+        <p:spPr>
+          <a:xfrm>
+            <a:off x="3803904" y="1325880"/>
+            <a:ext cx="1572768" cy="347472"/>
+          </a:xfrm>
+          <a:prstGeom prst="roundRect">
+            <a:avLst>
+              <a:gd name="adj" fmla="val 26316"/>
+            </a:avLst>
+          </a:prstGeom>
+          <a:solidFill>
+            <a:srgbClr val="D97706">
+              <a:alpha val="75000"/>
+            </a:srgbClr>
+          </a:solidFill>
+          <a:ln/>
+        </p:spPr>
+      </p:sp>
+      <p:sp>
+        <p:nvSpPr>
+          <p:cNvPr id="21" name="Text 19"/>
+          <p:cNvSpPr/>
+          <p:nvPr/>
+        </p:nvSpPr>
+        <p:spPr>
+          <a:xfrm>
+            <a:off x="3803904" y="1325880"/>
+            <a:ext cx="1572768" cy="347472"/>
+          </a:xfrm>
+          <a:prstGeom prst="rect">
+            <a:avLst/>
+          </a:prstGeom>
+          <a:noFill/>
+          <a:ln/>
+        </p:spPr>
+        <p:txBody>
+          <a:bodyPr wrap="square" lIns="0" tIns="0" rIns="0" bIns="0" rtlCol="0" anchor="ctr"/>
+          <a:lstStyle/>
+          <a:p>
+            <a:pPr marL="0" indent="0" algn="ctr">
+              <a:buNone/>
+            </a:pPr>
+            <a:r>
+              <a:rPr lang="en-US" sz="1000" b="1" dirty="0">
+                <a:solidFill>
+                  <a:srgbClr val="FFFFFF"/>
+                </a:solidFill>
+              </a:rPr>
+              <a:t>AI / LLM</a:t>
+            </a:r>
+            <a:endParaRPr lang="en-US" sz="1000" dirty="0"/>
+          </a:p>
+        </p:txBody>
+      </p:sp>
+      <p:sp>
+        <p:nvSpPr>
+          <p:cNvPr id="22" name="Text 20"/>
+          <p:cNvSpPr/>
+          <p:nvPr/>
+        </p:nvSpPr>
+        <p:spPr>
+          <a:xfrm>
+            <a:off x="3895344" y="1783080"/>
+            <a:ext cx="1389888" cy="384048"/>
+          </a:xfrm>
+          <a:prstGeom prst="rect">
+            <a:avLst/>
+          </a:prstGeom>
+          <a:noFill/>
+          <a:ln/>
+        </p:spPr>
+        <p:txBody>
+          <a:bodyPr wrap="square" lIns="0" tIns="0" rIns="0" bIns="0" rtlCol="0" anchor="ctr"/>
+          <a:lstStyle/>
+          <a:p>
+            <a:pPr marL="0" indent="0" algn="ctr">
+              <a:lnSpc>
+                <a:spcPct val="120000"/>
+              </a:lnSpc>
+              <a:buNone/>
+            </a:pPr>
+            <a:r>
+              <a:rPr lang="en-US" sz="900" dirty="0">
+                <a:solidFill>
+                  <a:srgbClr val="CBD5E1"/>
+                </a:solidFill>
+              </a:rPr>
+              <a:t>OpenAI → Groq → Gemini</a:t>
+            </a:r>
+            <a:endParaRPr lang="en-US" sz="900" dirty="0"/>
+          </a:p>
+        </p:txBody>
+      </p:sp>
+      <p:sp>
+        <p:nvSpPr>
+          <p:cNvPr id="23" name="Text 21"/>
+          <p:cNvSpPr/>
+          <p:nvPr/>
+        </p:nvSpPr>
+        <p:spPr>
+          <a:xfrm>
+            <a:off x="3895344" y="2258568"/>
+            <a:ext cx="1389888" cy="384048"/>
+          </a:xfrm>
+          <a:prstGeom prst="rect">
+            <a:avLst/>
+          </a:prstGeom>
+          <a:noFill/>
+          <a:ln/>
+        </p:spPr>
+        <p:txBody>
+          <a:bodyPr wrap="square" lIns="0" tIns="0" rIns="0" bIns="0" rtlCol="0" anchor="ctr"/>
+          <a:lstStyle/>
+          <a:p>
+            <a:pPr marL="0" indent="0" algn="ctr">
+              <a:lnSpc>
+                <a:spcPct val="120000"/>
+              </a:lnSpc>
+              <a:buNone/>
+            </a:pPr>
+            <a:r>
+              <a:rPr lang="en-US" sz="900" dirty="0">
+                <a:solidFill>
+                  <a:srgbClr val="CBD5E1"/>
+                </a:solidFill>
+              </a:rPr>
+              <a:t>3-tier fallback chain</a:t>
+            </a:r>
+            <a:endParaRPr lang="en-US" sz="900" dirty="0"/>
+          </a:p>
+        </p:txBody>
+      </p:sp>
+      <p:sp>
+        <p:nvSpPr>
+          <p:cNvPr id="24" name="Text 22"/>
+          <p:cNvSpPr/>
+          <p:nvPr/>
+        </p:nvSpPr>
+        <p:spPr>
+          <a:xfrm>
+            <a:off x="3895344" y="2734056"/>
+            <a:ext cx="1389888" cy="384048"/>
+          </a:xfrm>
+          <a:prstGeom prst="rect">
+            <a:avLst/>
+          </a:prstGeom>
+          <a:noFill/>
+          <a:ln/>
+        </p:spPr>
+        <p:txBody>
+          <a:bodyPr wrap="square" lIns="0" tIns="0" rIns="0" bIns="0" rtlCol="0" anchor="ctr"/>
+          <a:lstStyle/>
+          <a:p>
+            <a:pPr marL="0" indent="0" algn="ctr">
+              <a:lnSpc>
+                <a:spcPct val="120000"/>
+              </a:lnSpc>
+              <a:buNone/>
+            </a:pPr>
+            <a:r>
+              <a:rPr lang="en-US" sz="900" dirty="0">
+                <a:solidFill>
+                  <a:srgbClr val="CBD5E1"/>
+                </a:solidFill>
+              </a:rPr>
+              <a:t>LangSmith tracing</a:t>
+            </a:r>
+            <a:endParaRPr lang="en-US" sz="900" dirty="0"/>
+          </a:p>
+        </p:txBody>
+      </p:sp>
+      <p:sp>
+        <p:nvSpPr>
+          <p:cNvPr id="25" name="Shape 23"/>
+          <p:cNvSpPr/>
+          <p:nvPr/>
+        </p:nvSpPr>
+        <p:spPr>
+          <a:xfrm>
+            <a:off x="5376672" y="2651760"/>
+            <a:ext cx="146304" cy="0"/>
+          </a:xfrm>
+          <a:prstGeom prst="line">
+            <a:avLst/>
+          </a:prstGeom>
+          <a:noFill/>
+          <a:ln w="19050">
+            <a:solidFill>
+              <a:srgbClr val="D97706"/>
+            </a:solidFill>
+            <a:prstDash val="sysDash"/>
+          </a:ln>
+        </p:spPr>
+      </p:sp>
+      <p:sp>
+        <p:nvSpPr>
+          <p:cNvPr id="26" name="Shape 24"/>
+          <p:cNvSpPr/>
+          <p:nvPr/>
+        </p:nvSpPr>
+        <p:spPr>
+          <a:xfrm>
+            <a:off x="5522976" y="1325880"/>
+            <a:ext cx="1572768" cy="2651760"/>
+          </a:xfrm>
+          <a:prstGeom prst="roundRect">
+            <a:avLst>
+              <a:gd name="adj" fmla="val 5814"/>
+            </a:avLst>
+          </a:prstGeom>
+          <a:solidFill>
+            <a:srgbClr val="162032"/>
+          </a:solidFill>
+          <a:ln/>
+          <a:effectLst>
+            <a:outerShdw blurRad="101600" dist="38100" dir="2700000" algn="bl" rotWithShape="0">
+              <a:srgbClr val="000000">
+                <a:alpha val="18000"/>
+              </a:srgbClr>
+            </a:outerShdw>
+          </a:effectLst>
+        </p:spPr>
+      </p:sp>
+      <p:sp>
+        <p:nvSpPr>
+          <p:cNvPr id="27" name="Shape 25"/>
+          <p:cNvSpPr/>
+          <p:nvPr/>
+        </p:nvSpPr>
+        <p:spPr>
+          <a:xfrm>
+            <a:off x="5522976" y="1325880"/>
+            <a:ext cx="1572768" cy="347472"/>
+          </a:xfrm>
+          <a:prstGeom prst="roundRect">
+            <a:avLst>
+              <a:gd name="adj" fmla="val 26316"/>
+            </a:avLst>
+          </a:prstGeom>
+          <a:solidFill>
+            <a:srgbClr val="059669">
+              <a:alpha val="75000"/>
+            </a:srgbClr>
+          </a:solidFill>
+          <a:ln/>
+        </p:spPr>
+      </p:sp>
+      <p:sp>
+        <p:nvSpPr>
+          <p:cNvPr id="28" name="Text 26"/>
+          <p:cNvSpPr/>
+          <p:nvPr/>
+        </p:nvSpPr>
+        <p:spPr>
+          <a:xfrm>
+            <a:off x="5522976" y="1325880"/>
+            <a:ext cx="1572768" cy="347472"/>
+          </a:xfrm>
+          <a:prstGeom prst="rect">
+            <a:avLst/>
+          </a:prstGeom>
+          <a:noFill/>
+          <a:ln/>
+        </p:spPr>
+        <p:txBody>
+          <a:bodyPr wrap="square" lIns="0" tIns="0" rIns="0" bIns="0" rtlCol="0" anchor="ctr"/>
+          <a:lstStyle/>
+          <a:p>
+            <a:pPr marL="0" indent="0" algn="ctr">
+              <a:buNone/>
+            </a:pPr>
+            <a:r>
+              <a:rPr lang="en-US" sz="1000" b="1" dirty="0">
+                <a:solidFill>
+                  <a:srgbClr val="FFFFFF"/>
+                </a:solidFill>
+              </a:rPr>
+              <a:t>Data Layer</a:t>
+            </a:r>
+            <a:endParaRPr lang="en-US" sz="1000" dirty="0"/>
+          </a:p>
+        </p:txBody>
+      </p:sp>
+      <p:sp>
+        <p:nvSpPr>
+          <p:cNvPr id="29" name="Text 27"/>
+          <p:cNvSpPr/>
+          <p:nvPr/>
+        </p:nvSpPr>
+        <p:spPr>
+          <a:xfrm>
+            <a:off x="5614416" y="1783080"/>
+            <a:ext cx="1389888" cy="384048"/>
+          </a:xfrm>
+          <a:prstGeom prst="rect">
+            <a:avLst/>
+          </a:prstGeom>
+          <a:noFill/>
+          <a:ln/>
+        </p:spPr>
+        <p:txBody>
+          <a:bodyPr wrap="square" lIns="0" tIns="0" rIns="0" bIns="0" rtlCol="0" anchor="ctr"/>
+          <a:lstStyle/>
+          <a:p>
+            <a:pPr marL="0" indent="0" algn="ctr">
+              <a:lnSpc>
+                <a:spcPct val="120000"/>
+              </a:lnSpc>
+              <a:buNone/>
+            </a:pPr>
+            <a:r>
+              <a:rPr lang="en-US" sz="900" dirty="0">
+                <a:solidFill>
+                  <a:srgbClr val="CBD5E1"/>
+                </a:solidFill>
+              </a:rPr>
+              <a:t>Pinecone Vector DB</a:t>
+            </a:r>
+            <a:endParaRPr lang="en-US" sz="900" dirty="0"/>
+          </a:p>
+        </p:txBody>
+      </p:sp>
+      <p:sp>
+        <p:nvSpPr>
+          <p:cNvPr id="30" name="Text 28"/>
+          <p:cNvSpPr/>
+          <p:nvPr/>
+        </p:nvSpPr>
+        <p:spPr>
+          <a:xfrm>
+            <a:off x="5614416" y="2258568"/>
+            <a:ext cx="1389888" cy="384048"/>
+          </a:xfrm>
+          <a:prstGeom prst="rect">
+            <a:avLst/>
+          </a:prstGeom>
+          <a:noFill/>
+          <a:ln/>
+        </p:spPr>
+        <p:txBody>
+          <a:bodyPr wrap="square" lIns="0" tIns="0" rIns="0" bIns="0" rtlCol="0" anchor="ctr"/>
+          <a:lstStyle/>
+          <a:p>
+            <a:pPr marL="0" indent="0" algn="ctr">
+              <a:lnSpc>
+                <a:spcPct val="120000"/>
+              </a:lnSpc>
+              <a:buNone/>
+            </a:pPr>
+            <a:r>
+              <a:rPr lang="en-US" sz="900" dirty="0">
+                <a:solidFill>
+                  <a:srgbClr val="CBD5E1"/>
+                </a:solidFill>
+              </a:rPr>
+              <a:t>BM25 Hybrid Search</a:t>
+            </a:r>
+            <a:endParaRPr lang="en-US" sz="900" dirty="0"/>
+          </a:p>
+        </p:txBody>
+      </p:sp>
+      <p:sp>
+        <p:nvSpPr>
+          <p:cNvPr id="31" name="Text 29"/>
+          <p:cNvSpPr/>
+          <p:nvPr/>
+        </p:nvSpPr>
+        <p:spPr>
+          <a:xfrm>
+            <a:off x="5614416" y="2734056"/>
+            <a:ext cx="1389888" cy="384048"/>
+          </a:xfrm>
+          <a:prstGeom prst="rect">
+            <a:avLst/>
+          </a:prstGeom>
+          <a:noFill/>
+          <a:ln/>
+        </p:spPr>
+        <p:txBody>
+          <a:bodyPr wrap="square" lIns="0" tIns="0" rIns="0" bIns="0" rtlCol="0" anchor="ctr"/>
+          <a:lstStyle/>
+          <a:p>
+            <a:pPr marL="0" indent="0" algn="ctr">
+              <a:lnSpc>
+                <a:spcPct val="120000"/>
+              </a:lnSpc>
+              <a:buNone/>
+            </a:pPr>
+            <a:r>
+              <a:rPr lang="en-US" sz="900" dirty="0">
+                <a:solidFill>
+                  <a:srgbClr val="CBD5E1"/>
+                </a:solidFill>
+              </a:rPr>
+              <a:t>SQLite User Auth</a:t>
+            </a:r>
+            <a:endParaRPr lang="en-US" sz="900" dirty="0"/>
+          </a:p>
+        </p:txBody>
+      </p:sp>
+      <p:sp>
+        <p:nvSpPr>
+          <p:cNvPr id="32" name="Shape 30"/>
+          <p:cNvSpPr/>
+          <p:nvPr/>
+        </p:nvSpPr>
+        <p:spPr>
+          <a:xfrm>
+            <a:off x="7095744" y="2651760"/>
+            <a:ext cx="146304" cy="0"/>
+          </a:xfrm>
+          <a:prstGeom prst="line">
+            <a:avLst/>
+          </a:prstGeom>
+          <a:noFill/>
+          <a:ln w="19050">
+            <a:solidFill>
+              <a:srgbClr val="059669"/>
+            </a:solidFill>
+            <a:prstDash val="sysDash"/>
+          </a:ln>
+        </p:spPr>
+      </p:sp>
+      <p:sp>
+        <p:nvSpPr>
+          <p:cNvPr id="33" name="Shape 31"/>
+          <p:cNvSpPr/>
+          <p:nvPr/>
+        </p:nvSpPr>
+        <p:spPr>
+          <a:xfrm>
+            <a:off x="7242048" y="1325880"/>
+            <a:ext cx="1572768" cy="2651760"/>
+          </a:xfrm>
+          <a:prstGeom prst="roundRect">
+            <a:avLst>
+              <a:gd name="adj" fmla="val 5814"/>
+            </a:avLst>
+          </a:prstGeom>
+          <a:solidFill>
+            <a:srgbClr val="162032"/>
+          </a:solidFill>
+          <a:ln/>
+          <a:effectLst>
+            <a:outerShdw blurRad="101600" dist="38100" dir="2700000" algn="bl" rotWithShape="0">
+              <a:srgbClr val="000000">
+                <a:alpha val="18000"/>
+              </a:srgbClr>
+            </a:outerShdw>
+          </a:effectLst>
+        </p:spPr>
+      </p:sp>
+      <p:sp>
+        <p:nvSpPr>
+          <p:cNvPr id="34" name="Shape 32"/>
+          <p:cNvSpPr/>
+          <p:nvPr/>
+        </p:nvSpPr>
+        <p:spPr>
+          <a:xfrm>
+            <a:off x="7242048" y="1325880"/>
+            <a:ext cx="1572768" cy="347472"/>
+          </a:xfrm>
+          <a:prstGeom prst="roundRect">
+            <a:avLst>
+              <a:gd name="adj" fmla="val 26316"/>
+            </a:avLst>
+          </a:prstGeom>
+          <a:solidFill>
+            <a:srgbClr val="DC2626">
+              <a:alpha val="75000"/>
+            </a:srgbClr>
+          </a:solidFill>
+          <a:ln/>
+        </p:spPr>
+      </p:sp>
+      <p:sp>
+        <p:nvSpPr>
+          <p:cNvPr id="35" name="Text 33"/>
+          <p:cNvSpPr/>
+          <p:nvPr/>
+        </p:nvSpPr>
+        <p:spPr>
+          <a:xfrm>
+            <a:off x="7242048" y="1325880"/>
+            <a:ext cx="1572768" cy="347472"/>
+          </a:xfrm>
+          <a:prstGeom prst="rect">
+            <a:avLst/>
+          </a:prstGeom>
+          <a:noFill/>
+          <a:ln/>
+        </p:spPr>
+        <p:txBody>
+          <a:bodyPr wrap="square" lIns="0" tIns="0" rIns="0" bIns="0" rtlCol="0" anchor="ctr"/>
+          <a:lstStyle/>
+          <a:p>
+            <a:pPr marL="0" indent="0" algn="ctr">
+              <a:buNone/>
+            </a:pPr>
+            <a:r>
+              <a:rPr lang="en-US" sz="1000" b="1" dirty="0">
+                <a:solidFill>
+                  <a:srgbClr val="FFFFFF"/>
+                </a:solidFill>
+              </a:rPr>
+              <a:t>Cloud</a:t>
+            </a:r>
+            <a:endParaRPr lang="en-US" sz="1000" dirty="0"/>
+          </a:p>
+        </p:txBody>
+      </p:sp>
+      <p:sp>
+        <p:nvSpPr>
+          <p:cNvPr id="36" name="Text 34"/>
+          <p:cNvSpPr/>
+          <p:nvPr/>
+        </p:nvSpPr>
+        <p:spPr>
+          <a:xfrm>
+            <a:off x="7333488" y="1783080"/>
+            <a:ext cx="1389888" cy="384048"/>
+          </a:xfrm>
+          <a:prstGeom prst="rect">
+            <a:avLst/>
+          </a:prstGeom>
+          <a:noFill/>
+          <a:ln/>
+        </p:spPr>
+        <p:txBody>
+          <a:bodyPr wrap="square" lIns="0" tIns="0" rIns="0" bIns="0" rtlCol="0" anchor="ctr"/>
+          <a:lstStyle/>
+          <a:p>
+            <a:pPr marL="0" indent="0" algn="ctr">
+              <a:lnSpc>
+                <a:spcPct val="120000"/>
+              </a:lnSpc>
+              <a:buNone/>
+            </a:pPr>
+            <a:r>
+              <a:rPr lang="en-US" sz="900" dirty="0">
+                <a:solidFill>
+                  <a:srgbClr val="CBD5E1"/>
+                </a:solidFill>
+              </a:rPr>
+              <a:t>Azure App Service</a:t>
+            </a:r>
+            <a:endParaRPr lang="en-US" sz="900" dirty="0"/>
+          </a:p>
+        </p:txBody>
+      </p:sp>
+      <p:sp>
+        <p:nvSpPr>
+          <p:cNvPr id="38" name="Text 36"/>
+          <p:cNvSpPr/>
+          <p:nvPr/>
+        </p:nvSpPr>
+        <p:spPr>
+          <a:xfrm>
+            <a:off x="7296912" y="2276856"/>
+            <a:ext cx="1389888" cy="384048"/>
+          </a:xfrm>
+          <a:prstGeom prst="rect">
+            <a:avLst/>
+          </a:prstGeom>
+          <a:noFill/>
+          <a:ln/>
+        </p:spPr>
+        <p:txBody>
+          <a:bodyPr wrap="square" lIns="0" tIns="0" rIns="0" bIns="0" rtlCol="0" anchor="ctr"/>
+          <a:lstStyle/>
+          <a:p>
+            <a:pPr marL="0" indent="0" algn="ctr">
+              <a:lnSpc>
+                <a:spcPct val="120000"/>
+              </a:lnSpc>
+              <a:buNone/>
+            </a:pPr>
+            <a:r>
+              <a:rPr lang="en-US" sz="900" dirty="0">
+                <a:solidFill>
+                  <a:srgbClr val="CBD5E1"/>
+                </a:solidFill>
+              </a:rPr>
+              <a:t>GitHub Actions CI/CD</a:t>
+            </a:r>
+            <a:endParaRPr lang="en-US" sz="900" dirty="0"/>
+          </a:p>
+        </p:txBody>
+      </p:sp>
+      <p:sp>
+        <p:nvSpPr>
+          <p:cNvPr id="39" name="Text 37"/>
+          <p:cNvSpPr/>
+          <p:nvPr/>
+        </p:nvSpPr>
+        <p:spPr>
+          <a:xfrm>
+            <a:off x="365760" y="4160520"/>
+            <a:ext cx="8412480" cy="320040"/>
+          </a:xfrm>
+          <a:prstGeom prst="rect">
+            <a:avLst/>
+          </a:prstGeom>
+          <a:noFill/>
+          <a:ln/>
+        </p:spPr>
+        <p:txBody>
+          <a:bodyPr wrap="square" lIns="0" tIns="0" rIns="0" bIns="0" rtlCol="0" anchor="ctr"/>
+          <a:lstStyle/>
+          <a:p>
+            <a:pPr marL="0" indent="0" algn="ctr">
+              <a:buNone/>
+            </a:pPr>
+            <a:r>
+              <a:rPr lang="en-US" sz="950" i="1" dirty="0">
+                <a:solidFill>
+                  <a:srgbClr val="94A3B8"/>
+                </a:solidFill>
+              </a:rPr>
+              <a:t>← User uploads PDF → Chunks → Vectors → LLM → Risk Score + Recommendations →</a:t>
+            </a:r>
+            <a:endParaRPr lang="en-US" sz="950" dirty="0"/>
+          </a:p>
+        </p:txBody>
+      </p:sp>
+    </p:spTree>
+  </p:cSld>
+  <p:clrMapOvr>
+    <a:masterClrMapping/>
+  </p:clrMapOvr>
 </p:sld>
 </file>
 

--- a/Capstone_Project/Credit-Risk-Intelligence-Platform/docs/Project_Documents/Credit_Risk_Platform_Capstone_project.pptx
+++ b/Capstone_Project/Credit-Risk-Intelligence-Platform/docs/Project_Documents/Credit_Risk_Platform_Capstone_project.pptx
@@ -6,28 +6,27 @@
     <p:sldMasterId id="2147483760" r:id="rId2"/>
   </p:sldMasterIdLst>
   <p:notesMasterIdLst>
-    <p:notesMasterId r:id="rId22"/>
+    <p:notesMasterId r:id="rId21"/>
   </p:notesMasterIdLst>
   <p:sldIdLst>
     <p:sldId id="256" r:id="rId3"/>
-    <p:sldId id="300" r:id="rId4"/>
-    <p:sldId id="311" r:id="rId5"/>
-    <p:sldId id="312" r:id="rId6"/>
-    <p:sldId id="313" r:id="rId7"/>
-    <p:sldId id="314" r:id="rId8"/>
-    <p:sldId id="308" r:id="rId9"/>
-    <p:sldId id="257" r:id="rId10"/>
-    <p:sldId id="259" r:id="rId11"/>
-    <p:sldId id="260" r:id="rId12"/>
-    <p:sldId id="272" r:id="rId13"/>
-    <p:sldId id="262" r:id="rId14"/>
-    <p:sldId id="263" r:id="rId15"/>
-    <p:sldId id="264" r:id="rId16"/>
-    <p:sldId id="266" r:id="rId17"/>
-    <p:sldId id="269" r:id="rId18"/>
-    <p:sldId id="310" r:id="rId19"/>
-    <p:sldId id="315" r:id="rId20"/>
-    <p:sldId id="271" r:id="rId21"/>
+    <p:sldId id="311" r:id="rId4"/>
+    <p:sldId id="312" r:id="rId5"/>
+    <p:sldId id="313" r:id="rId6"/>
+    <p:sldId id="314" r:id="rId7"/>
+    <p:sldId id="308" r:id="rId8"/>
+    <p:sldId id="257" r:id="rId9"/>
+    <p:sldId id="259" r:id="rId10"/>
+    <p:sldId id="260" r:id="rId11"/>
+    <p:sldId id="272" r:id="rId12"/>
+    <p:sldId id="262" r:id="rId13"/>
+    <p:sldId id="263" r:id="rId14"/>
+    <p:sldId id="264" r:id="rId15"/>
+    <p:sldId id="266" r:id="rId16"/>
+    <p:sldId id="269" r:id="rId17"/>
+    <p:sldId id="310" r:id="rId18"/>
+    <p:sldId id="315" r:id="rId19"/>
+    <p:sldId id="271" r:id="rId20"/>
   </p:sldIdLst>
   <p:sldSz cx="9144000" cy="5143500" type="screen16x9"/>
   <p:notesSz cx="5143500" cy="9144000"/>
@@ -455,7 +454,7 @@
                 <a:tabLst/>
                 <a:defRPr/>
               </a:pPr>
-              <a:t>17</a:t>
+              <a:t>16</a:t>
             </a:fld>
             <a:endParaRPr kumimoji="0" lang="en-US" sz="1800" b="0" i="0" u="none" strike="noStrike" kern="1200" cap="none" spc="0" normalizeH="0" baseline="0" noProof="0">
               <a:ln>
@@ -555,7 +554,7 @@
           <a:p>
             <a:fld id="{F7021451-1387-4CA6-816F-3879F97B5CBC}" type="slidenum">
               <a:rPr lang="en-US"/>
-              <a:t>19</a:t>
+              <a:t>18</a:t>
             </a:fld>
             <a:endParaRPr lang="en-US"/>
           </a:p>
@@ -642,7 +641,7 @@
           <a:p>
             <a:fld id="{F7021451-1387-4CA6-816F-3879F97B5CBC}" type="slidenum">
               <a:rPr lang="en-US"/>
-              <a:t>8</a:t>
+              <a:t>7</a:t>
             </a:fld>
             <a:endParaRPr lang="en-US"/>
           </a:p>
@@ -729,7 +728,7 @@
           <a:p>
             <a:fld id="{F7021451-1387-4CA6-816F-3879F97B5CBC}" type="slidenum">
               <a:rPr lang="en-US"/>
-              <a:t>9</a:t>
+              <a:t>8</a:t>
             </a:fld>
             <a:endParaRPr lang="en-US"/>
           </a:p>
@@ -816,7 +815,7 @@
           <a:p>
             <a:fld id="{F7021451-1387-4CA6-816F-3879F97B5CBC}" type="slidenum">
               <a:rPr lang="en-US"/>
-              <a:t>10</a:t>
+              <a:t>9</a:t>
             </a:fld>
             <a:endParaRPr lang="en-US"/>
           </a:p>
@@ -900,7 +899,7 @@
           <a:p>
             <a:fld id="{F7021451-1387-4CA6-816F-3879F97B5CBC}" type="slidenum">
               <a:rPr lang="en-US"/>
-              <a:t>11</a:t>
+              <a:t>10</a:t>
             </a:fld>
             <a:endParaRPr lang="en-US"/>
           </a:p>
@@ -987,7 +986,7 @@
           <a:p>
             <a:fld id="{F7021451-1387-4CA6-816F-3879F97B5CBC}" type="slidenum">
               <a:rPr lang="en-US"/>
-              <a:t>13</a:t>
+              <a:t>12</a:t>
             </a:fld>
             <a:endParaRPr lang="en-US"/>
           </a:p>
@@ -1074,7 +1073,7 @@
           <a:p>
             <a:fld id="{F7021451-1387-4CA6-816F-3879F97B5CBC}" type="slidenum">
               <a:rPr lang="en-US"/>
-              <a:t>14</a:t>
+              <a:t>13</a:t>
             </a:fld>
             <a:endParaRPr lang="en-US"/>
           </a:p>
@@ -1161,7 +1160,7 @@
           <a:p>
             <a:fld id="{F7021451-1387-4CA6-816F-3879F97B5CBC}" type="slidenum">
               <a:rPr lang="en-US"/>
-              <a:t>15</a:t>
+              <a:t>14</a:t>
             </a:fld>
             <a:endParaRPr lang="en-US"/>
           </a:p>
@@ -1248,7 +1247,7 @@
           <a:p>
             <a:fld id="{F7021451-1387-4CA6-816F-3879F97B5CBC}" type="slidenum">
               <a:rPr lang="en-US"/>
-              <a:t>16</a:t>
+              <a:t>15</a:t>
             </a:fld>
             <a:endParaRPr lang="en-US"/>
           </a:p>
@@ -2295,1860 +2294,6 @@
 
 <file path=ppt/slides/slide10.xml><?xml version="1.0" encoding="utf-8"?>
 <p:sld xmlns:a="http://schemas.openxmlformats.org/drawingml/2006/main" xmlns:r="http://schemas.openxmlformats.org/officeDocument/2006/relationships" xmlns:p="http://schemas.openxmlformats.org/presentationml/2006/main">
-  <p:cSld name="Features and Views">
-    <p:bg>
-      <p:bgPr>
-        <a:solidFill>
-          <a:srgbClr val="0F1B2D"/>
-        </a:solidFill>
-        <a:effectLst/>
-      </p:bgPr>
-    </p:bg>
-    <p:spTree>
-      <p:nvGrpSpPr>
-        <p:cNvPr id="1" name=""/>
-        <p:cNvGrpSpPr/>
-        <p:nvPr/>
-      </p:nvGrpSpPr>
-      <p:grpSpPr>
-        <a:xfrm>
-          <a:off x="0" y="0"/>
-          <a:ext cx="0" cy="0"/>
-          <a:chOff x="0" y="0"/>
-          <a:chExt cx="0" cy="0"/>
-        </a:xfrm>
-      </p:grpSpPr>
-      <p:sp>
-        <p:nvSpPr>
-          <p:cNvPr id="101" name="Badge"/>
-          <p:cNvSpPr/>
-          <p:nvPr/>
-        </p:nvSpPr>
-        <p:spPr>
-          <a:xfrm>
-            <a:off x="457200" y="274320"/>
-            <a:ext cx="1550000" cy="256032"/>
-          </a:xfrm>
-          <a:prstGeom prst="roundRect">
-            <a:avLst>
-              <a:gd name="adj" fmla="val 50000"/>
-            </a:avLst>
-          </a:prstGeom>
-          <a:solidFill>
-            <a:srgbClr val="2563EB">
-              <a:alpha val="25000"/>
-            </a:srgbClr>
-          </a:solidFill>
-          <a:ln/>
-        </p:spPr>
-      </p:sp>
-      <p:sp>
-        <p:nvSpPr>
-          <p:cNvPr id="102" name="BadgeText"/>
-          <p:cNvSpPr/>
-          <p:nvPr/>
-        </p:nvSpPr>
-        <p:spPr>
-          <a:xfrm>
-            <a:off x="457200" y="274320"/>
-            <a:ext cx="1550000" cy="256032"/>
-          </a:xfrm>
-          <a:prstGeom prst="rect">
-            <a:avLst/>
-          </a:prstGeom>
-          <a:noFill/>
-          <a:ln/>
-        </p:spPr>
-        <p:txBody>
-          <a:bodyPr wrap="square" lIns="0" tIns="0" rIns="0" bIns="0" rtlCol="0" anchor="ctr"/>
-          <a:lstStyle/>
-          <a:p>
-            <a:pPr marL="0" indent="0" algn="ctr">
-              <a:buNone/>
-            </a:pPr>
-            <a:r>
-              <a:rPr lang="en-US" sz="900" b="1" kern="0" spc="150" dirty="0">
-                <a:solidFill>
-                  <a:srgbClr val="2563EB"/>
-                </a:solidFill>
-              </a:rPr>
-              <a:t>FEATURES</a:t>
-            </a:r>
-          </a:p>
-        </p:txBody>
-      </p:sp>
-      <p:sp>
-        <p:nvSpPr>
-          <p:cNvPr id="103" name="Title"/>
-          <p:cNvSpPr/>
-          <p:nvPr/>
-        </p:nvSpPr>
-        <p:spPr>
-          <a:xfrm>
-            <a:off x="457200" y="590000"/>
-            <a:ext cx="8229600" cy="460000"/>
-          </a:xfrm>
-          <a:prstGeom prst="rect">
-            <a:avLst/>
-          </a:prstGeom>
-          <a:noFill/>
-          <a:ln/>
-        </p:spPr>
-        <p:txBody>
-          <a:bodyPr wrap="square" lIns="0" tIns="0" rIns="0" bIns="0" rtlCol="0" anchor="ctr"/>
-          <a:lstStyle/>
-          <a:p>
-            <a:pPr marL="0" indent="0">
-              <a:buNone/>
-            </a:pPr>
-            <a:r>
-              <a:rPr lang="en-US" sz="2400" b="1" dirty="0">
-                <a:solidFill>
-                  <a:srgbClr val="FFFFFF"/>
-                </a:solidFill>
-                <a:latin typeface="Cambria" pitchFamily="34" charset="0"/>
-              </a:rPr>
-              <a:t>Everything Inside The Platform</a:t>
-            </a:r>
-          </a:p>
-        </p:txBody>
-      </p:sp>
-      <p:sp>
-        <p:nvSpPr>
-          <p:cNvPr id="104" name="Card"/>
-          <p:cNvSpPr/>
-          <p:nvPr/>
-        </p:nvSpPr>
-        <p:spPr>
-          <a:xfrm>
-            <a:off x="457200" y="1180000"/>
-            <a:ext cx="2600000" cy="620000"/>
-          </a:xfrm>
-          <a:prstGeom prst="roundRect">
-            <a:avLst>
-              <a:gd name="adj" fmla="val 9000"/>
-            </a:avLst>
-          </a:prstGeom>
-          <a:solidFill>
-            <a:srgbClr val="162032"/>
-          </a:solidFill>
-          <a:ln/>
-          <a:effectLst>
-            <a:outerShdw blurRad="101600" dist="38100" dir="2700000" algn="bl" rotWithShape="0">
-              <a:srgbClr val="000000">
-                <a:alpha val="18000"/>
-              </a:srgbClr>
-            </a:outerShdw>
-          </a:effectLst>
-        </p:spPr>
-      </p:sp>
-      <p:sp>
-        <p:nvSpPr>
-          <p:cNvPr id="105" name="Text"/>
-          <p:cNvSpPr/>
-          <p:nvPr/>
-        </p:nvSpPr>
-        <p:spPr>
-          <a:xfrm>
-            <a:off x="597200" y="1250000"/>
-            <a:ext cx="400000" cy="400000"/>
-          </a:xfrm>
-          <a:prstGeom prst="rect">
-            <a:avLst/>
-          </a:prstGeom>
-          <a:noFill/>
-          <a:ln/>
-        </p:spPr>
-        <p:txBody>
-          <a:bodyPr wrap="square" lIns="0" tIns="0" rIns="0" bIns="0" rtlCol="0" anchor="ctr"/>
-          <a:lstStyle/>
-          <a:p>
-            <a:pPr marL="0" indent="0" algn="l">
-              <a:buNone/>
-            </a:pPr>
-            <a:r>
-              <a:rPr lang="en-US" sz="1700" b="0" dirty="0">
-                <a:solidFill>
-                  <a:srgbClr val="FFFFFF"/>
-                </a:solidFill>
-              </a:rPr>
-              <a:t>🔐</a:t>
-            </a:r>
-          </a:p>
-        </p:txBody>
-      </p:sp>
-      <p:sp>
-        <p:nvSpPr>
-          <p:cNvPr id="106" name="Text"/>
-          <p:cNvSpPr/>
-          <p:nvPr/>
-        </p:nvSpPr>
-        <p:spPr>
-          <a:xfrm>
-            <a:off x="1017200" y="1270000"/>
-            <a:ext cx="2000000" cy="220000"/>
-          </a:xfrm>
-          <a:prstGeom prst="rect">
-            <a:avLst/>
-          </a:prstGeom>
-          <a:noFill/>
-          <a:ln/>
-        </p:spPr>
-        <p:txBody>
-          <a:bodyPr wrap="square" lIns="0" tIns="0" rIns="0" bIns="0" rtlCol="0" anchor="t"/>
-          <a:lstStyle/>
-          <a:p>
-            <a:pPr marL="0" indent="0" algn="l">
-              <a:buNone/>
-            </a:pPr>
-            <a:r>
-              <a:rPr lang="en-US" sz="1000" b="1" dirty="0">
-                <a:solidFill>
-                  <a:srgbClr val="FFFFFF"/>
-                </a:solidFill>
-              </a:rPr>
-              <a:t>Secure Login</a:t>
-            </a:r>
-          </a:p>
-        </p:txBody>
-      </p:sp>
-      <p:sp>
-        <p:nvSpPr>
-          <p:cNvPr id="107" name="Text"/>
-          <p:cNvSpPr/>
-          <p:nvPr/>
-        </p:nvSpPr>
-        <p:spPr>
-          <a:xfrm>
-            <a:off x="1017200" y="1480000"/>
-            <a:ext cx="2000000" cy="220000"/>
-          </a:xfrm>
-          <a:prstGeom prst="rect">
-            <a:avLst/>
-          </a:prstGeom>
-          <a:noFill/>
-          <a:ln/>
-        </p:spPr>
-        <p:txBody>
-          <a:bodyPr wrap="square" lIns="0" tIns="0" rIns="0" bIns="0" rtlCol="0" anchor="t"/>
-          <a:lstStyle/>
-          <a:p>
-            <a:pPr marL="0" indent="0" algn="l">
-              <a:buNone/>
-            </a:pPr>
-            <a:r>
-              <a:rPr lang="en-US" sz="800" b="0" dirty="0">
-                <a:solidFill>
-                  <a:srgbClr val="94A3B8"/>
-                </a:solidFill>
-              </a:rPr>
-              <a:t>JWT + bcrypt auth</a:t>
-            </a:r>
-          </a:p>
-        </p:txBody>
-      </p:sp>
-      <p:sp>
-        <p:nvSpPr>
-          <p:cNvPr id="108" name="Card"/>
-          <p:cNvSpPr/>
-          <p:nvPr/>
-        </p:nvSpPr>
-        <p:spPr>
-          <a:xfrm>
-            <a:off x="3172000" y="1180000"/>
-            <a:ext cx="2600000" cy="620000"/>
-          </a:xfrm>
-          <a:prstGeom prst="roundRect">
-            <a:avLst>
-              <a:gd name="adj" fmla="val 9000"/>
-            </a:avLst>
-          </a:prstGeom>
-          <a:solidFill>
-            <a:srgbClr val="162032"/>
-          </a:solidFill>
-          <a:ln/>
-          <a:effectLst>
-            <a:outerShdw blurRad="101600" dist="38100" dir="2700000" algn="bl" rotWithShape="0">
-              <a:srgbClr val="000000">
-                <a:alpha val="18000"/>
-              </a:srgbClr>
-            </a:outerShdw>
-          </a:effectLst>
-        </p:spPr>
-      </p:sp>
-      <p:sp>
-        <p:nvSpPr>
-          <p:cNvPr id="109" name="Text"/>
-          <p:cNvSpPr/>
-          <p:nvPr/>
-        </p:nvSpPr>
-        <p:spPr>
-          <a:xfrm>
-            <a:off x="3312000" y="1250000"/>
-            <a:ext cx="400000" cy="400000"/>
-          </a:xfrm>
-          <a:prstGeom prst="rect">
-            <a:avLst/>
-          </a:prstGeom>
-          <a:noFill/>
-          <a:ln/>
-        </p:spPr>
-        <p:txBody>
-          <a:bodyPr wrap="square" lIns="0" tIns="0" rIns="0" bIns="0" rtlCol="0" anchor="ctr"/>
-          <a:lstStyle/>
-          <a:p>
-            <a:pPr marL="0" indent="0" algn="l">
-              <a:buNone/>
-            </a:pPr>
-            <a:r>
-              <a:rPr lang="en-US" sz="1700" b="0" dirty="0">
-                <a:solidFill>
-                  <a:srgbClr val="FFFFFF"/>
-                </a:solidFill>
-              </a:rPr>
-              <a:t>📤</a:t>
-            </a:r>
-          </a:p>
-        </p:txBody>
-      </p:sp>
-      <p:sp>
-        <p:nvSpPr>
-          <p:cNvPr id="110" name="Text"/>
-          <p:cNvSpPr/>
-          <p:nvPr/>
-        </p:nvSpPr>
-        <p:spPr>
-          <a:xfrm>
-            <a:off x="3732000" y="1270000"/>
-            <a:ext cx="2000000" cy="220000"/>
-          </a:xfrm>
-          <a:prstGeom prst="rect">
-            <a:avLst/>
-          </a:prstGeom>
-          <a:noFill/>
-          <a:ln/>
-        </p:spPr>
-        <p:txBody>
-          <a:bodyPr wrap="square" lIns="0" tIns="0" rIns="0" bIns="0" rtlCol="0" anchor="t"/>
-          <a:lstStyle/>
-          <a:p>
-            <a:pPr marL="0" indent="0" algn="l">
-              <a:buNone/>
-            </a:pPr>
-            <a:r>
-              <a:rPr lang="en-US" sz="1000" b="1" dirty="0">
-                <a:solidFill>
-                  <a:srgbClr val="FFFFFF"/>
-                </a:solidFill>
-              </a:rPr>
-              <a:t>Upload PDFs</a:t>
-            </a:r>
-          </a:p>
-        </p:txBody>
-      </p:sp>
-      <p:sp>
-        <p:nvSpPr>
-          <p:cNvPr id="111" name="Text"/>
-          <p:cNvSpPr/>
-          <p:nvPr/>
-        </p:nvSpPr>
-        <p:spPr>
-          <a:xfrm>
-            <a:off x="3732000" y="1480000"/>
-            <a:ext cx="2000000" cy="220000"/>
-          </a:xfrm>
-          <a:prstGeom prst="rect">
-            <a:avLst/>
-          </a:prstGeom>
-          <a:noFill/>
-          <a:ln/>
-        </p:spPr>
-        <p:txBody>
-          <a:bodyPr wrap="square" lIns="0" tIns="0" rIns="0" bIns="0" rtlCol="0" anchor="t"/>
-          <a:lstStyle/>
-          <a:p>
-            <a:pPr marL="0" indent="0" algn="l">
-              <a:buNone/>
-            </a:pPr>
-            <a:r>
-              <a:rPr lang="en-US" sz="800" b="0" dirty="0">
-                <a:solidFill>
-                  <a:srgbClr val="94A3B8"/>
-                </a:solidFill>
-              </a:rPr>
-              <a:t>Salary slips, statements, ITR</a:t>
-            </a:r>
-          </a:p>
-        </p:txBody>
-      </p:sp>
-      <p:sp>
-        <p:nvSpPr>
-          <p:cNvPr id="112" name="Card"/>
-          <p:cNvSpPr/>
-          <p:nvPr/>
-        </p:nvSpPr>
-        <p:spPr>
-          <a:xfrm>
-            <a:off x="5886800" y="1180000"/>
-            <a:ext cx="2600000" cy="620000"/>
-          </a:xfrm>
-          <a:prstGeom prst="roundRect">
-            <a:avLst>
-              <a:gd name="adj" fmla="val 9000"/>
-            </a:avLst>
-          </a:prstGeom>
-          <a:solidFill>
-            <a:srgbClr val="162032"/>
-          </a:solidFill>
-          <a:ln/>
-          <a:effectLst>
-            <a:outerShdw blurRad="101600" dist="38100" dir="2700000" algn="bl" rotWithShape="0">
-              <a:srgbClr val="000000">
-                <a:alpha val="18000"/>
-              </a:srgbClr>
-            </a:outerShdw>
-          </a:effectLst>
-        </p:spPr>
-      </p:sp>
-      <p:sp>
-        <p:nvSpPr>
-          <p:cNvPr id="113" name="Text"/>
-          <p:cNvSpPr/>
-          <p:nvPr/>
-        </p:nvSpPr>
-        <p:spPr>
-          <a:xfrm>
-            <a:off x="6026800" y="1250000"/>
-            <a:ext cx="400000" cy="400000"/>
-          </a:xfrm>
-          <a:prstGeom prst="rect">
-            <a:avLst/>
-          </a:prstGeom>
-          <a:noFill/>
-          <a:ln/>
-        </p:spPr>
-        <p:txBody>
-          <a:bodyPr wrap="square" lIns="0" tIns="0" rIns="0" bIns="0" rtlCol="0" anchor="ctr"/>
-          <a:lstStyle/>
-          <a:p>
-            <a:pPr marL="0" indent="0" algn="l">
-              <a:buNone/>
-            </a:pPr>
-            <a:r>
-              <a:rPr lang="en-US" sz="1700" b="0" dirty="0">
-                <a:solidFill>
-                  <a:srgbClr val="FFFFFF"/>
-                </a:solidFill>
-              </a:rPr>
-              <a:t>📊</a:t>
-            </a:r>
-          </a:p>
-        </p:txBody>
-      </p:sp>
-      <p:sp>
-        <p:nvSpPr>
-          <p:cNvPr id="114" name="Text"/>
-          <p:cNvSpPr/>
-          <p:nvPr/>
-        </p:nvSpPr>
-        <p:spPr>
-          <a:xfrm>
-            <a:off x="6446800" y="1270000"/>
-            <a:ext cx="2000000" cy="220000"/>
-          </a:xfrm>
-          <a:prstGeom prst="rect">
-            <a:avLst/>
-          </a:prstGeom>
-          <a:noFill/>
-          <a:ln/>
-        </p:spPr>
-        <p:txBody>
-          <a:bodyPr wrap="square" lIns="0" tIns="0" rIns="0" bIns="0" rtlCol="0" anchor="t"/>
-          <a:lstStyle/>
-          <a:p>
-            <a:pPr marL="0" indent="0" algn="l">
-              <a:buNone/>
-            </a:pPr>
-            <a:r>
-              <a:rPr lang="en-US" sz="1000" b="1" dirty="0">
-                <a:solidFill>
-                  <a:srgbClr val="FFFFFF"/>
-                </a:solidFill>
-              </a:rPr>
-              <a:t>Risk Analysis</a:t>
-            </a:r>
-          </a:p>
-        </p:txBody>
-      </p:sp>
-      <p:sp>
-        <p:nvSpPr>
-          <p:cNvPr id="115" name="Text"/>
-          <p:cNvSpPr/>
-          <p:nvPr/>
-        </p:nvSpPr>
-        <p:spPr>
-          <a:xfrm>
-            <a:off x="6446800" y="1480000"/>
-            <a:ext cx="2000000" cy="220000"/>
-          </a:xfrm>
-          <a:prstGeom prst="rect">
-            <a:avLst/>
-          </a:prstGeom>
-          <a:noFill/>
-          <a:ln/>
-        </p:spPr>
-        <p:txBody>
-          <a:bodyPr wrap="square" lIns="0" tIns="0" rIns="0" bIns="0" rtlCol="0" anchor="t"/>
-          <a:lstStyle/>
-          <a:p>
-            <a:pPr marL="0" indent="0" algn="l">
-              <a:buNone/>
-            </a:pPr>
-            <a:r>
-              <a:rPr lang="en-US" sz="800" b="0" dirty="0">
-                <a:solidFill>
-                  <a:srgbClr val="94A3B8"/>
-                </a:solidFill>
-              </a:rPr>
-              <a:t>AI credit score + red flags</a:t>
-            </a:r>
-          </a:p>
-        </p:txBody>
-      </p:sp>
-      <p:sp>
-        <p:nvSpPr>
-          <p:cNvPr id="116" name="Card"/>
-          <p:cNvSpPr/>
-          <p:nvPr/>
-        </p:nvSpPr>
-        <p:spPr>
-          <a:xfrm>
-            <a:off x="457200" y="1914800"/>
-            <a:ext cx="2600000" cy="620000"/>
-          </a:xfrm>
-          <a:prstGeom prst="roundRect">
-            <a:avLst>
-              <a:gd name="adj" fmla="val 9000"/>
-            </a:avLst>
-          </a:prstGeom>
-          <a:solidFill>
-            <a:srgbClr val="162032"/>
-          </a:solidFill>
-          <a:ln/>
-          <a:effectLst>
-            <a:outerShdw blurRad="101600" dist="38100" dir="2700000" algn="bl" rotWithShape="0">
-              <a:srgbClr val="000000">
-                <a:alpha val="18000"/>
-              </a:srgbClr>
-            </a:outerShdw>
-          </a:effectLst>
-        </p:spPr>
-      </p:sp>
-      <p:sp>
-        <p:nvSpPr>
-          <p:cNvPr id="117" name="Text"/>
-          <p:cNvSpPr/>
-          <p:nvPr/>
-        </p:nvSpPr>
-        <p:spPr>
-          <a:xfrm>
-            <a:off x="597200" y="1984800"/>
-            <a:ext cx="400000" cy="400000"/>
-          </a:xfrm>
-          <a:prstGeom prst="rect">
-            <a:avLst/>
-          </a:prstGeom>
-          <a:noFill/>
-          <a:ln/>
-        </p:spPr>
-        <p:txBody>
-          <a:bodyPr wrap="square" lIns="0" tIns="0" rIns="0" bIns="0" rtlCol="0" anchor="ctr"/>
-          <a:lstStyle/>
-          <a:p>
-            <a:pPr marL="0" indent="0" algn="l">
-              <a:buNone/>
-            </a:pPr>
-            <a:r>
-              <a:rPr lang="en-US" sz="1700" b="0" dirty="0">
-                <a:solidFill>
-                  <a:srgbClr val="FFFFFF"/>
-                </a:solidFill>
-              </a:rPr>
-              <a:t>💡</a:t>
-            </a:r>
-          </a:p>
-        </p:txBody>
-      </p:sp>
-      <p:sp>
-        <p:nvSpPr>
-          <p:cNvPr id="118" name="Text"/>
-          <p:cNvSpPr/>
-          <p:nvPr/>
-        </p:nvSpPr>
-        <p:spPr>
-          <a:xfrm>
-            <a:off x="1017200" y="2004800"/>
-            <a:ext cx="2000000" cy="220000"/>
-          </a:xfrm>
-          <a:prstGeom prst="rect">
-            <a:avLst/>
-          </a:prstGeom>
-          <a:noFill/>
-          <a:ln/>
-        </p:spPr>
-        <p:txBody>
-          <a:bodyPr wrap="square" lIns="0" tIns="0" rIns="0" bIns="0" rtlCol="0" anchor="t"/>
-          <a:lstStyle/>
-          <a:p>
-            <a:pPr marL="0" indent="0" algn="l">
-              <a:buNone/>
-            </a:pPr>
-            <a:r>
-              <a:rPr lang="en-US" sz="1000" b="1" dirty="0">
-                <a:solidFill>
-                  <a:srgbClr val="FFFFFF"/>
-                </a:solidFill>
-              </a:rPr>
-              <a:t>AI Recommendations</a:t>
-            </a:r>
-          </a:p>
-        </p:txBody>
-      </p:sp>
-      <p:sp>
-        <p:nvSpPr>
-          <p:cNvPr id="119" name="Text"/>
-          <p:cNvSpPr/>
-          <p:nvPr/>
-        </p:nvSpPr>
-        <p:spPr>
-          <a:xfrm>
-            <a:off x="1017200" y="2214800"/>
-            <a:ext cx="2000000" cy="220000"/>
-          </a:xfrm>
-          <a:prstGeom prst="rect">
-            <a:avLst/>
-          </a:prstGeom>
-          <a:noFill/>
-          <a:ln/>
-        </p:spPr>
-        <p:txBody>
-          <a:bodyPr wrap="square" lIns="0" tIns="0" rIns="0" bIns="0" rtlCol="0" anchor="t"/>
-          <a:lstStyle/>
-          <a:p>
-            <a:pPr marL="0" indent="0" algn="l">
-              <a:buNone/>
-            </a:pPr>
-            <a:r>
-              <a:rPr lang="en-US" sz="800" b="0" dirty="0">
-                <a:solidFill>
-                  <a:srgbClr val="94A3B8"/>
-                </a:solidFill>
-              </a:rPr>
-              <a:t>Urgency-sorted action plan</a:t>
-            </a:r>
-          </a:p>
-        </p:txBody>
-      </p:sp>
-      <p:sp>
-        <p:nvSpPr>
-          <p:cNvPr id="120" name="Card"/>
-          <p:cNvSpPr/>
-          <p:nvPr/>
-        </p:nvSpPr>
-        <p:spPr>
-          <a:xfrm>
-            <a:off x="3172000" y="1914800"/>
-            <a:ext cx="2600000" cy="620000"/>
-          </a:xfrm>
-          <a:prstGeom prst="roundRect">
-            <a:avLst>
-              <a:gd name="adj" fmla="val 9000"/>
-            </a:avLst>
-          </a:prstGeom>
-          <a:solidFill>
-            <a:srgbClr val="162032"/>
-          </a:solidFill>
-          <a:ln/>
-          <a:effectLst>
-            <a:outerShdw blurRad="101600" dist="38100" dir="2700000" algn="bl" rotWithShape="0">
-              <a:srgbClr val="000000">
-                <a:alpha val="18000"/>
-              </a:srgbClr>
-            </a:outerShdw>
-          </a:effectLst>
-        </p:spPr>
-      </p:sp>
-      <p:sp>
-        <p:nvSpPr>
-          <p:cNvPr id="121" name="Text"/>
-          <p:cNvSpPr/>
-          <p:nvPr/>
-        </p:nvSpPr>
-        <p:spPr>
-          <a:xfrm>
-            <a:off x="3312000" y="1984800"/>
-            <a:ext cx="400000" cy="400000"/>
-          </a:xfrm>
-          <a:prstGeom prst="rect">
-            <a:avLst/>
-          </a:prstGeom>
-          <a:noFill/>
-          <a:ln/>
-        </p:spPr>
-        <p:txBody>
-          <a:bodyPr wrap="square" lIns="0" tIns="0" rIns="0" bIns="0" rtlCol="0" anchor="ctr"/>
-          <a:lstStyle/>
-          <a:p>
-            <a:pPr marL="0" indent="0" algn="l">
-              <a:buNone/>
-            </a:pPr>
-            <a:r>
-              <a:rPr lang="en-US" sz="1700" b="0" dirty="0">
-                <a:solidFill>
-                  <a:srgbClr val="FFFFFF"/>
-                </a:solidFill>
-              </a:rPr>
-              <a:t>💬</a:t>
-            </a:r>
-          </a:p>
-        </p:txBody>
-      </p:sp>
-      <p:sp>
-        <p:nvSpPr>
-          <p:cNvPr id="122" name="Text"/>
-          <p:cNvSpPr/>
-          <p:nvPr/>
-        </p:nvSpPr>
-        <p:spPr>
-          <a:xfrm>
-            <a:off x="3732000" y="2004800"/>
-            <a:ext cx="2000000" cy="220000"/>
-          </a:xfrm>
-          <a:prstGeom prst="rect">
-            <a:avLst/>
-          </a:prstGeom>
-          <a:noFill/>
-          <a:ln/>
-        </p:spPr>
-        <p:txBody>
-          <a:bodyPr wrap="square" lIns="0" tIns="0" rIns="0" bIns="0" rtlCol="0" anchor="t"/>
-          <a:lstStyle/>
-          <a:p>
-            <a:pPr marL="0" indent="0" algn="l">
-              <a:buNone/>
-            </a:pPr>
-            <a:r>
-              <a:rPr lang="en-US" sz="1000" b="1" dirty="0">
-                <a:solidFill>
-                  <a:srgbClr val="FFFFFF"/>
-                </a:solidFill>
-              </a:rPr>
-              <a:t>AI Chat</a:t>
-            </a:r>
-          </a:p>
-        </p:txBody>
-      </p:sp>
-      <p:sp>
-        <p:nvSpPr>
-          <p:cNvPr id="123" name="Text"/>
-          <p:cNvSpPr/>
-          <p:nvPr/>
-        </p:nvSpPr>
-        <p:spPr>
-          <a:xfrm>
-            <a:off x="3732000" y="2214800"/>
-            <a:ext cx="2000000" cy="220000"/>
-          </a:xfrm>
-          <a:prstGeom prst="rect">
-            <a:avLst/>
-          </a:prstGeom>
-          <a:noFill/>
-          <a:ln/>
-        </p:spPr>
-        <p:txBody>
-          <a:bodyPr wrap="square" lIns="0" tIns="0" rIns="0" bIns="0" rtlCol="0" anchor="t"/>
-          <a:lstStyle/>
-          <a:p>
-            <a:pPr marL="0" indent="0" algn="l">
-              <a:buNone/>
-            </a:pPr>
-            <a:r>
-              <a:rPr lang="en-US" sz="800" b="0" dirty="0">
-                <a:solidFill>
-                  <a:srgbClr val="94A3B8"/>
-                </a:solidFill>
-              </a:rPr>
-              <a:t>Ask about your own documents</a:t>
-            </a:r>
-          </a:p>
-        </p:txBody>
-      </p:sp>
-      <p:sp>
-        <p:nvSpPr>
-          <p:cNvPr id="124" name="Card"/>
-          <p:cNvSpPr/>
-          <p:nvPr/>
-        </p:nvSpPr>
-        <p:spPr>
-          <a:xfrm>
-            <a:off x="5886800" y="1914800"/>
-            <a:ext cx="2600000" cy="620000"/>
-          </a:xfrm>
-          <a:prstGeom prst="roundRect">
-            <a:avLst>
-              <a:gd name="adj" fmla="val 9000"/>
-            </a:avLst>
-          </a:prstGeom>
-          <a:solidFill>
-            <a:srgbClr val="162032"/>
-          </a:solidFill>
-          <a:ln/>
-          <a:effectLst>
-            <a:outerShdw blurRad="101600" dist="38100" dir="2700000" algn="bl" rotWithShape="0">
-              <a:srgbClr val="000000">
-                <a:alpha val="18000"/>
-              </a:srgbClr>
-            </a:outerShdw>
-          </a:effectLst>
-        </p:spPr>
-      </p:sp>
-      <p:sp>
-        <p:nvSpPr>
-          <p:cNvPr id="125" name="Text"/>
-          <p:cNvSpPr/>
-          <p:nvPr/>
-        </p:nvSpPr>
-        <p:spPr>
-          <a:xfrm>
-            <a:off x="6026800" y="1984800"/>
-            <a:ext cx="400000" cy="400000"/>
-          </a:xfrm>
-          <a:prstGeom prst="rect">
-            <a:avLst/>
-          </a:prstGeom>
-          <a:noFill/>
-          <a:ln/>
-        </p:spPr>
-        <p:txBody>
-          <a:bodyPr wrap="square" lIns="0" tIns="0" rIns="0" bIns="0" rtlCol="0" anchor="ctr"/>
-          <a:lstStyle/>
-          <a:p>
-            <a:pPr marL="0" indent="0" algn="l">
-              <a:buNone/>
-            </a:pPr>
-            <a:r>
-              <a:rPr lang="en-US" sz="1700" b="0" dirty="0">
-                <a:solidFill>
-                  <a:srgbClr val="FFFFFF"/>
-                </a:solidFill>
-              </a:rPr>
-              <a:t>🏙️</a:t>
-            </a:r>
-          </a:p>
-        </p:txBody>
-      </p:sp>
-      <p:sp>
-        <p:nvSpPr>
-          <p:cNvPr id="126" name="Text"/>
-          <p:cNvSpPr/>
-          <p:nvPr/>
-        </p:nvSpPr>
-        <p:spPr>
-          <a:xfrm>
-            <a:off x="6446800" y="2004800"/>
-            <a:ext cx="2000000" cy="220000"/>
-          </a:xfrm>
-          <a:prstGeom prst="rect">
-            <a:avLst/>
-          </a:prstGeom>
-          <a:noFill/>
-          <a:ln/>
-        </p:spPr>
-        <p:txBody>
-          <a:bodyPr wrap="square" lIns="0" tIns="0" rIns="0" bIns="0" rtlCol="0" anchor="t"/>
-          <a:lstStyle/>
-          <a:p>
-            <a:pPr marL="0" indent="0" algn="l">
-              <a:buNone/>
-            </a:pPr>
-            <a:r>
-              <a:rPr lang="en-US" sz="1000" b="1" dirty="0">
-                <a:solidFill>
-                  <a:srgbClr val="FFFFFF"/>
-                </a:solidFill>
-              </a:rPr>
-              <a:t>Retirement Planner</a:t>
-            </a:r>
-          </a:p>
-        </p:txBody>
-      </p:sp>
-      <p:sp>
-        <p:nvSpPr>
-          <p:cNvPr id="127" name="Text"/>
-          <p:cNvSpPr/>
-          <p:nvPr/>
-        </p:nvSpPr>
-        <p:spPr>
-          <a:xfrm>
-            <a:off x="6446800" y="2214800"/>
-            <a:ext cx="2000000" cy="220000"/>
-          </a:xfrm>
-          <a:prstGeom prst="rect">
-            <a:avLst/>
-          </a:prstGeom>
-          <a:noFill/>
-          <a:ln/>
-        </p:spPr>
-        <p:txBody>
-          <a:bodyPr wrap="square" lIns="0" tIns="0" rIns="0" bIns="0" rtlCol="0" anchor="t"/>
-          <a:lstStyle/>
-          <a:p>
-            <a:pPr marL="0" indent="0" algn="l">
-              <a:buNone/>
-            </a:pPr>
-            <a:r>
-              <a:rPr lang="en-US" sz="800" b="0" dirty="0">
-                <a:solidFill>
-                  <a:srgbClr val="94A3B8"/>
-                </a:solidFill>
-              </a:rPr>
-              <a:t>40-city cost of living</a:t>
-            </a:r>
-          </a:p>
-        </p:txBody>
-      </p:sp>
-      <p:sp>
-        <p:nvSpPr>
-          <p:cNvPr id="128" name="Pill"/>
-          <p:cNvSpPr/>
-          <p:nvPr/>
-        </p:nvSpPr>
-        <p:spPr>
-          <a:xfrm>
-            <a:off x="457200" y="2709600"/>
-            <a:ext cx="1750000" cy="260000"/>
-          </a:xfrm>
-          <a:prstGeom prst="roundRect">
-            <a:avLst>
-              <a:gd name="adj" fmla="val 50000"/>
-            </a:avLst>
-          </a:prstGeom>
-          <a:solidFill>
-            <a:srgbClr val="0891B2">
-              <a:alpha val="20000"/>
-            </a:srgbClr>
-          </a:solidFill>
-          <a:ln/>
-        </p:spPr>
-        <p:txBody>
-          <a:bodyPr wrap="square" lIns="0" tIns="0" rIns="0" bIns="0" rtlCol="0" anchor="ctr"/>
-          <a:lstStyle/>
-          <a:p>
-            <a:pPr marL="0" indent="0" algn="ctr">
-              <a:buNone/>
-            </a:pPr>
-            <a:r>
-              <a:rPr lang="en-US" sz="900" b="1" dirty="0">
-                <a:solidFill>
-                  <a:srgbClr val="FFFFFF"/>
-                </a:solidFill>
-              </a:rPr>
-              <a:t>👤  CUSTOMER SEES</a:t>
-            </a:r>
-          </a:p>
-        </p:txBody>
-      </p:sp>
-      <p:sp>
-        <p:nvSpPr>
-          <p:cNvPr id="129" name="Pill"/>
-          <p:cNvSpPr/>
-          <p:nvPr/>
-        </p:nvSpPr>
-        <p:spPr>
-          <a:xfrm>
-            <a:off x="4686300" y="2709600"/>
-            <a:ext cx="1750000" cy="260000"/>
-          </a:xfrm>
-          <a:prstGeom prst="roundRect">
-            <a:avLst>
-              <a:gd name="adj" fmla="val 50000"/>
-            </a:avLst>
-          </a:prstGeom>
-          <a:solidFill>
-            <a:srgbClr val="D97706">
-              <a:alpha val="20000"/>
-            </a:srgbClr>
-          </a:solidFill>
-          <a:ln/>
-        </p:spPr>
-        <p:txBody>
-          <a:bodyPr wrap="square" lIns="0" tIns="0" rIns="0" bIns="0" rtlCol="0" anchor="ctr"/>
-          <a:lstStyle/>
-          <a:p>
-            <a:pPr marL="0" indent="0" algn="ctr">
-              <a:buNone/>
-            </a:pPr>
-            <a:r>
-              <a:rPr lang="en-US" sz="900" b="1" dirty="0">
-                <a:solidFill>
-                  <a:srgbClr val="FFFFFF"/>
-                </a:solidFill>
-              </a:rPr>
-              <a:t>🏦  BANK OFFICER SEES</a:t>
-            </a:r>
-          </a:p>
-        </p:txBody>
-      </p:sp>
-      <p:sp>
-        <p:nvSpPr>
-          <p:cNvPr id="130" name="Text"/>
-          <p:cNvSpPr/>
-          <p:nvPr/>
-        </p:nvSpPr>
-        <p:spPr>
-          <a:xfrm>
-            <a:off x="457200" y="3049600"/>
-            <a:ext cx="30000" cy="190000"/>
-          </a:xfrm>
-          <a:prstGeom prst="rect">
-            <a:avLst/>
-          </a:prstGeom>
-          <a:noFill/>
-          <a:ln/>
-        </p:spPr>
-        <p:txBody>
-          <a:bodyPr wrap="square" lIns="0" tIns="0" rIns="0" bIns="0" rtlCol="0" anchor="t"/>
-          <a:lstStyle/>
-          <a:p>
-            <a:pPr marL="0" indent="0" algn="l">
-              <a:buNone/>
-            </a:pPr>
-            <a:r>
-              <a:rPr lang="en-US" sz="950" b="1" dirty="0">
-                <a:solidFill>
-                  <a:srgbClr val="0891B2"/>
-                </a:solidFill>
-              </a:rPr>
-              <a:t>•</a:t>
-            </a:r>
-          </a:p>
-        </p:txBody>
-      </p:sp>
-      <p:sp>
-        <p:nvSpPr>
-          <p:cNvPr id="131" name="Text"/>
-          <p:cNvSpPr/>
-          <p:nvPr/>
-        </p:nvSpPr>
-        <p:spPr>
-          <a:xfrm>
-            <a:off x="657200" y="3049600"/>
-            <a:ext cx="3800500" cy="190000"/>
-          </a:xfrm>
-          <a:prstGeom prst="rect">
-            <a:avLst/>
-          </a:prstGeom>
-          <a:noFill/>
-          <a:ln/>
-        </p:spPr>
-        <p:txBody>
-          <a:bodyPr wrap="square" lIns="0" tIns="0" rIns="0" bIns="0" rtlCol="0" anchor="t"/>
-          <a:lstStyle/>
-          <a:p>
-            <a:pPr marL="0" indent="0" algn="l">
-              <a:buNone/>
-            </a:pPr>
-            <a:r>
-              <a:rPr lang="en-US" sz="850" b="0" dirty="0">
-                <a:solidFill>
-                  <a:srgbClr val="E2E8F0"/>
-                </a:solidFill>
-              </a:rPr>
-              <a:t>Personal risk score (0-100)</a:t>
-            </a:r>
-          </a:p>
-        </p:txBody>
-      </p:sp>
-      <p:sp>
-        <p:nvSpPr>
-          <p:cNvPr id="132" name="Text"/>
-          <p:cNvSpPr/>
-          <p:nvPr/>
-        </p:nvSpPr>
-        <p:spPr>
-          <a:xfrm>
-            <a:off x="457200" y="3299600"/>
-            <a:ext cx="30000" cy="190000"/>
-          </a:xfrm>
-          <a:prstGeom prst="rect">
-            <a:avLst/>
-          </a:prstGeom>
-          <a:noFill/>
-          <a:ln/>
-        </p:spPr>
-        <p:txBody>
-          <a:bodyPr wrap="square" lIns="0" tIns="0" rIns="0" bIns="0" rtlCol="0" anchor="t"/>
-          <a:lstStyle/>
-          <a:p>
-            <a:pPr marL="0" indent="0" algn="l">
-              <a:buNone/>
-            </a:pPr>
-            <a:r>
-              <a:rPr lang="en-US" sz="950" b="1" dirty="0">
-                <a:solidFill>
-                  <a:srgbClr val="0891B2"/>
-                </a:solidFill>
-              </a:rPr>
-              <a:t>•</a:t>
-            </a:r>
-          </a:p>
-        </p:txBody>
-      </p:sp>
-      <p:sp>
-        <p:nvSpPr>
-          <p:cNvPr id="133" name="Text"/>
-          <p:cNvSpPr/>
-          <p:nvPr/>
-        </p:nvSpPr>
-        <p:spPr>
-          <a:xfrm>
-            <a:off x="657200" y="3299600"/>
-            <a:ext cx="3800500" cy="190000"/>
-          </a:xfrm>
-          <a:prstGeom prst="rect">
-            <a:avLst/>
-          </a:prstGeom>
-          <a:noFill/>
-          <a:ln/>
-        </p:spPr>
-        <p:txBody>
-          <a:bodyPr wrap="square" lIns="0" tIns="0" rIns="0" bIns="0" rtlCol="0" anchor="t"/>
-          <a:lstStyle/>
-          <a:p>
-            <a:pPr marL="0" indent="0" algn="l">
-              <a:buNone/>
-            </a:pPr>
-            <a:r>
-              <a:rPr lang="en-US" sz="850" b="0" dirty="0">
-                <a:solidFill>
-                  <a:srgbClr val="E2E8F0"/>
-                </a:solidFill>
-              </a:rPr>
-              <a:t>Loan approval probability</a:t>
-            </a:r>
-          </a:p>
-        </p:txBody>
-      </p:sp>
-      <p:sp>
-        <p:nvSpPr>
-          <p:cNvPr id="134" name="Text"/>
-          <p:cNvSpPr/>
-          <p:nvPr/>
-        </p:nvSpPr>
-        <p:spPr>
-          <a:xfrm>
-            <a:off x="457200" y="3549600"/>
-            <a:ext cx="30000" cy="190000"/>
-          </a:xfrm>
-          <a:prstGeom prst="rect">
-            <a:avLst/>
-          </a:prstGeom>
-          <a:noFill/>
-          <a:ln/>
-        </p:spPr>
-        <p:txBody>
-          <a:bodyPr wrap="square" lIns="0" tIns="0" rIns="0" bIns="0" rtlCol="0" anchor="t"/>
-          <a:lstStyle/>
-          <a:p>
-            <a:pPr marL="0" indent="0" algn="l">
-              <a:buNone/>
-            </a:pPr>
-            <a:r>
-              <a:rPr lang="en-US" sz="950" b="1" dirty="0">
-                <a:solidFill>
-                  <a:srgbClr val="0891B2"/>
-                </a:solidFill>
-              </a:rPr>
-              <a:t>•</a:t>
-            </a:r>
-          </a:p>
-        </p:txBody>
-      </p:sp>
-      <p:sp>
-        <p:nvSpPr>
-          <p:cNvPr id="135" name="Text"/>
-          <p:cNvSpPr/>
-          <p:nvPr/>
-        </p:nvSpPr>
-        <p:spPr>
-          <a:xfrm>
-            <a:off x="657200" y="3549600"/>
-            <a:ext cx="3800500" cy="190000"/>
-          </a:xfrm>
-          <a:prstGeom prst="rect">
-            <a:avLst/>
-          </a:prstGeom>
-          <a:noFill/>
-          <a:ln/>
-        </p:spPr>
-        <p:txBody>
-          <a:bodyPr wrap="square" lIns="0" tIns="0" rIns="0" bIns="0" rtlCol="0" anchor="t"/>
-          <a:lstStyle/>
-          <a:p>
-            <a:pPr marL="0" indent="0" algn="l">
-              <a:buNone/>
-            </a:pPr>
-            <a:r>
-              <a:rPr lang="en-US" sz="850" b="0" dirty="0">
-                <a:solidFill>
-                  <a:srgbClr val="E2E8F0"/>
-                </a:solidFill>
-              </a:rPr>
-              <a:t>Safe borrowing amount</a:t>
-            </a:r>
-          </a:p>
-        </p:txBody>
-      </p:sp>
-      <p:sp>
-        <p:nvSpPr>
-          <p:cNvPr id="136" name="Text"/>
-          <p:cNvSpPr/>
-          <p:nvPr/>
-        </p:nvSpPr>
-        <p:spPr>
-          <a:xfrm>
-            <a:off x="457200" y="3799600"/>
-            <a:ext cx="30000" cy="190000"/>
-          </a:xfrm>
-          <a:prstGeom prst="rect">
-            <a:avLst/>
-          </a:prstGeom>
-          <a:noFill/>
-          <a:ln/>
-        </p:spPr>
-        <p:txBody>
-          <a:bodyPr wrap="square" lIns="0" tIns="0" rIns="0" bIns="0" rtlCol="0" anchor="t"/>
-          <a:lstStyle/>
-          <a:p>
-            <a:pPr marL="0" indent="0" algn="l">
-              <a:buNone/>
-            </a:pPr>
-            <a:r>
-              <a:rPr lang="en-US" sz="950" b="1" dirty="0">
-                <a:solidFill>
-                  <a:srgbClr val="0891B2"/>
-                </a:solidFill>
-              </a:rPr>
-              <a:t>•</a:t>
-            </a:r>
-          </a:p>
-        </p:txBody>
-      </p:sp>
-      <p:sp>
-        <p:nvSpPr>
-          <p:cNvPr id="137" name="Text"/>
-          <p:cNvSpPr/>
-          <p:nvPr/>
-        </p:nvSpPr>
-        <p:spPr>
-          <a:xfrm>
-            <a:off x="657200" y="3799600"/>
-            <a:ext cx="3800500" cy="190000"/>
-          </a:xfrm>
-          <a:prstGeom prst="rect">
-            <a:avLst/>
-          </a:prstGeom>
-          <a:noFill/>
-          <a:ln/>
-        </p:spPr>
-        <p:txBody>
-          <a:bodyPr wrap="square" lIns="0" tIns="0" rIns="0" bIns="0" rtlCol="0" anchor="t"/>
-          <a:lstStyle/>
-          <a:p>
-            <a:pPr marL="0" indent="0" algn="l">
-              <a:buNone/>
-            </a:pPr>
-            <a:r>
-              <a:rPr lang="en-US" sz="850" b="0" dirty="0">
-                <a:solidFill>
-                  <a:srgbClr val="E2E8F0"/>
-                </a:solidFill>
-              </a:rPr>
-              <a:t>Recommended banks &amp; rates</a:t>
-            </a:r>
-          </a:p>
-        </p:txBody>
-      </p:sp>
-      <p:sp>
-        <p:nvSpPr>
-          <p:cNvPr id="138" name="Text"/>
-          <p:cNvSpPr/>
-          <p:nvPr/>
-        </p:nvSpPr>
-        <p:spPr>
-          <a:xfrm>
-            <a:off x="457200" y="4049600"/>
-            <a:ext cx="30000" cy="190000"/>
-          </a:xfrm>
-          <a:prstGeom prst="rect">
-            <a:avLst/>
-          </a:prstGeom>
-          <a:noFill/>
-          <a:ln/>
-        </p:spPr>
-        <p:txBody>
-          <a:bodyPr wrap="square" lIns="0" tIns="0" rIns="0" bIns="0" rtlCol="0" anchor="t"/>
-          <a:lstStyle/>
-          <a:p>
-            <a:pPr marL="0" indent="0" algn="l">
-              <a:buNone/>
-            </a:pPr>
-            <a:r>
-              <a:rPr lang="en-US" sz="950" b="1" dirty="0">
-                <a:solidFill>
-                  <a:srgbClr val="0891B2"/>
-                </a:solidFill>
-              </a:rPr>
-              <a:t>•</a:t>
-            </a:r>
-          </a:p>
-        </p:txBody>
-      </p:sp>
-      <p:sp>
-        <p:nvSpPr>
-          <p:cNvPr id="139" name="Text"/>
-          <p:cNvSpPr/>
-          <p:nvPr/>
-        </p:nvSpPr>
-        <p:spPr>
-          <a:xfrm>
-            <a:off x="657200" y="4049600"/>
-            <a:ext cx="3800500" cy="190000"/>
-          </a:xfrm>
-          <a:prstGeom prst="rect">
-            <a:avLst/>
-          </a:prstGeom>
-          <a:noFill/>
-          <a:ln/>
-        </p:spPr>
-        <p:txBody>
-          <a:bodyPr wrap="square" lIns="0" tIns="0" rIns="0" bIns="0" rtlCol="0" anchor="t"/>
-          <a:lstStyle/>
-          <a:p>
-            <a:pPr marL="0" indent="0" algn="l">
-              <a:buNone/>
-            </a:pPr>
-            <a:r>
-              <a:rPr lang="en-US" sz="850" b="0" dirty="0">
-                <a:solidFill>
-                  <a:srgbClr val="E2E8F0"/>
-                </a:solidFill>
-              </a:rPr>
-              <a:t>Debt-to-income ratio (DTI)</a:t>
-            </a:r>
-          </a:p>
-        </p:txBody>
-      </p:sp>
-      <p:sp>
-        <p:nvSpPr>
-          <p:cNvPr id="140" name="Text"/>
-          <p:cNvSpPr/>
-          <p:nvPr/>
-        </p:nvSpPr>
-        <p:spPr>
-          <a:xfrm>
-            <a:off x="457200" y="4299600"/>
-            <a:ext cx="30000" cy="190000"/>
-          </a:xfrm>
-          <a:prstGeom prst="rect">
-            <a:avLst/>
-          </a:prstGeom>
-          <a:noFill/>
-          <a:ln/>
-        </p:spPr>
-        <p:txBody>
-          <a:bodyPr wrap="square" lIns="0" tIns="0" rIns="0" bIns="0" rtlCol="0" anchor="t"/>
-          <a:lstStyle/>
-          <a:p>
-            <a:pPr marL="0" indent="0" algn="l">
-              <a:buNone/>
-            </a:pPr>
-            <a:r>
-              <a:rPr lang="en-US" sz="950" b="1" dirty="0">
-                <a:solidFill>
-                  <a:srgbClr val="0891B2"/>
-                </a:solidFill>
-              </a:rPr>
-              <a:t>•</a:t>
-            </a:r>
-          </a:p>
-        </p:txBody>
-      </p:sp>
-      <p:sp>
-        <p:nvSpPr>
-          <p:cNvPr id="141" name="Text"/>
-          <p:cNvSpPr/>
-          <p:nvPr/>
-        </p:nvSpPr>
-        <p:spPr>
-          <a:xfrm>
-            <a:off x="657200" y="4299600"/>
-            <a:ext cx="3800500" cy="190000"/>
-          </a:xfrm>
-          <a:prstGeom prst="rect">
-            <a:avLst/>
-          </a:prstGeom>
-          <a:noFill/>
-          <a:ln/>
-        </p:spPr>
-        <p:txBody>
-          <a:bodyPr wrap="square" lIns="0" tIns="0" rIns="0" bIns="0" rtlCol="0" anchor="t"/>
-          <a:lstStyle/>
-          <a:p>
-            <a:pPr marL="0" indent="0" algn="l">
-              <a:buNone/>
-            </a:pPr>
-            <a:r>
-              <a:rPr lang="en-US" sz="850" b="0" dirty="0">
-                <a:solidFill>
-                  <a:srgbClr val="E2E8F0"/>
-                </a:solidFill>
-              </a:rPr>
-              <a:t>Improvement action plan</a:t>
-            </a:r>
-          </a:p>
-        </p:txBody>
-      </p:sp>
-      <p:sp>
-        <p:nvSpPr>
-          <p:cNvPr id="142" name="Text"/>
-          <p:cNvSpPr/>
-          <p:nvPr/>
-        </p:nvSpPr>
-        <p:spPr>
-          <a:xfrm>
-            <a:off x="4686300" y="3049600"/>
-            <a:ext cx="30000" cy="190000"/>
-          </a:xfrm>
-          <a:prstGeom prst="rect">
-            <a:avLst/>
-          </a:prstGeom>
-          <a:noFill/>
-          <a:ln/>
-        </p:spPr>
-        <p:txBody>
-          <a:bodyPr wrap="square" lIns="0" tIns="0" rIns="0" bIns="0" rtlCol="0" anchor="t"/>
-          <a:lstStyle/>
-          <a:p>
-            <a:pPr marL="0" indent="0" algn="l">
-              <a:buNone/>
-            </a:pPr>
-            <a:r>
-              <a:rPr lang="en-US" sz="950" b="1" dirty="0">
-                <a:solidFill>
-                  <a:srgbClr val="D97706"/>
-                </a:solidFill>
-              </a:rPr>
-              <a:t>•</a:t>
-            </a:r>
-          </a:p>
-        </p:txBody>
-      </p:sp>
-      <p:sp>
-        <p:nvSpPr>
-          <p:cNvPr id="143" name="Text"/>
-          <p:cNvSpPr/>
-          <p:nvPr/>
-        </p:nvSpPr>
-        <p:spPr>
-          <a:xfrm>
-            <a:off x="4886300" y="3049600"/>
-            <a:ext cx="3800500" cy="190000"/>
-          </a:xfrm>
-          <a:prstGeom prst="rect">
-            <a:avLst/>
-          </a:prstGeom>
-          <a:noFill/>
-          <a:ln/>
-        </p:spPr>
-        <p:txBody>
-          <a:bodyPr wrap="square" lIns="0" tIns="0" rIns="0" bIns="0" rtlCol="0" anchor="t"/>
-          <a:lstStyle/>
-          <a:p>
-            <a:pPr marL="0" indent="0" algn="l">
-              <a:buNone/>
-            </a:pPr>
-            <a:r>
-              <a:rPr lang="en-US" sz="850" b="0" dirty="0">
-                <a:solidFill>
-                  <a:srgbClr val="E2E8F0"/>
-                </a:solidFill>
-              </a:rPr>
-              <a:t>NPA risk &amp; CRAR indicators</a:t>
-            </a:r>
-          </a:p>
-        </p:txBody>
-      </p:sp>
-      <p:sp>
-        <p:nvSpPr>
-          <p:cNvPr id="144" name="Text"/>
-          <p:cNvSpPr/>
-          <p:nvPr/>
-        </p:nvSpPr>
-        <p:spPr>
-          <a:xfrm>
-            <a:off x="4686300" y="3299600"/>
-            <a:ext cx="30000" cy="190000"/>
-          </a:xfrm>
-          <a:prstGeom prst="rect">
-            <a:avLst/>
-          </a:prstGeom>
-          <a:noFill/>
-          <a:ln/>
-        </p:spPr>
-        <p:txBody>
-          <a:bodyPr wrap="square" lIns="0" tIns="0" rIns="0" bIns="0" rtlCol="0" anchor="t"/>
-          <a:lstStyle/>
-          <a:p>
-            <a:pPr marL="0" indent="0" algn="l">
-              <a:buNone/>
-            </a:pPr>
-            <a:r>
-              <a:rPr lang="en-US" sz="950" b="1" dirty="0">
-                <a:solidFill>
-                  <a:srgbClr val="D97706"/>
-                </a:solidFill>
-              </a:rPr>
-              <a:t>•</a:t>
-            </a:r>
-          </a:p>
-        </p:txBody>
-      </p:sp>
-      <p:sp>
-        <p:nvSpPr>
-          <p:cNvPr id="145" name="Text"/>
-          <p:cNvSpPr/>
-          <p:nvPr/>
-        </p:nvSpPr>
-        <p:spPr>
-          <a:xfrm>
-            <a:off x="4886300" y="3299600"/>
-            <a:ext cx="3800500" cy="190000"/>
-          </a:xfrm>
-          <a:prstGeom prst="rect">
-            <a:avLst/>
-          </a:prstGeom>
-          <a:noFill/>
-          <a:ln/>
-        </p:spPr>
-        <p:txBody>
-          <a:bodyPr wrap="square" lIns="0" tIns="0" rIns="0" bIns="0" rtlCol="0" anchor="t"/>
-          <a:lstStyle/>
-          <a:p>
-            <a:pPr marL="0" indent="0" algn="l">
-              <a:buNone/>
-            </a:pPr>
-            <a:r>
-              <a:rPr lang="en-US" sz="850" b="0" dirty="0">
-                <a:solidFill>
-                  <a:srgbClr val="E2E8F0"/>
-                </a:solidFill>
-              </a:rPr>
-              <a:t>Fraud detection flags</a:t>
-            </a:r>
-          </a:p>
-        </p:txBody>
-      </p:sp>
-      <p:sp>
-        <p:nvSpPr>
-          <p:cNvPr id="146" name="Text"/>
-          <p:cNvSpPr/>
-          <p:nvPr/>
-        </p:nvSpPr>
-        <p:spPr>
-          <a:xfrm>
-            <a:off x="4686300" y="3549600"/>
-            <a:ext cx="30000" cy="190000"/>
-          </a:xfrm>
-          <a:prstGeom prst="rect">
-            <a:avLst/>
-          </a:prstGeom>
-          <a:noFill/>
-          <a:ln/>
-        </p:spPr>
-        <p:txBody>
-          <a:bodyPr wrap="square" lIns="0" tIns="0" rIns="0" bIns="0" rtlCol="0" anchor="t"/>
-          <a:lstStyle/>
-          <a:p>
-            <a:pPr marL="0" indent="0" algn="l">
-              <a:buNone/>
-            </a:pPr>
-            <a:r>
-              <a:rPr lang="en-US" sz="950" b="1" dirty="0">
-                <a:solidFill>
-                  <a:srgbClr val="D97706"/>
-                </a:solidFill>
-              </a:rPr>
-              <a:t>•</a:t>
-            </a:r>
-          </a:p>
-        </p:txBody>
-      </p:sp>
-      <p:sp>
-        <p:nvSpPr>
-          <p:cNvPr id="147" name="Text"/>
-          <p:cNvSpPr/>
-          <p:nvPr/>
-        </p:nvSpPr>
-        <p:spPr>
-          <a:xfrm>
-            <a:off x="4886300" y="3549600"/>
-            <a:ext cx="3800500" cy="190000"/>
-          </a:xfrm>
-          <a:prstGeom prst="rect">
-            <a:avLst/>
-          </a:prstGeom>
-          <a:noFill/>
-          <a:ln/>
-        </p:spPr>
-        <p:txBody>
-          <a:bodyPr wrap="square" lIns="0" tIns="0" rIns="0" bIns="0" rtlCol="0" anchor="t"/>
-          <a:lstStyle/>
-          <a:p>
-            <a:pPr marL="0" indent="0" algn="l">
-              <a:buNone/>
-            </a:pPr>
-            <a:r>
-              <a:rPr lang="en-US" sz="850" b="0" dirty="0">
-                <a:solidFill>
-                  <a:srgbClr val="E2E8F0"/>
-                </a:solidFill>
-              </a:rPr>
-              <a:t>Applicant financial summary</a:t>
-            </a:r>
-          </a:p>
-        </p:txBody>
-      </p:sp>
-      <p:sp>
-        <p:nvSpPr>
-          <p:cNvPr id="148" name="Text"/>
-          <p:cNvSpPr/>
-          <p:nvPr/>
-        </p:nvSpPr>
-        <p:spPr>
-          <a:xfrm>
-            <a:off x="4686300" y="3799600"/>
-            <a:ext cx="30000" cy="190000"/>
-          </a:xfrm>
-          <a:prstGeom prst="rect">
-            <a:avLst/>
-          </a:prstGeom>
-          <a:noFill/>
-          <a:ln/>
-        </p:spPr>
-        <p:txBody>
-          <a:bodyPr wrap="square" lIns="0" tIns="0" rIns="0" bIns="0" rtlCol="0" anchor="t"/>
-          <a:lstStyle/>
-          <a:p>
-            <a:pPr marL="0" indent="0" algn="l">
-              <a:buNone/>
-            </a:pPr>
-            <a:r>
-              <a:rPr lang="en-US" sz="950" b="1" dirty="0">
-                <a:solidFill>
-                  <a:srgbClr val="D97706"/>
-                </a:solidFill>
-              </a:rPr>
-              <a:t>•</a:t>
-            </a:r>
-          </a:p>
-        </p:txBody>
-      </p:sp>
-      <p:sp>
-        <p:nvSpPr>
-          <p:cNvPr id="149" name="Text"/>
-          <p:cNvSpPr/>
-          <p:nvPr/>
-        </p:nvSpPr>
-        <p:spPr>
-          <a:xfrm>
-            <a:off x="4886300" y="3799600"/>
-            <a:ext cx="3800500" cy="190000"/>
-          </a:xfrm>
-          <a:prstGeom prst="rect">
-            <a:avLst/>
-          </a:prstGeom>
-          <a:noFill/>
-          <a:ln/>
-        </p:spPr>
-        <p:txBody>
-          <a:bodyPr wrap="square" lIns="0" tIns="0" rIns="0" bIns="0" rtlCol="0" anchor="t"/>
-          <a:lstStyle/>
-          <a:p>
-            <a:pPr marL="0" indent="0" algn="l">
-              <a:buNone/>
-            </a:pPr>
-            <a:r>
-              <a:rPr lang="en-US" sz="850" b="0" dirty="0">
-                <a:solidFill>
-                  <a:srgbClr val="E2E8F0"/>
-                </a:solidFill>
-              </a:rPr>
-              <a:t>Loan approve / reject decision</a:t>
-            </a:r>
-          </a:p>
-        </p:txBody>
-      </p:sp>
-      <p:sp>
-        <p:nvSpPr>
-          <p:cNvPr id="150" name="Text"/>
-          <p:cNvSpPr/>
-          <p:nvPr/>
-        </p:nvSpPr>
-        <p:spPr>
-          <a:xfrm>
-            <a:off x="4686300" y="4049600"/>
-            <a:ext cx="30000" cy="190000"/>
-          </a:xfrm>
-          <a:prstGeom prst="rect">
-            <a:avLst/>
-          </a:prstGeom>
-          <a:noFill/>
-          <a:ln/>
-        </p:spPr>
-        <p:txBody>
-          <a:bodyPr wrap="square" lIns="0" tIns="0" rIns="0" bIns="0" rtlCol="0" anchor="t"/>
-          <a:lstStyle/>
-          <a:p>
-            <a:pPr marL="0" indent="0" algn="l">
-              <a:buNone/>
-            </a:pPr>
-            <a:r>
-              <a:rPr lang="en-US" sz="950" b="1" dirty="0">
-                <a:solidFill>
-                  <a:srgbClr val="D97706"/>
-                </a:solidFill>
-              </a:rPr>
-              <a:t>•</a:t>
-            </a:r>
-          </a:p>
-        </p:txBody>
-      </p:sp>
-      <p:sp>
-        <p:nvSpPr>
-          <p:cNvPr id="151" name="Text"/>
-          <p:cNvSpPr/>
-          <p:nvPr/>
-        </p:nvSpPr>
-        <p:spPr>
-          <a:xfrm>
-            <a:off x="4886300" y="4049600"/>
-            <a:ext cx="3800500" cy="190000"/>
-          </a:xfrm>
-          <a:prstGeom prst="rect">
-            <a:avLst/>
-          </a:prstGeom>
-          <a:noFill/>
-          <a:ln/>
-        </p:spPr>
-        <p:txBody>
-          <a:bodyPr wrap="square" lIns="0" tIns="0" rIns="0" bIns="0" rtlCol="0" anchor="t"/>
-          <a:lstStyle/>
-          <a:p>
-            <a:pPr marL="0" indent="0" algn="l">
-              <a:buNone/>
-            </a:pPr>
-            <a:r>
-              <a:rPr lang="en-US" sz="850" b="0" dirty="0">
-                <a:solidFill>
-                  <a:srgbClr val="E2E8F0"/>
-                </a:solidFill>
-              </a:rPr>
-              <a:t>Capital adequacy assessment</a:t>
-            </a:r>
-          </a:p>
-        </p:txBody>
-      </p:sp>
-      <p:sp>
-        <p:nvSpPr>
-          <p:cNvPr id="152" name="Text"/>
-          <p:cNvSpPr/>
-          <p:nvPr/>
-        </p:nvSpPr>
-        <p:spPr>
-          <a:xfrm>
-            <a:off x="4686300" y="4299600"/>
-            <a:ext cx="30000" cy="190000"/>
-          </a:xfrm>
-          <a:prstGeom prst="rect">
-            <a:avLst/>
-          </a:prstGeom>
-          <a:noFill/>
-          <a:ln/>
-        </p:spPr>
-        <p:txBody>
-          <a:bodyPr wrap="square" lIns="0" tIns="0" rIns="0" bIns="0" rtlCol="0" anchor="t"/>
-          <a:lstStyle/>
-          <a:p>
-            <a:pPr marL="0" indent="0" algn="l">
-              <a:buNone/>
-            </a:pPr>
-            <a:r>
-              <a:rPr lang="en-US" sz="950" b="1" dirty="0">
-                <a:solidFill>
-                  <a:srgbClr val="D97706"/>
-                </a:solidFill>
-              </a:rPr>
-              <a:t>•</a:t>
-            </a:r>
-          </a:p>
-        </p:txBody>
-      </p:sp>
-      <p:sp>
-        <p:nvSpPr>
-          <p:cNvPr id="153" name="Text"/>
-          <p:cNvSpPr/>
-          <p:nvPr/>
-        </p:nvSpPr>
-        <p:spPr>
-          <a:xfrm>
-            <a:off x="4886300" y="4299600"/>
-            <a:ext cx="3800500" cy="190000"/>
-          </a:xfrm>
-          <a:prstGeom prst="rect">
-            <a:avLst/>
-          </a:prstGeom>
-          <a:noFill/>
-          <a:ln/>
-        </p:spPr>
-        <p:txBody>
-          <a:bodyPr wrap="square" lIns="0" tIns="0" rIns="0" bIns="0" rtlCol="0" anchor="t"/>
-          <a:lstStyle/>
-          <a:p>
-            <a:pPr marL="0" indent="0" algn="l">
-              <a:buNone/>
-            </a:pPr>
-            <a:r>
-              <a:rPr lang="en-US" sz="850" b="0" dirty="0">
-                <a:solidFill>
-                  <a:srgbClr val="E2E8F0"/>
-                </a:solidFill>
-              </a:rPr>
-              <a:t>Structured executive report</a:t>
-            </a:r>
-          </a:p>
-        </p:txBody>
-      </p:sp>
-    </p:spTree>
-  </p:cSld>
-  <p:clrMapOvr>
-    <a:masterClrMapping/>
-  </p:clrMapOvr>
-</p:sld>
-</file>
-
-<file path=ppt/slides/slide11.xml><?xml version="1.0" encoding="utf-8"?>
-<p:sld xmlns:a="http://schemas.openxmlformats.org/drawingml/2006/main" xmlns:r="http://schemas.openxmlformats.org/officeDocument/2006/relationships" xmlns:p="http://schemas.openxmlformats.org/presentationml/2006/main">
   <p:cSld>
     <p:bg>
       <p:bgPr>
@@ -4925,7 +3070,7 @@
 </p:sld>
 </file>
 
-<file path=ppt/slides/slide12.xml><?xml version="1.0" encoding="utf-8"?>
+<file path=ppt/slides/slide11.xml><?xml version="1.0" encoding="utf-8"?>
 <p:sld xmlns:a="http://schemas.openxmlformats.org/drawingml/2006/main" xmlns:r="http://schemas.openxmlformats.org/officeDocument/2006/relationships" xmlns:p="http://schemas.openxmlformats.org/presentationml/2006/main">
   <p:cSld name="Core Feature Showcase">
     <p:bg>
@@ -5995,7 +4140,7 @@
 </p:sld>
 </file>
 
-<file path=ppt/slides/slide13.xml><?xml version="1.0" encoding="utf-8"?>
+<file path=ppt/slides/slide12.xml><?xml version="1.0" encoding="utf-8"?>
 <p:sld xmlns:a="http://schemas.openxmlformats.org/drawingml/2006/main" xmlns:r="http://schemas.openxmlformats.org/officeDocument/2006/relationships" xmlns:p="http://schemas.openxmlformats.org/presentationml/2006/main">
   <p:cSld name="Slide 8">
     <p:bg>
@@ -7728,7 +5873,7 @@
 </p:sld>
 </file>
 
-<file path=ppt/slides/slide14.xml><?xml version="1.0" encoding="utf-8"?>
+<file path=ppt/slides/slide13.xml><?xml version="1.0" encoding="utf-8"?>
 <p:sld xmlns:a="http://schemas.openxmlformats.org/drawingml/2006/main" xmlns:r="http://schemas.openxmlformats.org/officeDocument/2006/relationships" xmlns:p="http://schemas.openxmlformats.org/presentationml/2006/main">
   <p:cSld name="AI Quality and Testing">
     <p:bg>
@@ -8986,7 +7131,7 @@
 </p:sld>
 </file>
 
-<file path=ppt/slides/slide15.xml><?xml version="1.0" encoding="utf-8"?>
+<file path=ppt/slides/slide14.xml><?xml version="1.0" encoding="utf-8"?>
 <p:sld xmlns:a="http://schemas.openxmlformats.org/drawingml/2006/main" xmlns:r="http://schemas.openxmlformats.org/officeDocument/2006/relationships" xmlns:p="http://schemas.openxmlformats.org/presentationml/2006/main">
   <p:cSld name="DevOps">
     <p:bg>
@@ -10218,7 +8363,7 @@
 </p:sld>
 </file>
 
-<file path=ppt/slides/slide16.xml><?xml version="1.0" encoding="utf-8"?>
+<file path=ppt/slides/slide15.xml><?xml version="1.0" encoding="utf-8"?>
 <p:sld xmlns:a="http://schemas.openxmlformats.org/drawingml/2006/main" xmlns:r="http://schemas.openxmlformats.org/officeDocument/2006/relationships" xmlns:p="http://schemas.openxmlformats.org/presentationml/2006/main">
   <p:cSld name="Challenges and Lessons">
     <p:bg>
@@ -11368,6 +9513,1916 @@
         </p:txBody>
       </p:sp>
     </p:spTree>
+  </p:cSld>
+  <p:clrMapOvr>
+    <a:masterClrMapping/>
+  </p:clrMapOvr>
+</p:sld>
+</file>
+
+<file path=ppt/slides/slide16.xml><?xml version="1.0" encoding="utf-8"?>
+<p:sld xmlns:a="http://schemas.openxmlformats.org/drawingml/2006/main" xmlns:r="http://schemas.openxmlformats.org/officeDocument/2006/relationships" xmlns:p="http://schemas.openxmlformats.org/presentationml/2006/main">
+  <p:cSld>
+    <p:bg>
+      <p:bgPr>
+        <a:solidFill>
+          <a:srgbClr val="0F1B2D"/>
+        </a:solidFill>
+        <a:effectLst/>
+      </p:bgPr>
+    </p:bg>
+    <p:spTree>
+      <p:nvGrpSpPr>
+        <p:cNvPr id="1" name=""/>
+        <p:cNvGrpSpPr/>
+        <p:nvPr/>
+      </p:nvGrpSpPr>
+      <p:grpSpPr>
+        <a:xfrm>
+          <a:off x="0" y="0"/>
+          <a:ext cx="0" cy="0"/>
+          <a:chOff x="0" y="0"/>
+          <a:chExt cx="0" cy="0"/>
+        </a:xfrm>
+      </p:grpSpPr>
+      <p:sp>
+        <p:nvSpPr>
+          <p:cNvPr id="2" name="Shape 0"/>
+          <p:cNvSpPr/>
+          <p:nvPr/>
+        </p:nvSpPr>
+        <p:spPr>
+          <a:xfrm>
+            <a:off x="457200" y="274320"/>
+            <a:ext cx="2286000" cy="256032"/>
+          </a:xfrm>
+          <a:prstGeom prst="roundRect">
+            <a:avLst>
+              <a:gd name="adj" fmla="val 21429"/>
+            </a:avLst>
+          </a:prstGeom>
+          <a:solidFill>
+            <a:srgbClr val="F5A623">
+              <a:alpha val="22000"/>
+            </a:srgbClr>
+          </a:solidFill>
+          <a:ln/>
+        </p:spPr>
+      </p:sp>
+      <p:sp>
+        <p:nvSpPr>
+          <p:cNvPr id="3" name="Text 1"/>
+          <p:cNvSpPr/>
+          <p:nvPr/>
+        </p:nvSpPr>
+        <p:spPr>
+          <a:xfrm>
+            <a:off x="457200" y="274320"/>
+            <a:ext cx="2286000" cy="256032"/>
+          </a:xfrm>
+          <a:prstGeom prst="rect">
+            <a:avLst/>
+          </a:prstGeom>
+          <a:noFill/>
+          <a:ln/>
+        </p:spPr>
+        <p:txBody>
+          <a:bodyPr wrap="square" lIns="0" tIns="0" rIns="0" bIns="0" rtlCol="0" anchor="ctr"/>
+          <a:lstStyle/>
+          <a:p>
+            <a:pPr marL="0" marR="0" lvl="0" indent="0" algn="ctr" defTabSz="914400" rtl="0" eaLnBrk="1" fontAlgn="auto" latinLnBrk="0" hangingPunct="1">
+              <a:lnSpc>
+                <a:spcPct val="100000"/>
+              </a:lnSpc>
+              <a:spcBef>
+                <a:spcPts val="0"/>
+              </a:spcBef>
+              <a:spcAft>
+                <a:spcPts val="0"/>
+              </a:spcAft>
+              <a:buClrTx/>
+              <a:buSzTx/>
+              <a:buFontTx/>
+              <a:buNone/>
+              <a:tabLst/>
+              <a:defRPr/>
+            </a:pPr>
+            <a:r>
+              <a:rPr kumimoji="0" lang="en-US" sz="900" b="1" i="0" u="none" strike="noStrike" kern="0" cap="none" spc="120" normalizeH="0" baseline="0" noProof="0" dirty="0">
+                <a:ln>
+                  <a:noFill/>
+                </a:ln>
+                <a:solidFill>
+                  <a:srgbClr val="F5A623"/>
+                </a:solidFill>
+                <a:effectLst/>
+                <a:uLnTx/>
+                <a:uFillTx/>
+                <a:latin typeface="Calibri" pitchFamily="34" charset="0"/>
+                <a:ea typeface="Calibri" pitchFamily="34" charset="-122"/>
+                <a:cs typeface="Calibri" pitchFamily="34" charset="-120"/>
+              </a:rPr>
+              <a:t>EY GUIDELINES · IN PRACTICE</a:t>
+            </a:r>
+            <a:endParaRPr kumimoji="0" lang="en-US" sz="900" b="0" i="0" u="none" strike="noStrike" kern="1200" cap="none" spc="0" normalizeH="0" baseline="0" noProof="0" dirty="0">
+              <a:ln>
+                <a:noFill/>
+              </a:ln>
+              <a:solidFill>
+                <a:prstClr val="black"/>
+              </a:solidFill>
+              <a:effectLst/>
+              <a:uLnTx/>
+              <a:uFillTx/>
+              <a:latin typeface="Calibri" panose="020F0502020204030204"/>
+              <a:ea typeface="+mn-ea"/>
+              <a:cs typeface="+mn-cs"/>
+            </a:endParaRPr>
+          </a:p>
+        </p:txBody>
+      </p:sp>
+      <p:sp>
+        <p:nvSpPr>
+          <p:cNvPr id="4" name="Text 2"/>
+          <p:cNvSpPr/>
+          <p:nvPr/>
+        </p:nvSpPr>
+        <p:spPr>
+          <a:xfrm>
+            <a:off x="457200" y="566928"/>
+            <a:ext cx="8229600" cy="457200"/>
+          </a:xfrm>
+          <a:prstGeom prst="rect">
+            <a:avLst/>
+          </a:prstGeom>
+          <a:noFill/>
+          <a:ln/>
+        </p:spPr>
+        <p:txBody>
+          <a:bodyPr wrap="square" lIns="0" tIns="0" rIns="0" bIns="0" rtlCol="0" anchor="ctr"/>
+          <a:lstStyle/>
+          <a:p>
+            <a:pPr marL="0" marR="0" lvl="0" indent="0" algn="l" defTabSz="914400" rtl="0" eaLnBrk="1" fontAlgn="auto" latinLnBrk="0" hangingPunct="1">
+              <a:lnSpc>
+                <a:spcPct val="100000"/>
+              </a:lnSpc>
+              <a:spcBef>
+                <a:spcPts val="0"/>
+              </a:spcBef>
+              <a:spcAft>
+                <a:spcPts val="0"/>
+              </a:spcAft>
+              <a:buClrTx/>
+              <a:buSzTx/>
+              <a:buFontTx/>
+              <a:buNone/>
+              <a:tabLst/>
+              <a:defRPr/>
+            </a:pPr>
+            <a:r>
+              <a:rPr kumimoji="0" lang="en-US" sz="2200" b="1" i="0" u="none" strike="noStrike" kern="1200" cap="none" spc="0" normalizeH="0" baseline="0" noProof="0" dirty="0">
+                <a:ln>
+                  <a:noFill/>
+                </a:ln>
+                <a:solidFill>
+                  <a:srgbClr val="FFFFFF"/>
+                </a:solidFill>
+                <a:effectLst/>
+                <a:uLnTx/>
+                <a:uFillTx/>
+                <a:latin typeface="Cambria" pitchFamily="34" charset="0"/>
+                <a:ea typeface="Cambria" pitchFamily="34" charset="-122"/>
+                <a:cs typeface="Cambria" pitchFamily="34" charset="-120"/>
+              </a:rPr>
+              <a:t>How Our Project Followed EY Coding Guidelines</a:t>
+            </a:r>
+            <a:endParaRPr kumimoji="0" lang="en-US" sz="2200" b="0" i="0" u="none" strike="noStrike" kern="1200" cap="none" spc="0" normalizeH="0" baseline="0" noProof="0" dirty="0">
+              <a:ln>
+                <a:noFill/>
+              </a:ln>
+              <a:solidFill>
+                <a:prstClr val="black"/>
+              </a:solidFill>
+              <a:effectLst/>
+              <a:uLnTx/>
+              <a:uFillTx/>
+              <a:latin typeface="Calibri" panose="020F0502020204030204"/>
+              <a:ea typeface="+mn-ea"/>
+              <a:cs typeface="+mn-cs"/>
+            </a:endParaRPr>
+          </a:p>
+        </p:txBody>
+      </p:sp>
+      <p:sp>
+        <p:nvSpPr>
+          <p:cNvPr id="5" name="Text 3"/>
+          <p:cNvSpPr/>
+          <p:nvPr/>
+        </p:nvSpPr>
+        <p:spPr>
+          <a:xfrm>
+            <a:off x="457200" y="969264"/>
+            <a:ext cx="8229600" cy="274320"/>
+          </a:xfrm>
+          <a:prstGeom prst="rect">
+            <a:avLst/>
+          </a:prstGeom>
+          <a:noFill/>
+          <a:ln/>
+        </p:spPr>
+        <p:txBody>
+          <a:bodyPr wrap="square" lIns="0" tIns="0" rIns="0" bIns="0" rtlCol="0" anchor="ctr"/>
+          <a:lstStyle/>
+          <a:p>
+            <a:pPr marL="0" marR="0" lvl="0" indent="0" algn="l" defTabSz="914400" rtl="0" eaLnBrk="1" fontAlgn="auto" latinLnBrk="0" hangingPunct="1">
+              <a:lnSpc>
+                <a:spcPct val="100000"/>
+              </a:lnSpc>
+              <a:spcBef>
+                <a:spcPts val="0"/>
+              </a:spcBef>
+              <a:spcAft>
+                <a:spcPts val="0"/>
+              </a:spcAft>
+              <a:buClrTx/>
+              <a:buSzTx/>
+              <a:buFontTx/>
+              <a:buNone/>
+              <a:tabLst/>
+              <a:defRPr/>
+            </a:pPr>
+            <a:r>
+              <a:rPr kumimoji="0" lang="en-US" sz="1050" b="0" i="1" u="none" strike="noStrike" kern="1200" cap="none" spc="0" normalizeH="0" baseline="0" noProof="0" dirty="0">
+                <a:ln>
+                  <a:noFill/>
+                </a:ln>
+                <a:solidFill>
+                  <a:srgbClr val="AAB4C4"/>
+                </a:solidFill>
+                <a:effectLst/>
+                <a:uLnTx/>
+                <a:uFillTx/>
+                <a:latin typeface="Calibri" pitchFamily="34" charset="0"/>
+                <a:ea typeface="Calibri" pitchFamily="34" charset="-122"/>
+                <a:cs typeface="Calibri" pitchFamily="34" charset="-120"/>
+              </a:rPr>
+              <a:t>Every EY coding principle mapped to what we actually built and shipped on the Credit Risk Intelligence Platform.</a:t>
+            </a:r>
+            <a:endParaRPr kumimoji="0" lang="en-US" sz="1050" b="0" i="0" u="none" strike="noStrike" kern="1200" cap="none" spc="0" normalizeH="0" baseline="0" noProof="0" dirty="0">
+              <a:ln>
+                <a:noFill/>
+              </a:ln>
+              <a:solidFill>
+                <a:prstClr val="black"/>
+              </a:solidFill>
+              <a:effectLst/>
+              <a:uLnTx/>
+              <a:uFillTx/>
+              <a:latin typeface="Calibri" panose="020F0502020204030204"/>
+              <a:ea typeface="+mn-ea"/>
+              <a:cs typeface="+mn-cs"/>
+            </a:endParaRPr>
+          </a:p>
+        </p:txBody>
+      </p:sp>
+      <p:sp>
+        <p:nvSpPr>
+          <p:cNvPr id="6" name="Shape 4"/>
+          <p:cNvSpPr/>
+          <p:nvPr/>
+        </p:nvSpPr>
+        <p:spPr>
+          <a:xfrm>
+            <a:off x="457200" y="1417320"/>
+            <a:ext cx="3977640" cy="841248"/>
+          </a:xfrm>
+          <a:prstGeom prst="roundRect">
+            <a:avLst>
+              <a:gd name="adj" fmla="val 6522"/>
+            </a:avLst>
+          </a:prstGeom>
+          <a:solidFill>
+            <a:srgbClr val="162032"/>
+          </a:solidFill>
+          <a:ln w="9525">
+            <a:solidFill>
+              <a:srgbClr val="233047"/>
+            </a:solidFill>
+            <a:prstDash val="solid"/>
+          </a:ln>
+          <a:effectLst>
+            <a:outerShdw blurRad="76200" dist="25400" dir="5400000" algn="bl" rotWithShape="0">
+              <a:srgbClr val="000000">
+                <a:alpha val="16000"/>
+              </a:srgbClr>
+            </a:outerShdw>
+          </a:effectLst>
+        </p:spPr>
+      </p:sp>
+      <p:sp>
+        <p:nvSpPr>
+          <p:cNvPr id="7" name="Shape 5"/>
+          <p:cNvSpPr/>
+          <p:nvPr/>
+        </p:nvSpPr>
+        <p:spPr>
+          <a:xfrm>
+            <a:off x="603504" y="1545336"/>
+            <a:ext cx="402336" cy="402336"/>
+          </a:xfrm>
+          <a:prstGeom prst="ellipse">
+            <a:avLst/>
+          </a:prstGeom>
+          <a:solidFill>
+            <a:srgbClr val="E8544E">
+              <a:alpha val="20000"/>
+            </a:srgbClr>
+          </a:solidFill>
+          <a:ln/>
+        </p:spPr>
+      </p:sp>
+      <p:sp>
+        <p:nvSpPr>
+          <p:cNvPr id="8" name="Text 6"/>
+          <p:cNvSpPr/>
+          <p:nvPr/>
+        </p:nvSpPr>
+        <p:spPr>
+          <a:xfrm>
+            <a:off x="603504" y="1545336"/>
+            <a:ext cx="402336" cy="402336"/>
+          </a:xfrm>
+          <a:prstGeom prst="rect">
+            <a:avLst/>
+          </a:prstGeom>
+          <a:noFill/>
+          <a:ln/>
+        </p:spPr>
+        <p:txBody>
+          <a:bodyPr wrap="square" lIns="0" tIns="0" rIns="0" bIns="0" rtlCol="0" anchor="ctr"/>
+          <a:lstStyle/>
+          <a:p>
+            <a:pPr marL="0" marR="0" lvl="0" indent="0" algn="ctr" defTabSz="914400" rtl="0" eaLnBrk="1" fontAlgn="auto" latinLnBrk="0" hangingPunct="1">
+              <a:lnSpc>
+                <a:spcPct val="100000"/>
+              </a:lnSpc>
+              <a:spcBef>
+                <a:spcPts val="0"/>
+              </a:spcBef>
+              <a:spcAft>
+                <a:spcPts val="0"/>
+              </a:spcAft>
+              <a:buClrTx/>
+              <a:buSzTx/>
+              <a:buFontTx/>
+              <a:buNone/>
+              <a:tabLst/>
+              <a:defRPr/>
+            </a:pPr>
+            <a:r>
+              <a:rPr kumimoji="0" lang="en-US" sz="1400" b="0" i="0" u="none" strike="noStrike" kern="1200" cap="none" spc="0" normalizeH="0" baseline="0" noProof="0" dirty="0">
+                <a:ln>
+                  <a:noFill/>
+                </a:ln>
+                <a:solidFill>
+                  <a:srgbClr val="E8544E"/>
+                </a:solidFill>
+                <a:effectLst/>
+                <a:uLnTx/>
+                <a:uFillTx/>
+                <a:latin typeface="Calibri" panose="020F0502020204030204"/>
+                <a:ea typeface="+mn-ea"/>
+                <a:cs typeface="+mn-cs"/>
+              </a:rPr>
+              <a:t>✎</a:t>
+            </a:r>
+            <a:endParaRPr kumimoji="0" lang="en-US" sz="1400" b="0" i="0" u="none" strike="noStrike" kern="1200" cap="none" spc="0" normalizeH="0" baseline="0" noProof="0" dirty="0">
+              <a:ln>
+                <a:noFill/>
+              </a:ln>
+              <a:solidFill>
+                <a:prstClr val="black"/>
+              </a:solidFill>
+              <a:effectLst/>
+              <a:uLnTx/>
+              <a:uFillTx/>
+              <a:latin typeface="Calibri" panose="020F0502020204030204"/>
+              <a:ea typeface="+mn-ea"/>
+              <a:cs typeface="+mn-cs"/>
+            </a:endParaRPr>
+          </a:p>
+        </p:txBody>
+      </p:sp>
+      <p:sp>
+        <p:nvSpPr>
+          <p:cNvPr id="9" name="Text 7"/>
+          <p:cNvSpPr/>
+          <p:nvPr/>
+        </p:nvSpPr>
+        <p:spPr>
+          <a:xfrm>
+            <a:off x="1115568" y="1508760"/>
+            <a:ext cx="3172968" cy="219456"/>
+          </a:xfrm>
+          <a:prstGeom prst="rect">
+            <a:avLst/>
+          </a:prstGeom>
+          <a:noFill/>
+          <a:ln/>
+        </p:spPr>
+        <p:txBody>
+          <a:bodyPr wrap="square" lIns="0" tIns="0" rIns="0" bIns="0" rtlCol="0" anchor="ctr"/>
+          <a:lstStyle/>
+          <a:p>
+            <a:pPr marL="0" marR="0" lvl="0" indent="0" algn="l" defTabSz="914400" rtl="0" eaLnBrk="1" fontAlgn="auto" latinLnBrk="0" hangingPunct="1">
+              <a:lnSpc>
+                <a:spcPct val="100000"/>
+              </a:lnSpc>
+              <a:spcBef>
+                <a:spcPts val="0"/>
+              </a:spcBef>
+              <a:spcAft>
+                <a:spcPts val="0"/>
+              </a:spcAft>
+              <a:buClrTx/>
+              <a:buSzTx/>
+              <a:buFontTx/>
+              <a:buNone/>
+              <a:tabLst/>
+              <a:defRPr/>
+            </a:pPr>
+            <a:r>
+              <a:rPr kumimoji="0" lang="en-US" sz="1200" b="1" i="0" u="none" strike="noStrike" kern="1200" cap="none" spc="0" normalizeH="0" baseline="0" noProof="0" dirty="0">
+                <a:ln>
+                  <a:noFill/>
+                </a:ln>
+                <a:solidFill>
+                  <a:srgbClr val="FFFFFF"/>
+                </a:solidFill>
+                <a:effectLst/>
+                <a:uLnTx/>
+                <a:uFillTx/>
+                <a:latin typeface="Cambria" pitchFamily="34" charset="0"/>
+                <a:ea typeface="Cambria" pitchFamily="34" charset="-122"/>
+                <a:cs typeface="Cambria" pitchFamily="34" charset="-120"/>
+              </a:rPr>
+              <a:t>Naming Conventions</a:t>
+            </a:r>
+            <a:endParaRPr kumimoji="0" lang="en-US" sz="1200" b="0" i="0" u="none" strike="noStrike" kern="1200" cap="none" spc="0" normalizeH="0" baseline="0" noProof="0" dirty="0">
+              <a:ln>
+                <a:noFill/>
+              </a:ln>
+              <a:solidFill>
+                <a:prstClr val="black"/>
+              </a:solidFill>
+              <a:effectLst/>
+              <a:uLnTx/>
+              <a:uFillTx/>
+              <a:latin typeface="Calibri" panose="020F0502020204030204"/>
+              <a:ea typeface="+mn-ea"/>
+              <a:cs typeface="+mn-cs"/>
+            </a:endParaRPr>
+          </a:p>
+        </p:txBody>
+      </p:sp>
+      <p:sp>
+        <p:nvSpPr>
+          <p:cNvPr id="10" name="Text 8"/>
+          <p:cNvSpPr/>
+          <p:nvPr/>
+        </p:nvSpPr>
+        <p:spPr>
+          <a:xfrm>
+            <a:off x="1115568" y="1728216"/>
+            <a:ext cx="3172968" cy="457200"/>
+          </a:xfrm>
+          <a:prstGeom prst="rect">
+            <a:avLst/>
+          </a:prstGeom>
+          <a:noFill/>
+          <a:ln/>
+        </p:spPr>
+        <p:txBody>
+          <a:bodyPr wrap="square" lIns="0" tIns="0" rIns="0" bIns="0" rtlCol="0" anchor="t"/>
+          <a:lstStyle/>
+          <a:p>
+            <a:pPr marL="0" marR="0" lvl="0" indent="0" algn="l" defTabSz="914400" rtl="0" eaLnBrk="1" fontAlgn="auto" latinLnBrk="0" hangingPunct="1">
+              <a:lnSpc>
+                <a:spcPct val="108000"/>
+              </a:lnSpc>
+              <a:spcBef>
+                <a:spcPts val="0"/>
+              </a:spcBef>
+              <a:spcAft>
+                <a:spcPts val="0"/>
+              </a:spcAft>
+              <a:buClrTx/>
+              <a:buSzTx/>
+              <a:buFontTx/>
+              <a:buNone/>
+              <a:tabLst/>
+              <a:defRPr/>
+            </a:pPr>
+            <a:r>
+              <a:rPr kumimoji="0" lang="en-US" sz="870" b="0" i="0" u="none" strike="noStrike" kern="1200" cap="none" spc="0" normalizeH="0" baseline="0" noProof="0" dirty="0">
+                <a:ln>
+                  <a:noFill/>
+                </a:ln>
+                <a:solidFill>
+                  <a:srgbClr val="AAB4C4"/>
+                </a:solidFill>
+                <a:effectLst/>
+                <a:uLnTx/>
+                <a:uFillTx/>
+                <a:latin typeface="Calibri" pitchFamily="34" charset="0"/>
+                <a:ea typeface="Calibri" pitchFamily="34" charset="-122"/>
+                <a:cs typeface="Calibri" pitchFamily="34" charset="-120"/>
+              </a:rPr>
+              <a:t>Modules named by responsibility — test_auth.py, test_loan_workflow.py, test_reranker.py, retrieval_agent, chat_agent — consistent across the codebase.</a:t>
+            </a:r>
+            <a:endParaRPr kumimoji="0" lang="en-US" sz="870" b="0" i="0" u="none" strike="noStrike" kern="1200" cap="none" spc="0" normalizeH="0" baseline="0" noProof="0" dirty="0">
+              <a:ln>
+                <a:noFill/>
+              </a:ln>
+              <a:solidFill>
+                <a:prstClr val="black"/>
+              </a:solidFill>
+              <a:effectLst/>
+              <a:uLnTx/>
+              <a:uFillTx/>
+              <a:latin typeface="Calibri" panose="020F0502020204030204"/>
+              <a:ea typeface="+mn-ea"/>
+              <a:cs typeface="+mn-cs"/>
+            </a:endParaRPr>
+          </a:p>
+        </p:txBody>
+      </p:sp>
+      <p:sp>
+        <p:nvSpPr>
+          <p:cNvPr id="11" name="Shape 9"/>
+          <p:cNvSpPr/>
+          <p:nvPr/>
+        </p:nvSpPr>
+        <p:spPr>
+          <a:xfrm>
+            <a:off x="4709160" y="1417320"/>
+            <a:ext cx="3977640" cy="841248"/>
+          </a:xfrm>
+          <a:prstGeom prst="roundRect">
+            <a:avLst>
+              <a:gd name="adj" fmla="val 6522"/>
+            </a:avLst>
+          </a:prstGeom>
+          <a:solidFill>
+            <a:srgbClr val="162032"/>
+          </a:solidFill>
+          <a:ln w="9525">
+            <a:solidFill>
+              <a:srgbClr val="233047"/>
+            </a:solidFill>
+            <a:prstDash val="solid"/>
+          </a:ln>
+          <a:effectLst>
+            <a:outerShdw blurRad="76200" dist="25400" dir="5400000" algn="bl" rotWithShape="0">
+              <a:srgbClr val="000000">
+                <a:alpha val="16000"/>
+              </a:srgbClr>
+            </a:outerShdw>
+          </a:effectLst>
+        </p:spPr>
+      </p:sp>
+      <p:sp>
+        <p:nvSpPr>
+          <p:cNvPr id="12" name="Shape 10"/>
+          <p:cNvSpPr/>
+          <p:nvPr/>
+        </p:nvSpPr>
+        <p:spPr>
+          <a:xfrm>
+            <a:off x="4855464" y="1545336"/>
+            <a:ext cx="402336" cy="402336"/>
+          </a:xfrm>
+          <a:prstGeom prst="ellipse">
+            <a:avLst/>
+          </a:prstGeom>
+          <a:solidFill>
+            <a:srgbClr val="3B82F6">
+              <a:alpha val="20000"/>
+            </a:srgbClr>
+          </a:solidFill>
+          <a:ln/>
+        </p:spPr>
+      </p:sp>
+      <p:sp>
+        <p:nvSpPr>
+          <p:cNvPr id="13" name="Text 11"/>
+          <p:cNvSpPr/>
+          <p:nvPr/>
+        </p:nvSpPr>
+        <p:spPr>
+          <a:xfrm>
+            <a:off x="4855464" y="1545336"/>
+            <a:ext cx="402336" cy="402336"/>
+          </a:xfrm>
+          <a:prstGeom prst="rect">
+            <a:avLst/>
+          </a:prstGeom>
+          <a:noFill/>
+          <a:ln/>
+        </p:spPr>
+        <p:txBody>
+          <a:bodyPr wrap="square" lIns="0" tIns="0" rIns="0" bIns="0" rtlCol="0" anchor="ctr"/>
+          <a:lstStyle/>
+          <a:p>
+            <a:pPr marL="0" marR="0" lvl="0" indent="0" algn="ctr" defTabSz="914400" rtl="0" eaLnBrk="1" fontAlgn="auto" latinLnBrk="0" hangingPunct="1">
+              <a:lnSpc>
+                <a:spcPct val="100000"/>
+              </a:lnSpc>
+              <a:spcBef>
+                <a:spcPts val="0"/>
+              </a:spcBef>
+              <a:spcAft>
+                <a:spcPts val="0"/>
+              </a:spcAft>
+              <a:buClrTx/>
+              <a:buSzTx/>
+              <a:buFontTx/>
+              <a:buNone/>
+              <a:tabLst/>
+              <a:defRPr/>
+            </a:pPr>
+            <a:r>
+              <a:rPr kumimoji="0" lang="en-US" sz="1400" b="0" i="0" u="none" strike="noStrike" kern="1200" cap="none" spc="0" normalizeH="0" baseline="0" noProof="0" dirty="0">
+                <a:ln>
+                  <a:noFill/>
+                </a:ln>
+                <a:solidFill>
+                  <a:srgbClr val="3B82F6"/>
+                </a:solidFill>
+                <a:effectLst/>
+                <a:uLnTx/>
+                <a:uFillTx/>
+                <a:latin typeface="Calibri" panose="020F0502020204030204"/>
+                <a:ea typeface="+mn-ea"/>
+                <a:cs typeface="+mn-cs"/>
+              </a:rPr>
+              <a:t>🔀</a:t>
+            </a:r>
+            <a:endParaRPr kumimoji="0" lang="en-US" sz="1400" b="0" i="0" u="none" strike="noStrike" kern="1200" cap="none" spc="0" normalizeH="0" baseline="0" noProof="0" dirty="0">
+              <a:ln>
+                <a:noFill/>
+              </a:ln>
+              <a:solidFill>
+                <a:prstClr val="black"/>
+              </a:solidFill>
+              <a:effectLst/>
+              <a:uLnTx/>
+              <a:uFillTx/>
+              <a:latin typeface="Calibri" panose="020F0502020204030204"/>
+              <a:ea typeface="+mn-ea"/>
+              <a:cs typeface="+mn-cs"/>
+            </a:endParaRPr>
+          </a:p>
+        </p:txBody>
+      </p:sp>
+      <p:sp>
+        <p:nvSpPr>
+          <p:cNvPr id="14" name="Text 12"/>
+          <p:cNvSpPr/>
+          <p:nvPr/>
+        </p:nvSpPr>
+        <p:spPr>
+          <a:xfrm>
+            <a:off x="5367528" y="1508760"/>
+            <a:ext cx="3172968" cy="219456"/>
+          </a:xfrm>
+          <a:prstGeom prst="rect">
+            <a:avLst/>
+          </a:prstGeom>
+          <a:noFill/>
+          <a:ln/>
+        </p:spPr>
+        <p:txBody>
+          <a:bodyPr wrap="square" lIns="0" tIns="0" rIns="0" bIns="0" rtlCol="0" anchor="ctr"/>
+          <a:lstStyle/>
+          <a:p>
+            <a:pPr marL="0" marR="0" lvl="0" indent="0" algn="l" defTabSz="914400" rtl="0" eaLnBrk="1" fontAlgn="auto" latinLnBrk="0" hangingPunct="1">
+              <a:lnSpc>
+                <a:spcPct val="100000"/>
+              </a:lnSpc>
+              <a:spcBef>
+                <a:spcPts val="0"/>
+              </a:spcBef>
+              <a:spcAft>
+                <a:spcPts val="0"/>
+              </a:spcAft>
+              <a:buClrTx/>
+              <a:buSzTx/>
+              <a:buFontTx/>
+              <a:buNone/>
+              <a:tabLst/>
+              <a:defRPr/>
+            </a:pPr>
+            <a:r>
+              <a:rPr kumimoji="0" lang="en-US" sz="1200" b="1" i="0" u="none" strike="noStrike" kern="1200" cap="none" spc="0" normalizeH="0" baseline="0" noProof="0" dirty="0">
+                <a:ln>
+                  <a:noFill/>
+                </a:ln>
+                <a:solidFill>
+                  <a:srgbClr val="FFFFFF"/>
+                </a:solidFill>
+                <a:effectLst/>
+                <a:uLnTx/>
+                <a:uFillTx/>
+                <a:latin typeface="Cambria" pitchFamily="34" charset="0"/>
+                <a:ea typeface="Cambria" pitchFamily="34" charset="-122"/>
+                <a:cs typeface="Cambria" pitchFamily="34" charset="-120"/>
+              </a:rPr>
+              <a:t>Code Reviews</a:t>
+            </a:r>
+            <a:endParaRPr kumimoji="0" lang="en-US" sz="1200" b="0" i="0" u="none" strike="noStrike" kern="1200" cap="none" spc="0" normalizeH="0" baseline="0" noProof="0" dirty="0">
+              <a:ln>
+                <a:noFill/>
+              </a:ln>
+              <a:solidFill>
+                <a:prstClr val="black"/>
+              </a:solidFill>
+              <a:effectLst/>
+              <a:uLnTx/>
+              <a:uFillTx/>
+              <a:latin typeface="Calibri" panose="020F0502020204030204"/>
+              <a:ea typeface="+mn-ea"/>
+              <a:cs typeface="+mn-cs"/>
+            </a:endParaRPr>
+          </a:p>
+        </p:txBody>
+      </p:sp>
+      <p:sp>
+        <p:nvSpPr>
+          <p:cNvPr id="15" name="Text 13"/>
+          <p:cNvSpPr/>
+          <p:nvPr/>
+        </p:nvSpPr>
+        <p:spPr>
+          <a:xfrm>
+            <a:off x="5367528" y="1728216"/>
+            <a:ext cx="3172968" cy="457200"/>
+          </a:xfrm>
+          <a:prstGeom prst="rect">
+            <a:avLst/>
+          </a:prstGeom>
+          <a:noFill/>
+          <a:ln/>
+        </p:spPr>
+        <p:txBody>
+          <a:bodyPr wrap="square" lIns="0" tIns="0" rIns="0" bIns="0" rtlCol="0" anchor="t"/>
+          <a:lstStyle/>
+          <a:p>
+            <a:pPr marL="0" marR="0" lvl="0" indent="0" algn="l" defTabSz="914400" rtl="0" eaLnBrk="1" fontAlgn="auto" latinLnBrk="0" hangingPunct="1">
+              <a:lnSpc>
+                <a:spcPct val="108000"/>
+              </a:lnSpc>
+              <a:spcBef>
+                <a:spcPts val="0"/>
+              </a:spcBef>
+              <a:spcAft>
+                <a:spcPts val="0"/>
+              </a:spcAft>
+              <a:buClrTx/>
+              <a:buSzTx/>
+              <a:buFontTx/>
+              <a:buNone/>
+              <a:tabLst/>
+              <a:defRPr/>
+            </a:pPr>
+            <a:r>
+              <a:rPr kumimoji="0" lang="en-US" sz="870" b="0" i="0" u="none" strike="noStrike" kern="1200" cap="none" spc="0" normalizeH="0" baseline="0" noProof="0" dirty="0">
+                <a:ln>
+                  <a:noFill/>
+                </a:ln>
+                <a:solidFill>
+                  <a:srgbClr val="AAB4C4"/>
+                </a:solidFill>
+                <a:effectLst/>
+                <a:uLnTx/>
+                <a:uFillTx/>
+                <a:latin typeface="Calibri" pitchFamily="34" charset="0"/>
+                <a:ea typeface="Calibri" pitchFamily="34" charset="-122"/>
+                <a:cs typeface="Calibri" pitchFamily="34" charset="-120"/>
+              </a:rPr>
+              <a:t>Every push is gated: GitHub Actions runs all 96 tests automatically before code can move forward — no merge without a passing check.</a:t>
+            </a:r>
+            <a:endParaRPr kumimoji="0" lang="en-US" sz="870" b="0" i="0" u="none" strike="noStrike" kern="1200" cap="none" spc="0" normalizeH="0" baseline="0" noProof="0" dirty="0">
+              <a:ln>
+                <a:noFill/>
+              </a:ln>
+              <a:solidFill>
+                <a:prstClr val="black"/>
+              </a:solidFill>
+              <a:effectLst/>
+              <a:uLnTx/>
+              <a:uFillTx/>
+              <a:latin typeface="Calibri" panose="020F0502020204030204"/>
+              <a:ea typeface="+mn-ea"/>
+              <a:cs typeface="+mn-cs"/>
+            </a:endParaRPr>
+          </a:p>
+        </p:txBody>
+      </p:sp>
+      <p:sp>
+        <p:nvSpPr>
+          <p:cNvPr id="16" name="Shape 14"/>
+          <p:cNvSpPr/>
+          <p:nvPr/>
+        </p:nvSpPr>
+        <p:spPr>
+          <a:xfrm>
+            <a:off x="457200" y="2331720"/>
+            <a:ext cx="3977640" cy="841248"/>
+          </a:xfrm>
+          <a:prstGeom prst="roundRect">
+            <a:avLst>
+              <a:gd name="adj" fmla="val 6522"/>
+            </a:avLst>
+          </a:prstGeom>
+          <a:solidFill>
+            <a:srgbClr val="162032"/>
+          </a:solidFill>
+          <a:ln w="9525">
+            <a:solidFill>
+              <a:srgbClr val="233047"/>
+            </a:solidFill>
+            <a:prstDash val="solid"/>
+          </a:ln>
+          <a:effectLst>
+            <a:outerShdw blurRad="76200" dist="25400" dir="5400000" algn="bl" rotWithShape="0">
+              <a:srgbClr val="000000">
+                <a:alpha val="16000"/>
+              </a:srgbClr>
+            </a:outerShdw>
+          </a:effectLst>
+        </p:spPr>
+      </p:sp>
+      <p:sp>
+        <p:nvSpPr>
+          <p:cNvPr id="17" name="Shape 15"/>
+          <p:cNvSpPr/>
+          <p:nvPr/>
+        </p:nvSpPr>
+        <p:spPr>
+          <a:xfrm>
+            <a:off x="603504" y="2459736"/>
+            <a:ext cx="402336" cy="402336"/>
+          </a:xfrm>
+          <a:prstGeom prst="ellipse">
+            <a:avLst/>
+          </a:prstGeom>
+          <a:solidFill>
+            <a:srgbClr val="059669">
+              <a:alpha val="20000"/>
+            </a:srgbClr>
+          </a:solidFill>
+          <a:ln/>
+        </p:spPr>
+      </p:sp>
+      <p:sp>
+        <p:nvSpPr>
+          <p:cNvPr id="18" name="Text 16"/>
+          <p:cNvSpPr/>
+          <p:nvPr/>
+        </p:nvSpPr>
+        <p:spPr>
+          <a:xfrm>
+            <a:off x="603504" y="2459736"/>
+            <a:ext cx="402336" cy="402336"/>
+          </a:xfrm>
+          <a:prstGeom prst="rect">
+            <a:avLst/>
+          </a:prstGeom>
+          <a:noFill/>
+          <a:ln/>
+        </p:spPr>
+        <p:txBody>
+          <a:bodyPr wrap="square" lIns="0" tIns="0" rIns="0" bIns="0" rtlCol="0" anchor="ctr"/>
+          <a:lstStyle/>
+          <a:p>
+            <a:pPr marL="0" marR="0" lvl="0" indent="0" algn="ctr" defTabSz="914400" rtl="0" eaLnBrk="1" fontAlgn="auto" latinLnBrk="0" hangingPunct="1">
+              <a:lnSpc>
+                <a:spcPct val="100000"/>
+              </a:lnSpc>
+              <a:spcBef>
+                <a:spcPts val="0"/>
+              </a:spcBef>
+              <a:spcAft>
+                <a:spcPts val="0"/>
+              </a:spcAft>
+              <a:buClrTx/>
+              <a:buSzTx/>
+              <a:buFontTx/>
+              <a:buNone/>
+              <a:tabLst/>
+              <a:defRPr/>
+            </a:pPr>
+            <a:r>
+              <a:rPr kumimoji="0" lang="en-US" sz="1400" b="0" i="0" u="none" strike="noStrike" kern="1200" cap="none" spc="0" normalizeH="0" baseline="0" noProof="0" dirty="0">
+                <a:ln>
+                  <a:noFill/>
+                </a:ln>
+                <a:solidFill>
+                  <a:srgbClr val="059669"/>
+                </a:solidFill>
+                <a:effectLst/>
+                <a:uLnTx/>
+                <a:uFillTx/>
+                <a:latin typeface="Calibri" panose="020F0502020204030204"/>
+                <a:ea typeface="+mn-ea"/>
+                <a:cs typeface="+mn-cs"/>
+              </a:rPr>
+              <a:t>📄</a:t>
+            </a:r>
+            <a:endParaRPr kumimoji="0" lang="en-US" sz="1400" b="0" i="0" u="none" strike="noStrike" kern="1200" cap="none" spc="0" normalizeH="0" baseline="0" noProof="0" dirty="0">
+              <a:ln>
+                <a:noFill/>
+              </a:ln>
+              <a:solidFill>
+                <a:prstClr val="black"/>
+              </a:solidFill>
+              <a:effectLst/>
+              <a:uLnTx/>
+              <a:uFillTx/>
+              <a:latin typeface="Calibri" panose="020F0502020204030204"/>
+              <a:ea typeface="+mn-ea"/>
+              <a:cs typeface="+mn-cs"/>
+            </a:endParaRPr>
+          </a:p>
+        </p:txBody>
+      </p:sp>
+      <p:sp>
+        <p:nvSpPr>
+          <p:cNvPr id="19" name="Text 17"/>
+          <p:cNvSpPr/>
+          <p:nvPr/>
+        </p:nvSpPr>
+        <p:spPr>
+          <a:xfrm>
+            <a:off x="1115568" y="2423160"/>
+            <a:ext cx="3172968" cy="219456"/>
+          </a:xfrm>
+          <a:prstGeom prst="rect">
+            <a:avLst/>
+          </a:prstGeom>
+          <a:noFill/>
+          <a:ln/>
+        </p:spPr>
+        <p:txBody>
+          <a:bodyPr wrap="square" lIns="0" tIns="0" rIns="0" bIns="0" rtlCol="0" anchor="ctr"/>
+          <a:lstStyle/>
+          <a:p>
+            <a:pPr marL="0" marR="0" lvl="0" indent="0" algn="l" defTabSz="914400" rtl="0" eaLnBrk="1" fontAlgn="auto" latinLnBrk="0" hangingPunct="1">
+              <a:lnSpc>
+                <a:spcPct val="100000"/>
+              </a:lnSpc>
+              <a:spcBef>
+                <a:spcPts val="0"/>
+              </a:spcBef>
+              <a:spcAft>
+                <a:spcPts val="0"/>
+              </a:spcAft>
+              <a:buClrTx/>
+              <a:buSzTx/>
+              <a:buFontTx/>
+              <a:buNone/>
+              <a:tabLst/>
+              <a:defRPr/>
+            </a:pPr>
+            <a:r>
+              <a:rPr kumimoji="0" lang="en-US" sz="1200" b="1" i="0" u="none" strike="noStrike" kern="1200" cap="none" spc="0" normalizeH="0" baseline="0" noProof="0" dirty="0">
+                <a:ln>
+                  <a:noFill/>
+                </a:ln>
+                <a:solidFill>
+                  <a:srgbClr val="FFFFFF"/>
+                </a:solidFill>
+                <a:effectLst/>
+                <a:uLnTx/>
+                <a:uFillTx/>
+                <a:latin typeface="Cambria" pitchFamily="34" charset="0"/>
+                <a:ea typeface="Cambria" pitchFamily="34" charset="-122"/>
+                <a:cs typeface="Cambria" pitchFamily="34" charset="-120"/>
+              </a:rPr>
+              <a:t>Documentation</a:t>
+            </a:r>
+            <a:endParaRPr kumimoji="0" lang="en-US" sz="1200" b="0" i="0" u="none" strike="noStrike" kern="1200" cap="none" spc="0" normalizeH="0" baseline="0" noProof="0" dirty="0">
+              <a:ln>
+                <a:noFill/>
+              </a:ln>
+              <a:solidFill>
+                <a:prstClr val="black"/>
+              </a:solidFill>
+              <a:effectLst/>
+              <a:uLnTx/>
+              <a:uFillTx/>
+              <a:latin typeface="Calibri" panose="020F0502020204030204"/>
+              <a:ea typeface="+mn-ea"/>
+              <a:cs typeface="+mn-cs"/>
+            </a:endParaRPr>
+          </a:p>
+        </p:txBody>
+      </p:sp>
+      <p:sp>
+        <p:nvSpPr>
+          <p:cNvPr id="20" name="Text 18"/>
+          <p:cNvSpPr/>
+          <p:nvPr/>
+        </p:nvSpPr>
+        <p:spPr>
+          <a:xfrm>
+            <a:off x="1115568" y="2642616"/>
+            <a:ext cx="3172968" cy="457200"/>
+          </a:xfrm>
+          <a:prstGeom prst="rect">
+            <a:avLst/>
+          </a:prstGeom>
+          <a:noFill/>
+          <a:ln/>
+        </p:spPr>
+        <p:txBody>
+          <a:bodyPr wrap="square" lIns="0" tIns="0" rIns="0" bIns="0" rtlCol="0" anchor="t"/>
+          <a:lstStyle/>
+          <a:p>
+            <a:pPr marL="0" marR="0" lvl="0" indent="0" algn="l" defTabSz="914400" rtl="0" eaLnBrk="1" fontAlgn="auto" latinLnBrk="0" hangingPunct="1">
+              <a:lnSpc>
+                <a:spcPct val="108000"/>
+              </a:lnSpc>
+              <a:spcBef>
+                <a:spcPts val="0"/>
+              </a:spcBef>
+              <a:spcAft>
+                <a:spcPts val="0"/>
+              </a:spcAft>
+              <a:buClrTx/>
+              <a:buSzTx/>
+              <a:buFontTx/>
+              <a:buNone/>
+              <a:tabLst/>
+              <a:defRPr/>
+            </a:pPr>
+            <a:r>
+              <a:rPr kumimoji="0" lang="en-US" sz="870" b="0" i="0" u="none" strike="noStrike" kern="1200" cap="none" spc="0" normalizeH="0" baseline="0" noProof="0" dirty="0">
+                <a:ln>
+                  <a:noFill/>
+                </a:ln>
+                <a:solidFill>
+                  <a:srgbClr val="AAB4C4"/>
+                </a:solidFill>
+                <a:effectLst/>
+                <a:uLnTx/>
+                <a:uFillTx/>
+                <a:latin typeface="Calibri" pitchFamily="34" charset="0"/>
+                <a:ea typeface="Calibri" pitchFamily="34" charset="-122"/>
+                <a:cs typeface="Calibri" pitchFamily="34" charset="-120"/>
+              </a:rPr>
+              <a:t>LangSmith traces every step by name (auth.login_attempt, document_processing, run_risk_analysis) — intent is visible, not just code.</a:t>
+            </a:r>
+            <a:endParaRPr kumimoji="0" lang="en-US" sz="870" b="0" i="0" u="none" strike="noStrike" kern="1200" cap="none" spc="0" normalizeH="0" baseline="0" noProof="0" dirty="0">
+              <a:ln>
+                <a:noFill/>
+              </a:ln>
+              <a:solidFill>
+                <a:prstClr val="black"/>
+              </a:solidFill>
+              <a:effectLst/>
+              <a:uLnTx/>
+              <a:uFillTx/>
+              <a:latin typeface="Calibri" panose="020F0502020204030204"/>
+              <a:ea typeface="+mn-ea"/>
+              <a:cs typeface="+mn-cs"/>
+            </a:endParaRPr>
+          </a:p>
+        </p:txBody>
+      </p:sp>
+      <p:sp>
+        <p:nvSpPr>
+          <p:cNvPr id="21" name="Shape 19"/>
+          <p:cNvSpPr/>
+          <p:nvPr/>
+        </p:nvSpPr>
+        <p:spPr>
+          <a:xfrm>
+            <a:off x="4709160" y="2331720"/>
+            <a:ext cx="3977640" cy="841248"/>
+          </a:xfrm>
+          <a:prstGeom prst="roundRect">
+            <a:avLst>
+              <a:gd name="adj" fmla="val 6522"/>
+            </a:avLst>
+          </a:prstGeom>
+          <a:solidFill>
+            <a:srgbClr val="162032"/>
+          </a:solidFill>
+          <a:ln w="9525">
+            <a:solidFill>
+              <a:srgbClr val="233047"/>
+            </a:solidFill>
+            <a:prstDash val="solid"/>
+          </a:ln>
+          <a:effectLst>
+            <a:outerShdw blurRad="76200" dist="25400" dir="5400000" algn="bl" rotWithShape="0">
+              <a:srgbClr val="000000">
+                <a:alpha val="16000"/>
+              </a:srgbClr>
+            </a:outerShdw>
+          </a:effectLst>
+        </p:spPr>
+      </p:sp>
+      <p:sp>
+        <p:nvSpPr>
+          <p:cNvPr id="22" name="Shape 20"/>
+          <p:cNvSpPr/>
+          <p:nvPr/>
+        </p:nvSpPr>
+        <p:spPr>
+          <a:xfrm>
+            <a:off x="4855464" y="2459736"/>
+            <a:ext cx="402336" cy="402336"/>
+          </a:xfrm>
+          <a:prstGeom prst="ellipse">
+            <a:avLst/>
+          </a:prstGeom>
+          <a:solidFill>
+            <a:srgbClr val="F5A623">
+              <a:alpha val="20000"/>
+            </a:srgbClr>
+          </a:solidFill>
+          <a:ln/>
+        </p:spPr>
+      </p:sp>
+      <p:sp>
+        <p:nvSpPr>
+          <p:cNvPr id="23" name="Text 21"/>
+          <p:cNvSpPr/>
+          <p:nvPr/>
+        </p:nvSpPr>
+        <p:spPr>
+          <a:xfrm>
+            <a:off x="4855464" y="2459736"/>
+            <a:ext cx="402336" cy="402336"/>
+          </a:xfrm>
+          <a:prstGeom prst="rect">
+            <a:avLst/>
+          </a:prstGeom>
+          <a:noFill/>
+          <a:ln/>
+        </p:spPr>
+        <p:txBody>
+          <a:bodyPr wrap="square" lIns="0" tIns="0" rIns="0" bIns="0" rtlCol="0" anchor="ctr"/>
+          <a:lstStyle/>
+          <a:p>
+            <a:pPr marL="0" marR="0" lvl="0" indent="0" algn="ctr" defTabSz="914400" rtl="0" eaLnBrk="1" fontAlgn="auto" latinLnBrk="0" hangingPunct="1">
+              <a:lnSpc>
+                <a:spcPct val="100000"/>
+              </a:lnSpc>
+              <a:spcBef>
+                <a:spcPts val="0"/>
+              </a:spcBef>
+              <a:spcAft>
+                <a:spcPts val="0"/>
+              </a:spcAft>
+              <a:buClrTx/>
+              <a:buSzTx/>
+              <a:buFontTx/>
+              <a:buNone/>
+              <a:tabLst/>
+              <a:defRPr/>
+            </a:pPr>
+            <a:r>
+              <a:rPr kumimoji="0" lang="en-US" sz="1400" b="0" i="0" u="none" strike="noStrike" kern="1200" cap="none" spc="0" normalizeH="0" baseline="0" noProof="0" dirty="0">
+                <a:ln>
+                  <a:noFill/>
+                </a:ln>
+                <a:solidFill>
+                  <a:srgbClr val="F5A623"/>
+                </a:solidFill>
+                <a:effectLst/>
+                <a:uLnTx/>
+                <a:uFillTx/>
+                <a:latin typeface="Calibri" panose="020F0502020204030204"/>
+                <a:ea typeface="+mn-ea"/>
+                <a:cs typeface="+mn-cs"/>
+              </a:rPr>
+              <a:t>🛡</a:t>
+            </a:r>
+            <a:endParaRPr kumimoji="0" lang="en-US" sz="1400" b="0" i="0" u="none" strike="noStrike" kern="1200" cap="none" spc="0" normalizeH="0" baseline="0" noProof="0" dirty="0">
+              <a:ln>
+                <a:noFill/>
+              </a:ln>
+              <a:solidFill>
+                <a:prstClr val="black"/>
+              </a:solidFill>
+              <a:effectLst/>
+              <a:uLnTx/>
+              <a:uFillTx/>
+              <a:latin typeface="Calibri" panose="020F0502020204030204"/>
+              <a:ea typeface="+mn-ea"/>
+              <a:cs typeface="+mn-cs"/>
+            </a:endParaRPr>
+          </a:p>
+        </p:txBody>
+      </p:sp>
+      <p:sp>
+        <p:nvSpPr>
+          <p:cNvPr id="24" name="Text 22"/>
+          <p:cNvSpPr/>
+          <p:nvPr/>
+        </p:nvSpPr>
+        <p:spPr>
+          <a:xfrm>
+            <a:off x="5367528" y="2423160"/>
+            <a:ext cx="3172968" cy="219456"/>
+          </a:xfrm>
+          <a:prstGeom prst="rect">
+            <a:avLst/>
+          </a:prstGeom>
+          <a:noFill/>
+          <a:ln/>
+        </p:spPr>
+        <p:txBody>
+          <a:bodyPr wrap="square" lIns="0" tIns="0" rIns="0" bIns="0" rtlCol="0" anchor="ctr"/>
+          <a:lstStyle/>
+          <a:p>
+            <a:pPr marL="0" marR="0" lvl="0" indent="0" algn="l" defTabSz="914400" rtl="0" eaLnBrk="1" fontAlgn="auto" latinLnBrk="0" hangingPunct="1">
+              <a:lnSpc>
+                <a:spcPct val="100000"/>
+              </a:lnSpc>
+              <a:spcBef>
+                <a:spcPts val="0"/>
+              </a:spcBef>
+              <a:spcAft>
+                <a:spcPts val="0"/>
+              </a:spcAft>
+              <a:buClrTx/>
+              <a:buSzTx/>
+              <a:buFontTx/>
+              <a:buNone/>
+              <a:tabLst/>
+              <a:defRPr/>
+            </a:pPr>
+            <a:r>
+              <a:rPr kumimoji="0" lang="en-US" sz="1200" b="1" i="0" u="none" strike="noStrike" kern="1200" cap="none" spc="0" normalizeH="0" baseline="0" noProof="0" dirty="0">
+                <a:ln>
+                  <a:noFill/>
+                </a:ln>
+                <a:solidFill>
+                  <a:srgbClr val="FFFFFF"/>
+                </a:solidFill>
+                <a:effectLst/>
+                <a:uLnTx/>
+                <a:uFillTx/>
+                <a:latin typeface="Cambria" pitchFamily="34" charset="0"/>
+                <a:ea typeface="Cambria" pitchFamily="34" charset="-122"/>
+                <a:cs typeface="Cambria" pitchFamily="34" charset="-120"/>
+              </a:rPr>
+              <a:t>Security &amp; Compliance</a:t>
+            </a:r>
+            <a:endParaRPr kumimoji="0" lang="en-US" sz="1200" b="0" i="0" u="none" strike="noStrike" kern="1200" cap="none" spc="0" normalizeH="0" baseline="0" noProof="0" dirty="0">
+              <a:ln>
+                <a:noFill/>
+              </a:ln>
+              <a:solidFill>
+                <a:prstClr val="black"/>
+              </a:solidFill>
+              <a:effectLst/>
+              <a:uLnTx/>
+              <a:uFillTx/>
+              <a:latin typeface="Calibri" panose="020F0502020204030204"/>
+              <a:ea typeface="+mn-ea"/>
+              <a:cs typeface="+mn-cs"/>
+            </a:endParaRPr>
+          </a:p>
+        </p:txBody>
+      </p:sp>
+      <p:sp>
+        <p:nvSpPr>
+          <p:cNvPr id="25" name="Text 23"/>
+          <p:cNvSpPr/>
+          <p:nvPr/>
+        </p:nvSpPr>
+        <p:spPr>
+          <a:xfrm>
+            <a:off x="5367528" y="2642616"/>
+            <a:ext cx="3172968" cy="457200"/>
+          </a:xfrm>
+          <a:prstGeom prst="rect">
+            <a:avLst/>
+          </a:prstGeom>
+          <a:noFill/>
+          <a:ln/>
+        </p:spPr>
+        <p:txBody>
+          <a:bodyPr wrap="square" lIns="0" tIns="0" rIns="0" bIns="0" rtlCol="0" anchor="t"/>
+          <a:lstStyle/>
+          <a:p>
+            <a:pPr marL="0" marR="0" lvl="0" indent="0" algn="l" defTabSz="914400" rtl="0" eaLnBrk="1" fontAlgn="auto" latinLnBrk="0" hangingPunct="1">
+              <a:lnSpc>
+                <a:spcPct val="108000"/>
+              </a:lnSpc>
+              <a:spcBef>
+                <a:spcPts val="0"/>
+              </a:spcBef>
+              <a:spcAft>
+                <a:spcPts val="0"/>
+              </a:spcAft>
+              <a:buClrTx/>
+              <a:buSzTx/>
+              <a:buFontTx/>
+              <a:buNone/>
+              <a:tabLst/>
+              <a:defRPr/>
+            </a:pPr>
+            <a:r>
+              <a:rPr kumimoji="0" lang="en-US" sz="870" b="0" i="0" u="none" strike="noStrike" kern="1200" cap="none" spc="0" normalizeH="0" baseline="0" noProof="0" dirty="0">
+                <a:ln>
+                  <a:noFill/>
+                </a:ln>
+                <a:solidFill>
+                  <a:srgbClr val="AAB4C4"/>
+                </a:solidFill>
+                <a:effectLst/>
+                <a:uLnTx/>
+                <a:uFillTx/>
+                <a:latin typeface="Calibri" pitchFamily="34" charset="0"/>
+                <a:ea typeface="Calibri" pitchFamily="34" charset="-122"/>
+                <a:cs typeface="Calibri" pitchFamily="34" charset="-120"/>
+              </a:rPr>
+              <a:t>JWT + bcrypt authentication; 13 secure environment settings kept out of the Docker image, never baked into the build.</a:t>
+            </a:r>
+            <a:endParaRPr kumimoji="0" lang="en-US" sz="870" b="0" i="0" u="none" strike="noStrike" kern="1200" cap="none" spc="0" normalizeH="0" baseline="0" noProof="0" dirty="0">
+              <a:ln>
+                <a:noFill/>
+              </a:ln>
+              <a:solidFill>
+                <a:prstClr val="black"/>
+              </a:solidFill>
+              <a:effectLst/>
+              <a:uLnTx/>
+              <a:uFillTx/>
+              <a:latin typeface="Calibri" panose="020F0502020204030204"/>
+              <a:ea typeface="+mn-ea"/>
+              <a:cs typeface="+mn-cs"/>
+            </a:endParaRPr>
+          </a:p>
+        </p:txBody>
+      </p:sp>
+      <p:sp>
+        <p:nvSpPr>
+          <p:cNvPr id="26" name="Shape 24"/>
+          <p:cNvSpPr/>
+          <p:nvPr/>
+        </p:nvSpPr>
+        <p:spPr>
+          <a:xfrm>
+            <a:off x="457200" y="3246120"/>
+            <a:ext cx="3977640" cy="841248"/>
+          </a:xfrm>
+          <a:prstGeom prst="roundRect">
+            <a:avLst>
+              <a:gd name="adj" fmla="val 6522"/>
+            </a:avLst>
+          </a:prstGeom>
+          <a:solidFill>
+            <a:srgbClr val="162032"/>
+          </a:solidFill>
+          <a:ln w="9525">
+            <a:solidFill>
+              <a:srgbClr val="233047"/>
+            </a:solidFill>
+            <a:prstDash val="solid"/>
+          </a:ln>
+          <a:effectLst>
+            <a:outerShdw blurRad="76200" dist="25400" dir="5400000" algn="bl" rotWithShape="0">
+              <a:srgbClr val="000000">
+                <a:alpha val="16000"/>
+              </a:srgbClr>
+            </a:outerShdw>
+          </a:effectLst>
+        </p:spPr>
+      </p:sp>
+      <p:sp>
+        <p:nvSpPr>
+          <p:cNvPr id="27" name="Shape 25"/>
+          <p:cNvSpPr/>
+          <p:nvPr/>
+        </p:nvSpPr>
+        <p:spPr>
+          <a:xfrm>
+            <a:off x="603504" y="3374136"/>
+            <a:ext cx="402336" cy="402336"/>
+          </a:xfrm>
+          <a:prstGeom prst="ellipse">
+            <a:avLst/>
+          </a:prstGeom>
+          <a:solidFill>
+            <a:srgbClr val="E8544E">
+              <a:alpha val="20000"/>
+            </a:srgbClr>
+          </a:solidFill>
+          <a:ln/>
+        </p:spPr>
+      </p:sp>
+      <p:sp>
+        <p:nvSpPr>
+          <p:cNvPr id="28" name="Text 26"/>
+          <p:cNvSpPr/>
+          <p:nvPr/>
+        </p:nvSpPr>
+        <p:spPr>
+          <a:xfrm>
+            <a:off x="603504" y="3374136"/>
+            <a:ext cx="402336" cy="402336"/>
+          </a:xfrm>
+          <a:prstGeom prst="rect">
+            <a:avLst/>
+          </a:prstGeom>
+          <a:noFill/>
+          <a:ln/>
+        </p:spPr>
+        <p:txBody>
+          <a:bodyPr wrap="square" lIns="0" tIns="0" rIns="0" bIns="0" rtlCol="0" anchor="ctr"/>
+          <a:lstStyle/>
+          <a:p>
+            <a:pPr marL="0" marR="0" lvl="0" indent="0" algn="ctr" defTabSz="914400" rtl="0" eaLnBrk="1" fontAlgn="auto" latinLnBrk="0" hangingPunct="1">
+              <a:lnSpc>
+                <a:spcPct val="100000"/>
+              </a:lnSpc>
+              <a:spcBef>
+                <a:spcPts val="0"/>
+              </a:spcBef>
+              <a:spcAft>
+                <a:spcPts val="0"/>
+              </a:spcAft>
+              <a:buClrTx/>
+              <a:buSzTx/>
+              <a:buFontTx/>
+              <a:buNone/>
+              <a:tabLst/>
+              <a:defRPr/>
+            </a:pPr>
+            <a:r>
+              <a:rPr kumimoji="0" lang="en-US" sz="1400" b="0" i="0" u="none" strike="noStrike" kern="1200" cap="none" spc="0" normalizeH="0" baseline="0" noProof="0" dirty="0">
+                <a:ln>
+                  <a:noFill/>
+                </a:ln>
+                <a:solidFill>
+                  <a:srgbClr val="E8544E"/>
+                </a:solidFill>
+                <a:effectLst/>
+                <a:uLnTx/>
+                <a:uFillTx/>
+                <a:latin typeface="Calibri" panose="020F0502020204030204"/>
+                <a:ea typeface="+mn-ea"/>
+                <a:cs typeface="+mn-cs"/>
+              </a:rPr>
+              <a:t>✔</a:t>
+            </a:r>
+            <a:endParaRPr kumimoji="0" lang="en-US" sz="1400" b="0" i="0" u="none" strike="noStrike" kern="1200" cap="none" spc="0" normalizeH="0" baseline="0" noProof="0" dirty="0">
+              <a:ln>
+                <a:noFill/>
+              </a:ln>
+              <a:solidFill>
+                <a:prstClr val="black"/>
+              </a:solidFill>
+              <a:effectLst/>
+              <a:uLnTx/>
+              <a:uFillTx/>
+              <a:latin typeface="Calibri" panose="020F0502020204030204"/>
+              <a:ea typeface="+mn-ea"/>
+              <a:cs typeface="+mn-cs"/>
+            </a:endParaRPr>
+          </a:p>
+        </p:txBody>
+      </p:sp>
+      <p:sp>
+        <p:nvSpPr>
+          <p:cNvPr id="29" name="Text 27"/>
+          <p:cNvSpPr/>
+          <p:nvPr/>
+        </p:nvSpPr>
+        <p:spPr>
+          <a:xfrm>
+            <a:off x="1115568" y="3337560"/>
+            <a:ext cx="3172968" cy="219456"/>
+          </a:xfrm>
+          <a:prstGeom prst="rect">
+            <a:avLst/>
+          </a:prstGeom>
+          <a:noFill/>
+          <a:ln/>
+        </p:spPr>
+        <p:txBody>
+          <a:bodyPr wrap="square" lIns="0" tIns="0" rIns="0" bIns="0" rtlCol="0" anchor="ctr"/>
+          <a:lstStyle/>
+          <a:p>
+            <a:pPr marL="0" marR="0" lvl="0" indent="0" algn="l" defTabSz="914400" rtl="0" eaLnBrk="1" fontAlgn="auto" latinLnBrk="0" hangingPunct="1">
+              <a:lnSpc>
+                <a:spcPct val="100000"/>
+              </a:lnSpc>
+              <a:spcBef>
+                <a:spcPts val="0"/>
+              </a:spcBef>
+              <a:spcAft>
+                <a:spcPts val="0"/>
+              </a:spcAft>
+              <a:buClrTx/>
+              <a:buSzTx/>
+              <a:buFontTx/>
+              <a:buNone/>
+              <a:tabLst/>
+              <a:defRPr/>
+            </a:pPr>
+            <a:r>
+              <a:rPr kumimoji="0" lang="en-US" sz="1200" b="1" i="0" u="none" strike="noStrike" kern="1200" cap="none" spc="0" normalizeH="0" baseline="0" noProof="0" dirty="0">
+                <a:ln>
+                  <a:noFill/>
+                </a:ln>
+                <a:solidFill>
+                  <a:srgbClr val="FFFFFF"/>
+                </a:solidFill>
+                <a:effectLst/>
+                <a:uLnTx/>
+                <a:uFillTx/>
+                <a:latin typeface="Cambria" pitchFamily="34" charset="0"/>
+                <a:ea typeface="Cambria" pitchFamily="34" charset="-122"/>
+                <a:cs typeface="Cambria" pitchFamily="34" charset="-120"/>
+              </a:rPr>
+              <a:t>Testing Standards</a:t>
+            </a:r>
+            <a:endParaRPr kumimoji="0" lang="en-US" sz="1200" b="0" i="0" u="none" strike="noStrike" kern="1200" cap="none" spc="0" normalizeH="0" baseline="0" noProof="0" dirty="0">
+              <a:ln>
+                <a:noFill/>
+              </a:ln>
+              <a:solidFill>
+                <a:prstClr val="black"/>
+              </a:solidFill>
+              <a:effectLst/>
+              <a:uLnTx/>
+              <a:uFillTx/>
+              <a:latin typeface="Calibri" panose="020F0502020204030204"/>
+              <a:ea typeface="+mn-ea"/>
+              <a:cs typeface="+mn-cs"/>
+            </a:endParaRPr>
+          </a:p>
+        </p:txBody>
+      </p:sp>
+      <p:sp>
+        <p:nvSpPr>
+          <p:cNvPr id="30" name="Text 28"/>
+          <p:cNvSpPr/>
+          <p:nvPr/>
+        </p:nvSpPr>
+        <p:spPr>
+          <a:xfrm>
+            <a:off x="1115568" y="3557016"/>
+            <a:ext cx="3172968" cy="457200"/>
+          </a:xfrm>
+          <a:prstGeom prst="rect">
+            <a:avLst/>
+          </a:prstGeom>
+          <a:noFill/>
+          <a:ln/>
+        </p:spPr>
+        <p:txBody>
+          <a:bodyPr wrap="square" lIns="0" tIns="0" rIns="0" bIns="0" rtlCol="0" anchor="t"/>
+          <a:lstStyle/>
+          <a:p>
+            <a:pPr marL="0" marR="0" lvl="0" indent="0" algn="l" defTabSz="914400" rtl="0" eaLnBrk="1" fontAlgn="auto" latinLnBrk="0" hangingPunct="1">
+              <a:lnSpc>
+                <a:spcPct val="108000"/>
+              </a:lnSpc>
+              <a:spcBef>
+                <a:spcPts val="0"/>
+              </a:spcBef>
+              <a:spcAft>
+                <a:spcPts val="0"/>
+              </a:spcAft>
+              <a:buClrTx/>
+              <a:buSzTx/>
+              <a:buFontTx/>
+              <a:buNone/>
+              <a:tabLst/>
+              <a:defRPr/>
+            </a:pPr>
+            <a:r>
+              <a:rPr kumimoji="0" lang="en-US" sz="870" b="0" i="0" u="none" strike="noStrike" kern="1200" cap="none" spc="0" normalizeH="0" baseline="0" noProof="0" dirty="0">
+                <a:ln>
+                  <a:noFill/>
+                </a:ln>
+                <a:solidFill>
+                  <a:srgbClr val="AAB4C4"/>
+                </a:solidFill>
+                <a:effectLst/>
+                <a:uLnTx/>
+                <a:uFillTx/>
+                <a:latin typeface="Calibri" pitchFamily="34" charset="0"/>
+                <a:ea typeface="Calibri" pitchFamily="34" charset="-122"/>
+                <a:cs typeface="Calibri" pitchFamily="34" charset="-120"/>
+              </a:rPr>
+              <a:t>96 unit tests across every module, plus DeepEval (0.22 hallucination score) and RAGAS (0.88 faithfulness) — all run in CI in 6 seconds.</a:t>
+            </a:r>
+            <a:endParaRPr kumimoji="0" lang="en-US" sz="870" b="0" i="0" u="none" strike="noStrike" kern="1200" cap="none" spc="0" normalizeH="0" baseline="0" noProof="0" dirty="0">
+              <a:ln>
+                <a:noFill/>
+              </a:ln>
+              <a:solidFill>
+                <a:prstClr val="black"/>
+              </a:solidFill>
+              <a:effectLst/>
+              <a:uLnTx/>
+              <a:uFillTx/>
+              <a:latin typeface="Calibri" panose="020F0502020204030204"/>
+              <a:ea typeface="+mn-ea"/>
+              <a:cs typeface="+mn-cs"/>
+            </a:endParaRPr>
+          </a:p>
+        </p:txBody>
+      </p:sp>
+      <p:sp>
+        <p:nvSpPr>
+          <p:cNvPr id="31" name="Shape 29"/>
+          <p:cNvSpPr/>
+          <p:nvPr/>
+        </p:nvSpPr>
+        <p:spPr>
+          <a:xfrm>
+            <a:off x="4709160" y="3246120"/>
+            <a:ext cx="3977640" cy="841248"/>
+          </a:xfrm>
+          <a:prstGeom prst="roundRect">
+            <a:avLst>
+              <a:gd name="adj" fmla="val 6522"/>
+            </a:avLst>
+          </a:prstGeom>
+          <a:solidFill>
+            <a:srgbClr val="162032"/>
+          </a:solidFill>
+          <a:ln w="9525">
+            <a:solidFill>
+              <a:srgbClr val="233047"/>
+            </a:solidFill>
+            <a:prstDash val="solid"/>
+          </a:ln>
+          <a:effectLst>
+            <a:outerShdw blurRad="76200" dist="25400" dir="5400000" algn="bl" rotWithShape="0">
+              <a:srgbClr val="000000">
+                <a:alpha val="16000"/>
+              </a:srgbClr>
+            </a:outerShdw>
+          </a:effectLst>
+        </p:spPr>
+      </p:sp>
+      <p:sp>
+        <p:nvSpPr>
+          <p:cNvPr id="32" name="Shape 30"/>
+          <p:cNvSpPr/>
+          <p:nvPr/>
+        </p:nvSpPr>
+        <p:spPr>
+          <a:xfrm>
+            <a:off x="4855464" y="3374136"/>
+            <a:ext cx="402336" cy="402336"/>
+          </a:xfrm>
+          <a:prstGeom prst="ellipse">
+            <a:avLst/>
+          </a:prstGeom>
+          <a:solidFill>
+            <a:srgbClr val="3B82F6">
+              <a:alpha val="20000"/>
+            </a:srgbClr>
+          </a:solidFill>
+          <a:ln/>
+        </p:spPr>
+      </p:sp>
+      <p:sp>
+        <p:nvSpPr>
+          <p:cNvPr id="33" name="Text 31"/>
+          <p:cNvSpPr/>
+          <p:nvPr/>
+        </p:nvSpPr>
+        <p:spPr>
+          <a:xfrm>
+            <a:off x="4855464" y="3374136"/>
+            <a:ext cx="402336" cy="402336"/>
+          </a:xfrm>
+          <a:prstGeom prst="rect">
+            <a:avLst/>
+          </a:prstGeom>
+          <a:noFill/>
+          <a:ln/>
+        </p:spPr>
+        <p:txBody>
+          <a:bodyPr wrap="square" lIns="0" tIns="0" rIns="0" bIns="0" rtlCol="0" anchor="ctr"/>
+          <a:lstStyle/>
+          <a:p>
+            <a:pPr marL="0" marR="0" lvl="0" indent="0" algn="ctr" defTabSz="914400" rtl="0" eaLnBrk="1" fontAlgn="auto" latinLnBrk="0" hangingPunct="1">
+              <a:lnSpc>
+                <a:spcPct val="100000"/>
+              </a:lnSpc>
+              <a:spcBef>
+                <a:spcPts val="0"/>
+              </a:spcBef>
+              <a:spcAft>
+                <a:spcPts val="0"/>
+              </a:spcAft>
+              <a:buClrTx/>
+              <a:buSzTx/>
+              <a:buFontTx/>
+              <a:buNone/>
+              <a:tabLst/>
+              <a:defRPr/>
+            </a:pPr>
+            <a:r>
+              <a:rPr kumimoji="0" lang="en-US" sz="1400" b="0" i="0" u="none" strike="noStrike" kern="1200" cap="none" spc="0" normalizeH="0" baseline="0" noProof="0" dirty="0">
+                <a:ln>
+                  <a:noFill/>
+                </a:ln>
+                <a:solidFill>
+                  <a:srgbClr val="3B82F6"/>
+                </a:solidFill>
+                <a:effectLst/>
+                <a:uLnTx/>
+                <a:uFillTx/>
+                <a:latin typeface="Calibri" panose="020F0502020204030204"/>
+                <a:ea typeface="+mn-ea"/>
+                <a:cs typeface="+mn-cs"/>
+              </a:rPr>
+              <a:t>📦</a:t>
+            </a:r>
+            <a:endParaRPr kumimoji="0" lang="en-US" sz="1400" b="0" i="0" u="none" strike="noStrike" kern="1200" cap="none" spc="0" normalizeH="0" baseline="0" noProof="0" dirty="0">
+              <a:ln>
+                <a:noFill/>
+              </a:ln>
+              <a:solidFill>
+                <a:prstClr val="black"/>
+              </a:solidFill>
+              <a:effectLst/>
+              <a:uLnTx/>
+              <a:uFillTx/>
+              <a:latin typeface="Calibri" panose="020F0502020204030204"/>
+              <a:ea typeface="+mn-ea"/>
+              <a:cs typeface="+mn-cs"/>
+            </a:endParaRPr>
+          </a:p>
+        </p:txBody>
+      </p:sp>
+      <p:sp>
+        <p:nvSpPr>
+          <p:cNvPr id="34" name="Text 32"/>
+          <p:cNvSpPr/>
+          <p:nvPr/>
+        </p:nvSpPr>
+        <p:spPr>
+          <a:xfrm>
+            <a:off x="5367528" y="3337560"/>
+            <a:ext cx="3172968" cy="219456"/>
+          </a:xfrm>
+          <a:prstGeom prst="rect">
+            <a:avLst/>
+          </a:prstGeom>
+          <a:noFill/>
+          <a:ln/>
+        </p:spPr>
+        <p:txBody>
+          <a:bodyPr wrap="square" lIns="0" tIns="0" rIns="0" bIns="0" rtlCol="0" anchor="ctr"/>
+          <a:lstStyle/>
+          <a:p>
+            <a:pPr marL="0" marR="0" lvl="0" indent="0" algn="l" defTabSz="914400" rtl="0" eaLnBrk="1" fontAlgn="auto" latinLnBrk="0" hangingPunct="1">
+              <a:lnSpc>
+                <a:spcPct val="100000"/>
+              </a:lnSpc>
+              <a:spcBef>
+                <a:spcPts val="0"/>
+              </a:spcBef>
+              <a:spcAft>
+                <a:spcPts val="0"/>
+              </a:spcAft>
+              <a:buClrTx/>
+              <a:buSzTx/>
+              <a:buFontTx/>
+              <a:buNone/>
+              <a:tabLst/>
+              <a:defRPr/>
+            </a:pPr>
+            <a:r>
+              <a:rPr kumimoji="0" lang="en-US" sz="1200" b="1" i="0" u="none" strike="noStrike" kern="1200" cap="none" spc="0" normalizeH="0" baseline="0" noProof="0" dirty="0">
+                <a:ln>
+                  <a:noFill/>
+                </a:ln>
+                <a:solidFill>
+                  <a:srgbClr val="FFFFFF"/>
+                </a:solidFill>
+                <a:effectLst/>
+                <a:uLnTx/>
+                <a:uFillTx/>
+                <a:latin typeface="Cambria" pitchFamily="34" charset="0"/>
+                <a:ea typeface="Cambria" pitchFamily="34" charset="-122"/>
+                <a:cs typeface="Cambria" pitchFamily="34" charset="-120"/>
+              </a:rPr>
+              <a:t>Version Control</a:t>
+            </a:r>
+            <a:endParaRPr kumimoji="0" lang="en-US" sz="1200" b="0" i="0" u="none" strike="noStrike" kern="1200" cap="none" spc="0" normalizeH="0" baseline="0" noProof="0" dirty="0">
+              <a:ln>
+                <a:noFill/>
+              </a:ln>
+              <a:solidFill>
+                <a:prstClr val="black"/>
+              </a:solidFill>
+              <a:effectLst/>
+              <a:uLnTx/>
+              <a:uFillTx/>
+              <a:latin typeface="Calibri" panose="020F0502020204030204"/>
+              <a:ea typeface="+mn-ea"/>
+              <a:cs typeface="+mn-cs"/>
+            </a:endParaRPr>
+          </a:p>
+        </p:txBody>
+      </p:sp>
+      <p:sp>
+        <p:nvSpPr>
+          <p:cNvPr id="35" name="Text 33"/>
+          <p:cNvSpPr/>
+          <p:nvPr/>
+        </p:nvSpPr>
+        <p:spPr>
+          <a:xfrm>
+            <a:off x="5367528" y="3557016"/>
+            <a:ext cx="3172968" cy="457200"/>
+          </a:xfrm>
+          <a:prstGeom prst="rect">
+            <a:avLst/>
+          </a:prstGeom>
+          <a:noFill/>
+          <a:ln/>
+        </p:spPr>
+        <p:txBody>
+          <a:bodyPr wrap="square" lIns="0" tIns="0" rIns="0" bIns="0" rtlCol="0" anchor="t"/>
+          <a:lstStyle/>
+          <a:p>
+            <a:pPr marL="0" marR="0" lvl="0" indent="0" algn="l" defTabSz="914400" rtl="0" eaLnBrk="1" fontAlgn="auto" latinLnBrk="0" hangingPunct="1">
+              <a:lnSpc>
+                <a:spcPct val="108000"/>
+              </a:lnSpc>
+              <a:spcBef>
+                <a:spcPts val="0"/>
+              </a:spcBef>
+              <a:spcAft>
+                <a:spcPts val="0"/>
+              </a:spcAft>
+              <a:buClrTx/>
+              <a:buSzTx/>
+              <a:buFontTx/>
+              <a:buNone/>
+              <a:tabLst/>
+              <a:defRPr/>
+            </a:pPr>
+            <a:r>
+              <a:rPr kumimoji="0" lang="en-US" sz="870" b="0" i="0" u="none" strike="noStrike" kern="1200" cap="none" spc="0" normalizeH="0" baseline="0" noProof="0" dirty="0">
+                <a:ln>
+                  <a:noFill/>
+                </a:ln>
+                <a:solidFill>
+                  <a:srgbClr val="AAB4C4"/>
+                </a:solidFill>
+                <a:effectLst/>
+                <a:uLnTx/>
+                <a:uFillTx/>
+                <a:latin typeface="Calibri" pitchFamily="34" charset="0"/>
+                <a:ea typeface="Calibri" pitchFamily="34" charset="-122"/>
+                <a:cs typeface="Calibri" pitchFamily="34" charset="-120"/>
+              </a:rPr>
+              <a:t>Trunk-based flow: git push → tests → Docker build → push to ACR → deploy — a clean, atomic, automated pipeline to Azure.</a:t>
+            </a:r>
+            <a:endParaRPr kumimoji="0" lang="en-US" sz="870" b="0" i="0" u="none" strike="noStrike" kern="1200" cap="none" spc="0" normalizeH="0" baseline="0" noProof="0" dirty="0">
+              <a:ln>
+                <a:noFill/>
+              </a:ln>
+              <a:solidFill>
+                <a:prstClr val="black"/>
+              </a:solidFill>
+              <a:effectLst/>
+              <a:uLnTx/>
+              <a:uFillTx/>
+              <a:latin typeface="Calibri" panose="020F0502020204030204"/>
+              <a:ea typeface="+mn-ea"/>
+              <a:cs typeface="+mn-cs"/>
+            </a:endParaRPr>
+          </a:p>
+        </p:txBody>
+      </p:sp>
+    </p:spTree>
+    <p:extLst>
+      <p:ext uri="{BB962C8B-B14F-4D97-AF65-F5344CB8AC3E}">
+        <p14:creationId xmlns:p14="http://schemas.microsoft.com/office/powerpoint/2010/main" val="3343381645"/>
+      </p:ext>
+    </p:extLst>
   </p:cSld>
   <p:clrMapOvr>
     <a:masterClrMapping/>
@@ -11408,1916 +11463,6 @@
         </p:nvSpPr>
         <p:spPr>
           <a:xfrm>
-            <a:off x="457200" y="274320"/>
-            <a:ext cx="2286000" cy="256032"/>
-          </a:xfrm>
-          <a:prstGeom prst="roundRect">
-            <a:avLst>
-              <a:gd name="adj" fmla="val 21429"/>
-            </a:avLst>
-          </a:prstGeom>
-          <a:solidFill>
-            <a:srgbClr val="F5A623">
-              <a:alpha val="22000"/>
-            </a:srgbClr>
-          </a:solidFill>
-          <a:ln/>
-        </p:spPr>
-      </p:sp>
-      <p:sp>
-        <p:nvSpPr>
-          <p:cNvPr id="3" name="Text 1"/>
-          <p:cNvSpPr/>
-          <p:nvPr/>
-        </p:nvSpPr>
-        <p:spPr>
-          <a:xfrm>
-            <a:off x="457200" y="274320"/>
-            <a:ext cx="2286000" cy="256032"/>
-          </a:xfrm>
-          <a:prstGeom prst="rect">
-            <a:avLst/>
-          </a:prstGeom>
-          <a:noFill/>
-          <a:ln/>
-        </p:spPr>
-        <p:txBody>
-          <a:bodyPr wrap="square" lIns="0" tIns="0" rIns="0" bIns="0" rtlCol="0" anchor="ctr"/>
-          <a:lstStyle/>
-          <a:p>
-            <a:pPr marL="0" marR="0" lvl="0" indent="0" algn="ctr" defTabSz="914400" rtl="0" eaLnBrk="1" fontAlgn="auto" latinLnBrk="0" hangingPunct="1">
-              <a:lnSpc>
-                <a:spcPct val="100000"/>
-              </a:lnSpc>
-              <a:spcBef>
-                <a:spcPts val="0"/>
-              </a:spcBef>
-              <a:spcAft>
-                <a:spcPts val="0"/>
-              </a:spcAft>
-              <a:buClrTx/>
-              <a:buSzTx/>
-              <a:buFontTx/>
-              <a:buNone/>
-              <a:tabLst/>
-              <a:defRPr/>
-            </a:pPr>
-            <a:r>
-              <a:rPr kumimoji="0" lang="en-US" sz="900" b="1" i="0" u="none" strike="noStrike" kern="0" cap="none" spc="120" normalizeH="0" baseline="0" noProof="0" dirty="0">
-                <a:ln>
-                  <a:noFill/>
-                </a:ln>
-                <a:solidFill>
-                  <a:srgbClr val="F5A623"/>
-                </a:solidFill>
-                <a:effectLst/>
-                <a:uLnTx/>
-                <a:uFillTx/>
-                <a:latin typeface="Calibri" pitchFamily="34" charset="0"/>
-                <a:ea typeface="Calibri" pitchFamily="34" charset="-122"/>
-                <a:cs typeface="Calibri" pitchFamily="34" charset="-120"/>
-              </a:rPr>
-              <a:t>EY GUIDELINES · IN PRACTICE</a:t>
-            </a:r>
-            <a:endParaRPr kumimoji="0" lang="en-US" sz="900" b="0" i="0" u="none" strike="noStrike" kern="1200" cap="none" spc="0" normalizeH="0" baseline="0" noProof="0" dirty="0">
-              <a:ln>
-                <a:noFill/>
-              </a:ln>
-              <a:solidFill>
-                <a:prstClr val="black"/>
-              </a:solidFill>
-              <a:effectLst/>
-              <a:uLnTx/>
-              <a:uFillTx/>
-              <a:latin typeface="Calibri" panose="020F0502020204030204"/>
-              <a:ea typeface="+mn-ea"/>
-              <a:cs typeface="+mn-cs"/>
-            </a:endParaRPr>
-          </a:p>
-        </p:txBody>
-      </p:sp>
-      <p:sp>
-        <p:nvSpPr>
-          <p:cNvPr id="4" name="Text 2"/>
-          <p:cNvSpPr/>
-          <p:nvPr/>
-        </p:nvSpPr>
-        <p:spPr>
-          <a:xfrm>
-            <a:off x="457200" y="566928"/>
-            <a:ext cx="8229600" cy="457200"/>
-          </a:xfrm>
-          <a:prstGeom prst="rect">
-            <a:avLst/>
-          </a:prstGeom>
-          <a:noFill/>
-          <a:ln/>
-        </p:spPr>
-        <p:txBody>
-          <a:bodyPr wrap="square" lIns="0" tIns="0" rIns="0" bIns="0" rtlCol="0" anchor="ctr"/>
-          <a:lstStyle/>
-          <a:p>
-            <a:pPr marL="0" marR="0" lvl="0" indent="0" algn="l" defTabSz="914400" rtl="0" eaLnBrk="1" fontAlgn="auto" latinLnBrk="0" hangingPunct="1">
-              <a:lnSpc>
-                <a:spcPct val="100000"/>
-              </a:lnSpc>
-              <a:spcBef>
-                <a:spcPts val="0"/>
-              </a:spcBef>
-              <a:spcAft>
-                <a:spcPts val="0"/>
-              </a:spcAft>
-              <a:buClrTx/>
-              <a:buSzTx/>
-              <a:buFontTx/>
-              <a:buNone/>
-              <a:tabLst/>
-              <a:defRPr/>
-            </a:pPr>
-            <a:r>
-              <a:rPr kumimoji="0" lang="en-US" sz="2200" b="1" i="0" u="none" strike="noStrike" kern="1200" cap="none" spc="0" normalizeH="0" baseline="0" noProof="0" dirty="0">
-                <a:ln>
-                  <a:noFill/>
-                </a:ln>
-                <a:solidFill>
-                  <a:srgbClr val="FFFFFF"/>
-                </a:solidFill>
-                <a:effectLst/>
-                <a:uLnTx/>
-                <a:uFillTx/>
-                <a:latin typeface="Cambria" pitchFamily="34" charset="0"/>
-                <a:ea typeface="Cambria" pitchFamily="34" charset="-122"/>
-                <a:cs typeface="Cambria" pitchFamily="34" charset="-120"/>
-              </a:rPr>
-              <a:t>How Our Project Followed EY Coding Guidelines</a:t>
-            </a:r>
-            <a:endParaRPr kumimoji="0" lang="en-US" sz="2200" b="0" i="0" u="none" strike="noStrike" kern="1200" cap="none" spc="0" normalizeH="0" baseline="0" noProof="0" dirty="0">
-              <a:ln>
-                <a:noFill/>
-              </a:ln>
-              <a:solidFill>
-                <a:prstClr val="black"/>
-              </a:solidFill>
-              <a:effectLst/>
-              <a:uLnTx/>
-              <a:uFillTx/>
-              <a:latin typeface="Calibri" panose="020F0502020204030204"/>
-              <a:ea typeface="+mn-ea"/>
-              <a:cs typeface="+mn-cs"/>
-            </a:endParaRPr>
-          </a:p>
-        </p:txBody>
-      </p:sp>
-      <p:sp>
-        <p:nvSpPr>
-          <p:cNvPr id="5" name="Text 3"/>
-          <p:cNvSpPr/>
-          <p:nvPr/>
-        </p:nvSpPr>
-        <p:spPr>
-          <a:xfrm>
-            <a:off x="457200" y="969264"/>
-            <a:ext cx="8229600" cy="274320"/>
-          </a:xfrm>
-          <a:prstGeom prst="rect">
-            <a:avLst/>
-          </a:prstGeom>
-          <a:noFill/>
-          <a:ln/>
-        </p:spPr>
-        <p:txBody>
-          <a:bodyPr wrap="square" lIns="0" tIns="0" rIns="0" bIns="0" rtlCol="0" anchor="ctr"/>
-          <a:lstStyle/>
-          <a:p>
-            <a:pPr marL="0" marR="0" lvl="0" indent="0" algn="l" defTabSz="914400" rtl="0" eaLnBrk="1" fontAlgn="auto" latinLnBrk="0" hangingPunct="1">
-              <a:lnSpc>
-                <a:spcPct val="100000"/>
-              </a:lnSpc>
-              <a:spcBef>
-                <a:spcPts val="0"/>
-              </a:spcBef>
-              <a:spcAft>
-                <a:spcPts val="0"/>
-              </a:spcAft>
-              <a:buClrTx/>
-              <a:buSzTx/>
-              <a:buFontTx/>
-              <a:buNone/>
-              <a:tabLst/>
-              <a:defRPr/>
-            </a:pPr>
-            <a:r>
-              <a:rPr kumimoji="0" lang="en-US" sz="1050" b="0" i="1" u="none" strike="noStrike" kern="1200" cap="none" spc="0" normalizeH="0" baseline="0" noProof="0" dirty="0">
-                <a:ln>
-                  <a:noFill/>
-                </a:ln>
-                <a:solidFill>
-                  <a:srgbClr val="AAB4C4"/>
-                </a:solidFill>
-                <a:effectLst/>
-                <a:uLnTx/>
-                <a:uFillTx/>
-                <a:latin typeface="Calibri" pitchFamily="34" charset="0"/>
-                <a:ea typeface="Calibri" pitchFamily="34" charset="-122"/>
-                <a:cs typeface="Calibri" pitchFamily="34" charset="-120"/>
-              </a:rPr>
-              <a:t>Every EY coding principle mapped to what we actually built and shipped on the Credit Risk Intelligence Platform.</a:t>
-            </a:r>
-            <a:endParaRPr kumimoji="0" lang="en-US" sz="1050" b="0" i="0" u="none" strike="noStrike" kern="1200" cap="none" spc="0" normalizeH="0" baseline="0" noProof="0" dirty="0">
-              <a:ln>
-                <a:noFill/>
-              </a:ln>
-              <a:solidFill>
-                <a:prstClr val="black"/>
-              </a:solidFill>
-              <a:effectLst/>
-              <a:uLnTx/>
-              <a:uFillTx/>
-              <a:latin typeface="Calibri" panose="020F0502020204030204"/>
-              <a:ea typeface="+mn-ea"/>
-              <a:cs typeface="+mn-cs"/>
-            </a:endParaRPr>
-          </a:p>
-        </p:txBody>
-      </p:sp>
-      <p:sp>
-        <p:nvSpPr>
-          <p:cNvPr id="6" name="Shape 4"/>
-          <p:cNvSpPr/>
-          <p:nvPr/>
-        </p:nvSpPr>
-        <p:spPr>
-          <a:xfrm>
-            <a:off x="457200" y="1417320"/>
-            <a:ext cx="3977640" cy="841248"/>
-          </a:xfrm>
-          <a:prstGeom prst="roundRect">
-            <a:avLst>
-              <a:gd name="adj" fmla="val 6522"/>
-            </a:avLst>
-          </a:prstGeom>
-          <a:solidFill>
-            <a:srgbClr val="162032"/>
-          </a:solidFill>
-          <a:ln w="9525">
-            <a:solidFill>
-              <a:srgbClr val="233047"/>
-            </a:solidFill>
-            <a:prstDash val="solid"/>
-          </a:ln>
-          <a:effectLst>
-            <a:outerShdw blurRad="76200" dist="25400" dir="5400000" algn="bl" rotWithShape="0">
-              <a:srgbClr val="000000">
-                <a:alpha val="16000"/>
-              </a:srgbClr>
-            </a:outerShdw>
-          </a:effectLst>
-        </p:spPr>
-      </p:sp>
-      <p:sp>
-        <p:nvSpPr>
-          <p:cNvPr id="7" name="Shape 5"/>
-          <p:cNvSpPr/>
-          <p:nvPr/>
-        </p:nvSpPr>
-        <p:spPr>
-          <a:xfrm>
-            <a:off x="603504" y="1545336"/>
-            <a:ext cx="402336" cy="402336"/>
-          </a:xfrm>
-          <a:prstGeom prst="ellipse">
-            <a:avLst/>
-          </a:prstGeom>
-          <a:solidFill>
-            <a:srgbClr val="E8544E">
-              <a:alpha val="20000"/>
-            </a:srgbClr>
-          </a:solidFill>
-          <a:ln/>
-        </p:spPr>
-      </p:sp>
-      <p:sp>
-        <p:nvSpPr>
-          <p:cNvPr id="8" name="Text 6"/>
-          <p:cNvSpPr/>
-          <p:nvPr/>
-        </p:nvSpPr>
-        <p:spPr>
-          <a:xfrm>
-            <a:off x="603504" y="1545336"/>
-            <a:ext cx="402336" cy="402336"/>
-          </a:xfrm>
-          <a:prstGeom prst="rect">
-            <a:avLst/>
-          </a:prstGeom>
-          <a:noFill/>
-          <a:ln/>
-        </p:spPr>
-        <p:txBody>
-          <a:bodyPr wrap="square" lIns="0" tIns="0" rIns="0" bIns="0" rtlCol="0" anchor="ctr"/>
-          <a:lstStyle/>
-          <a:p>
-            <a:pPr marL="0" marR="0" lvl="0" indent="0" algn="ctr" defTabSz="914400" rtl="0" eaLnBrk="1" fontAlgn="auto" latinLnBrk="0" hangingPunct="1">
-              <a:lnSpc>
-                <a:spcPct val="100000"/>
-              </a:lnSpc>
-              <a:spcBef>
-                <a:spcPts val="0"/>
-              </a:spcBef>
-              <a:spcAft>
-                <a:spcPts val="0"/>
-              </a:spcAft>
-              <a:buClrTx/>
-              <a:buSzTx/>
-              <a:buFontTx/>
-              <a:buNone/>
-              <a:tabLst/>
-              <a:defRPr/>
-            </a:pPr>
-            <a:r>
-              <a:rPr kumimoji="0" lang="en-US" sz="1400" b="0" i="0" u="none" strike="noStrike" kern="1200" cap="none" spc="0" normalizeH="0" baseline="0" noProof="0" dirty="0">
-                <a:ln>
-                  <a:noFill/>
-                </a:ln>
-                <a:solidFill>
-                  <a:srgbClr val="E8544E"/>
-                </a:solidFill>
-                <a:effectLst/>
-                <a:uLnTx/>
-                <a:uFillTx/>
-                <a:latin typeface="Calibri" panose="020F0502020204030204"/>
-                <a:ea typeface="+mn-ea"/>
-                <a:cs typeface="+mn-cs"/>
-              </a:rPr>
-              <a:t>✎</a:t>
-            </a:r>
-            <a:endParaRPr kumimoji="0" lang="en-US" sz="1400" b="0" i="0" u="none" strike="noStrike" kern="1200" cap="none" spc="0" normalizeH="0" baseline="0" noProof="0" dirty="0">
-              <a:ln>
-                <a:noFill/>
-              </a:ln>
-              <a:solidFill>
-                <a:prstClr val="black"/>
-              </a:solidFill>
-              <a:effectLst/>
-              <a:uLnTx/>
-              <a:uFillTx/>
-              <a:latin typeface="Calibri" panose="020F0502020204030204"/>
-              <a:ea typeface="+mn-ea"/>
-              <a:cs typeface="+mn-cs"/>
-            </a:endParaRPr>
-          </a:p>
-        </p:txBody>
-      </p:sp>
-      <p:sp>
-        <p:nvSpPr>
-          <p:cNvPr id="9" name="Text 7"/>
-          <p:cNvSpPr/>
-          <p:nvPr/>
-        </p:nvSpPr>
-        <p:spPr>
-          <a:xfrm>
-            <a:off x="1115568" y="1508760"/>
-            <a:ext cx="3172968" cy="219456"/>
-          </a:xfrm>
-          <a:prstGeom prst="rect">
-            <a:avLst/>
-          </a:prstGeom>
-          <a:noFill/>
-          <a:ln/>
-        </p:spPr>
-        <p:txBody>
-          <a:bodyPr wrap="square" lIns="0" tIns="0" rIns="0" bIns="0" rtlCol="0" anchor="ctr"/>
-          <a:lstStyle/>
-          <a:p>
-            <a:pPr marL="0" marR="0" lvl="0" indent="0" algn="l" defTabSz="914400" rtl="0" eaLnBrk="1" fontAlgn="auto" latinLnBrk="0" hangingPunct="1">
-              <a:lnSpc>
-                <a:spcPct val="100000"/>
-              </a:lnSpc>
-              <a:spcBef>
-                <a:spcPts val="0"/>
-              </a:spcBef>
-              <a:spcAft>
-                <a:spcPts val="0"/>
-              </a:spcAft>
-              <a:buClrTx/>
-              <a:buSzTx/>
-              <a:buFontTx/>
-              <a:buNone/>
-              <a:tabLst/>
-              <a:defRPr/>
-            </a:pPr>
-            <a:r>
-              <a:rPr kumimoji="0" lang="en-US" sz="1200" b="1" i="0" u="none" strike="noStrike" kern="1200" cap="none" spc="0" normalizeH="0" baseline="0" noProof="0" dirty="0">
-                <a:ln>
-                  <a:noFill/>
-                </a:ln>
-                <a:solidFill>
-                  <a:srgbClr val="FFFFFF"/>
-                </a:solidFill>
-                <a:effectLst/>
-                <a:uLnTx/>
-                <a:uFillTx/>
-                <a:latin typeface="Cambria" pitchFamily="34" charset="0"/>
-                <a:ea typeface="Cambria" pitchFamily="34" charset="-122"/>
-                <a:cs typeface="Cambria" pitchFamily="34" charset="-120"/>
-              </a:rPr>
-              <a:t>Naming Conventions</a:t>
-            </a:r>
-            <a:endParaRPr kumimoji="0" lang="en-US" sz="1200" b="0" i="0" u="none" strike="noStrike" kern="1200" cap="none" spc="0" normalizeH="0" baseline="0" noProof="0" dirty="0">
-              <a:ln>
-                <a:noFill/>
-              </a:ln>
-              <a:solidFill>
-                <a:prstClr val="black"/>
-              </a:solidFill>
-              <a:effectLst/>
-              <a:uLnTx/>
-              <a:uFillTx/>
-              <a:latin typeface="Calibri" panose="020F0502020204030204"/>
-              <a:ea typeface="+mn-ea"/>
-              <a:cs typeface="+mn-cs"/>
-            </a:endParaRPr>
-          </a:p>
-        </p:txBody>
-      </p:sp>
-      <p:sp>
-        <p:nvSpPr>
-          <p:cNvPr id="10" name="Text 8"/>
-          <p:cNvSpPr/>
-          <p:nvPr/>
-        </p:nvSpPr>
-        <p:spPr>
-          <a:xfrm>
-            <a:off x="1115568" y="1728216"/>
-            <a:ext cx="3172968" cy="457200"/>
-          </a:xfrm>
-          <a:prstGeom prst="rect">
-            <a:avLst/>
-          </a:prstGeom>
-          <a:noFill/>
-          <a:ln/>
-        </p:spPr>
-        <p:txBody>
-          <a:bodyPr wrap="square" lIns="0" tIns="0" rIns="0" bIns="0" rtlCol="0" anchor="t"/>
-          <a:lstStyle/>
-          <a:p>
-            <a:pPr marL="0" marR="0" lvl="0" indent="0" algn="l" defTabSz="914400" rtl="0" eaLnBrk="1" fontAlgn="auto" latinLnBrk="0" hangingPunct="1">
-              <a:lnSpc>
-                <a:spcPct val="108000"/>
-              </a:lnSpc>
-              <a:spcBef>
-                <a:spcPts val="0"/>
-              </a:spcBef>
-              <a:spcAft>
-                <a:spcPts val="0"/>
-              </a:spcAft>
-              <a:buClrTx/>
-              <a:buSzTx/>
-              <a:buFontTx/>
-              <a:buNone/>
-              <a:tabLst/>
-              <a:defRPr/>
-            </a:pPr>
-            <a:r>
-              <a:rPr kumimoji="0" lang="en-US" sz="870" b="0" i="0" u="none" strike="noStrike" kern="1200" cap="none" spc="0" normalizeH="0" baseline="0" noProof="0" dirty="0">
-                <a:ln>
-                  <a:noFill/>
-                </a:ln>
-                <a:solidFill>
-                  <a:srgbClr val="AAB4C4"/>
-                </a:solidFill>
-                <a:effectLst/>
-                <a:uLnTx/>
-                <a:uFillTx/>
-                <a:latin typeface="Calibri" pitchFamily="34" charset="0"/>
-                <a:ea typeface="Calibri" pitchFamily="34" charset="-122"/>
-                <a:cs typeface="Calibri" pitchFamily="34" charset="-120"/>
-              </a:rPr>
-              <a:t>Modules named by responsibility — test_auth.py, test_loan_workflow.py, test_reranker.py, retrieval_agent, chat_agent — consistent across the codebase.</a:t>
-            </a:r>
-            <a:endParaRPr kumimoji="0" lang="en-US" sz="870" b="0" i="0" u="none" strike="noStrike" kern="1200" cap="none" spc="0" normalizeH="0" baseline="0" noProof="0" dirty="0">
-              <a:ln>
-                <a:noFill/>
-              </a:ln>
-              <a:solidFill>
-                <a:prstClr val="black"/>
-              </a:solidFill>
-              <a:effectLst/>
-              <a:uLnTx/>
-              <a:uFillTx/>
-              <a:latin typeface="Calibri" panose="020F0502020204030204"/>
-              <a:ea typeface="+mn-ea"/>
-              <a:cs typeface="+mn-cs"/>
-            </a:endParaRPr>
-          </a:p>
-        </p:txBody>
-      </p:sp>
-      <p:sp>
-        <p:nvSpPr>
-          <p:cNvPr id="11" name="Shape 9"/>
-          <p:cNvSpPr/>
-          <p:nvPr/>
-        </p:nvSpPr>
-        <p:spPr>
-          <a:xfrm>
-            <a:off x="4709160" y="1417320"/>
-            <a:ext cx="3977640" cy="841248"/>
-          </a:xfrm>
-          <a:prstGeom prst="roundRect">
-            <a:avLst>
-              <a:gd name="adj" fmla="val 6522"/>
-            </a:avLst>
-          </a:prstGeom>
-          <a:solidFill>
-            <a:srgbClr val="162032"/>
-          </a:solidFill>
-          <a:ln w="9525">
-            <a:solidFill>
-              <a:srgbClr val="233047"/>
-            </a:solidFill>
-            <a:prstDash val="solid"/>
-          </a:ln>
-          <a:effectLst>
-            <a:outerShdw blurRad="76200" dist="25400" dir="5400000" algn="bl" rotWithShape="0">
-              <a:srgbClr val="000000">
-                <a:alpha val="16000"/>
-              </a:srgbClr>
-            </a:outerShdw>
-          </a:effectLst>
-        </p:spPr>
-      </p:sp>
-      <p:sp>
-        <p:nvSpPr>
-          <p:cNvPr id="12" name="Shape 10"/>
-          <p:cNvSpPr/>
-          <p:nvPr/>
-        </p:nvSpPr>
-        <p:spPr>
-          <a:xfrm>
-            <a:off x="4855464" y="1545336"/>
-            <a:ext cx="402336" cy="402336"/>
-          </a:xfrm>
-          <a:prstGeom prst="ellipse">
-            <a:avLst/>
-          </a:prstGeom>
-          <a:solidFill>
-            <a:srgbClr val="3B82F6">
-              <a:alpha val="20000"/>
-            </a:srgbClr>
-          </a:solidFill>
-          <a:ln/>
-        </p:spPr>
-      </p:sp>
-      <p:sp>
-        <p:nvSpPr>
-          <p:cNvPr id="13" name="Text 11"/>
-          <p:cNvSpPr/>
-          <p:nvPr/>
-        </p:nvSpPr>
-        <p:spPr>
-          <a:xfrm>
-            <a:off x="4855464" y="1545336"/>
-            <a:ext cx="402336" cy="402336"/>
-          </a:xfrm>
-          <a:prstGeom prst="rect">
-            <a:avLst/>
-          </a:prstGeom>
-          <a:noFill/>
-          <a:ln/>
-        </p:spPr>
-        <p:txBody>
-          <a:bodyPr wrap="square" lIns="0" tIns="0" rIns="0" bIns="0" rtlCol="0" anchor="ctr"/>
-          <a:lstStyle/>
-          <a:p>
-            <a:pPr marL="0" marR="0" lvl="0" indent="0" algn="ctr" defTabSz="914400" rtl="0" eaLnBrk="1" fontAlgn="auto" latinLnBrk="0" hangingPunct="1">
-              <a:lnSpc>
-                <a:spcPct val="100000"/>
-              </a:lnSpc>
-              <a:spcBef>
-                <a:spcPts val="0"/>
-              </a:spcBef>
-              <a:spcAft>
-                <a:spcPts val="0"/>
-              </a:spcAft>
-              <a:buClrTx/>
-              <a:buSzTx/>
-              <a:buFontTx/>
-              <a:buNone/>
-              <a:tabLst/>
-              <a:defRPr/>
-            </a:pPr>
-            <a:r>
-              <a:rPr kumimoji="0" lang="en-US" sz="1400" b="0" i="0" u="none" strike="noStrike" kern="1200" cap="none" spc="0" normalizeH="0" baseline="0" noProof="0" dirty="0">
-                <a:ln>
-                  <a:noFill/>
-                </a:ln>
-                <a:solidFill>
-                  <a:srgbClr val="3B82F6"/>
-                </a:solidFill>
-                <a:effectLst/>
-                <a:uLnTx/>
-                <a:uFillTx/>
-                <a:latin typeface="Calibri" panose="020F0502020204030204"/>
-                <a:ea typeface="+mn-ea"/>
-                <a:cs typeface="+mn-cs"/>
-              </a:rPr>
-              <a:t>🔀</a:t>
-            </a:r>
-            <a:endParaRPr kumimoji="0" lang="en-US" sz="1400" b="0" i="0" u="none" strike="noStrike" kern="1200" cap="none" spc="0" normalizeH="0" baseline="0" noProof="0" dirty="0">
-              <a:ln>
-                <a:noFill/>
-              </a:ln>
-              <a:solidFill>
-                <a:prstClr val="black"/>
-              </a:solidFill>
-              <a:effectLst/>
-              <a:uLnTx/>
-              <a:uFillTx/>
-              <a:latin typeface="Calibri" panose="020F0502020204030204"/>
-              <a:ea typeface="+mn-ea"/>
-              <a:cs typeface="+mn-cs"/>
-            </a:endParaRPr>
-          </a:p>
-        </p:txBody>
-      </p:sp>
-      <p:sp>
-        <p:nvSpPr>
-          <p:cNvPr id="14" name="Text 12"/>
-          <p:cNvSpPr/>
-          <p:nvPr/>
-        </p:nvSpPr>
-        <p:spPr>
-          <a:xfrm>
-            <a:off x="5367528" y="1508760"/>
-            <a:ext cx="3172968" cy="219456"/>
-          </a:xfrm>
-          <a:prstGeom prst="rect">
-            <a:avLst/>
-          </a:prstGeom>
-          <a:noFill/>
-          <a:ln/>
-        </p:spPr>
-        <p:txBody>
-          <a:bodyPr wrap="square" lIns="0" tIns="0" rIns="0" bIns="0" rtlCol="0" anchor="ctr"/>
-          <a:lstStyle/>
-          <a:p>
-            <a:pPr marL="0" marR="0" lvl="0" indent="0" algn="l" defTabSz="914400" rtl="0" eaLnBrk="1" fontAlgn="auto" latinLnBrk="0" hangingPunct="1">
-              <a:lnSpc>
-                <a:spcPct val="100000"/>
-              </a:lnSpc>
-              <a:spcBef>
-                <a:spcPts val="0"/>
-              </a:spcBef>
-              <a:spcAft>
-                <a:spcPts val="0"/>
-              </a:spcAft>
-              <a:buClrTx/>
-              <a:buSzTx/>
-              <a:buFontTx/>
-              <a:buNone/>
-              <a:tabLst/>
-              <a:defRPr/>
-            </a:pPr>
-            <a:r>
-              <a:rPr kumimoji="0" lang="en-US" sz="1200" b="1" i="0" u="none" strike="noStrike" kern="1200" cap="none" spc="0" normalizeH="0" baseline="0" noProof="0" dirty="0">
-                <a:ln>
-                  <a:noFill/>
-                </a:ln>
-                <a:solidFill>
-                  <a:srgbClr val="FFFFFF"/>
-                </a:solidFill>
-                <a:effectLst/>
-                <a:uLnTx/>
-                <a:uFillTx/>
-                <a:latin typeface="Cambria" pitchFamily="34" charset="0"/>
-                <a:ea typeface="Cambria" pitchFamily="34" charset="-122"/>
-                <a:cs typeface="Cambria" pitchFamily="34" charset="-120"/>
-              </a:rPr>
-              <a:t>Code Reviews</a:t>
-            </a:r>
-            <a:endParaRPr kumimoji="0" lang="en-US" sz="1200" b="0" i="0" u="none" strike="noStrike" kern="1200" cap="none" spc="0" normalizeH="0" baseline="0" noProof="0" dirty="0">
-              <a:ln>
-                <a:noFill/>
-              </a:ln>
-              <a:solidFill>
-                <a:prstClr val="black"/>
-              </a:solidFill>
-              <a:effectLst/>
-              <a:uLnTx/>
-              <a:uFillTx/>
-              <a:latin typeface="Calibri" panose="020F0502020204030204"/>
-              <a:ea typeface="+mn-ea"/>
-              <a:cs typeface="+mn-cs"/>
-            </a:endParaRPr>
-          </a:p>
-        </p:txBody>
-      </p:sp>
-      <p:sp>
-        <p:nvSpPr>
-          <p:cNvPr id="15" name="Text 13"/>
-          <p:cNvSpPr/>
-          <p:nvPr/>
-        </p:nvSpPr>
-        <p:spPr>
-          <a:xfrm>
-            <a:off x="5367528" y="1728216"/>
-            <a:ext cx="3172968" cy="457200"/>
-          </a:xfrm>
-          <a:prstGeom prst="rect">
-            <a:avLst/>
-          </a:prstGeom>
-          <a:noFill/>
-          <a:ln/>
-        </p:spPr>
-        <p:txBody>
-          <a:bodyPr wrap="square" lIns="0" tIns="0" rIns="0" bIns="0" rtlCol="0" anchor="t"/>
-          <a:lstStyle/>
-          <a:p>
-            <a:pPr marL="0" marR="0" lvl="0" indent="0" algn="l" defTabSz="914400" rtl="0" eaLnBrk="1" fontAlgn="auto" latinLnBrk="0" hangingPunct="1">
-              <a:lnSpc>
-                <a:spcPct val="108000"/>
-              </a:lnSpc>
-              <a:spcBef>
-                <a:spcPts val="0"/>
-              </a:spcBef>
-              <a:spcAft>
-                <a:spcPts val="0"/>
-              </a:spcAft>
-              <a:buClrTx/>
-              <a:buSzTx/>
-              <a:buFontTx/>
-              <a:buNone/>
-              <a:tabLst/>
-              <a:defRPr/>
-            </a:pPr>
-            <a:r>
-              <a:rPr kumimoji="0" lang="en-US" sz="870" b="0" i="0" u="none" strike="noStrike" kern="1200" cap="none" spc="0" normalizeH="0" baseline="0" noProof="0" dirty="0">
-                <a:ln>
-                  <a:noFill/>
-                </a:ln>
-                <a:solidFill>
-                  <a:srgbClr val="AAB4C4"/>
-                </a:solidFill>
-                <a:effectLst/>
-                <a:uLnTx/>
-                <a:uFillTx/>
-                <a:latin typeface="Calibri" pitchFamily="34" charset="0"/>
-                <a:ea typeface="Calibri" pitchFamily="34" charset="-122"/>
-                <a:cs typeface="Calibri" pitchFamily="34" charset="-120"/>
-              </a:rPr>
-              <a:t>Every push is gated: GitHub Actions runs all 96 tests automatically before code can move forward — no merge without a passing check.</a:t>
-            </a:r>
-            <a:endParaRPr kumimoji="0" lang="en-US" sz="870" b="0" i="0" u="none" strike="noStrike" kern="1200" cap="none" spc="0" normalizeH="0" baseline="0" noProof="0" dirty="0">
-              <a:ln>
-                <a:noFill/>
-              </a:ln>
-              <a:solidFill>
-                <a:prstClr val="black"/>
-              </a:solidFill>
-              <a:effectLst/>
-              <a:uLnTx/>
-              <a:uFillTx/>
-              <a:latin typeface="Calibri" panose="020F0502020204030204"/>
-              <a:ea typeface="+mn-ea"/>
-              <a:cs typeface="+mn-cs"/>
-            </a:endParaRPr>
-          </a:p>
-        </p:txBody>
-      </p:sp>
-      <p:sp>
-        <p:nvSpPr>
-          <p:cNvPr id="16" name="Shape 14"/>
-          <p:cNvSpPr/>
-          <p:nvPr/>
-        </p:nvSpPr>
-        <p:spPr>
-          <a:xfrm>
-            <a:off x="457200" y="2331720"/>
-            <a:ext cx="3977640" cy="841248"/>
-          </a:xfrm>
-          <a:prstGeom prst="roundRect">
-            <a:avLst>
-              <a:gd name="adj" fmla="val 6522"/>
-            </a:avLst>
-          </a:prstGeom>
-          <a:solidFill>
-            <a:srgbClr val="162032"/>
-          </a:solidFill>
-          <a:ln w="9525">
-            <a:solidFill>
-              <a:srgbClr val="233047"/>
-            </a:solidFill>
-            <a:prstDash val="solid"/>
-          </a:ln>
-          <a:effectLst>
-            <a:outerShdw blurRad="76200" dist="25400" dir="5400000" algn="bl" rotWithShape="0">
-              <a:srgbClr val="000000">
-                <a:alpha val="16000"/>
-              </a:srgbClr>
-            </a:outerShdw>
-          </a:effectLst>
-        </p:spPr>
-      </p:sp>
-      <p:sp>
-        <p:nvSpPr>
-          <p:cNvPr id="17" name="Shape 15"/>
-          <p:cNvSpPr/>
-          <p:nvPr/>
-        </p:nvSpPr>
-        <p:spPr>
-          <a:xfrm>
-            <a:off x="603504" y="2459736"/>
-            <a:ext cx="402336" cy="402336"/>
-          </a:xfrm>
-          <a:prstGeom prst="ellipse">
-            <a:avLst/>
-          </a:prstGeom>
-          <a:solidFill>
-            <a:srgbClr val="059669">
-              <a:alpha val="20000"/>
-            </a:srgbClr>
-          </a:solidFill>
-          <a:ln/>
-        </p:spPr>
-      </p:sp>
-      <p:sp>
-        <p:nvSpPr>
-          <p:cNvPr id="18" name="Text 16"/>
-          <p:cNvSpPr/>
-          <p:nvPr/>
-        </p:nvSpPr>
-        <p:spPr>
-          <a:xfrm>
-            <a:off x="603504" y="2459736"/>
-            <a:ext cx="402336" cy="402336"/>
-          </a:xfrm>
-          <a:prstGeom prst="rect">
-            <a:avLst/>
-          </a:prstGeom>
-          <a:noFill/>
-          <a:ln/>
-        </p:spPr>
-        <p:txBody>
-          <a:bodyPr wrap="square" lIns="0" tIns="0" rIns="0" bIns="0" rtlCol="0" anchor="ctr"/>
-          <a:lstStyle/>
-          <a:p>
-            <a:pPr marL="0" marR="0" lvl="0" indent="0" algn="ctr" defTabSz="914400" rtl="0" eaLnBrk="1" fontAlgn="auto" latinLnBrk="0" hangingPunct="1">
-              <a:lnSpc>
-                <a:spcPct val="100000"/>
-              </a:lnSpc>
-              <a:spcBef>
-                <a:spcPts val="0"/>
-              </a:spcBef>
-              <a:spcAft>
-                <a:spcPts val="0"/>
-              </a:spcAft>
-              <a:buClrTx/>
-              <a:buSzTx/>
-              <a:buFontTx/>
-              <a:buNone/>
-              <a:tabLst/>
-              <a:defRPr/>
-            </a:pPr>
-            <a:r>
-              <a:rPr kumimoji="0" lang="en-US" sz="1400" b="0" i="0" u="none" strike="noStrike" kern="1200" cap="none" spc="0" normalizeH="0" baseline="0" noProof="0" dirty="0">
-                <a:ln>
-                  <a:noFill/>
-                </a:ln>
-                <a:solidFill>
-                  <a:srgbClr val="059669"/>
-                </a:solidFill>
-                <a:effectLst/>
-                <a:uLnTx/>
-                <a:uFillTx/>
-                <a:latin typeface="Calibri" panose="020F0502020204030204"/>
-                <a:ea typeface="+mn-ea"/>
-                <a:cs typeface="+mn-cs"/>
-              </a:rPr>
-              <a:t>📄</a:t>
-            </a:r>
-            <a:endParaRPr kumimoji="0" lang="en-US" sz="1400" b="0" i="0" u="none" strike="noStrike" kern="1200" cap="none" spc="0" normalizeH="0" baseline="0" noProof="0" dirty="0">
-              <a:ln>
-                <a:noFill/>
-              </a:ln>
-              <a:solidFill>
-                <a:prstClr val="black"/>
-              </a:solidFill>
-              <a:effectLst/>
-              <a:uLnTx/>
-              <a:uFillTx/>
-              <a:latin typeface="Calibri" panose="020F0502020204030204"/>
-              <a:ea typeface="+mn-ea"/>
-              <a:cs typeface="+mn-cs"/>
-            </a:endParaRPr>
-          </a:p>
-        </p:txBody>
-      </p:sp>
-      <p:sp>
-        <p:nvSpPr>
-          <p:cNvPr id="19" name="Text 17"/>
-          <p:cNvSpPr/>
-          <p:nvPr/>
-        </p:nvSpPr>
-        <p:spPr>
-          <a:xfrm>
-            <a:off x="1115568" y="2423160"/>
-            <a:ext cx="3172968" cy="219456"/>
-          </a:xfrm>
-          <a:prstGeom prst="rect">
-            <a:avLst/>
-          </a:prstGeom>
-          <a:noFill/>
-          <a:ln/>
-        </p:spPr>
-        <p:txBody>
-          <a:bodyPr wrap="square" lIns="0" tIns="0" rIns="0" bIns="0" rtlCol="0" anchor="ctr"/>
-          <a:lstStyle/>
-          <a:p>
-            <a:pPr marL="0" marR="0" lvl="0" indent="0" algn="l" defTabSz="914400" rtl="0" eaLnBrk="1" fontAlgn="auto" latinLnBrk="0" hangingPunct="1">
-              <a:lnSpc>
-                <a:spcPct val="100000"/>
-              </a:lnSpc>
-              <a:spcBef>
-                <a:spcPts val="0"/>
-              </a:spcBef>
-              <a:spcAft>
-                <a:spcPts val="0"/>
-              </a:spcAft>
-              <a:buClrTx/>
-              <a:buSzTx/>
-              <a:buFontTx/>
-              <a:buNone/>
-              <a:tabLst/>
-              <a:defRPr/>
-            </a:pPr>
-            <a:r>
-              <a:rPr kumimoji="0" lang="en-US" sz="1200" b="1" i="0" u="none" strike="noStrike" kern="1200" cap="none" spc="0" normalizeH="0" baseline="0" noProof="0" dirty="0">
-                <a:ln>
-                  <a:noFill/>
-                </a:ln>
-                <a:solidFill>
-                  <a:srgbClr val="FFFFFF"/>
-                </a:solidFill>
-                <a:effectLst/>
-                <a:uLnTx/>
-                <a:uFillTx/>
-                <a:latin typeface="Cambria" pitchFamily="34" charset="0"/>
-                <a:ea typeface="Cambria" pitchFamily="34" charset="-122"/>
-                <a:cs typeface="Cambria" pitchFamily="34" charset="-120"/>
-              </a:rPr>
-              <a:t>Documentation</a:t>
-            </a:r>
-            <a:endParaRPr kumimoji="0" lang="en-US" sz="1200" b="0" i="0" u="none" strike="noStrike" kern="1200" cap="none" spc="0" normalizeH="0" baseline="0" noProof="0" dirty="0">
-              <a:ln>
-                <a:noFill/>
-              </a:ln>
-              <a:solidFill>
-                <a:prstClr val="black"/>
-              </a:solidFill>
-              <a:effectLst/>
-              <a:uLnTx/>
-              <a:uFillTx/>
-              <a:latin typeface="Calibri" panose="020F0502020204030204"/>
-              <a:ea typeface="+mn-ea"/>
-              <a:cs typeface="+mn-cs"/>
-            </a:endParaRPr>
-          </a:p>
-        </p:txBody>
-      </p:sp>
-      <p:sp>
-        <p:nvSpPr>
-          <p:cNvPr id="20" name="Text 18"/>
-          <p:cNvSpPr/>
-          <p:nvPr/>
-        </p:nvSpPr>
-        <p:spPr>
-          <a:xfrm>
-            <a:off x="1115568" y="2642616"/>
-            <a:ext cx="3172968" cy="457200"/>
-          </a:xfrm>
-          <a:prstGeom prst="rect">
-            <a:avLst/>
-          </a:prstGeom>
-          <a:noFill/>
-          <a:ln/>
-        </p:spPr>
-        <p:txBody>
-          <a:bodyPr wrap="square" lIns="0" tIns="0" rIns="0" bIns="0" rtlCol="0" anchor="t"/>
-          <a:lstStyle/>
-          <a:p>
-            <a:pPr marL="0" marR="0" lvl="0" indent="0" algn="l" defTabSz="914400" rtl="0" eaLnBrk="1" fontAlgn="auto" latinLnBrk="0" hangingPunct="1">
-              <a:lnSpc>
-                <a:spcPct val="108000"/>
-              </a:lnSpc>
-              <a:spcBef>
-                <a:spcPts val="0"/>
-              </a:spcBef>
-              <a:spcAft>
-                <a:spcPts val="0"/>
-              </a:spcAft>
-              <a:buClrTx/>
-              <a:buSzTx/>
-              <a:buFontTx/>
-              <a:buNone/>
-              <a:tabLst/>
-              <a:defRPr/>
-            </a:pPr>
-            <a:r>
-              <a:rPr kumimoji="0" lang="en-US" sz="870" b="0" i="0" u="none" strike="noStrike" kern="1200" cap="none" spc="0" normalizeH="0" baseline="0" noProof="0" dirty="0">
-                <a:ln>
-                  <a:noFill/>
-                </a:ln>
-                <a:solidFill>
-                  <a:srgbClr val="AAB4C4"/>
-                </a:solidFill>
-                <a:effectLst/>
-                <a:uLnTx/>
-                <a:uFillTx/>
-                <a:latin typeface="Calibri" pitchFamily="34" charset="0"/>
-                <a:ea typeface="Calibri" pitchFamily="34" charset="-122"/>
-                <a:cs typeface="Calibri" pitchFamily="34" charset="-120"/>
-              </a:rPr>
-              <a:t>LangSmith traces every step by name (auth.login_attempt, document_processing, run_risk_analysis) — intent is visible, not just code.</a:t>
-            </a:r>
-            <a:endParaRPr kumimoji="0" lang="en-US" sz="870" b="0" i="0" u="none" strike="noStrike" kern="1200" cap="none" spc="0" normalizeH="0" baseline="0" noProof="0" dirty="0">
-              <a:ln>
-                <a:noFill/>
-              </a:ln>
-              <a:solidFill>
-                <a:prstClr val="black"/>
-              </a:solidFill>
-              <a:effectLst/>
-              <a:uLnTx/>
-              <a:uFillTx/>
-              <a:latin typeface="Calibri" panose="020F0502020204030204"/>
-              <a:ea typeface="+mn-ea"/>
-              <a:cs typeface="+mn-cs"/>
-            </a:endParaRPr>
-          </a:p>
-        </p:txBody>
-      </p:sp>
-      <p:sp>
-        <p:nvSpPr>
-          <p:cNvPr id="21" name="Shape 19"/>
-          <p:cNvSpPr/>
-          <p:nvPr/>
-        </p:nvSpPr>
-        <p:spPr>
-          <a:xfrm>
-            <a:off x="4709160" y="2331720"/>
-            <a:ext cx="3977640" cy="841248"/>
-          </a:xfrm>
-          <a:prstGeom prst="roundRect">
-            <a:avLst>
-              <a:gd name="adj" fmla="val 6522"/>
-            </a:avLst>
-          </a:prstGeom>
-          <a:solidFill>
-            <a:srgbClr val="162032"/>
-          </a:solidFill>
-          <a:ln w="9525">
-            <a:solidFill>
-              <a:srgbClr val="233047"/>
-            </a:solidFill>
-            <a:prstDash val="solid"/>
-          </a:ln>
-          <a:effectLst>
-            <a:outerShdw blurRad="76200" dist="25400" dir="5400000" algn="bl" rotWithShape="0">
-              <a:srgbClr val="000000">
-                <a:alpha val="16000"/>
-              </a:srgbClr>
-            </a:outerShdw>
-          </a:effectLst>
-        </p:spPr>
-      </p:sp>
-      <p:sp>
-        <p:nvSpPr>
-          <p:cNvPr id="22" name="Shape 20"/>
-          <p:cNvSpPr/>
-          <p:nvPr/>
-        </p:nvSpPr>
-        <p:spPr>
-          <a:xfrm>
-            <a:off x="4855464" y="2459736"/>
-            <a:ext cx="402336" cy="402336"/>
-          </a:xfrm>
-          <a:prstGeom prst="ellipse">
-            <a:avLst/>
-          </a:prstGeom>
-          <a:solidFill>
-            <a:srgbClr val="F5A623">
-              <a:alpha val="20000"/>
-            </a:srgbClr>
-          </a:solidFill>
-          <a:ln/>
-        </p:spPr>
-      </p:sp>
-      <p:sp>
-        <p:nvSpPr>
-          <p:cNvPr id="23" name="Text 21"/>
-          <p:cNvSpPr/>
-          <p:nvPr/>
-        </p:nvSpPr>
-        <p:spPr>
-          <a:xfrm>
-            <a:off x="4855464" y="2459736"/>
-            <a:ext cx="402336" cy="402336"/>
-          </a:xfrm>
-          <a:prstGeom prst="rect">
-            <a:avLst/>
-          </a:prstGeom>
-          <a:noFill/>
-          <a:ln/>
-        </p:spPr>
-        <p:txBody>
-          <a:bodyPr wrap="square" lIns="0" tIns="0" rIns="0" bIns="0" rtlCol="0" anchor="ctr"/>
-          <a:lstStyle/>
-          <a:p>
-            <a:pPr marL="0" marR="0" lvl="0" indent="0" algn="ctr" defTabSz="914400" rtl="0" eaLnBrk="1" fontAlgn="auto" latinLnBrk="0" hangingPunct="1">
-              <a:lnSpc>
-                <a:spcPct val="100000"/>
-              </a:lnSpc>
-              <a:spcBef>
-                <a:spcPts val="0"/>
-              </a:spcBef>
-              <a:spcAft>
-                <a:spcPts val="0"/>
-              </a:spcAft>
-              <a:buClrTx/>
-              <a:buSzTx/>
-              <a:buFontTx/>
-              <a:buNone/>
-              <a:tabLst/>
-              <a:defRPr/>
-            </a:pPr>
-            <a:r>
-              <a:rPr kumimoji="0" lang="en-US" sz="1400" b="0" i="0" u="none" strike="noStrike" kern="1200" cap="none" spc="0" normalizeH="0" baseline="0" noProof="0" dirty="0">
-                <a:ln>
-                  <a:noFill/>
-                </a:ln>
-                <a:solidFill>
-                  <a:srgbClr val="F5A623"/>
-                </a:solidFill>
-                <a:effectLst/>
-                <a:uLnTx/>
-                <a:uFillTx/>
-                <a:latin typeface="Calibri" panose="020F0502020204030204"/>
-                <a:ea typeface="+mn-ea"/>
-                <a:cs typeface="+mn-cs"/>
-              </a:rPr>
-              <a:t>🛡</a:t>
-            </a:r>
-            <a:endParaRPr kumimoji="0" lang="en-US" sz="1400" b="0" i="0" u="none" strike="noStrike" kern="1200" cap="none" spc="0" normalizeH="0" baseline="0" noProof="0" dirty="0">
-              <a:ln>
-                <a:noFill/>
-              </a:ln>
-              <a:solidFill>
-                <a:prstClr val="black"/>
-              </a:solidFill>
-              <a:effectLst/>
-              <a:uLnTx/>
-              <a:uFillTx/>
-              <a:latin typeface="Calibri" panose="020F0502020204030204"/>
-              <a:ea typeface="+mn-ea"/>
-              <a:cs typeface="+mn-cs"/>
-            </a:endParaRPr>
-          </a:p>
-        </p:txBody>
-      </p:sp>
-      <p:sp>
-        <p:nvSpPr>
-          <p:cNvPr id="24" name="Text 22"/>
-          <p:cNvSpPr/>
-          <p:nvPr/>
-        </p:nvSpPr>
-        <p:spPr>
-          <a:xfrm>
-            <a:off x="5367528" y="2423160"/>
-            <a:ext cx="3172968" cy="219456"/>
-          </a:xfrm>
-          <a:prstGeom prst="rect">
-            <a:avLst/>
-          </a:prstGeom>
-          <a:noFill/>
-          <a:ln/>
-        </p:spPr>
-        <p:txBody>
-          <a:bodyPr wrap="square" lIns="0" tIns="0" rIns="0" bIns="0" rtlCol="0" anchor="ctr"/>
-          <a:lstStyle/>
-          <a:p>
-            <a:pPr marL="0" marR="0" lvl="0" indent="0" algn="l" defTabSz="914400" rtl="0" eaLnBrk="1" fontAlgn="auto" latinLnBrk="0" hangingPunct="1">
-              <a:lnSpc>
-                <a:spcPct val="100000"/>
-              </a:lnSpc>
-              <a:spcBef>
-                <a:spcPts val="0"/>
-              </a:spcBef>
-              <a:spcAft>
-                <a:spcPts val="0"/>
-              </a:spcAft>
-              <a:buClrTx/>
-              <a:buSzTx/>
-              <a:buFontTx/>
-              <a:buNone/>
-              <a:tabLst/>
-              <a:defRPr/>
-            </a:pPr>
-            <a:r>
-              <a:rPr kumimoji="0" lang="en-US" sz="1200" b="1" i="0" u="none" strike="noStrike" kern="1200" cap="none" spc="0" normalizeH="0" baseline="0" noProof="0" dirty="0">
-                <a:ln>
-                  <a:noFill/>
-                </a:ln>
-                <a:solidFill>
-                  <a:srgbClr val="FFFFFF"/>
-                </a:solidFill>
-                <a:effectLst/>
-                <a:uLnTx/>
-                <a:uFillTx/>
-                <a:latin typeface="Cambria" pitchFamily="34" charset="0"/>
-                <a:ea typeface="Cambria" pitchFamily="34" charset="-122"/>
-                <a:cs typeface="Cambria" pitchFamily="34" charset="-120"/>
-              </a:rPr>
-              <a:t>Security &amp; Compliance</a:t>
-            </a:r>
-            <a:endParaRPr kumimoji="0" lang="en-US" sz="1200" b="0" i="0" u="none" strike="noStrike" kern="1200" cap="none" spc="0" normalizeH="0" baseline="0" noProof="0" dirty="0">
-              <a:ln>
-                <a:noFill/>
-              </a:ln>
-              <a:solidFill>
-                <a:prstClr val="black"/>
-              </a:solidFill>
-              <a:effectLst/>
-              <a:uLnTx/>
-              <a:uFillTx/>
-              <a:latin typeface="Calibri" panose="020F0502020204030204"/>
-              <a:ea typeface="+mn-ea"/>
-              <a:cs typeface="+mn-cs"/>
-            </a:endParaRPr>
-          </a:p>
-        </p:txBody>
-      </p:sp>
-      <p:sp>
-        <p:nvSpPr>
-          <p:cNvPr id="25" name="Text 23"/>
-          <p:cNvSpPr/>
-          <p:nvPr/>
-        </p:nvSpPr>
-        <p:spPr>
-          <a:xfrm>
-            <a:off x="5367528" y="2642616"/>
-            <a:ext cx="3172968" cy="457200"/>
-          </a:xfrm>
-          <a:prstGeom prst="rect">
-            <a:avLst/>
-          </a:prstGeom>
-          <a:noFill/>
-          <a:ln/>
-        </p:spPr>
-        <p:txBody>
-          <a:bodyPr wrap="square" lIns="0" tIns="0" rIns="0" bIns="0" rtlCol="0" anchor="t"/>
-          <a:lstStyle/>
-          <a:p>
-            <a:pPr marL="0" marR="0" lvl="0" indent="0" algn="l" defTabSz="914400" rtl="0" eaLnBrk="1" fontAlgn="auto" latinLnBrk="0" hangingPunct="1">
-              <a:lnSpc>
-                <a:spcPct val="108000"/>
-              </a:lnSpc>
-              <a:spcBef>
-                <a:spcPts val="0"/>
-              </a:spcBef>
-              <a:spcAft>
-                <a:spcPts val="0"/>
-              </a:spcAft>
-              <a:buClrTx/>
-              <a:buSzTx/>
-              <a:buFontTx/>
-              <a:buNone/>
-              <a:tabLst/>
-              <a:defRPr/>
-            </a:pPr>
-            <a:r>
-              <a:rPr kumimoji="0" lang="en-US" sz="870" b="0" i="0" u="none" strike="noStrike" kern="1200" cap="none" spc="0" normalizeH="0" baseline="0" noProof="0" dirty="0">
-                <a:ln>
-                  <a:noFill/>
-                </a:ln>
-                <a:solidFill>
-                  <a:srgbClr val="AAB4C4"/>
-                </a:solidFill>
-                <a:effectLst/>
-                <a:uLnTx/>
-                <a:uFillTx/>
-                <a:latin typeface="Calibri" pitchFamily="34" charset="0"/>
-                <a:ea typeface="Calibri" pitchFamily="34" charset="-122"/>
-                <a:cs typeface="Calibri" pitchFamily="34" charset="-120"/>
-              </a:rPr>
-              <a:t>JWT + bcrypt authentication; 13 secure environment settings kept out of the Docker image, never baked into the build.</a:t>
-            </a:r>
-            <a:endParaRPr kumimoji="0" lang="en-US" sz="870" b="0" i="0" u="none" strike="noStrike" kern="1200" cap="none" spc="0" normalizeH="0" baseline="0" noProof="0" dirty="0">
-              <a:ln>
-                <a:noFill/>
-              </a:ln>
-              <a:solidFill>
-                <a:prstClr val="black"/>
-              </a:solidFill>
-              <a:effectLst/>
-              <a:uLnTx/>
-              <a:uFillTx/>
-              <a:latin typeface="Calibri" panose="020F0502020204030204"/>
-              <a:ea typeface="+mn-ea"/>
-              <a:cs typeface="+mn-cs"/>
-            </a:endParaRPr>
-          </a:p>
-        </p:txBody>
-      </p:sp>
-      <p:sp>
-        <p:nvSpPr>
-          <p:cNvPr id="26" name="Shape 24"/>
-          <p:cNvSpPr/>
-          <p:nvPr/>
-        </p:nvSpPr>
-        <p:spPr>
-          <a:xfrm>
-            <a:off x="457200" y="3246120"/>
-            <a:ext cx="3977640" cy="841248"/>
-          </a:xfrm>
-          <a:prstGeom prst="roundRect">
-            <a:avLst>
-              <a:gd name="adj" fmla="val 6522"/>
-            </a:avLst>
-          </a:prstGeom>
-          <a:solidFill>
-            <a:srgbClr val="162032"/>
-          </a:solidFill>
-          <a:ln w="9525">
-            <a:solidFill>
-              <a:srgbClr val="233047"/>
-            </a:solidFill>
-            <a:prstDash val="solid"/>
-          </a:ln>
-          <a:effectLst>
-            <a:outerShdw blurRad="76200" dist="25400" dir="5400000" algn="bl" rotWithShape="0">
-              <a:srgbClr val="000000">
-                <a:alpha val="16000"/>
-              </a:srgbClr>
-            </a:outerShdw>
-          </a:effectLst>
-        </p:spPr>
-      </p:sp>
-      <p:sp>
-        <p:nvSpPr>
-          <p:cNvPr id="27" name="Shape 25"/>
-          <p:cNvSpPr/>
-          <p:nvPr/>
-        </p:nvSpPr>
-        <p:spPr>
-          <a:xfrm>
-            <a:off x="603504" y="3374136"/>
-            <a:ext cx="402336" cy="402336"/>
-          </a:xfrm>
-          <a:prstGeom prst="ellipse">
-            <a:avLst/>
-          </a:prstGeom>
-          <a:solidFill>
-            <a:srgbClr val="E8544E">
-              <a:alpha val="20000"/>
-            </a:srgbClr>
-          </a:solidFill>
-          <a:ln/>
-        </p:spPr>
-      </p:sp>
-      <p:sp>
-        <p:nvSpPr>
-          <p:cNvPr id="28" name="Text 26"/>
-          <p:cNvSpPr/>
-          <p:nvPr/>
-        </p:nvSpPr>
-        <p:spPr>
-          <a:xfrm>
-            <a:off x="603504" y="3374136"/>
-            <a:ext cx="402336" cy="402336"/>
-          </a:xfrm>
-          <a:prstGeom prst="rect">
-            <a:avLst/>
-          </a:prstGeom>
-          <a:noFill/>
-          <a:ln/>
-        </p:spPr>
-        <p:txBody>
-          <a:bodyPr wrap="square" lIns="0" tIns="0" rIns="0" bIns="0" rtlCol="0" anchor="ctr"/>
-          <a:lstStyle/>
-          <a:p>
-            <a:pPr marL="0" marR="0" lvl="0" indent="0" algn="ctr" defTabSz="914400" rtl="0" eaLnBrk="1" fontAlgn="auto" latinLnBrk="0" hangingPunct="1">
-              <a:lnSpc>
-                <a:spcPct val="100000"/>
-              </a:lnSpc>
-              <a:spcBef>
-                <a:spcPts val="0"/>
-              </a:spcBef>
-              <a:spcAft>
-                <a:spcPts val="0"/>
-              </a:spcAft>
-              <a:buClrTx/>
-              <a:buSzTx/>
-              <a:buFontTx/>
-              <a:buNone/>
-              <a:tabLst/>
-              <a:defRPr/>
-            </a:pPr>
-            <a:r>
-              <a:rPr kumimoji="0" lang="en-US" sz="1400" b="0" i="0" u="none" strike="noStrike" kern="1200" cap="none" spc="0" normalizeH="0" baseline="0" noProof="0" dirty="0">
-                <a:ln>
-                  <a:noFill/>
-                </a:ln>
-                <a:solidFill>
-                  <a:srgbClr val="E8544E"/>
-                </a:solidFill>
-                <a:effectLst/>
-                <a:uLnTx/>
-                <a:uFillTx/>
-                <a:latin typeface="Calibri" panose="020F0502020204030204"/>
-                <a:ea typeface="+mn-ea"/>
-                <a:cs typeface="+mn-cs"/>
-              </a:rPr>
-              <a:t>✔</a:t>
-            </a:r>
-            <a:endParaRPr kumimoji="0" lang="en-US" sz="1400" b="0" i="0" u="none" strike="noStrike" kern="1200" cap="none" spc="0" normalizeH="0" baseline="0" noProof="0" dirty="0">
-              <a:ln>
-                <a:noFill/>
-              </a:ln>
-              <a:solidFill>
-                <a:prstClr val="black"/>
-              </a:solidFill>
-              <a:effectLst/>
-              <a:uLnTx/>
-              <a:uFillTx/>
-              <a:latin typeface="Calibri" panose="020F0502020204030204"/>
-              <a:ea typeface="+mn-ea"/>
-              <a:cs typeface="+mn-cs"/>
-            </a:endParaRPr>
-          </a:p>
-        </p:txBody>
-      </p:sp>
-      <p:sp>
-        <p:nvSpPr>
-          <p:cNvPr id="29" name="Text 27"/>
-          <p:cNvSpPr/>
-          <p:nvPr/>
-        </p:nvSpPr>
-        <p:spPr>
-          <a:xfrm>
-            <a:off x="1115568" y="3337560"/>
-            <a:ext cx="3172968" cy="219456"/>
-          </a:xfrm>
-          <a:prstGeom prst="rect">
-            <a:avLst/>
-          </a:prstGeom>
-          <a:noFill/>
-          <a:ln/>
-        </p:spPr>
-        <p:txBody>
-          <a:bodyPr wrap="square" lIns="0" tIns="0" rIns="0" bIns="0" rtlCol="0" anchor="ctr"/>
-          <a:lstStyle/>
-          <a:p>
-            <a:pPr marL="0" marR="0" lvl="0" indent="0" algn="l" defTabSz="914400" rtl="0" eaLnBrk="1" fontAlgn="auto" latinLnBrk="0" hangingPunct="1">
-              <a:lnSpc>
-                <a:spcPct val="100000"/>
-              </a:lnSpc>
-              <a:spcBef>
-                <a:spcPts val="0"/>
-              </a:spcBef>
-              <a:spcAft>
-                <a:spcPts val="0"/>
-              </a:spcAft>
-              <a:buClrTx/>
-              <a:buSzTx/>
-              <a:buFontTx/>
-              <a:buNone/>
-              <a:tabLst/>
-              <a:defRPr/>
-            </a:pPr>
-            <a:r>
-              <a:rPr kumimoji="0" lang="en-US" sz="1200" b="1" i="0" u="none" strike="noStrike" kern="1200" cap="none" spc="0" normalizeH="0" baseline="0" noProof="0" dirty="0">
-                <a:ln>
-                  <a:noFill/>
-                </a:ln>
-                <a:solidFill>
-                  <a:srgbClr val="FFFFFF"/>
-                </a:solidFill>
-                <a:effectLst/>
-                <a:uLnTx/>
-                <a:uFillTx/>
-                <a:latin typeface="Cambria" pitchFamily="34" charset="0"/>
-                <a:ea typeface="Cambria" pitchFamily="34" charset="-122"/>
-                <a:cs typeface="Cambria" pitchFamily="34" charset="-120"/>
-              </a:rPr>
-              <a:t>Testing Standards</a:t>
-            </a:r>
-            <a:endParaRPr kumimoji="0" lang="en-US" sz="1200" b="0" i="0" u="none" strike="noStrike" kern="1200" cap="none" spc="0" normalizeH="0" baseline="0" noProof="0" dirty="0">
-              <a:ln>
-                <a:noFill/>
-              </a:ln>
-              <a:solidFill>
-                <a:prstClr val="black"/>
-              </a:solidFill>
-              <a:effectLst/>
-              <a:uLnTx/>
-              <a:uFillTx/>
-              <a:latin typeface="Calibri" panose="020F0502020204030204"/>
-              <a:ea typeface="+mn-ea"/>
-              <a:cs typeface="+mn-cs"/>
-            </a:endParaRPr>
-          </a:p>
-        </p:txBody>
-      </p:sp>
-      <p:sp>
-        <p:nvSpPr>
-          <p:cNvPr id="30" name="Text 28"/>
-          <p:cNvSpPr/>
-          <p:nvPr/>
-        </p:nvSpPr>
-        <p:spPr>
-          <a:xfrm>
-            <a:off x="1115568" y="3557016"/>
-            <a:ext cx="3172968" cy="457200"/>
-          </a:xfrm>
-          <a:prstGeom prst="rect">
-            <a:avLst/>
-          </a:prstGeom>
-          <a:noFill/>
-          <a:ln/>
-        </p:spPr>
-        <p:txBody>
-          <a:bodyPr wrap="square" lIns="0" tIns="0" rIns="0" bIns="0" rtlCol="0" anchor="t"/>
-          <a:lstStyle/>
-          <a:p>
-            <a:pPr marL="0" marR="0" lvl="0" indent="0" algn="l" defTabSz="914400" rtl="0" eaLnBrk="1" fontAlgn="auto" latinLnBrk="0" hangingPunct="1">
-              <a:lnSpc>
-                <a:spcPct val="108000"/>
-              </a:lnSpc>
-              <a:spcBef>
-                <a:spcPts val="0"/>
-              </a:spcBef>
-              <a:spcAft>
-                <a:spcPts val="0"/>
-              </a:spcAft>
-              <a:buClrTx/>
-              <a:buSzTx/>
-              <a:buFontTx/>
-              <a:buNone/>
-              <a:tabLst/>
-              <a:defRPr/>
-            </a:pPr>
-            <a:r>
-              <a:rPr kumimoji="0" lang="en-US" sz="870" b="0" i="0" u="none" strike="noStrike" kern="1200" cap="none" spc="0" normalizeH="0" baseline="0" noProof="0" dirty="0">
-                <a:ln>
-                  <a:noFill/>
-                </a:ln>
-                <a:solidFill>
-                  <a:srgbClr val="AAB4C4"/>
-                </a:solidFill>
-                <a:effectLst/>
-                <a:uLnTx/>
-                <a:uFillTx/>
-                <a:latin typeface="Calibri" pitchFamily="34" charset="0"/>
-                <a:ea typeface="Calibri" pitchFamily="34" charset="-122"/>
-                <a:cs typeface="Calibri" pitchFamily="34" charset="-120"/>
-              </a:rPr>
-              <a:t>96 unit tests across every module, plus DeepEval (0.22 hallucination score) and RAGAS (0.88 faithfulness) — all run in CI in 6 seconds.</a:t>
-            </a:r>
-            <a:endParaRPr kumimoji="0" lang="en-US" sz="870" b="0" i="0" u="none" strike="noStrike" kern="1200" cap="none" spc="0" normalizeH="0" baseline="0" noProof="0" dirty="0">
-              <a:ln>
-                <a:noFill/>
-              </a:ln>
-              <a:solidFill>
-                <a:prstClr val="black"/>
-              </a:solidFill>
-              <a:effectLst/>
-              <a:uLnTx/>
-              <a:uFillTx/>
-              <a:latin typeface="Calibri" panose="020F0502020204030204"/>
-              <a:ea typeface="+mn-ea"/>
-              <a:cs typeface="+mn-cs"/>
-            </a:endParaRPr>
-          </a:p>
-        </p:txBody>
-      </p:sp>
-      <p:sp>
-        <p:nvSpPr>
-          <p:cNvPr id="31" name="Shape 29"/>
-          <p:cNvSpPr/>
-          <p:nvPr/>
-        </p:nvSpPr>
-        <p:spPr>
-          <a:xfrm>
-            <a:off x="4709160" y="3246120"/>
-            <a:ext cx="3977640" cy="841248"/>
-          </a:xfrm>
-          <a:prstGeom prst="roundRect">
-            <a:avLst>
-              <a:gd name="adj" fmla="val 6522"/>
-            </a:avLst>
-          </a:prstGeom>
-          <a:solidFill>
-            <a:srgbClr val="162032"/>
-          </a:solidFill>
-          <a:ln w="9525">
-            <a:solidFill>
-              <a:srgbClr val="233047"/>
-            </a:solidFill>
-            <a:prstDash val="solid"/>
-          </a:ln>
-          <a:effectLst>
-            <a:outerShdw blurRad="76200" dist="25400" dir="5400000" algn="bl" rotWithShape="0">
-              <a:srgbClr val="000000">
-                <a:alpha val="16000"/>
-              </a:srgbClr>
-            </a:outerShdw>
-          </a:effectLst>
-        </p:spPr>
-      </p:sp>
-      <p:sp>
-        <p:nvSpPr>
-          <p:cNvPr id="32" name="Shape 30"/>
-          <p:cNvSpPr/>
-          <p:nvPr/>
-        </p:nvSpPr>
-        <p:spPr>
-          <a:xfrm>
-            <a:off x="4855464" y="3374136"/>
-            <a:ext cx="402336" cy="402336"/>
-          </a:xfrm>
-          <a:prstGeom prst="ellipse">
-            <a:avLst/>
-          </a:prstGeom>
-          <a:solidFill>
-            <a:srgbClr val="3B82F6">
-              <a:alpha val="20000"/>
-            </a:srgbClr>
-          </a:solidFill>
-          <a:ln/>
-        </p:spPr>
-      </p:sp>
-      <p:sp>
-        <p:nvSpPr>
-          <p:cNvPr id="33" name="Text 31"/>
-          <p:cNvSpPr/>
-          <p:nvPr/>
-        </p:nvSpPr>
-        <p:spPr>
-          <a:xfrm>
-            <a:off x="4855464" y="3374136"/>
-            <a:ext cx="402336" cy="402336"/>
-          </a:xfrm>
-          <a:prstGeom prst="rect">
-            <a:avLst/>
-          </a:prstGeom>
-          <a:noFill/>
-          <a:ln/>
-        </p:spPr>
-        <p:txBody>
-          <a:bodyPr wrap="square" lIns="0" tIns="0" rIns="0" bIns="0" rtlCol="0" anchor="ctr"/>
-          <a:lstStyle/>
-          <a:p>
-            <a:pPr marL="0" marR="0" lvl="0" indent="0" algn="ctr" defTabSz="914400" rtl="0" eaLnBrk="1" fontAlgn="auto" latinLnBrk="0" hangingPunct="1">
-              <a:lnSpc>
-                <a:spcPct val="100000"/>
-              </a:lnSpc>
-              <a:spcBef>
-                <a:spcPts val="0"/>
-              </a:spcBef>
-              <a:spcAft>
-                <a:spcPts val="0"/>
-              </a:spcAft>
-              <a:buClrTx/>
-              <a:buSzTx/>
-              <a:buFontTx/>
-              <a:buNone/>
-              <a:tabLst/>
-              <a:defRPr/>
-            </a:pPr>
-            <a:r>
-              <a:rPr kumimoji="0" lang="en-US" sz="1400" b="0" i="0" u="none" strike="noStrike" kern="1200" cap="none" spc="0" normalizeH="0" baseline="0" noProof="0" dirty="0">
-                <a:ln>
-                  <a:noFill/>
-                </a:ln>
-                <a:solidFill>
-                  <a:srgbClr val="3B82F6"/>
-                </a:solidFill>
-                <a:effectLst/>
-                <a:uLnTx/>
-                <a:uFillTx/>
-                <a:latin typeface="Calibri" panose="020F0502020204030204"/>
-                <a:ea typeface="+mn-ea"/>
-                <a:cs typeface="+mn-cs"/>
-              </a:rPr>
-              <a:t>📦</a:t>
-            </a:r>
-            <a:endParaRPr kumimoji="0" lang="en-US" sz="1400" b="0" i="0" u="none" strike="noStrike" kern="1200" cap="none" spc="0" normalizeH="0" baseline="0" noProof="0" dirty="0">
-              <a:ln>
-                <a:noFill/>
-              </a:ln>
-              <a:solidFill>
-                <a:prstClr val="black"/>
-              </a:solidFill>
-              <a:effectLst/>
-              <a:uLnTx/>
-              <a:uFillTx/>
-              <a:latin typeface="Calibri" panose="020F0502020204030204"/>
-              <a:ea typeface="+mn-ea"/>
-              <a:cs typeface="+mn-cs"/>
-            </a:endParaRPr>
-          </a:p>
-        </p:txBody>
-      </p:sp>
-      <p:sp>
-        <p:nvSpPr>
-          <p:cNvPr id="34" name="Text 32"/>
-          <p:cNvSpPr/>
-          <p:nvPr/>
-        </p:nvSpPr>
-        <p:spPr>
-          <a:xfrm>
-            <a:off x="5367528" y="3337560"/>
-            <a:ext cx="3172968" cy="219456"/>
-          </a:xfrm>
-          <a:prstGeom prst="rect">
-            <a:avLst/>
-          </a:prstGeom>
-          <a:noFill/>
-          <a:ln/>
-        </p:spPr>
-        <p:txBody>
-          <a:bodyPr wrap="square" lIns="0" tIns="0" rIns="0" bIns="0" rtlCol="0" anchor="ctr"/>
-          <a:lstStyle/>
-          <a:p>
-            <a:pPr marL="0" marR="0" lvl="0" indent="0" algn="l" defTabSz="914400" rtl="0" eaLnBrk="1" fontAlgn="auto" latinLnBrk="0" hangingPunct="1">
-              <a:lnSpc>
-                <a:spcPct val="100000"/>
-              </a:lnSpc>
-              <a:spcBef>
-                <a:spcPts val="0"/>
-              </a:spcBef>
-              <a:spcAft>
-                <a:spcPts val="0"/>
-              </a:spcAft>
-              <a:buClrTx/>
-              <a:buSzTx/>
-              <a:buFontTx/>
-              <a:buNone/>
-              <a:tabLst/>
-              <a:defRPr/>
-            </a:pPr>
-            <a:r>
-              <a:rPr kumimoji="0" lang="en-US" sz="1200" b="1" i="0" u="none" strike="noStrike" kern="1200" cap="none" spc="0" normalizeH="0" baseline="0" noProof="0" dirty="0">
-                <a:ln>
-                  <a:noFill/>
-                </a:ln>
-                <a:solidFill>
-                  <a:srgbClr val="FFFFFF"/>
-                </a:solidFill>
-                <a:effectLst/>
-                <a:uLnTx/>
-                <a:uFillTx/>
-                <a:latin typeface="Cambria" pitchFamily="34" charset="0"/>
-                <a:ea typeface="Cambria" pitchFamily="34" charset="-122"/>
-                <a:cs typeface="Cambria" pitchFamily="34" charset="-120"/>
-              </a:rPr>
-              <a:t>Version Control</a:t>
-            </a:r>
-            <a:endParaRPr kumimoji="0" lang="en-US" sz="1200" b="0" i="0" u="none" strike="noStrike" kern="1200" cap="none" spc="0" normalizeH="0" baseline="0" noProof="0" dirty="0">
-              <a:ln>
-                <a:noFill/>
-              </a:ln>
-              <a:solidFill>
-                <a:prstClr val="black"/>
-              </a:solidFill>
-              <a:effectLst/>
-              <a:uLnTx/>
-              <a:uFillTx/>
-              <a:latin typeface="Calibri" panose="020F0502020204030204"/>
-              <a:ea typeface="+mn-ea"/>
-              <a:cs typeface="+mn-cs"/>
-            </a:endParaRPr>
-          </a:p>
-        </p:txBody>
-      </p:sp>
-      <p:sp>
-        <p:nvSpPr>
-          <p:cNvPr id="35" name="Text 33"/>
-          <p:cNvSpPr/>
-          <p:nvPr/>
-        </p:nvSpPr>
-        <p:spPr>
-          <a:xfrm>
-            <a:off x="5367528" y="3557016"/>
-            <a:ext cx="3172968" cy="457200"/>
-          </a:xfrm>
-          <a:prstGeom prst="rect">
-            <a:avLst/>
-          </a:prstGeom>
-          <a:noFill/>
-          <a:ln/>
-        </p:spPr>
-        <p:txBody>
-          <a:bodyPr wrap="square" lIns="0" tIns="0" rIns="0" bIns="0" rtlCol="0" anchor="t"/>
-          <a:lstStyle/>
-          <a:p>
-            <a:pPr marL="0" marR="0" lvl="0" indent="0" algn="l" defTabSz="914400" rtl="0" eaLnBrk="1" fontAlgn="auto" latinLnBrk="0" hangingPunct="1">
-              <a:lnSpc>
-                <a:spcPct val="108000"/>
-              </a:lnSpc>
-              <a:spcBef>
-                <a:spcPts val="0"/>
-              </a:spcBef>
-              <a:spcAft>
-                <a:spcPts val="0"/>
-              </a:spcAft>
-              <a:buClrTx/>
-              <a:buSzTx/>
-              <a:buFontTx/>
-              <a:buNone/>
-              <a:tabLst/>
-              <a:defRPr/>
-            </a:pPr>
-            <a:r>
-              <a:rPr kumimoji="0" lang="en-US" sz="870" b="0" i="0" u="none" strike="noStrike" kern="1200" cap="none" spc="0" normalizeH="0" baseline="0" noProof="0" dirty="0">
-                <a:ln>
-                  <a:noFill/>
-                </a:ln>
-                <a:solidFill>
-                  <a:srgbClr val="AAB4C4"/>
-                </a:solidFill>
-                <a:effectLst/>
-                <a:uLnTx/>
-                <a:uFillTx/>
-                <a:latin typeface="Calibri" pitchFamily="34" charset="0"/>
-                <a:ea typeface="Calibri" pitchFamily="34" charset="-122"/>
-                <a:cs typeface="Calibri" pitchFamily="34" charset="-120"/>
-              </a:rPr>
-              <a:t>Trunk-based flow: git push → tests → Docker build → push to ACR → deploy — a clean, atomic, automated pipeline to Azure.</a:t>
-            </a:r>
-            <a:endParaRPr kumimoji="0" lang="en-US" sz="870" b="0" i="0" u="none" strike="noStrike" kern="1200" cap="none" spc="0" normalizeH="0" baseline="0" noProof="0" dirty="0">
-              <a:ln>
-                <a:noFill/>
-              </a:ln>
-              <a:solidFill>
-                <a:prstClr val="black"/>
-              </a:solidFill>
-              <a:effectLst/>
-              <a:uLnTx/>
-              <a:uFillTx/>
-              <a:latin typeface="Calibri" panose="020F0502020204030204"/>
-              <a:ea typeface="+mn-ea"/>
-              <a:cs typeface="+mn-cs"/>
-            </a:endParaRPr>
-          </a:p>
-        </p:txBody>
-      </p:sp>
-    </p:spTree>
-    <p:extLst>
-      <p:ext uri="{BB962C8B-B14F-4D97-AF65-F5344CB8AC3E}">
-        <p14:creationId xmlns:p14="http://schemas.microsoft.com/office/powerpoint/2010/main" val="3343381645"/>
-      </p:ext>
-    </p:extLst>
-  </p:cSld>
-  <p:clrMapOvr>
-    <a:masterClrMapping/>
-  </p:clrMapOvr>
-</p:sld>
-</file>
-
-<file path=ppt/slides/slide18.xml><?xml version="1.0" encoding="utf-8"?>
-<p:sld xmlns:a="http://schemas.openxmlformats.org/drawingml/2006/main" xmlns:r="http://schemas.openxmlformats.org/officeDocument/2006/relationships" xmlns:p="http://schemas.openxmlformats.org/presentationml/2006/main">
-  <p:cSld>
-    <p:bg>
-      <p:bgPr>
-        <a:solidFill>
-          <a:srgbClr val="0F1B2D"/>
-        </a:solidFill>
-        <a:effectLst/>
-      </p:bgPr>
-    </p:bg>
-    <p:spTree>
-      <p:nvGrpSpPr>
-        <p:cNvPr id="1" name=""/>
-        <p:cNvGrpSpPr/>
-        <p:nvPr/>
-      </p:nvGrpSpPr>
-      <p:grpSpPr>
-        <a:xfrm>
-          <a:off x="0" y="0"/>
-          <a:ext cx="0" cy="0"/>
-          <a:chOff x="0" y="0"/>
-          <a:chExt cx="0" cy="0"/>
-        </a:xfrm>
-      </p:grpSpPr>
-      <p:sp>
-        <p:nvSpPr>
-          <p:cNvPr id="2" name="Shape 0"/>
-          <p:cNvSpPr/>
-          <p:nvPr/>
-        </p:nvSpPr>
-        <p:spPr>
-          <a:xfrm>
             <a:off x="6858000" y="-914400"/>
             <a:ext cx="3657600" cy="3657600"/>
           </a:xfrm>
@@ -13502,7 +11647,7 @@
 </p:sld>
 </file>
 
-<file path=ppt/slides/slide19.xml><?xml version="1.0" encoding="utf-8"?>
+<file path=ppt/slides/slide18.xml><?xml version="1.0" encoding="utf-8"?>
 <p:sld xmlns:a="http://schemas.openxmlformats.org/drawingml/2006/main" xmlns:r="http://schemas.openxmlformats.org/officeDocument/2006/relationships" xmlns:p="http://schemas.openxmlformats.org/presentationml/2006/main">
   <p:cSld name="Slide 16">
     <p:bg>
@@ -14149,34 +12294,14 @@
       </p:grpSpPr>
       <p:sp>
         <p:nvSpPr>
-          <p:cNvPr id="3" name="Shape 0"/>
-          <p:cNvSpPr/>
-          <p:nvPr/>
-        </p:nvSpPr>
-        <p:spPr>
-          <a:xfrm>
-            <a:off x="0" y="0"/>
-            <a:ext cx="5918454" cy="5143500"/>
-          </a:xfrm>
-          <a:prstGeom prst="rect">
-            <a:avLst/>
-          </a:prstGeom>
-          <a:solidFill>
-            <a:srgbClr val="12213A"/>
-          </a:solidFill>
-          <a:ln/>
-        </p:spPr>
-      </p:sp>
-      <p:sp>
-        <p:nvSpPr>
-          <p:cNvPr id="4" name="Shape 1"/>
-          <p:cNvSpPr/>
-          <p:nvPr/>
-        </p:nvSpPr>
-        <p:spPr>
-          <a:xfrm>
-            <a:off x="480060" y="685800"/>
-            <a:ext cx="2468880" cy="246888"/>
+          <p:cNvPr id="2" name="Shape 0"/>
+          <p:cNvSpPr/>
+          <p:nvPr/>
+        </p:nvSpPr>
+        <p:spPr>
+          <a:xfrm>
+            <a:off x="411480" y="342900"/>
+            <a:ext cx="1577340" cy="260604"/>
           </a:xfrm>
           <a:prstGeom prst="roundRect">
             <a:avLst>
@@ -14184,21 +12309,21 @@
             </a:avLst>
           </a:prstGeom>
           <a:solidFill>
-            <a:srgbClr val="1E2C4A"/>
+            <a:srgbClr val="D97757"/>
           </a:solidFill>
           <a:ln/>
         </p:spPr>
       </p:sp>
       <p:sp>
         <p:nvSpPr>
-          <p:cNvPr id="5" name="Text 2"/>
-          <p:cNvSpPr/>
-          <p:nvPr/>
-        </p:nvSpPr>
-        <p:spPr>
-          <a:xfrm>
-            <a:off x="480060" y="685800"/>
-            <a:ext cx="2468880" cy="246888"/>
+          <p:cNvPr id="3" name="Text 1"/>
+          <p:cNvSpPr/>
+          <p:nvPr/>
+        </p:nvSpPr>
+        <p:spPr>
+          <a:xfrm>
+            <a:off x="411480" y="342900"/>
+            <a:ext cx="1577340" cy="260604"/>
           </a:xfrm>
           <a:prstGeom prst="rect">
             <a:avLst/>
@@ -14214,30 +12339,139 @@
               <a:buNone/>
             </a:pPr>
             <a:r>
-              <a:rPr lang="en-US" sz="825" b="1" kern="0" spc="150" dirty="0">
-                <a:solidFill>
-                  <a:srgbClr val="9FB0E8"/>
+              <a:rPr lang="en-US" sz="862" b="1" kern="0" spc="120" dirty="0">
+                <a:solidFill>
+                  <a:srgbClr val="FFFFFF"/>
                 </a:solidFill>
                 <a:latin typeface="Calibri" pitchFamily="34" charset="0"/>
                 <a:ea typeface="Calibri" pitchFamily="34" charset="-122"/>
                 <a:cs typeface="Calibri" pitchFamily="34" charset="-120"/>
               </a:rPr>
-              <a:t>A CREDIT RISK STORY</a:t>
-            </a:r>
-            <a:endParaRPr lang="en-US" sz="825" dirty="0"/>
-          </a:p>
-        </p:txBody>
-      </p:sp>
-      <p:sp>
-        <p:nvSpPr>
-          <p:cNvPr id="6" name="Text 3"/>
-          <p:cNvSpPr/>
-          <p:nvPr/>
-        </p:nvSpPr>
-        <p:spPr>
-          <a:xfrm>
-            <a:off x="466344" y="1097280"/>
-            <a:ext cx="5143500" cy="617220"/>
+              <a:t>THE OLD WAY</a:t>
+            </a:r>
+            <a:endParaRPr lang="en-US" sz="862" dirty="0"/>
+          </a:p>
+        </p:txBody>
+      </p:sp>
+      <p:sp>
+        <p:nvSpPr>
+          <p:cNvPr id="4" name="Shape 2"/>
+          <p:cNvSpPr/>
+          <p:nvPr/>
+        </p:nvSpPr>
+        <p:spPr>
+          <a:xfrm>
+            <a:off x="7317486" y="411480"/>
+            <a:ext cx="109728" cy="109728"/>
+          </a:xfrm>
+          <a:prstGeom prst="ellipse">
+            <a:avLst/>
+          </a:prstGeom>
+          <a:solidFill>
+            <a:srgbClr val="D97757"/>
+          </a:solidFill>
+          <a:ln/>
+        </p:spPr>
+      </p:sp>
+      <p:sp>
+        <p:nvSpPr>
+          <p:cNvPr id="5" name="Shape 3"/>
+          <p:cNvSpPr/>
+          <p:nvPr/>
+        </p:nvSpPr>
+        <p:spPr>
+          <a:xfrm>
+            <a:off x="7523226" y="411480"/>
+            <a:ext cx="109728" cy="109728"/>
+          </a:xfrm>
+          <a:prstGeom prst="ellipse">
+            <a:avLst/>
+          </a:prstGeom>
+          <a:solidFill>
+            <a:srgbClr val="E4E0D6"/>
+          </a:solidFill>
+          <a:ln/>
+        </p:spPr>
+      </p:sp>
+      <p:sp>
+        <p:nvSpPr>
+          <p:cNvPr id="6" name="Shape 4"/>
+          <p:cNvSpPr/>
+          <p:nvPr/>
+        </p:nvSpPr>
+        <p:spPr>
+          <a:xfrm>
+            <a:off x="7728966" y="411480"/>
+            <a:ext cx="109728" cy="109728"/>
+          </a:xfrm>
+          <a:prstGeom prst="ellipse">
+            <a:avLst/>
+          </a:prstGeom>
+          <a:solidFill>
+            <a:srgbClr val="E4E0D6"/>
+          </a:solidFill>
+          <a:ln/>
+        </p:spPr>
+      </p:sp>
+      <p:sp>
+        <p:nvSpPr>
+          <p:cNvPr id="7" name="Shape 5"/>
+          <p:cNvSpPr/>
+          <p:nvPr/>
+        </p:nvSpPr>
+        <p:spPr>
+          <a:xfrm>
+            <a:off x="7934706" y="411480"/>
+            <a:ext cx="109728" cy="109728"/>
+          </a:xfrm>
+          <a:prstGeom prst="ellipse">
+            <a:avLst/>
+          </a:prstGeom>
+          <a:solidFill>
+            <a:srgbClr val="E4E0D6"/>
+          </a:solidFill>
+          <a:ln/>
+        </p:spPr>
+      </p:sp>
+      <p:sp>
+        <p:nvSpPr>
+          <p:cNvPr id="11" name="Shape 9"/>
+          <p:cNvSpPr/>
+          <p:nvPr/>
+        </p:nvSpPr>
+        <p:spPr>
+          <a:xfrm>
+            <a:off x="480060" y="788670"/>
+            <a:ext cx="3909060" cy="3977640"/>
+          </a:xfrm>
+          <a:prstGeom prst="roundRect">
+            <a:avLst>
+              <a:gd name="adj" fmla="val 6140"/>
+            </a:avLst>
+          </a:prstGeom>
+          <a:solidFill>
+            <a:srgbClr val="FFFFFF"/>
+          </a:solidFill>
+          <a:ln/>
+          <a:effectLst>
+            <a:outerShdw blurRad="190500" dist="76200" dir="5400000" algn="bl" rotWithShape="0">
+              <a:srgbClr val="12213A">
+                <a:alpha val="16000"/>
+              </a:srgbClr>
+            </a:outerShdw>
+          </a:effectLst>
+        </p:spPr>
+      </p:sp>
+      <p:sp>
+        <p:nvSpPr>
+          <p:cNvPr id="13" name="Text 10"/>
+          <p:cNvSpPr/>
+          <p:nvPr/>
+        </p:nvSpPr>
+        <p:spPr>
+          <a:xfrm>
+            <a:off x="4629150" y="822960"/>
+            <a:ext cx="4046220" cy="240030"/>
           </a:xfrm>
           <a:prstGeom prst="rect">
             <a:avLst/>
@@ -14253,115 +12487,79 @@
               <a:buNone/>
             </a:pPr>
             <a:r>
-              <a:rPr lang="en-US" sz="3150" b="1" dirty="0">
-                <a:solidFill>
-                  <a:srgbClr val="FFFFFF"/>
+              <a:rPr lang="en-US" sz="900" b="1" kern="0" spc="150" dirty="0">
+                <a:solidFill>
+                  <a:srgbClr val="D97757"/>
+                </a:solidFill>
+                <a:latin typeface="Calibri" pitchFamily="34" charset="0"/>
+                <a:ea typeface="Calibri" pitchFamily="34" charset="-122"/>
+                <a:cs typeface="Calibri" pitchFamily="34" charset="-120"/>
+              </a:rPr>
+              <a:t>THE APPLICATION</a:t>
+            </a:r>
+            <a:endParaRPr lang="en-US" sz="900" dirty="0"/>
+          </a:p>
+        </p:txBody>
+      </p:sp>
+      <p:sp>
+        <p:nvSpPr>
+          <p:cNvPr id="14" name="Text 11"/>
+          <p:cNvSpPr/>
+          <p:nvPr/>
+        </p:nvSpPr>
+        <p:spPr>
+          <a:xfrm>
+            <a:off x="4629150" y="1062990"/>
+            <a:ext cx="4046220" cy="891540"/>
+          </a:xfrm>
+          <a:prstGeom prst="rect">
+            <a:avLst/>
+          </a:prstGeom>
+          <a:noFill/>
+          <a:ln/>
+        </p:spPr>
+        <p:txBody>
+          <a:bodyPr wrap="square" lIns="0" tIns="0" rIns="0" bIns="0" rtlCol="0" anchor="ctr"/>
+          <a:lstStyle/>
+          <a:p>
+            <a:pPr>
+              <a:lnSpc>
+                <a:spcPct val="112000"/>
+              </a:lnSpc>
+            </a:pPr>
+            <a:r>
+              <a:rPr lang="en-US" sz="2025" b="1" dirty="0">
+                <a:solidFill>
+                  <a:srgbClr val="241F1A"/>
                 </a:solidFill>
                 <a:latin typeface="Cambria" pitchFamily="34" charset="0"/>
                 <a:ea typeface="Cambria" pitchFamily="34" charset="-122"/>
                 <a:cs typeface="Cambria" pitchFamily="34" charset="-120"/>
               </a:rPr>
-              <a:t>What Rohan Needed</a:t>
-            </a:r>
-            <a:endParaRPr lang="en-US" sz="3150" dirty="0"/>
-          </a:p>
-        </p:txBody>
-      </p:sp>
-      <p:sp>
-        <p:nvSpPr>
-          <p:cNvPr id="7" name="Text 4"/>
-          <p:cNvSpPr/>
-          <p:nvPr/>
-        </p:nvSpPr>
-        <p:spPr>
-          <a:xfrm>
-            <a:off x="466344" y="1611630"/>
-            <a:ext cx="5143500" cy="617220"/>
-          </a:xfrm>
-          <a:prstGeom prst="rect">
-            <a:avLst/>
-          </a:prstGeom>
-          <a:noFill/>
-          <a:ln/>
-        </p:spPr>
-        <p:txBody>
-          <a:bodyPr wrap="square" lIns="0" tIns="0" rIns="0" bIns="0" rtlCol="0" anchor="ctr"/>
-          <a:lstStyle/>
-          <a:p>
-            <a:pPr marL="0" indent="0">
-              <a:buNone/>
-            </a:pPr>
-            <a:r>
-              <a:rPr lang="en-US" sz="3150" b="1" dirty="0">
-                <a:solidFill>
-                  <a:srgbClr val="FFFFFF"/>
-                </a:solidFill>
-                <a:latin typeface="Cambria" pitchFamily="34" charset="0"/>
-                <a:ea typeface="Cambria" pitchFamily="34" charset="-122"/>
-                <a:cs typeface="Cambria" pitchFamily="34" charset="-120"/>
-              </a:rPr>
-              <a:t>Was an Answer.</a:t>
-            </a:r>
-            <a:endParaRPr lang="en-US" sz="3150" dirty="0"/>
-          </a:p>
-        </p:txBody>
-      </p:sp>
-      <p:sp>
-        <p:nvSpPr>
-          <p:cNvPr id="8" name="Text 5"/>
-          <p:cNvSpPr/>
-          <p:nvPr/>
-        </p:nvSpPr>
-        <p:spPr>
-          <a:xfrm>
-            <a:off x="466344" y="2297430"/>
-            <a:ext cx="4526280" cy="480060"/>
-          </a:xfrm>
-          <a:prstGeom prst="rect">
-            <a:avLst/>
-          </a:prstGeom>
-          <a:noFill/>
-          <a:ln/>
-        </p:spPr>
-        <p:txBody>
-          <a:bodyPr wrap="square" lIns="0" tIns="0" rIns="0" bIns="0" rtlCol="0" anchor="ctr"/>
-          <a:lstStyle/>
-          <a:p>
-            <a:pPr>
-              <a:lnSpc>
-                <a:spcPct val="130000"/>
-              </a:lnSpc>
-            </a:pPr>
-            <a:r>
-              <a:rPr lang="en-IN" sz="1200" dirty="0">
-                <a:solidFill>
-                  <a:schemeClr val="bg2"/>
-                </a:solidFill>
-              </a:rPr>
-              <a:t>Rohan applied for a business loan and heard nothing for four days. Here's what happened next.</a:t>
-            </a:r>
-            <a:endParaRPr lang="en-US" sz="1125" dirty="0"/>
-          </a:p>
-        </p:txBody>
-      </p:sp>
-      <p:sp>
-        <p:nvSpPr>
-          <p:cNvPr id="9" name="Shape 6"/>
-          <p:cNvSpPr/>
-          <p:nvPr/>
-        </p:nvSpPr>
-        <p:spPr>
-          <a:xfrm>
-            <a:off x="480060" y="2983230"/>
-            <a:ext cx="1783080" cy="0"/>
+              <a:t>Rohan asked for a loan. Then he waited four days.</a:t>
+            </a:r>
+            <a:endParaRPr lang="en-US" sz="2025" dirty="0"/>
+          </a:p>
+        </p:txBody>
+      </p:sp>
+      <p:sp>
+        <p:nvSpPr>
+          <p:cNvPr id="15" name="Shape 12"/>
+          <p:cNvSpPr/>
+          <p:nvPr/>
+        </p:nvSpPr>
+        <p:spPr>
+          <a:xfrm>
+            <a:off x="4629150" y="2023110"/>
+            <a:ext cx="822960" cy="0"/>
           </a:xfrm>
           <a:prstGeom prst="line">
             <a:avLst/>
           </a:prstGeom>
           <a:noFill/>
-          <a:ln w="9525">
+          <a:ln w="28575">
             <a:solidFill>
-              <a:srgbClr val="2E3D5E"/>
+              <a:srgbClr val="D97757"/>
             </a:solidFill>
             <a:prstDash val="solid"/>
           </a:ln>
@@ -14369,53 +12567,55 @@
       </p:sp>
       <p:sp>
         <p:nvSpPr>
-          <p:cNvPr id="11" name="Text 8"/>
-          <p:cNvSpPr/>
-          <p:nvPr/>
-        </p:nvSpPr>
-        <p:spPr>
-          <a:xfrm>
-            <a:off x="411480" y="4896612"/>
-            <a:ext cx="5486400" cy="192024"/>
-          </a:xfrm>
-          <a:prstGeom prst="rect">
-            <a:avLst/>
-          </a:prstGeom>
-          <a:noFill/>
-          <a:ln/>
-        </p:spPr>
-        <p:txBody>
-          <a:bodyPr wrap="square" rtlCol="0" anchor="ctr"/>
-          <a:lstStyle/>
-          <a:p>
-            <a:pPr marL="0" indent="0" algn="l">
-              <a:buNone/>
-            </a:pPr>
-            <a:r>
-              <a:rPr lang="en-US" sz="712" dirty="0">
-                <a:solidFill>
-                  <a:srgbClr val="AEB0C4"/>
+          <p:cNvPr id="16" name="Text 13"/>
+          <p:cNvSpPr/>
+          <p:nvPr/>
+        </p:nvSpPr>
+        <p:spPr>
+          <a:xfrm>
+            <a:off x="4615434" y="2023110"/>
+            <a:ext cx="4046220" cy="1508760"/>
+          </a:xfrm>
+          <a:prstGeom prst="rect">
+            <a:avLst/>
+          </a:prstGeom>
+          <a:noFill/>
+          <a:ln/>
+        </p:spPr>
+        <p:txBody>
+          <a:bodyPr wrap="square" lIns="0" tIns="0" rIns="0" bIns="0" rtlCol="0" anchor="ctr"/>
+          <a:lstStyle/>
+          <a:p>
+            <a:pPr>
+              <a:lnSpc>
+                <a:spcPct val="145000"/>
+              </a:lnSpc>
+            </a:pPr>
+            <a:r>
+              <a:rPr lang="en-US" sz="1162" i="1" dirty="0">
+                <a:solidFill>
+                  <a:srgbClr val="3B362F"/>
                 </a:solidFill>
                 <a:latin typeface="Calibri" pitchFamily="34" charset="0"/>
                 <a:ea typeface="Calibri" pitchFamily="34" charset="-122"/>
                 <a:cs typeface="Calibri" pitchFamily="34" charset="-120"/>
               </a:rPr>
-              <a:t>Cover</a:t>
-            </a:r>
-            <a:endParaRPr lang="en-US" sz="712" dirty="0"/>
-          </a:p>
-        </p:txBody>
-      </p:sp>
-      <p:sp>
-        <p:nvSpPr>
-          <p:cNvPr id="12" name="Text 9"/>
-          <p:cNvSpPr/>
-          <p:nvPr/>
-        </p:nvSpPr>
-        <p:spPr>
-          <a:xfrm>
-            <a:off x="6947154" y="4896612"/>
-            <a:ext cx="1783080" cy="192024"/>
+              <a:t>Rohan owns a small electronics shop. A big festival is coming, and he needs a loan to buy new products to sell before demand goes up. He applies for the loan, feeling hopeful. But one day turns into four. No one tells him what is happening. He has no idea if he will get the loan or not.</a:t>
+            </a:r>
+            <a:endParaRPr lang="en-US" sz="1162" dirty="0"/>
+          </a:p>
+        </p:txBody>
+      </p:sp>
+      <p:sp>
+        <p:nvSpPr>
+          <p:cNvPr id="17" name="Text 14"/>
+          <p:cNvSpPr/>
+          <p:nvPr/>
+        </p:nvSpPr>
+        <p:spPr>
+          <a:xfrm>
+            <a:off x="411480" y="4896612"/>
+            <a:ext cx="5486400" cy="192024"/>
           </a:xfrm>
           <a:prstGeom prst="rect">
             <a:avLst/>
@@ -14427,18 +12627,57 @@
           <a:bodyPr wrap="square" rtlCol="0" anchor="ctr"/>
           <a:lstStyle/>
           <a:p>
-            <a:pPr marL="0" indent="0" algn="r">
+            <a:pPr marL="0" indent="0" algn="l">
               <a:buNone/>
             </a:pPr>
             <a:r>
               <a:rPr lang="en-US" sz="712" dirty="0">
                 <a:solidFill>
-                  <a:srgbClr val="AEB0C4"/>
+                  <a:srgbClr val="8A8378"/>
                 </a:solidFill>
                 <a:latin typeface="Calibri" pitchFamily="34" charset="0"/>
                 <a:ea typeface="Calibri" pitchFamily="34" charset="-122"/>
                 <a:cs typeface="Calibri" pitchFamily="34" charset="-120"/>
               </a:rPr>
+              <a:t>THE OLD WAY</a:t>
+            </a:r>
+            <a:endParaRPr lang="en-US" sz="712" dirty="0"/>
+          </a:p>
+        </p:txBody>
+      </p:sp>
+      <p:sp>
+        <p:nvSpPr>
+          <p:cNvPr id="18" name="Text 15"/>
+          <p:cNvSpPr/>
+          <p:nvPr/>
+        </p:nvSpPr>
+        <p:spPr>
+          <a:xfrm>
+            <a:off x="6947154" y="4896612"/>
+            <a:ext cx="1783080" cy="192024"/>
+          </a:xfrm>
+          <a:prstGeom prst="rect">
+            <a:avLst/>
+          </a:prstGeom>
+          <a:noFill/>
+          <a:ln/>
+        </p:spPr>
+        <p:txBody>
+          <a:bodyPr wrap="square" rtlCol="0" anchor="ctr"/>
+          <a:lstStyle/>
+          <a:p>
+            <a:pPr marL="0" indent="0" algn="r">
+              <a:buNone/>
+            </a:pPr>
+            <a:r>
+              <a:rPr lang="en-US" sz="712" dirty="0">
+                <a:solidFill>
+                  <a:srgbClr val="8A8378"/>
+                </a:solidFill>
+                <a:latin typeface="Calibri" pitchFamily="34" charset="0"/>
+                <a:ea typeface="Calibri" pitchFamily="34" charset="-122"/>
+                <a:cs typeface="Calibri" pitchFamily="34" charset="-120"/>
+              </a:rPr>
               <a:t>Rohan's Story</a:t>
             </a:r>
             <a:endParaRPr lang="en-US" sz="712" dirty="0"/>
@@ -14447,7 +12686,7 @@
       </p:sp>
       <p:pic>
         <p:nvPicPr>
-          <p:cNvPr id="13" name="Picture 12" descr="s2.png"/>
+          <p:cNvPr id="19" name="Picture 18" descr="s4.png"/>
           <p:cNvPicPr>
             <a:picLocks noChangeAspect="1"/>
           </p:cNvPicPr>
@@ -14461,8 +12700,8 @@
         </p:blipFill>
         <p:spPr>
           <a:xfrm>
-            <a:off x="5438394" y="0"/>
-            <a:ext cx="3703320" cy="5143500"/>
+            <a:off x="480060" y="788670"/>
+            <a:ext cx="3909060" cy="3977640"/>
           </a:xfrm>
           <a:prstGeom prst="rect">
             <a:avLst/>
@@ -14514,7 +12753,7 @@
             </a:avLst>
           </a:prstGeom>
           <a:solidFill>
-            <a:srgbClr val="D97757"/>
+            <a:srgbClr val="C1583B"/>
           </a:solidFill>
           <a:ln/>
         </p:spPr>
@@ -14552,7 +12791,7 @@
                 <a:ea typeface="Calibri" pitchFamily="34" charset="-122"/>
                 <a:cs typeface="Calibri" pitchFamily="34" charset="-120"/>
               </a:rPr>
-              <a:t>THE OLD WAY</a:t>
+              <a:t>WHERE IT BROKE</a:t>
             </a:r>
             <a:endParaRPr lang="en-US" sz="862" dirty="0"/>
           </a:p>
@@ -14573,7 +12812,7 @@
             <a:avLst/>
           </a:prstGeom>
           <a:solidFill>
-            <a:srgbClr val="D97757"/>
+            <a:srgbClr val="E4E0D6"/>
           </a:solidFill>
           <a:ln/>
         </p:spPr>
@@ -14593,7 +12832,7 @@
             <a:avLst/>
           </a:prstGeom>
           <a:solidFill>
-            <a:srgbClr val="E4E0D6"/>
+            <a:srgbClr val="C1583B"/>
           </a:solidFill>
           <a:ln/>
         </p:spPr>
@@ -14694,13 +12933,13 @@
             <a:r>
               <a:rPr lang="en-US" sz="900" b="1" kern="0" spc="150" dirty="0">
                 <a:solidFill>
-                  <a:srgbClr val="D97757"/>
+                  <a:srgbClr val="C1583B"/>
                 </a:solidFill>
                 <a:latin typeface="Calibri" pitchFamily="34" charset="0"/>
                 <a:ea typeface="Calibri" pitchFamily="34" charset="-122"/>
                 <a:cs typeface="Calibri" pitchFamily="34" charset="-120"/>
               </a:rPr>
-              <a:t>THE APPLICATION</a:t>
+              <a:t>THE ANSWER HE GOT</a:t>
             </a:r>
             <a:endParaRPr lang="en-US" sz="900" dirty="0"/>
           </a:p>
@@ -14741,7 +12980,7 @@
                 <a:ea typeface="Cambria" pitchFamily="34" charset="-122"/>
                 <a:cs typeface="Cambria" pitchFamily="34" charset="-120"/>
               </a:rPr>
-              <a:t>He asked for a loan. Then he waited four days.</a:t>
+              <a:t>Loan Application Rejected — No Reason Given by the Bank</a:t>
             </a:r>
             <a:endParaRPr lang="en-US" sz="2025" dirty="0"/>
           </a:p>
@@ -14764,7 +13003,7 @@
           <a:noFill/>
           <a:ln w="28575">
             <a:solidFill>
-              <a:srgbClr val="D97757"/>
+              <a:srgbClr val="C1583B"/>
             </a:solidFill>
             <a:prstDash val="solid"/>
           </a:ln>
@@ -14778,7 +13017,7 @@
         </p:nvSpPr>
         <p:spPr>
           <a:xfrm>
-            <a:off x="4615434" y="2023110"/>
+            <a:off x="4629150" y="2194560"/>
             <a:ext cx="4046220" cy="1508760"/>
           </a:xfrm>
           <a:prstGeom prst="rect">
@@ -14805,7 +13044,7 @@
                 <a:ea typeface="Calibri" pitchFamily="34" charset="-122"/>
                 <a:cs typeface="Calibri" pitchFamily="34" charset="-120"/>
               </a:rPr>
-              <a:t>Rohan owns a small electronics shop. A big festival is coming, and he needs a loan to buy new products to sell before demand goes up. He applies for the loan, feeling hopeful. But one day turns into four. No one tells him what is happening. He has no idea if he will get the loan or not.</a:t>
+              <a:t>After four days of waiting, the answer is just one word: rejected. No one tells him why, and no one tells him what to fix. The festival does not wait for anyone. Rohan cannot buy new stock in time, and he loses more than a loan — he loses his best sales season of the year.</a:t>
             </a:r>
             <a:endParaRPr lang="en-US" sz="1162" dirty="0"/>
           </a:p>
@@ -14844,7 +13083,7 @@
                 <a:ea typeface="Calibri" pitchFamily="34" charset="-122"/>
                 <a:cs typeface="Calibri" pitchFamily="34" charset="-120"/>
               </a:rPr>
-              <a:t>THE OLD WAY</a:t>
+              <a:t>WHERE IT BROKE</a:t>
             </a:r>
             <a:endParaRPr lang="en-US" sz="712" dirty="0"/>
           </a:p>
@@ -14958,7 +13197,7 @@
             </a:avLst>
           </a:prstGeom>
           <a:solidFill>
-            <a:srgbClr val="C1583B"/>
+            <a:srgbClr val="5C7A54"/>
           </a:solidFill>
           <a:ln/>
         </p:spPr>
@@ -14996,7 +13235,7 @@
                 <a:ea typeface="Calibri" pitchFamily="34" charset="-122"/>
                 <a:cs typeface="Calibri" pitchFamily="34" charset="-120"/>
               </a:rPr>
-              <a:t>WHERE IT BROKE</a:t>
+              <a:t>THE NEW WAY</a:t>
             </a:r>
             <a:endParaRPr lang="en-US" sz="862" dirty="0"/>
           </a:p>
@@ -15037,7 +13276,7 @@
             <a:avLst/>
           </a:prstGeom>
           <a:solidFill>
-            <a:srgbClr val="C1583B"/>
+            <a:srgbClr val="E4E0D6"/>
           </a:solidFill>
           <a:ln/>
         </p:spPr>
@@ -15057,7 +13296,7 @@
             <a:avLst/>
           </a:prstGeom>
           <a:solidFill>
-            <a:srgbClr val="E4E0D6"/>
+            <a:srgbClr val="5C7A54"/>
           </a:solidFill>
           <a:ln/>
         </p:spPr>
@@ -15138,13 +13377,13 @@
             <a:r>
               <a:rPr lang="en-US" sz="900" b="1" kern="0" spc="150" dirty="0">
                 <a:solidFill>
-                  <a:srgbClr val="C1583B"/>
+                  <a:srgbClr val="5C7A54"/>
                 </a:solidFill>
                 <a:latin typeface="Calibri" pitchFamily="34" charset="0"/>
                 <a:ea typeface="Calibri" pitchFamily="34" charset="-122"/>
                 <a:cs typeface="Calibri" pitchFamily="34" charset="-120"/>
               </a:rPr>
-              <a:t>THE ANSWER HE GOT</a:t>
+              <a:t>THE TURNING POINT</a:t>
             </a:r>
             <a:endParaRPr lang="en-US" sz="900" dirty="0"/>
           </a:p>
@@ -15171,10 +13410,11 @@
           <a:bodyPr wrap="square" lIns="0" tIns="0" rIns="0" bIns="0" rtlCol="0" anchor="ctr"/>
           <a:lstStyle/>
           <a:p>
-            <a:pPr>
+            <a:pPr marL="0" indent="0">
               <a:lnSpc>
                 <a:spcPct val="112000"/>
               </a:lnSpc>
+              <a:buNone/>
             </a:pPr>
             <a:r>
               <a:rPr lang="en-US" sz="2025" b="1" dirty="0">
@@ -15185,7 +13425,7 @@
                 <a:ea typeface="Cambria" pitchFamily="34" charset="-122"/>
                 <a:cs typeface="Cambria" pitchFamily="34" charset="-120"/>
               </a:rPr>
-              <a:t>Loan Application Rejected — No Reason Given by the Bank</a:t>
+              <a:t>The same documents. This time, read in minutes.</a:t>
             </a:r>
             <a:endParaRPr lang="en-US" sz="2025" dirty="0"/>
           </a:p>
@@ -15208,7 +13448,7 @@
           <a:noFill/>
           <a:ln w="28575">
             <a:solidFill>
-              <a:srgbClr val="C1583B"/>
+              <a:srgbClr val="5C7A54"/>
             </a:solidFill>
             <a:prstDash val="solid"/>
           </a:ln>
@@ -15249,7 +13489,7 @@
                 <a:ea typeface="Calibri" pitchFamily="34" charset="-122"/>
                 <a:cs typeface="Calibri" pitchFamily="34" charset="-120"/>
               </a:rPr>
-              <a:t>After four days of waiting, the answer is just one word: rejected. No one tells him why, and no one tells him what to fix. The festival does not wait for anyone. Rohan cannot buy new stock in time, and he loses more than a loan — he loses his best sales season of the year.</a:t>
+              <a:t>This time, before he applies again, Rohan uploads his documents to the Credit Risk Intelligence Platform recommended by his friend. In minutes, it shows him exactly why he was rejected — and what he needs to fix. He fixes it, then applies again, feeling sure this time.</a:t>
             </a:r>
             <a:endParaRPr lang="en-US" sz="1162" dirty="0"/>
           </a:p>
@@ -15288,7 +13528,7 @@
                 <a:ea typeface="Calibri" pitchFamily="34" charset="-122"/>
                 <a:cs typeface="Calibri" pitchFamily="34" charset="-120"/>
               </a:rPr>
-              <a:t>WHERE IT BROKE</a:t>
+              <a:t>THE NEW WAY</a:t>
             </a:r>
             <a:endParaRPr lang="en-US" sz="712" dirty="0"/>
           </a:p>
@@ -15335,7 +13575,7 @@
       </p:sp>
       <p:pic>
         <p:nvPicPr>
-          <p:cNvPr id="19" name="Picture 18" descr="s4.png"/>
+          <p:cNvPr id="19" name="Picture 18" descr="s7.png"/>
           <p:cNvPicPr>
             <a:picLocks noChangeAspect="1"/>
           </p:cNvPicPr>
@@ -15501,7 +13741,7 @@
             <a:avLst/>
           </a:prstGeom>
           <a:solidFill>
-            <a:srgbClr val="5C7A54"/>
+            <a:srgbClr val="E4E0D6"/>
           </a:solidFill>
           <a:ln/>
         </p:spPr>
@@ -15521,7 +13761,7 @@
             <a:avLst/>
           </a:prstGeom>
           <a:solidFill>
-            <a:srgbClr val="E4E0D6"/>
+            <a:srgbClr val="5C7A54"/>
           </a:solidFill>
           <a:ln/>
         </p:spPr>
@@ -15588,7 +13828,7 @@
                 <a:ea typeface="Calibri" pitchFamily="34" charset="-122"/>
                 <a:cs typeface="Calibri" pitchFamily="34" charset="-120"/>
               </a:rPr>
-              <a:t>THE TURNING POINT</a:t>
+              <a:t>THE NEW NORMAL</a:t>
             </a:r>
             <a:endParaRPr lang="en-US" sz="900" dirty="0"/>
           </a:p>
@@ -15630,7 +13870,7 @@
                 <a:ea typeface="Cambria" pitchFamily="34" charset="-122"/>
                 <a:cs typeface="Cambria" pitchFamily="34" charset="-120"/>
               </a:rPr>
-              <a:t>The same documents. This time, read in minutes.</a:t>
+              <a:t>Approved. And this time, he knows why.</a:t>
             </a:r>
             <a:endParaRPr lang="en-US" sz="2025" dirty="0"/>
           </a:p>
@@ -15694,7 +13934,7 @@
                 <a:ea typeface="Calibri" pitchFamily="34" charset="-122"/>
                 <a:cs typeface="Calibri" pitchFamily="34" charset="-120"/>
               </a:rPr>
-              <a:t>This time, before he applies again, Rohan uploads his documents to the Credit Risk Intelligence Platform recommended by his friend. In minutes, it shows him exactly why he was rejected — and what he needs to fix. He fixes it, then applies again, feeling sure this time.</a:t>
+              <a:t>Rohan gets his inventory in time for the festival. The bank keeps a happy customer instead of losing one. Same papers, read the right way this time — by the bank and by Rohan. Rohan is just one person. But this platform is built to give every person a clear answer, not just a yes or no.</a:t>
             </a:r>
             <a:endParaRPr lang="en-US" sz="1162" dirty="0"/>
           </a:p>
@@ -15780,7 +14020,7 @@
       </p:sp>
       <p:pic>
         <p:nvPicPr>
-          <p:cNvPr id="19" name="Picture 18" descr="s7.png"/>
+          <p:cNvPr id="19" name="Picture 18" descr="s9.png"/>
           <p:cNvPicPr>
             <a:picLocks noChangeAspect="1"/>
           </p:cNvPicPr>
@@ -15814,451 +14054,6 @@
 </file>
 
 <file path=ppt/slides/slide6.xml><?xml version="1.0" encoding="utf-8"?>
-<p:sld xmlns:a="http://schemas.openxmlformats.org/drawingml/2006/main" xmlns:r="http://schemas.openxmlformats.org/officeDocument/2006/relationships" xmlns:p="http://schemas.openxmlformats.org/presentationml/2006/main">
-  <p:cSld>
-    <p:spTree>
-      <p:nvGrpSpPr>
-        <p:cNvPr id="1" name=""/>
-        <p:cNvGrpSpPr/>
-        <p:nvPr/>
-      </p:nvGrpSpPr>
-      <p:grpSpPr>
-        <a:xfrm>
-          <a:off x="0" y="0"/>
-          <a:ext cx="0" cy="0"/>
-          <a:chOff x="0" y="0"/>
-          <a:chExt cx="0" cy="0"/>
-        </a:xfrm>
-      </p:grpSpPr>
-      <p:sp>
-        <p:nvSpPr>
-          <p:cNvPr id="2" name="Shape 0"/>
-          <p:cNvSpPr/>
-          <p:nvPr/>
-        </p:nvSpPr>
-        <p:spPr>
-          <a:xfrm>
-            <a:off x="411480" y="342900"/>
-            <a:ext cx="1577340" cy="260604"/>
-          </a:xfrm>
-          <a:prstGeom prst="roundRect">
-            <a:avLst>
-              <a:gd name="adj" fmla="val 50000"/>
-            </a:avLst>
-          </a:prstGeom>
-          <a:solidFill>
-            <a:srgbClr val="5C7A54"/>
-          </a:solidFill>
-          <a:ln/>
-        </p:spPr>
-      </p:sp>
-      <p:sp>
-        <p:nvSpPr>
-          <p:cNvPr id="3" name="Text 1"/>
-          <p:cNvSpPr/>
-          <p:nvPr/>
-        </p:nvSpPr>
-        <p:spPr>
-          <a:xfrm>
-            <a:off x="411480" y="342900"/>
-            <a:ext cx="1577340" cy="260604"/>
-          </a:xfrm>
-          <a:prstGeom prst="rect">
-            <a:avLst/>
-          </a:prstGeom>
-          <a:noFill/>
-          <a:ln/>
-        </p:spPr>
-        <p:txBody>
-          <a:bodyPr wrap="square" lIns="0" tIns="0" rIns="0" bIns="0" rtlCol="0" anchor="ctr"/>
-          <a:lstStyle/>
-          <a:p>
-            <a:pPr marL="0" indent="0" algn="ctr">
-              <a:buNone/>
-            </a:pPr>
-            <a:r>
-              <a:rPr lang="en-US" sz="862" b="1" kern="0" spc="120" dirty="0">
-                <a:solidFill>
-                  <a:srgbClr val="FFFFFF"/>
-                </a:solidFill>
-                <a:latin typeface="Calibri" pitchFamily="34" charset="0"/>
-                <a:ea typeface="Calibri" pitchFamily="34" charset="-122"/>
-                <a:cs typeface="Calibri" pitchFamily="34" charset="-120"/>
-              </a:rPr>
-              <a:t>THE NEW WAY</a:t>
-            </a:r>
-            <a:endParaRPr lang="en-US" sz="862" dirty="0"/>
-          </a:p>
-        </p:txBody>
-      </p:sp>
-      <p:sp>
-        <p:nvSpPr>
-          <p:cNvPr id="4" name="Shape 2"/>
-          <p:cNvSpPr/>
-          <p:nvPr/>
-        </p:nvSpPr>
-        <p:spPr>
-          <a:xfrm>
-            <a:off x="7317486" y="411480"/>
-            <a:ext cx="109728" cy="109728"/>
-          </a:xfrm>
-          <a:prstGeom prst="ellipse">
-            <a:avLst/>
-          </a:prstGeom>
-          <a:solidFill>
-            <a:srgbClr val="E4E0D6"/>
-          </a:solidFill>
-          <a:ln/>
-        </p:spPr>
-      </p:sp>
-      <p:sp>
-        <p:nvSpPr>
-          <p:cNvPr id="5" name="Shape 3"/>
-          <p:cNvSpPr/>
-          <p:nvPr/>
-        </p:nvSpPr>
-        <p:spPr>
-          <a:xfrm>
-            <a:off x="7523226" y="411480"/>
-            <a:ext cx="109728" cy="109728"/>
-          </a:xfrm>
-          <a:prstGeom prst="ellipse">
-            <a:avLst/>
-          </a:prstGeom>
-          <a:solidFill>
-            <a:srgbClr val="E4E0D6"/>
-          </a:solidFill>
-          <a:ln/>
-        </p:spPr>
-      </p:sp>
-      <p:sp>
-        <p:nvSpPr>
-          <p:cNvPr id="6" name="Shape 4"/>
-          <p:cNvSpPr/>
-          <p:nvPr/>
-        </p:nvSpPr>
-        <p:spPr>
-          <a:xfrm>
-            <a:off x="7728966" y="411480"/>
-            <a:ext cx="109728" cy="109728"/>
-          </a:xfrm>
-          <a:prstGeom prst="ellipse">
-            <a:avLst/>
-          </a:prstGeom>
-          <a:solidFill>
-            <a:srgbClr val="E4E0D6"/>
-          </a:solidFill>
-          <a:ln/>
-        </p:spPr>
-      </p:sp>
-      <p:sp>
-        <p:nvSpPr>
-          <p:cNvPr id="7" name="Shape 5"/>
-          <p:cNvSpPr/>
-          <p:nvPr/>
-        </p:nvSpPr>
-        <p:spPr>
-          <a:xfrm>
-            <a:off x="7934706" y="411480"/>
-            <a:ext cx="109728" cy="109728"/>
-          </a:xfrm>
-          <a:prstGeom prst="ellipse">
-            <a:avLst/>
-          </a:prstGeom>
-          <a:solidFill>
-            <a:srgbClr val="5C7A54"/>
-          </a:solidFill>
-          <a:ln/>
-        </p:spPr>
-      </p:sp>
-      <p:sp>
-        <p:nvSpPr>
-          <p:cNvPr id="11" name="Shape 9"/>
-          <p:cNvSpPr/>
-          <p:nvPr/>
-        </p:nvSpPr>
-        <p:spPr>
-          <a:xfrm>
-            <a:off x="480060" y="788670"/>
-            <a:ext cx="3909060" cy="3977640"/>
-          </a:xfrm>
-          <a:prstGeom prst="roundRect">
-            <a:avLst>
-              <a:gd name="adj" fmla="val 6140"/>
-            </a:avLst>
-          </a:prstGeom>
-          <a:solidFill>
-            <a:srgbClr val="FFFFFF"/>
-          </a:solidFill>
-          <a:ln/>
-          <a:effectLst>
-            <a:outerShdw blurRad="190500" dist="76200" dir="5400000" algn="bl" rotWithShape="0">
-              <a:srgbClr val="12213A">
-                <a:alpha val="16000"/>
-              </a:srgbClr>
-            </a:outerShdw>
-          </a:effectLst>
-        </p:spPr>
-      </p:sp>
-      <p:sp>
-        <p:nvSpPr>
-          <p:cNvPr id="13" name="Text 10"/>
-          <p:cNvSpPr/>
-          <p:nvPr/>
-        </p:nvSpPr>
-        <p:spPr>
-          <a:xfrm>
-            <a:off x="4629150" y="822960"/>
-            <a:ext cx="4046220" cy="240030"/>
-          </a:xfrm>
-          <a:prstGeom prst="rect">
-            <a:avLst/>
-          </a:prstGeom>
-          <a:noFill/>
-          <a:ln/>
-        </p:spPr>
-        <p:txBody>
-          <a:bodyPr wrap="square" lIns="0" tIns="0" rIns="0" bIns="0" rtlCol="0" anchor="ctr"/>
-          <a:lstStyle/>
-          <a:p>
-            <a:pPr marL="0" indent="0">
-              <a:buNone/>
-            </a:pPr>
-            <a:r>
-              <a:rPr lang="en-US" sz="900" b="1" kern="0" spc="150" dirty="0">
-                <a:solidFill>
-                  <a:srgbClr val="5C7A54"/>
-                </a:solidFill>
-                <a:latin typeface="Calibri" pitchFamily="34" charset="0"/>
-                <a:ea typeface="Calibri" pitchFamily="34" charset="-122"/>
-                <a:cs typeface="Calibri" pitchFamily="34" charset="-120"/>
-              </a:rPr>
-              <a:t>THE NEW NORMAL</a:t>
-            </a:r>
-            <a:endParaRPr lang="en-US" sz="900" dirty="0"/>
-          </a:p>
-        </p:txBody>
-      </p:sp>
-      <p:sp>
-        <p:nvSpPr>
-          <p:cNvPr id="14" name="Text 11"/>
-          <p:cNvSpPr/>
-          <p:nvPr/>
-        </p:nvSpPr>
-        <p:spPr>
-          <a:xfrm>
-            <a:off x="4629150" y="1062990"/>
-            <a:ext cx="4046220" cy="891540"/>
-          </a:xfrm>
-          <a:prstGeom prst="rect">
-            <a:avLst/>
-          </a:prstGeom>
-          <a:noFill/>
-          <a:ln/>
-        </p:spPr>
-        <p:txBody>
-          <a:bodyPr wrap="square" lIns="0" tIns="0" rIns="0" bIns="0" rtlCol="0" anchor="ctr"/>
-          <a:lstStyle/>
-          <a:p>
-            <a:pPr marL="0" indent="0">
-              <a:lnSpc>
-                <a:spcPct val="112000"/>
-              </a:lnSpc>
-              <a:buNone/>
-            </a:pPr>
-            <a:r>
-              <a:rPr lang="en-US" sz="2025" b="1" dirty="0">
-                <a:solidFill>
-                  <a:srgbClr val="241F1A"/>
-                </a:solidFill>
-                <a:latin typeface="Cambria" pitchFamily="34" charset="0"/>
-                <a:ea typeface="Cambria" pitchFamily="34" charset="-122"/>
-                <a:cs typeface="Cambria" pitchFamily="34" charset="-120"/>
-              </a:rPr>
-              <a:t>Approved. And this time, he knows why.</a:t>
-            </a:r>
-            <a:endParaRPr lang="en-US" sz="2025" dirty="0"/>
-          </a:p>
-        </p:txBody>
-      </p:sp>
-      <p:sp>
-        <p:nvSpPr>
-          <p:cNvPr id="15" name="Shape 12"/>
-          <p:cNvSpPr/>
-          <p:nvPr/>
-        </p:nvSpPr>
-        <p:spPr>
-          <a:xfrm>
-            <a:off x="4629150" y="2023110"/>
-            <a:ext cx="822960" cy="0"/>
-          </a:xfrm>
-          <a:prstGeom prst="line">
-            <a:avLst/>
-          </a:prstGeom>
-          <a:noFill/>
-          <a:ln w="28575">
-            <a:solidFill>
-              <a:srgbClr val="5C7A54"/>
-            </a:solidFill>
-            <a:prstDash val="solid"/>
-          </a:ln>
-        </p:spPr>
-      </p:sp>
-      <p:sp>
-        <p:nvSpPr>
-          <p:cNvPr id="16" name="Text 13"/>
-          <p:cNvSpPr/>
-          <p:nvPr/>
-        </p:nvSpPr>
-        <p:spPr>
-          <a:xfrm>
-            <a:off x="4629150" y="2194560"/>
-            <a:ext cx="4046220" cy="1508760"/>
-          </a:xfrm>
-          <a:prstGeom prst="rect">
-            <a:avLst/>
-          </a:prstGeom>
-          <a:noFill/>
-          <a:ln/>
-        </p:spPr>
-        <p:txBody>
-          <a:bodyPr wrap="square" lIns="0" tIns="0" rIns="0" bIns="0" rtlCol="0" anchor="ctr"/>
-          <a:lstStyle/>
-          <a:p>
-            <a:pPr>
-              <a:lnSpc>
-                <a:spcPct val="145000"/>
-              </a:lnSpc>
-            </a:pPr>
-            <a:r>
-              <a:rPr lang="en-US" sz="1162" i="1" dirty="0">
-                <a:solidFill>
-                  <a:srgbClr val="3B362F"/>
-                </a:solidFill>
-                <a:latin typeface="Calibri" pitchFamily="34" charset="0"/>
-                <a:ea typeface="Calibri" pitchFamily="34" charset="-122"/>
-                <a:cs typeface="Calibri" pitchFamily="34" charset="-120"/>
-              </a:rPr>
-              <a:t>Rohan gets his inventory in time for the festival. The bank keeps a happy customer instead of losing one. Same papers, read the right way this time — by the bank and by Rohan. Rohan is just one person. But this platform is built to give every person a clear answer, not just a yes or no.</a:t>
-            </a:r>
-            <a:endParaRPr lang="en-US" sz="1162" dirty="0"/>
-          </a:p>
-        </p:txBody>
-      </p:sp>
-      <p:sp>
-        <p:nvSpPr>
-          <p:cNvPr id="17" name="Text 14"/>
-          <p:cNvSpPr/>
-          <p:nvPr/>
-        </p:nvSpPr>
-        <p:spPr>
-          <a:xfrm>
-            <a:off x="411480" y="4896612"/>
-            <a:ext cx="5486400" cy="192024"/>
-          </a:xfrm>
-          <a:prstGeom prst="rect">
-            <a:avLst/>
-          </a:prstGeom>
-          <a:noFill/>
-          <a:ln/>
-        </p:spPr>
-        <p:txBody>
-          <a:bodyPr wrap="square" rtlCol="0" anchor="ctr"/>
-          <a:lstStyle/>
-          <a:p>
-            <a:pPr marL="0" indent="0" algn="l">
-              <a:buNone/>
-            </a:pPr>
-            <a:r>
-              <a:rPr lang="en-US" sz="712" dirty="0">
-                <a:solidFill>
-                  <a:srgbClr val="8A8378"/>
-                </a:solidFill>
-                <a:latin typeface="Calibri" pitchFamily="34" charset="0"/>
-                <a:ea typeface="Calibri" pitchFamily="34" charset="-122"/>
-                <a:cs typeface="Calibri" pitchFamily="34" charset="-120"/>
-              </a:rPr>
-              <a:t>THE NEW WAY</a:t>
-            </a:r>
-            <a:endParaRPr lang="en-US" sz="712" dirty="0"/>
-          </a:p>
-        </p:txBody>
-      </p:sp>
-      <p:sp>
-        <p:nvSpPr>
-          <p:cNvPr id="18" name="Text 15"/>
-          <p:cNvSpPr/>
-          <p:nvPr/>
-        </p:nvSpPr>
-        <p:spPr>
-          <a:xfrm>
-            <a:off x="6947154" y="4896612"/>
-            <a:ext cx="1783080" cy="192024"/>
-          </a:xfrm>
-          <a:prstGeom prst="rect">
-            <a:avLst/>
-          </a:prstGeom>
-          <a:noFill/>
-          <a:ln/>
-        </p:spPr>
-        <p:txBody>
-          <a:bodyPr wrap="square" rtlCol="0" anchor="ctr"/>
-          <a:lstStyle/>
-          <a:p>
-            <a:pPr marL="0" indent="0" algn="r">
-              <a:buNone/>
-            </a:pPr>
-            <a:r>
-              <a:rPr lang="en-US" sz="712" dirty="0">
-                <a:solidFill>
-                  <a:srgbClr val="8A8378"/>
-                </a:solidFill>
-                <a:latin typeface="Calibri" pitchFamily="34" charset="0"/>
-                <a:ea typeface="Calibri" pitchFamily="34" charset="-122"/>
-                <a:cs typeface="Calibri" pitchFamily="34" charset="-120"/>
-              </a:rPr>
-              <a:t>Rohan's Story</a:t>
-            </a:r>
-            <a:endParaRPr lang="en-US" sz="712" dirty="0"/>
-          </a:p>
-        </p:txBody>
-      </p:sp>
-      <p:pic>
-        <p:nvPicPr>
-          <p:cNvPr id="19" name="Picture 18" descr="s9.png"/>
-          <p:cNvPicPr>
-            <a:picLocks noChangeAspect="1"/>
-          </p:cNvPicPr>
-          <p:nvPr/>
-        </p:nvPicPr>
-        <p:blipFill>
-          <a:blip r:embed="rId2"/>
-          <a:stretch>
-            <a:fillRect/>
-          </a:stretch>
-        </p:blipFill>
-        <p:spPr>
-          <a:xfrm>
-            <a:off x="480060" y="788670"/>
-            <a:ext cx="3909060" cy="3977640"/>
-          </a:xfrm>
-          <a:prstGeom prst="rect">
-            <a:avLst/>
-          </a:prstGeom>
-        </p:spPr>
-      </p:pic>
-    </p:spTree>
-  </p:cSld>
-  <p:clrMapOvr>
-    <a:masterClrMapping/>
-  </p:clrMapOvr>
-  <p:transition spd="slow">
-    <p:fade/>
-  </p:transition>
-</p:sld>
-</file>
-
-<file path=ppt/slides/slide7.xml><?xml version="1.0" encoding="utf-8"?>
 <p:sld xmlns:a="http://schemas.openxmlformats.org/drawingml/2006/main" xmlns:r="http://schemas.openxmlformats.org/officeDocument/2006/relationships" xmlns:p="http://schemas.openxmlformats.org/presentationml/2006/main">
   <p:cSld name="Slide 9">
     <p:bg>
@@ -16617,7 +14412,7 @@
 </p:sld>
 </file>
 
-<file path=ppt/slides/slide8.xml><?xml version="1.0" encoding="utf-8"?>
+<file path=ppt/slides/slide7.xml><?xml version="1.0" encoding="utf-8"?>
 <p:sld xmlns:a="http://schemas.openxmlformats.org/drawingml/2006/main" xmlns:r="http://schemas.openxmlformats.org/officeDocument/2006/relationships" xmlns:p="http://schemas.openxmlformats.org/presentationml/2006/main">
   <p:cSld name="Problem and Solution">
     <p:bg>
@@ -17900,7 +15695,7 @@
 </p:sld>
 </file>
 
-<file path=ppt/slides/slide9.xml><?xml version="1.0" encoding="utf-8"?>
+<file path=ppt/slides/slide8.xml><?xml version="1.0" encoding="utf-8"?>
 <p:sld xmlns:a="http://schemas.openxmlformats.org/drawingml/2006/main" xmlns:r="http://schemas.openxmlformats.org/officeDocument/2006/relationships" xmlns:p="http://schemas.openxmlformats.org/presentationml/2006/main">
   <p:cSld name="Slide 4">
     <p:bg>
@@ -19140,6 +16935,1860 @@
               <a:t>← User uploads PDF → Chunks → Vectors → LLM → Risk Score + Recommendations →</a:t>
             </a:r>
             <a:endParaRPr lang="en-US" sz="950" dirty="0"/>
+          </a:p>
+        </p:txBody>
+      </p:sp>
+    </p:spTree>
+  </p:cSld>
+  <p:clrMapOvr>
+    <a:masterClrMapping/>
+  </p:clrMapOvr>
+</p:sld>
+</file>
+
+<file path=ppt/slides/slide9.xml><?xml version="1.0" encoding="utf-8"?>
+<p:sld xmlns:a="http://schemas.openxmlformats.org/drawingml/2006/main" xmlns:r="http://schemas.openxmlformats.org/officeDocument/2006/relationships" xmlns:p="http://schemas.openxmlformats.org/presentationml/2006/main">
+  <p:cSld name="Features and Views">
+    <p:bg>
+      <p:bgPr>
+        <a:solidFill>
+          <a:srgbClr val="0F1B2D"/>
+        </a:solidFill>
+        <a:effectLst/>
+      </p:bgPr>
+    </p:bg>
+    <p:spTree>
+      <p:nvGrpSpPr>
+        <p:cNvPr id="1" name=""/>
+        <p:cNvGrpSpPr/>
+        <p:nvPr/>
+      </p:nvGrpSpPr>
+      <p:grpSpPr>
+        <a:xfrm>
+          <a:off x="0" y="0"/>
+          <a:ext cx="0" cy="0"/>
+          <a:chOff x="0" y="0"/>
+          <a:chExt cx="0" cy="0"/>
+        </a:xfrm>
+      </p:grpSpPr>
+      <p:sp>
+        <p:nvSpPr>
+          <p:cNvPr id="101" name="Badge"/>
+          <p:cNvSpPr/>
+          <p:nvPr/>
+        </p:nvSpPr>
+        <p:spPr>
+          <a:xfrm>
+            <a:off x="457200" y="274320"/>
+            <a:ext cx="1550000" cy="256032"/>
+          </a:xfrm>
+          <a:prstGeom prst="roundRect">
+            <a:avLst>
+              <a:gd name="adj" fmla="val 50000"/>
+            </a:avLst>
+          </a:prstGeom>
+          <a:solidFill>
+            <a:srgbClr val="2563EB">
+              <a:alpha val="25000"/>
+            </a:srgbClr>
+          </a:solidFill>
+          <a:ln/>
+        </p:spPr>
+      </p:sp>
+      <p:sp>
+        <p:nvSpPr>
+          <p:cNvPr id="102" name="BadgeText"/>
+          <p:cNvSpPr/>
+          <p:nvPr/>
+        </p:nvSpPr>
+        <p:spPr>
+          <a:xfrm>
+            <a:off x="457200" y="274320"/>
+            <a:ext cx="1550000" cy="256032"/>
+          </a:xfrm>
+          <a:prstGeom prst="rect">
+            <a:avLst/>
+          </a:prstGeom>
+          <a:noFill/>
+          <a:ln/>
+        </p:spPr>
+        <p:txBody>
+          <a:bodyPr wrap="square" lIns="0" tIns="0" rIns="0" bIns="0" rtlCol="0" anchor="ctr"/>
+          <a:lstStyle/>
+          <a:p>
+            <a:pPr marL="0" indent="0" algn="ctr">
+              <a:buNone/>
+            </a:pPr>
+            <a:r>
+              <a:rPr lang="en-US" sz="900" b="1" kern="0" spc="150" dirty="0">
+                <a:solidFill>
+                  <a:srgbClr val="2563EB"/>
+                </a:solidFill>
+              </a:rPr>
+              <a:t>FEATURES</a:t>
+            </a:r>
+          </a:p>
+        </p:txBody>
+      </p:sp>
+      <p:sp>
+        <p:nvSpPr>
+          <p:cNvPr id="103" name="Title"/>
+          <p:cNvSpPr/>
+          <p:nvPr/>
+        </p:nvSpPr>
+        <p:spPr>
+          <a:xfrm>
+            <a:off x="457200" y="590000"/>
+            <a:ext cx="8229600" cy="460000"/>
+          </a:xfrm>
+          <a:prstGeom prst="rect">
+            <a:avLst/>
+          </a:prstGeom>
+          <a:noFill/>
+          <a:ln/>
+        </p:spPr>
+        <p:txBody>
+          <a:bodyPr wrap="square" lIns="0" tIns="0" rIns="0" bIns="0" rtlCol="0" anchor="ctr"/>
+          <a:lstStyle/>
+          <a:p>
+            <a:pPr marL="0" indent="0">
+              <a:buNone/>
+            </a:pPr>
+            <a:r>
+              <a:rPr lang="en-US" sz="2400" b="1" dirty="0">
+                <a:solidFill>
+                  <a:srgbClr val="FFFFFF"/>
+                </a:solidFill>
+                <a:latin typeface="Cambria" pitchFamily="34" charset="0"/>
+              </a:rPr>
+              <a:t>Everything Inside The Platform</a:t>
+            </a:r>
+          </a:p>
+        </p:txBody>
+      </p:sp>
+      <p:sp>
+        <p:nvSpPr>
+          <p:cNvPr id="104" name="Card"/>
+          <p:cNvSpPr/>
+          <p:nvPr/>
+        </p:nvSpPr>
+        <p:spPr>
+          <a:xfrm>
+            <a:off x="457200" y="1180000"/>
+            <a:ext cx="2600000" cy="620000"/>
+          </a:xfrm>
+          <a:prstGeom prst="roundRect">
+            <a:avLst>
+              <a:gd name="adj" fmla="val 9000"/>
+            </a:avLst>
+          </a:prstGeom>
+          <a:solidFill>
+            <a:srgbClr val="162032"/>
+          </a:solidFill>
+          <a:ln/>
+          <a:effectLst>
+            <a:outerShdw blurRad="101600" dist="38100" dir="2700000" algn="bl" rotWithShape="0">
+              <a:srgbClr val="000000">
+                <a:alpha val="18000"/>
+              </a:srgbClr>
+            </a:outerShdw>
+          </a:effectLst>
+        </p:spPr>
+      </p:sp>
+      <p:sp>
+        <p:nvSpPr>
+          <p:cNvPr id="105" name="Text"/>
+          <p:cNvSpPr/>
+          <p:nvPr/>
+        </p:nvSpPr>
+        <p:spPr>
+          <a:xfrm>
+            <a:off x="597200" y="1250000"/>
+            <a:ext cx="400000" cy="400000"/>
+          </a:xfrm>
+          <a:prstGeom prst="rect">
+            <a:avLst/>
+          </a:prstGeom>
+          <a:noFill/>
+          <a:ln/>
+        </p:spPr>
+        <p:txBody>
+          <a:bodyPr wrap="square" lIns="0" tIns="0" rIns="0" bIns="0" rtlCol="0" anchor="ctr"/>
+          <a:lstStyle/>
+          <a:p>
+            <a:pPr marL="0" indent="0" algn="l">
+              <a:buNone/>
+            </a:pPr>
+            <a:r>
+              <a:rPr lang="en-US" sz="1700" b="0" dirty="0">
+                <a:solidFill>
+                  <a:srgbClr val="FFFFFF"/>
+                </a:solidFill>
+              </a:rPr>
+              <a:t>🔐</a:t>
+            </a:r>
+          </a:p>
+        </p:txBody>
+      </p:sp>
+      <p:sp>
+        <p:nvSpPr>
+          <p:cNvPr id="106" name="Text"/>
+          <p:cNvSpPr/>
+          <p:nvPr/>
+        </p:nvSpPr>
+        <p:spPr>
+          <a:xfrm>
+            <a:off x="1017200" y="1270000"/>
+            <a:ext cx="2000000" cy="220000"/>
+          </a:xfrm>
+          <a:prstGeom prst="rect">
+            <a:avLst/>
+          </a:prstGeom>
+          <a:noFill/>
+          <a:ln/>
+        </p:spPr>
+        <p:txBody>
+          <a:bodyPr wrap="square" lIns="0" tIns="0" rIns="0" bIns="0" rtlCol="0" anchor="t"/>
+          <a:lstStyle/>
+          <a:p>
+            <a:pPr marL="0" indent="0" algn="l">
+              <a:buNone/>
+            </a:pPr>
+            <a:r>
+              <a:rPr lang="en-US" sz="1000" b="1" dirty="0">
+                <a:solidFill>
+                  <a:srgbClr val="FFFFFF"/>
+                </a:solidFill>
+              </a:rPr>
+              <a:t>Secure Login</a:t>
+            </a:r>
+          </a:p>
+        </p:txBody>
+      </p:sp>
+      <p:sp>
+        <p:nvSpPr>
+          <p:cNvPr id="107" name="Text"/>
+          <p:cNvSpPr/>
+          <p:nvPr/>
+        </p:nvSpPr>
+        <p:spPr>
+          <a:xfrm>
+            <a:off x="1017200" y="1480000"/>
+            <a:ext cx="2000000" cy="220000"/>
+          </a:xfrm>
+          <a:prstGeom prst="rect">
+            <a:avLst/>
+          </a:prstGeom>
+          <a:noFill/>
+          <a:ln/>
+        </p:spPr>
+        <p:txBody>
+          <a:bodyPr wrap="square" lIns="0" tIns="0" rIns="0" bIns="0" rtlCol="0" anchor="t"/>
+          <a:lstStyle/>
+          <a:p>
+            <a:pPr marL="0" indent="0" algn="l">
+              <a:buNone/>
+            </a:pPr>
+            <a:r>
+              <a:rPr lang="en-US" sz="800" b="0" dirty="0">
+                <a:solidFill>
+                  <a:srgbClr val="94A3B8"/>
+                </a:solidFill>
+              </a:rPr>
+              <a:t>JWT + bcrypt auth</a:t>
+            </a:r>
+          </a:p>
+        </p:txBody>
+      </p:sp>
+      <p:sp>
+        <p:nvSpPr>
+          <p:cNvPr id="108" name="Card"/>
+          <p:cNvSpPr/>
+          <p:nvPr/>
+        </p:nvSpPr>
+        <p:spPr>
+          <a:xfrm>
+            <a:off x="3172000" y="1180000"/>
+            <a:ext cx="2600000" cy="620000"/>
+          </a:xfrm>
+          <a:prstGeom prst="roundRect">
+            <a:avLst>
+              <a:gd name="adj" fmla="val 9000"/>
+            </a:avLst>
+          </a:prstGeom>
+          <a:solidFill>
+            <a:srgbClr val="162032"/>
+          </a:solidFill>
+          <a:ln/>
+          <a:effectLst>
+            <a:outerShdw blurRad="101600" dist="38100" dir="2700000" algn="bl" rotWithShape="0">
+              <a:srgbClr val="000000">
+                <a:alpha val="18000"/>
+              </a:srgbClr>
+            </a:outerShdw>
+          </a:effectLst>
+        </p:spPr>
+      </p:sp>
+      <p:sp>
+        <p:nvSpPr>
+          <p:cNvPr id="109" name="Text"/>
+          <p:cNvSpPr/>
+          <p:nvPr/>
+        </p:nvSpPr>
+        <p:spPr>
+          <a:xfrm>
+            <a:off x="3312000" y="1250000"/>
+            <a:ext cx="400000" cy="400000"/>
+          </a:xfrm>
+          <a:prstGeom prst="rect">
+            <a:avLst/>
+          </a:prstGeom>
+          <a:noFill/>
+          <a:ln/>
+        </p:spPr>
+        <p:txBody>
+          <a:bodyPr wrap="square" lIns="0" tIns="0" rIns="0" bIns="0" rtlCol="0" anchor="ctr"/>
+          <a:lstStyle/>
+          <a:p>
+            <a:pPr marL="0" indent="0" algn="l">
+              <a:buNone/>
+            </a:pPr>
+            <a:r>
+              <a:rPr lang="en-US" sz="1700" b="0" dirty="0">
+                <a:solidFill>
+                  <a:srgbClr val="FFFFFF"/>
+                </a:solidFill>
+              </a:rPr>
+              <a:t>📤</a:t>
+            </a:r>
+          </a:p>
+        </p:txBody>
+      </p:sp>
+      <p:sp>
+        <p:nvSpPr>
+          <p:cNvPr id="110" name="Text"/>
+          <p:cNvSpPr/>
+          <p:nvPr/>
+        </p:nvSpPr>
+        <p:spPr>
+          <a:xfrm>
+            <a:off x="3732000" y="1270000"/>
+            <a:ext cx="2000000" cy="220000"/>
+          </a:xfrm>
+          <a:prstGeom prst="rect">
+            <a:avLst/>
+          </a:prstGeom>
+          <a:noFill/>
+          <a:ln/>
+        </p:spPr>
+        <p:txBody>
+          <a:bodyPr wrap="square" lIns="0" tIns="0" rIns="0" bIns="0" rtlCol="0" anchor="t"/>
+          <a:lstStyle/>
+          <a:p>
+            <a:pPr marL="0" indent="0" algn="l">
+              <a:buNone/>
+            </a:pPr>
+            <a:r>
+              <a:rPr lang="en-US" sz="1000" b="1" dirty="0">
+                <a:solidFill>
+                  <a:srgbClr val="FFFFFF"/>
+                </a:solidFill>
+              </a:rPr>
+              <a:t>Upload PDFs</a:t>
+            </a:r>
+          </a:p>
+        </p:txBody>
+      </p:sp>
+      <p:sp>
+        <p:nvSpPr>
+          <p:cNvPr id="111" name="Text"/>
+          <p:cNvSpPr/>
+          <p:nvPr/>
+        </p:nvSpPr>
+        <p:spPr>
+          <a:xfrm>
+            <a:off x="3732000" y="1480000"/>
+            <a:ext cx="2000000" cy="220000"/>
+          </a:xfrm>
+          <a:prstGeom prst="rect">
+            <a:avLst/>
+          </a:prstGeom>
+          <a:noFill/>
+          <a:ln/>
+        </p:spPr>
+        <p:txBody>
+          <a:bodyPr wrap="square" lIns="0" tIns="0" rIns="0" bIns="0" rtlCol="0" anchor="t"/>
+          <a:lstStyle/>
+          <a:p>
+            <a:pPr marL="0" indent="0" algn="l">
+              <a:buNone/>
+            </a:pPr>
+            <a:r>
+              <a:rPr lang="en-US" sz="800" b="0" dirty="0">
+                <a:solidFill>
+                  <a:srgbClr val="94A3B8"/>
+                </a:solidFill>
+              </a:rPr>
+              <a:t>Salary slips, statements, ITR</a:t>
+            </a:r>
+          </a:p>
+        </p:txBody>
+      </p:sp>
+      <p:sp>
+        <p:nvSpPr>
+          <p:cNvPr id="112" name="Card"/>
+          <p:cNvSpPr/>
+          <p:nvPr/>
+        </p:nvSpPr>
+        <p:spPr>
+          <a:xfrm>
+            <a:off x="5886800" y="1180000"/>
+            <a:ext cx="2600000" cy="620000"/>
+          </a:xfrm>
+          <a:prstGeom prst="roundRect">
+            <a:avLst>
+              <a:gd name="adj" fmla="val 9000"/>
+            </a:avLst>
+          </a:prstGeom>
+          <a:solidFill>
+            <a:srgbClr val="162032"/>
+          </a:solidFill>
+          <a:ln/>
+          <a:effectLst>
+            <a:outerShdw blurRad="101600" dist="38100" dir="2700000" algn="bl" rotWithShape="0">
+              <a:srgbClr val="000000">
+                <a:alpha val="18000"/>
+              </a:srgbClr>
+            </a:outerShdw>
+          </a:effectLst>
+        </p:spPr>
+      </p:sp>
+      <p:sp>
+        <p:nvSpPr>
+          <p:cNvPr id="113" name="Text"/>
+          <p:cNvSpPr/>
+          <p:nvPr/>
+        </p:nvSpPr>
+        <p:spPr>
+          <a:xfrm>
+            <a:off x="6026800" y="1250000"/>
+            <a:ext cx="400000" cy="400000"/>
+          </a:xfrm>
+          <a:prstGeom prst="rect">
+            <a:avLst/>
+          </a:prstGeom>
+          <a:noFill/>
+          <a:ln/>
+        </p:spPr>
+        <p:txBody>
+          <a:bodyPr wrap="square" lIns="0" tIns="0" rIns="0" bIns="0" rtlCol="0" anchor="ctr"/>
+          <a:lstStyle/>
+          <a:p>
+            <a:pPr marL="0" indent="0" algn="l">
+              <a:buNone/>
+            </a:pPr>
+            <a:r>
+              <a:rPr lang="en-US" sz="1700" b="0" dirty="0">
+                <a:solidFill>
+                  <a:srgbClr val="FFFFFF"/>
+                </a:solidFill>
+              </a:rPr>
+              <a:t>📊</a:t>
+            </a:r>
+          </a:p>
+        </p:txBody>
+      </p:sp>
+      <p:sp>
+        <p:nvSpPr>
+          <p:cNvPr id="114" name="Text"/>
+          <p:cNvSpPr/>
+          <p:nvPr/>
+        </p:nvSpPr>
+        <p:spPr>
+          <a:xfrm>
+            <a:off x="6446800" y="1270000"/>
+            <a:ext cx="2000000" cy="220000"/>
+          </a:xfrm>
+          <a:prstGeom prst="rect">
+            <a:avLst/>
+          </a:prstGeom>
+          <a:noFill/>
+          <a:ln/>
+        </p:spPr>
+        <p:txBody>
+          <a:bodyPr wrap="square" lIns="0" tIns="0" rIns="0" bIns="0" rtlCol="0" anchor="t"/>
+          <a:lstStyle/>
+          <a:p>
+            <a:pPr marL="0" indent="0" algn="l">
+              <a:buNone/>
+            </a:pPr>
+            <a:r>
+              <a:rPr lang="en-US" sz="1000" b="1" dirty="0">
+                <a:solidFill>
+                  <a:srgbClr val="FFFFFF"/>
+                </a:solidFill>
+              </a:rPr>
+              <a:t>Risk Analysis</a:t>
+            </a:r>
+          </a:p>
+        </p:txBody>
+      </p:sp>
+      <p:sp>
+        <p:nvSpPr>
+          <p:cNvPr id="115" name="Text"/>
+          <p:cNvSpPr/>
+          <p:nvPr/>
+        </p:nvSpPr>
+        <p:spPr>
+          <a:xfrm>
+            <a:off x="6446800" y="1480000"/>
+            <a:ext cx="2000000" cy="220000"/>
+          </a:xfrm>
+          <a:prstGeom prst="rect">
+            <a:avLst/>
+          </a:prstGeom>
+          <a:noFill/>
+          <a:ln/>
+        </p:spPr>
+        <p:txBody>
+          <a:bodyPr wrap="square" lIns="0" tIns="0" rIns="0" bIns="0" rtlCol="0" anchor="t"/>
+          <a:lstStyle/>
+          <a:p>
+            <a:pPr marL="0" indent="0" algn="l">
+              <a:buNone/>
+            </a:pPr>
+            <a:r>
+              <a:rPr lang="en-US" sz="800" b="0" dirty="0">
+                <a:solidFill>
+                  <a:srgbClr val="94A3B8"/>
+                </a:solidFill>
+              </a:rPr>
+              <a:t>AI credit score + red flags</a:t>
+            </a:r>
+          </a:p>
+        </p:txBody>
+      </p:sp>
+      <p:sp>
+        <p:nvSpPr>
+          <p:cNvPr id="116" name="Card"/>
+          <p:cNvSpPr/>
+          <p:nvPr/>
+        </p:nvSpPr>
+        <p:spPr>
+          <a:xfrm>
+            <a:off x="457200" y="1914800"/>
+            <a:ext cx="2600000" cy="620000"/>
+          </a:xfrm>
+          <a:prstGeom prst="roundRect">
+            <a:avLst>
+              <a:gd name="adj" fmla="val 9000"/>
+            </a:avLst>
+          </a:prstGeom>
+          <a:solidFill>
+            <a:srgbClr val="162032"/>
+          </a:solidFill>
+          <a:ln/>
+          <a:effectLst>
+            <a:outerShdw blurRad="101600" dist="38100" dir="2700000" algn="bl" rotWithShape="0">
+              <a:srgbClr val="000000">
+                <a:alpha val="18000"/>
+              </a:srgbClr>
+            </a:outerShdw>
+          </a:effectLst>
+        </p:spPr>
+      </p:sp>
+      <p:sp>
+        <p:nvSpPr>
+          <p:cNvPr id="117" name="Text"/>
+          <p:cNvSpPr/>
+          <p:nvPr/>
+        </p:nvSpPr>
+        <p:spPr>
+          <a:xfrm>
+            <a:off x="597200" y="1984800"/>
+            <a:ext cx="400000" cy="400000"/>
+          </a:xfrm>
+          <a:prstGeom prst="rect">
+            <a:avLst/>
+          </a:prstGeom>
+          <a:noFill/>
+          <a:ln/>
+        </p:spPr>
+        <p:txBody>
+          <a:bodyPr wrap="square" lIns="0" tIns="0" rIns="0" bIns="0" rtlCol="0" anchor="ctr"/>
+          <a:lstStyle/>
+          <a:p>
+            <a:pPr marL="0" indent="0" algn="l">
+              <a:buNone/>
+            </a:pPr>
+            <a:r>
+              <a:rPr lang="en-US" sz="1700" b="0" dirty="0">
+                <a:solidFill>
+                  <a:srgbClr val="FFFFFF"/>
+                </a:solidFill>
+              </a:rPr>
+              <a:t>💡</a:t>
+            </a:r>
+          </a:p>
+        </p:txBody>
+      </p:sp>
+      <p:sp>
+        <p:nvSpPr>
+          <p:cNvPr id="118" name="Text"/>
+          <p:cNvSpPr/>
+          <p:nvPr/>
+        </p:nvSpPr>
+        <p:spPr>
+          <a:xfrm>
+            <a:off x="1017200" y="2004800"/>
+            <a:ext cx="2000000" cy="220000"/>
+          </a:xfrm>
+          <a:prstGeom prst="rect">
+            <a:avLst/>
+          </a:prstGeom>
+          <a:noFill/>
+          <a:ln/>
+        </p:spPr>
+        <p:txBody>
+          <a:bodyPr wrap="square" lIns="0" tIns="0" rIns="0" bIns="0" rtlCol="0" anchor="t"/>
+          <a:lstStyle/>
+          <a:p>
+            <a:pPr marL="0" indent="0" algn="l">
+              <a:buNone/>
+            </a:pPr>
+            <a:r>
+              <a:rPr lang="en-US" sz="1000" b="1" dirty="0">
+                <a:solidFill>
+                  <a:srgbClr val="FFFFFF"/>
+                </a:solidFill>
+              </a:rPr>
+              <a:t>AI Recommendations</a:t>
+            </a:r>
+          </a:p>
+        </p:txBody>
+      </p:sp>
+      <p:sp>
+        <p:nvSpPr>
+          <p:cNvPr id="119" name="Text"/>
+          <p:cNvSpPr/>
+          <p:nvPr/>
+        </p:nvSpPr>
+        <p:spPr>
+          <a:xfrm>
+            <a:off x="1017200" y="2214800"/>
+            <a:ext cx="2000000" cy="220000"/>
+          </a:xfrm>
+          <a:prstGeom prst="rect">
+            <a:avLst/>
+          </a:prstGeom>
+          <a:noFill/>
+          <a:ln/>
+        </p:spPr>
+        <p:txBody>
+          <a:bodyPr wrap="square" lIns="0" tIns="0" rIns="0" bIns="0" rtlCol="0" anchor="t"/>
+          <a:lstStyle/>
+          <a:p>
+            <a:pPr marL="0" indent="0" algn="l">
+              <a:buNone/>
+            </a:pPr>
+            <a:r>
+              <a:rPr lang="en-US" sz="800" b="0" dirty="0">
+                <a:solidFill>
+                  <a:srgbClr val="94A3B8"/>
+                </a:solidFill>
+              </a:rPr>
+              <a:t>Urgency-sorted action plan</a:t>
+            </a:r>
+          </a:p>
+        </p:txBody>
+      </p:sp>
+      <p:sp>
+        <p:nvSpPr>
+          <p:cNvPr id="120" name="Card"/>
+          <p:cNvSpPr/>
+          <p:nvPr/>
+        </p:nvSpPr>
+        <p:spPr>
+          <a:xfrm>
+            <a:off x="3172000" y="1914800"/>
+            <a:ext cx="2600000" cy="620000"/>
+          </a:xfrm>
+          <a:prstGeom prst="roundRect">
+            <a:avLst>
+              <a:gd name="adj" fmla="val 9000"/>
+            </a:avLst>
+          </a:prstGeom>
+          <a:solidFill>
+            <a:srgbClr val="162032"/>
+          </a:solidFill>
+          <a:ln/>
+          <a:effectLst>
+            <a:outerShdw blurRad="101600" dist="38100" dir="2700000" algn="bl" rotWithShape="0">
+              <a:srgbClr val="000000">
+                <a:alpha val="18000"/>
+              </a:srgbClr>
+            </a:outerShdw>
+          </a:effectLst>
+        </p:spPr>
+      </p:sp>
+      <p:sp>
+        <p:nvSpPr>
+          <p:cNvPr id="121" name="Text"/>
+          <p:cNvSpPr/>
+          <p:nvPr/>
+        </p:nvSpPr>
+        <p:spPr>
+          <a:xfrm>
+            <a:off x="3312000" y="1984800"/>
+            <a:ext cx="400000" cy="400000"/>
+          </a:xfrm>
+          <a:prstGeom prst="rect">
+            <a:avLst/>
+          </a:prstGeom>
+          <a:noFill/>
+          <a:ln/>
+        </p:spPr>
+        <p:txBody>
+          <a:bodyPr wrap="square" lIns="0" tIns="0" rIns="0" bIns="0" rtlCol="0" anchor="ctr"/>
+          <a:lstStyle/>
+          <a:p>
+            <a:pPr marL="0" indent="0" algn="l">
+              <a:buNone/>
+            </a:pPr>
+            <a:r>
+              <a:rPr lang="en-US" sz="1700" b="0" dirty="0">
+                <a:solidFill>
+                  <a:srgbClr val="FFFFFF"/>
+                </a:solidFill>
+              </a:rPr>
+              <a:t>💬</a:t>
+            </a:r>
+          </a:p>
+        </p:txBody>
+      </p:sp>
+      <p:sp>
+        <p:nvSpPr>
+          <p:cNvPr id="122" name="Text"/>
+          <p:cNvSpPr/>
+          <p:nvPr/>
+        </p:nvSpPr>
+        <p:spPr>
+          <a:xfrm>
+            <a:off x="3732000" y="2004800"/>
+            <a:ext cx="2000000" cy="220000"/>
+          </a:xfrm>
+          <a:prstGeom prst="rect">
+            <a:avLst/>
+          </a:prstGeom>
+          <a:noFill/>
+          <a:ln/>
+        </p:spPr>
+        <p:txBody>
+          <a:bodyPr wrap="square" lIns="0" tIns="0" rIns="0" bIns="0" rtlCol="0" anchor="t"/>
+          <a:lstStyle/>
+          <a:p>
+            <a:pPr marL="0" indent="0" algn="l">
+              <a:buNone/>
+            </a:pPr>
+            <a:r>
+              <a:rPr lang="en-US" sz="1000" b="1" dirty="0">
+                <a:solidFill>
+                  <a:srgbClr val="FFFFFF"/>
+                </a:solidFill>
+              </a:rPr>
+              <a:t>AI Chat</a:t>
+            </a:r>
+          </a:p>
+        </p:txBody>
+      </p:sp>
+      <p:sp>
+        <p:nvSpPr>
+          <p:cNvPr id="123" name="Text"/>
+          <p:cNvSpPr/>
+          <p:nvPr/>
+        </p:nvSpPr>
+        <p:spPr>
+          <a:xfrm>
+            <a:off x="3732000" y="2214800"/>
+            <a:ext cx="2000000" cy="220000"/>
+          </a:xfrm>
+          <a:prstGeom prst="rect">
+            <a:avLst/>
+          </a:prstGeom>
+          <a:noFill/>
+          <a:ln/>
+        </p:spPr>
+        <p:txBody>
+          <a:bodyPr wrap="square" lIns="0" tIns="0" rIns="0" bIns="0" rtlCol="0" anchor="t"/>
+          <a:lstStyle/>
+          <a:p>
+            <a:pPr marL="0" indent="0" algn="l">
+              <a:buNone/>
+            </a:pPr>
+            <a:r>
+              <a:rPr lang="en-US" sz="800" b="0" dirty="0">
+                <a:solidFill>
+                  <a:srgbClr val="94A3B8"/>
+                </a:solidFill>
+              </a:rPr>
+              <a:t>Ask about your own documents</a:t>
+            </a:r>
+          </a:p>
+        </p:txBody>
+      </p:sp>
+      <p:sp>
+        <p:nvSpPr>
+          <p:cNvPr id="124" name="Card"/>
+          <p:cNvSpPr/>
+          <p:nvPr/>
+        </p:nvSpPr>
+        <p:spPr>
+          <a:xfrm>
+            <a:off x="5886800" y="1914800"/>
+            <a:ext cx="2600000" cy="620000"/>
+          </a:xfrm>
+          <a:prstGeom prst="roundRect">
+            <a:avLst>
+              <a:gd name="adj" fmla="val 9000"/>
+            </a:avLst>
+          </a:prstGeom>
+          <a:solidFill>
+            <a:srgbClr val="162032"/>
+          </a:solidFill>
+          <a:ln/>
+          <a:effectLst>
+            <a:outerShdw blurRad="101600" dist="38100" dir="2700000" algn="bl" rotWithShape="0">
+              <a:srgbClr val="000000">
+                <a:alpha val="18000"/>
+              </a:srgbClr>
+            </a:outerShdw>
+          </a:effectLst>
+        </p:spPr>
+      </p:sp>
+      <p:sp>
+        <p:nvSpPr>
+          <p:cNvPr id="125" name="Text"/>
+          <p:cNvSpPr/>
+          <p:nvPr/>
+        </p:nvSpPr>
+        <p:spPr>
+          <a:xfrm>
+            <a:off x="6026800" y="1984800"/>
+            <a:ext cx="400000" cy="400000"/>
+          </a:xfrm>
+          <a:prstGeom prst="rect">
+            <a:avLst/>
+          </a:prstGeom>
+          <a:noFill/>
+          <a:ln/>
+        </p:spPr>
+        <p:txBody>
+          <a:bodyPr wrap="square" lIns="0" tIns="0" rIns="0" bIns="0" rtlCol="0" anchor="ctr"/>
+          <a:lstStyle/>
+          <a:p>
+            <a:pPr marL="0" indent="0" algn="l">
+              <a:buNone/>
+            </a:pPr>
+            <a:r>
+              <a:rPr lang="en-US" sz="1700" b="0" dirty="0">
+                <a:solidFill>
+                  <a:srgbClr val="FFFFFF"/>
+                </a:solidFill>
+              </a:rPr>
+              <a:t>🏙️</a:t>
+            </a:r>
+          </a:p>
+        </p:txBody>
+      </p:sp>
+      <p:sp>
+        <p:nvSpPr>
+          <p:cNvPr id="126" name="Text"/>
+          <p:cNvSpPr/>
+          <p:nvPr/>
+        </p:nvSpPr>
+        <p:spPr>
+          <a:xfrm>
+            <a:off x="6446800" y="2004800"/>
+            <a:ext cx="2000000" cy="220000"/>
+          </a:xfrm>
+          <a:prstGeom prst="rect">
+            <a:avLst/>
+          </a:prstGeom>
+          <a:noFill/>
+          <a:ln/>
+        </p:spPr>
+        <p:txBody>
+          <a:bodyPr wrap="square" lIns="0" tIns="0" rIns="0" bIns="0" rtlCol="0" anchor="t"/>
+          <a:lstStyle/>
+          <a:p>
+            <a:pPr marL="0" indent="0" algn="l">
+              <a:buNone/>
+            </a:pPr>
+            <a:r>
+              <a:rPr lang="en-US" sz="1000" b="1" dirty="0">
+                <a:solidFill>
+                  <a:srgbClr val="FFFFFF"/>
+                </a:solidFill>
+              </a:rPr>
+              <a:t>Retirement Planner</a:t>
+            </a:r>
+          </a:p>
+        </p:txBody>
+      </p:sp>
+      <p:sp>
+        <p:nvSpPr>
+          <p:cNvPr id="127" name="Text"/>
+          <p:cNvSpPr/>
+          <p:nvPr/>
+        </p:nvSpPr>
+        <p:spPr>
+          <a:xfrm>
+            <a:off x="6446800" y="2214800"/>
+            <a:ext cx="2000000" cy="220000"/>
+          </a:xfrm>
+          <a:prstGeom prst="rect">
+            <a:avLst/>
+          </a:prstGeom>
+          <a:noFill/>
+          <a:ln/>
+        </p:spPr>
+        <p:txBody>
+          <a:bodyPr wrap="square" lIns="0" tIns="0" rIns="0" bIns="0" rtlCol="0" anchor="t"/>
+          <a:lstStyle/>
+          <a:p>
+            <a:pPr marL="0" indent="0" algn="l">
+              <a:buNone/>
+            </a:pPr>
+            <a:r>
+              <a:rPr lang="en-US" sz="800" b="0" dirty="0">
+                <a:solidFill>
+                  <a:srgbClr val="94A3B8"/>
+                </a:solidFill>
+              </a:rPr>
+              <a:t>40-city cost of living</a:t>
+            </a:r>
+          </a:p>
+        </p:txBody>
+      </p:sp>
+      <p:sp>
+        <p:nvSpPr>
+          <p:cNvPr id="128" name="Pill"/>
+          <p:cNvSpPr/>
+          <p:nvPr/>
+        </p:nvSpPr>
+        <p:spPr>
+          <a:xfrm>
+            <a:off x="457200" y="2709600"/>
+            <a:ext cx="1750000" cy="260000"/>
+          </a:xfrm>
+          <a:prstGeom prst="roundRect">
+            <a:avLst>
+              <a:gd name="adj" fmla="val 50000"/>
+            </a:avLst>
+          </a:prstGeom>
+          <a:solidFill>
+            <a:srgbClr val="0891B2">
+              <a:alpha val="20000"/>
+            </a:srgbClr>
+          </a:solidFill>
+          <a:ln/>
+        </p:spPr>
+        <p:txBody>
+          <a:bodyPr wrap="square" lIns="0" tIns="0" rIns="0" bIns="0" rtlCol="0" anchor="ctr"/>
+          <a:lstStyle/>
+          <a:p>
+            <a:pPr marL="0" indent="0" algn="ctr">
+              <a:buNone/>
+            </a:pPr>
+            <a:r>
+              <a:rPr lang="en-US" sz="900" b="1" dirty="0">
+                <a:solidFill>
+                  <a:srgbClr val="FFFFFF"/>
+                </a:solidFill>
+              </a:rPr>
+              <a:t>👤  CUSTOMER SEES</a:t>
+            </a:r>
+          </a:p>
+        </p:txBody>
+      </p:sp>
+      <p:sp>
+        <p:nvSpPr>
+          <p:cNvPr id="129" name="Pill"/>
+          <p:cNvSpPr/>
+          <p:nvPr/>
+        </p:nvSpPr>
+        <p:spPr>
+          <a:xfrm>
+            <a:off x="4686300" y="2709600"/>
+            <a:ext cx="1750000" cy="260000"/>
+          </a:xfrm>
+          <a:prstGeom prst="roundRect">
+            <a:avLst>
+              <a:gd name="adj" fmla="val 50000"/>
+            </a:avLst>
+          </a:prstGeom>
+          <a:solidFill>
+            <a:srgbClr val="D97706">
+              <a:alpha val="20000"/>
+            </a:srgbClr>
+          </a:solidFill>
+          <a:ln/>
+        </p:spPr>
+        <p:txBody>
+          <a:bodyPr wrap="square" lIns="0" tIns="0" rIns="0" bIns="0" rtlCol="0" anchor="ctr"/>
+          <a:lstStyle/>
+          <a:p>
+            <a:pPr marL="0" indent="0" algn="ctr">
+              <a:buNone/>
+            </a:pPr>
+            <a:r>
+              <a:rPr lang="en-US" sz="900" b="1" dirty="0">
+                <a:solidFill>
+                  <a:srgbClr val="FFFFFF"/>
+                </a:solidFill>
+              </a:rPr>
+              <a:t>🏦  BANK OFFICER SEES</a:t>
+            </a:r>
+          </a:p>
+        </p:txBody>
+      </p:sp>
+      <p:sp>
+        <p:nvSpPr>
+          <p:cNvPr id="130" name="Text"/>
+          <p:cNvSpPr/>
+          <p:nvPr/>
+        </p:nvSpPr>
+        <p:spPr>
+          <a:xfrm>
+            <a:off x="457200" y="3049600"/>
+            <a:ext cx="30000" cy="190000"/>
+          </a:xfrm>
+          <a:prstGeom prst="rect">
+            <a:avLst/>
+          </a:prstGeom>
+          <a:noFill/>
+          <a:ln/>
+        </p:spPr>
+        <p:txBody>
+          <a:bodyPr wrap="square" lIns="0" tIns="0" rIns="0" bIns="0" rtlCol="0" anchor="t"/>
+          <a:lstStyle/>
+          <a:p>
+            <a:pPr marL="0" indent="0" algn="l">
+              <a:buNone/>
+            </a:pPr>
+            <a:r>
+              <a:rPr lang="en-US" sz="950" b="1" dirty="0">
+                <a:solidFill>
+                  <a:srgbClr val="0891B2"/>
+                </a:solidFill>
+              </a:rPr>
+              <a:t>•</a:t>
+            </a:r>
+          </a:p>
+        </p:txBody>
+      </p:sp>
+      <p:sp>
+        <p:nvSpPr>
+          <p:cNvPr id="131" name="Text"/>
+          <p:cNvSpPr/>
+          <p:nvPr/>
+        </p:nvSpPr>
+        <p:spPr>
+          <a:xfrm>
+            <a:off x="657200" y="3049600"/>
+            <a:ext cx="3800500" cy="190000"/>
+          </a:xfrm>
+          <a:prstGeom prst="rect">
+            <a:avLst/>
+          </a:prstGeom>
+          <a:noFill/>
+          <a:ln/>
+        </p:spPr>
+        <p:txBody>
+          <a:bodyPr wrap="square" lIns="0" tIns="0" rIns="0" bIns="0" rtlCol="0" anchor="t"/>
+          <a:lstStyle/>
+          <a:p>
+            <a:pPr marL="0" indent="0" algn="l">
+              <a:buNone/>
+            </a:pPr>
+            <a:r>
+              <a:rPr lang="en-US" sz="850" b="0" dirty="0">
+                <a:solidFill>
+                  <a:srgbClr val="E2E8F0"/>
+                </a:solidFill>
+              </a:rPr>
+              <a:t>Personal risk score (0-100)</a:t>
+            </a:r>
+          </a:p>
+        </p:txBody>
+      </p:sp>
+      <p:sp>
+        <p:nvSpPr>
+          <p:cNvPr id="132" name="Text"/>
+          <p:cNvSpPr/>
+          <p:nvPr/>
+        </p:nvSpPr>
+        <p:spPr>
+          <a:xfrm>
+            <a:off x="457200" y="3299600"/>
+            <a:ext cx="30000" cy="190000"/>
+          </a:xfrm>
+          <a:prstGeom prst="rect">
+            <a:avLst/>
+          </a:prstGeom>
+          <a:noFill/>
+          <a:ln/>
+        </p:spPr>
+        <p:txBody>
+          <a:bodyPr wrap="square" lIns="0" tIns="0" rIns="0" bIns="0" rtlCol="0" anchor="t"/>
+          <a:lstStyle/>
+          <a:p>
+            <a:pPr marL="0" indent="0" algn="l">
+              <a:buNone/>
+            </a:pPr>
+            <a:r>
+              <a:rPr lang="en-US" sz="950" b="1" dirty="0">
+                <a:solidFill>
+                  <a:srgbClr val="0891B2"/>
+                </a:solidFill>
+              </a:rPr>
+              <a:t>•</a:t>
+            </a:r>
+          </a:p>
+        </p:txBody>
+      </p:sp>
+      <p:sp>
+        <p:nvSpPr>
+          <p:cNvPr id="133" name="Text"/>
+          <p:cNvSpPr/>
+          <p:nvPr/>
+        </p:nvSpPr>
+        <p:spPr>
+          <a:xfrm>
+            <a:off x="657200" y="3299600"/>
+            <a:ext cx="3800500" cy="190000"/>
+          </a:xfrm>
+          <a:prstGeom prst="rect">
+            <a:avLst/>
+          </a:prstGeom>
+          <a:noFill/>
+          <a:ln/>
+        </p:spPr>
+        <p:txBody>
+          <a:bodyPr wrap="square" lIns="0" tIns="0" rIns="0" bIns="0" rtlCol="0" anchor="t"/>
+          <a:lstStyle/>
+          <a:p>
+            <a:pPr marL="0" indent="0" algn="l">
+              <a:buNone/>
+            </a:pPr>
+            <a:r>
+              <a:rPr lang="en-US" sz="850" b="0" dirty="0">
+                <a:solidFill>
+                  <a:srgbClr val="E2E8F0"/>
+                </a:solidFill>
+              </a:rPr>
+              <a:t>Loan approval probability</a:t>
+            </a:r>
+          </a:p>
+        </p:txBody>
+      </p:sp>
+      <p:sp>
+        <p:nvSpPr>
+          <p:cNvPr id="134" name="Text"/>
+          <p:cNvSpPr/>
+          <p:nvPr/>
+        </p:nvSpPr>
+        <p:spPr>
+          <a:xfrm>
+            <a:off x="457200" y="3549600"/>
+            <a:ext cx="30000" cy="190000"/>
+          </a:xfrm>
+          <a:prstGeom prst="rect">
+            <a:avLst/>
+          </a:prstGeom>
+          <a:noFill/>
+          <a:ln/>
+        </p:spPr>
+        <p:txBody>
+          <a:bodyPr wrap="square" lIns="0" tIns="0" rIns="0" bIns="0" rtlCol="0" anchor="t"/>
+          <a:lstStyle/>
+          <a:p>
+            <a:pPr marL="0" indent="0" algn="l">
+              <a:buNone/>
+            </a:pPr>
+            <a:r>
+              <a:rPr lang="en-US" sz="950" b="1" dirty="0">
+                <a:solidFill>
+                  <a:srgbClr val="0891B2"/>
+                </a:solidFill>
+              </a:rPr>
+              <a:t>•</a:t>
+            </a:r>
+          </a:p>
+        </p:txBody>
+      </p:sp>
+      <p:sp>
+        <p:nvSpPr>
+          <p:cNvPr id="135" name="Text"/>
+          <p:cNvSpPr/>
+          <p:nvPr/>
+        </p:nvSpPr>
+        <p:spPr>
+          <a:xfrm>
+            <a:off x="657200" y="3549600"/>
+            <a:ext cx="3800500" cy="190000"/>
+          </a:xfrm>
+          <a:prstGeom prst="rect">
+            <a:avLst/>
+          </a:prstGeom>
+          <a:noFill/>
+          <a:ln/>
+        </p:spPr>
+        <p:txBody>
+          <a:bodyPr wrap="square" lIns="0" tIns="0" rIns="0" bIns="0" rtlCol="0" anchor="t"/>
+          <a:lstStyle/>
+          <a:p>
+            <a:pPr marL="0" indent="0" algn="l">
+              <a:buNone/>
+            </a:pPr>
+            <a:r>
+              <a:rPr lang="en-US" sz="850" b="0" dirty="0">
+                <a:solidFill>
+                  <a:srgbClr val="E2E8F0"/>
+                </a:solidFill>
+              </a:rPr>
+              <a:t>Safe borrowing amount</a:t>
+            </a:r>
+          </a:p>
+        </p:txBody>
+      </p:sp>
+      <p:sp>
+        <p:nvSpPr>
+          <p:cNvPr id="136" name="Text"/>
+          <p:cNvSpPr/>
+          <p:nvPr/>
+        </p:nvSpPr>
+        <p:spPr>
+          <a:xfrm>
+            <a:off x="457200" y="3799600"/>
+            <a:ext cx="30000" cy="190000"/>
+          </a:xfrm>
+          <a:prstGeom prst="rect">
+            <a:avLst/>
+          </a:prstGeom>
+          <a:noFill/>
+          <a:ln/>
+        </p:spPr>
+        <p:txBody>
+          <a:bodyPr wrap="square" lIns="0" tIns="0" rIns="0" bIns="0" rtlCol="0" anchor="t"/>
+          <a:lstStyle/>
+          <a:p>
+            <a:pPr marL="0" indent="0" algn="l">
+              <a:buNone/>
+            </a:pPr>
+            <a:r>
+              <a:rPr lang="en-US" sz="950" b="1" dirty="0">
+                <a:solidFill>
+                  <a:srgbClr val="0891B2"/>
+                </a:solidFill>
+              </a:rPr>
+              <a:t>•</a:t>
+            </a:r>
+          </a:p>
+        </p:txBody>
+      </p:sp>
+      <p:sp>
+        <p:nvSpPr>
+          <p:cNvPr id="137" name="Text"/>
+          <p:cNvSpPr/>
+          <p:nvPr/>
+        </p:nvSpPr>
+        <p:spPr>
+          <a:xfrm>
+            <a:off x="657200" y="3799600"/>
+            <a:ext cx="3800500" cy="190000"/>
+          </a:xfrm>
+          <a:prstGeom prst="rect">
+            <a:avLst/>
+          </a:prstGeom>
+          <a:noFill/>
+          <a:ln/>
+        </p:spPr>
+        <p:txBody>
+          <a:bodyPr wrap="square" lIns="0" tIns="0" rIns="0" bIns="0" rtlCol="0" anchor="t"/>
+          <a:lstStyle/>
+          <a:p>
+            <a:pPr marL="0" indent="0" algn="l">
+              <a:buNone/>
+            </a:pPr>
+            <a:r>
+              <a:rPr lang="en-US" sz="850" b="0" dirty="0">
+                <a:solidFill>
+                  <a:srgbClr val="E2E8F0"/>
+                </a:solidFill>
+              </a:rPr>
+              <a:t>Recommended banks &amp; rates</a:t>
+            </a:r>
+          </a:p>
+        </p:txBody>
+      </p:sp>
+      <p:sp>
+        <p:nvSpPr>
+          <p:cNvPr id="138" name="Text"/>
+          <p:cNvSpPr/>
+          <p:nvPr/>
+        </p:nvSpPr>
+        <p:spPr>
+          <a:xfrm>
+            <a:off x="457200" y="4049600"/>
+            <a:ext cx="30000" cy="190000"/>
+          </a:xfrm>
+          <a:prstGeom prst="rect">
+            <a:avLst/>
+          </a:prstGeom>
+          <a:noFill/>
+          <a:ln/>
+        </p:spPr>
+        <p:txBody>
+          <a:bodyPr wrap="square" lIns="0" tIns="0" rIns="0" bIns="0" rtlCol="0" anchor="t"/>
+          <a:lstStyle/>
+          <a:p>
+            <a:pPr marL="0" indent="0" algn="l">
+              <a:buNone/>
+            </a:pPr>
+            <a:r>
+              <a:rPr lang="en-US" sz="950" b="1" dirty="0">
+                <a:solidFill>
+                  <a:srgbClr val="0891B2"/>
+                </a:solidFill>
+              </a:rPr>
+              <a:t>•</a:t>
+            </a:r>
+          </a:p>
+        </p:txBody>
+      </p:sp>
+      <p:sp>
+        <p:nvSpPr>
+          <p:cNvPr id="139" name="Text"/>
+          <p:cNvSpPr/>
+          <p:nvPr/>
+        </p:nvSpPr>
+        <p:spPr>
+          <a:xfrm>
+            <a:off x="657200" y="4049600"/>
+            <a:ext cx="3800500" cy="190000"/>
+          </a:xfrm>
+          <a:prstGeom prst="rect">
+            <a:avLst/>
+          </a:prstGeom>
+          <a:noFill/>
+          <a:ln/>
+        </p:spPr>
+        <p:txBody>
+          <a:bodyPr wrap="square" lIns="0" tIns="0" rIns="0" bIns="0" rtlCol="0" anchor="t"/>
+          <a:lstStyle/>
+          <a:p>
+            <a:pPr marL="0" indent="0" algn="l">
+              <a:buNone/>
+            </a:pPr>
+            <a:r>
+              <a:rPr lang="en-US" sz="850" b="0" dirty="0">
+                <a:solidFill>
+                  <a:srgbClr val="E2E8F0"/>
+                </a:solidFill>
+              </a:rPr>
+              <a:t>Debt-to-income ratio (DTI)</a:t>
+            </a:r>
+          </a:p>
+        </p:txBody>
+      </p:sp>
+      <p:sp>
+        <p:nvSpPr>
+          <p:cNvPr id="140" name="Text"/>
+          <p:cNvSpPr/>
+          <p:nvPr/>
+        </p:nvSpPr>
+        <p:spPr>
+          <a:xfrm>
+            <a:off x="457200" y="4299600"/>
+            <a:ext cx="30000" cy="190000"/>
+          </a:xfrm>
+          <a:prstGeom prst="rect">
+            <a:avLst/>
+          </a:prstGeom>
+          <a:noFill/>
+          <a:ln/>
+        </p:spPr>
+        <p:txBody>
+          <a:bodyPr wrap="square" lIns="0" tIns="0" rIns="0" bIns="0" rtlCol="0" anchor="t"/>
+          <a:lstStyle/>
+          <a:p>
+            <a:pPr marL="0" indent="0" algn="l">
+              <a:buNone/>
+            </a:pPr>
+            <a:r>
+              <a:rPr lang="en-US" sz="950" b="1" dirty="0">
+                <a:solidFill>
+                  <a:srgbClr val="0891B2"/>
+                </a:solidFill>
+              </a:rPr>
+              <a:t>•</a:t>
+            </a:r>
+          </a:p>
+        </p:txBody>
+      </p:sp>
+      <p:sp>
+        <p:nvSpPr>
+          <p:cNvPr id="141" name="Text"/>
+          <p:cNvSpPr/>
+          <p:nvPr/>
+        </p:nvSpPr>
+        <p:spPr>
+          <a:xfrm>
+            <a:off x="657200" y="4299600"/>
+            <a:ext cx="3800500" cy="190000"/>
+          </a:xfrm>
+          <a:prstGeom prst="rect">
+            <a:avLst/>
+          </a:prstGeom>
+          <a:noFill/>
+          <a:ln/>
+        </p:spPr>
+        <p:txBody>
+          <a:bodyPr wrap="square" lIns="0" tIns="0" rIns="0" bIns="0" rtlCol="0" anchor="t"/>
+          <a:lstStyle/>
+          <a:p>
+            <a:pPr marL="0" indent="0" algn="l">
+              <a:buNone/>
+            </a:pPr>
+            <a:r>
+              <a:rPr lang="en-US" sz="850" b="0" dirty="0">
+                <a:solidFill>
+                  <a:srgbClr val="E2E8F0"/>
+                </a:solidFill>
+              </a:rPr>
+              <a:t>Improvement action plan</a:t>
+            </a:r>
+          </a:p>
+        </p:txBody>
+      </p:sp>
+      <p:sp>
+        <p:nvSpPr>
+          <p:cNvPr id="142" name="Text"/>
+          <p:cNvSpPr/>
+          <p:nvPr/>
+        </p:nvSpPr>
+        <p:spPr>
+          <a:xfrm>
+            <a:off x="4686300" y="3049600"/>
+            <a:ext cx="30000" cy="190000"/>
+          </a:xfrm>
+          <a:prstGeom prst="rect">
+            <a:avLst/>
+          </a:prstGeom>
+          <a:noFill/>
+          <a:ln/>
+        </p:spPr>
+        <p:txBody>
+          <a:bodyPr wrap="square" lIns="0" tIns="0" rIns="0" bIns="0" rtlCol="0" anchor="t"/>
+          <a:lstStyle/>
+          <a:p>
+            <a:pPr marL="0" indent="0" algn="l">
+              <a:buNone/>
+            </a:pPr>
+            <a:r>
+              <a:rPr lang="en-US" sz="950" b="1" dirty="0">
+                <a:solidFill>
+                  <a:srgbClr val="D97706"/>
+                </a:solidFill>
+              </a:rPr>
+              <a:t>•</a:t>
+            </a:r>
+          </a:p>
+        </p:txBody>
+      </p:sp>
+      <p:sp>
+        <p:nvSpPr>
+          <p:cNvPr id="143" name="Text"/>
+          <p:cNvSpPr/>
+          <p:nvPr/>
+        </p:nvSpPr>
+        <p:spPr>
+          <a:xfrm>
+            <a:off x="4886300" y="3049600"/>
+            <a:ext cx="3800500" cy="190000"/>
+          </a:xfrm>
+          <a:prstGeom prst="rect">
+            <a:avLst/>
+          </a:prstGeom>
+          <a:noFill/>
+          <a:ln/>
+        </p:spPr>
+        <p:txBody>
+          <a:bodyPr wrap="square" lIns="0" tIns="0" rIns="0" bIns="0" rtlCol="0" anchor="t"/>
+          <a:lstStyle/>
+          <a:p>
+            <a:pPr marL="0" indent="0" algn="l">
+              <a:buNone/>
+            </a:pPr>
+            <a:r>
+              <a:rPr lang="en-US" sz="850" b="0" dirty="0">
+                <a:solidFill>
+                  <a:srgbClr val="E2E8F0"/>
+                </a:solidFill>
+              </a:rPr>
+              <a:t>NPA risk &amp; CRAR indicators</a:t>
+            </a:r>
+          </a:p>
+        </p:txBody>
+      </p:sp>
+      <p:sp>
+        <p:nvSpPr>
+          <p:cNvPr id="144" name="Text"/>
+          <p:cNvSpPr/>
+          <p:nvPr/>
+        </p:nvSpPr>
+        <p:spPr>
+          <a:xfrm>
+            <a:off x="4686300" y="3299600"/>
+            <a:ext cx="30000" cy="190000"/>
+          </a:xfrm>
+          <a:prstGeom prst="rect">
+            <a:avLst/>
+          </a:prstGeom>
+          <a:noFill/>
+          <a:ln/>
+        </p:spPr>
+        <p:txBody>
+          <a:bodyPr wrap="square" lIns="0" tIns="0" rIns="0" bIns="0" rtlCol="0" anchor="t"/>
+          <a:lstStyle/>
+          <a:p>
+            <a:pPr marL="0" indent="0" algn="l">
+              <a:buNone/>
+            </a:pPr>
+            <a:r>
+              <a:rPr lang="en-US" sz="950" b="1" dirty="0">
+                <a:solidFill>
+                  <a:srgbClr val="D97706"/>
+                </a:solidFill>
+              </a:rPr>
+              <a:t>•</a:t>
+            </a:r>
+          </a:p>
+        </p:txBody>
+      </p:sp>
+      <p:sp>
+        <p:nvSpPr>
+          <p:cNvPr id="145" name="Text"/>
+          <p:cNvSpPr/>
+          <p:nvPr/>
+        </p:nvSpPr>
+        <p:spPr>
+          <a:xfrm>
+            <a:off x="4886300" y="3299600"/>
+            <a:ext cx="3800500" cy="190000"/>
+          </a:xfrm>
+          <a:prstGeom prst="rect">
+            <a:avLst/>
+          </a:prstGeom>
+          <a:noFill/>
+          <a:ln/>
+        </p:spPr>
+        <p:txBody>
+          <a:bodyPr wrap="square" lIns="0" tIns="0" rIns="0" bIns="0" rtlCol="0" anchor="t"/>
+          <a:lstStyle/>
+          <a:p>
+            <a:pPr marL="0" indent="0" algn="l">
+              <a:buNone/>
+            </a:pPr>
+            <a:r>
+              <a:rPr lang="en-US" sz="850" b="0" dirty="0">
+                <a:solidFill>
+                  <a:srgbClr val="E2E8F0"/>
+                </a:solidFill>
+              </a:rPr>
+              <a:t>Fraud detection flags</a:t>
+            </a:r>
+          </a:p>
+        </p:txBody>
+      </p:sp>
+      <p:sp>
+        <p:nvSpPr>
+          <p:cNvPr id="146" name="Text"/>
+          <p:cNvSpPr/>
+          <p:nvPr/>
+        </p:nvSpPr>
+        <p:spPr>
+          <a:xfrm>
+            <a:off x="4686300" y="3549600"/>
+            <a:ext cx="30000" cy="190000"/>
+          </a:xfrm>
+          <a:prstGeom prst="rect">
+            <a:avLst/>
+          </a:prstGeom>
+          <a:noFill/>
+          <a:ln/>
+        </p:spPr>
+        <p:txBody>
+          <a:bodyPr wrap="square" lIns="0" tIns="0" rIns="0" bIns="0" rtlCol="0" anchor="t"/>
+          <a:lstStyle/>
+          <a:p>
+            <a:pPr marL="0" indent="0" algn="l">
+              <a:buNone/>
+            </a:pPr>
+            <a:r>
+              <a:rPr lang="en-US" sz="950" b="1" dirty="0">
+                <a:solidFill>
+                  <a:srgbClr val="D97706"/>
+                </a:solidFill>
+              </a:rPr>
+              <a:t>•</a:t>
+            </a:r>
+          </a:p>
+        </p:txBody>
+      </p:sp>
+      <p:sp>
+        <p:nvSpPr>
+          <p:cNvPr id="147" name="Text"/>
+          <p:cNvSpPr/>
+          <p:nvPr/>
+        </p:nvSpPr>
+        <p:spPr>
+          <a:xfrm>
+            <a:off x="4886300" y="3549600"/>
+            <a:ext cx="3800500" cy="190000"/>
+          </a:xfrm>
+          <a:prstGeom prst="rect">
+            <a:avLst/>
+          </a:prstGeom>
+          <a:noFill/>
+          <a:ln/>
+        </p:spPr>
+        <p:txBody>
+          <a:bodyPr wrap="square" lIns="0" tIns="0" rIns="0" bIns="0" rtlCol="0" anchor="t"/>
+          <a:lstStyle/>
+          <a:p>
+            <a:pPr marL="0" indent="0" algn="l">
+              <a:buNone/>
+            </a:pPr>
+            <a:r>
+              <a:rPr lang="en-US" sz="850" b="0" dirty="0">
+                <a:solidFill>
+                  <a:srgbClr val="E2E8F0"/>
+                </a:solidFill>
+              </a:rPr>
+              <a:t>Applicant financial summary</a:t>
+            </a:r>
+          </a:p>
+        </p:txBody>
+      </p:sp>
+      <p:sp>
+        <p:nvSpPr>
+          <p:cNvPr id="148" name="Text"/>
+          <p:cNvSpPr/>
+          <p:nvPr/>
+        </p:nvSpPr>
+        <p:spPr>
+          <a:xfrm>
+            <a:off x="4686300" y="3799600"/>
+            <a:ext cx="30000" cy="190000"/>
+          </a:xfrm>
+          <a:prstGeom prst="rect">
+            <a:avLst/>
+          </a:prstGeom>
+          <a:noFill/>
+          <a:ln/>
+        </p:spPr>
+        <p:txBody>
+          <a:bodyPr wrap="square" lIns="0" tIns="0" rIns="0" bIns="0" rtlCol="0" anchor="t"/>
+          <a:lstStyle/>
+          <a:p>
+            <a:pPr marL="0" indent="0" algn="l">
+              <a:buNone/>
+            </a:pPr>
+            <a:r>
+              <a:rPr lang="en-US" sz="950" b="1" dirty="0">
+                <a:solidFill>
+                  <a:srgbClr val="D97706"/>
+                </a:solidFill>
+              </a:rPr>
+              <a:t>•</a:t>
+            </a:r>
+          </a:p>
+        </p:txBody>
+      </p:sp>
+      <p:sp>
+        <p:nvSpPr>
+          <p:cNvPr id="149" name="Text"/>
+          <p:cNvSpPr/>
+          <p:nvPr/>
+        </p:nvSpPr>
+        <p:spPr>
+          <a:xfrm>
+            <a:off x="4886300" y="3799600"/>
+            <a:ext cx="3800500" cy="190000"/>
+          </a:xfrm>
+          <a:prstGeom prst="rect">
+            <a:avLst/>
+          </a:prstGeom>
+          <a:noFill/>
+          <a:ln/>
+        </p:spPr>
+        <p:txBody>
+          <a:bodyPr wrap="square" lIns="0" tIns="0" rIns="0" bIns="0" rtlCol="0" anchor="t"/>
+          <a:lstStyle/>
+          <a:p>
+            <a:pPr marL="0" indent="0" algn="l">
+              <a:buNone/>
+            </a:pPr>
+            <a:r>
+              <a:rPr lang="en-US" sz="850" b="0" dirty="0">
+                <a:solidFill>
+                  <a:srgbClr val="E2E8F0"/>
+                </a:solidFill>
+              </a:rPr>
+              <a:t>Loan approve / reject decision</a:t>
+            </a:r>
+          </a:p>
+        </p:txBody>
+      </p:sp>
+      <p:sp>
+        <p:nvSpPr>
+          <p:cNvPr id="150" name="Text"/>
+          <p:cNvSpPr/>
+          <p:nvPr/>
+        </p:nvSpPr>
+        <p:spPr>
+          <a:xfrm>
+            <a:off x="4686300" y="4049600"/>
+            <a:ext cx="30000" cy="190000"/>
+          </a:xfrm>
+          <a:prstGeom prst="rect">
+            <a:avLst/>
+          </a:prstGeom>
+          <a:noFill/>
+          <a:ln/>
+        </p:spPr>
+        <p:txBody>
+          <a:bodyPr wrap="square" lIns="0" tIns="0" rIns="0" bIns="0" rtlCol="0" anchor="t"/>
+          <a:lstStyle/>
+          <a:p>
+            <a:pPr marL="0" indent="0" algn="l">
+              <a:buNone/>
+            </a:pPr>
+            <a:r>
+              <a:rPr lang="en-US" sz="950" b="1" dirty="0">
+                <a:solidFill>
+                  <a:srgbClr val="D97706"/>
+                </a:solidFill>
+              </a:rPr>
+              <a:t>•</a:t>
+            </a:r>
+          </a:p>
+        </p:txBody>
+      </p:sp>
+      <p:sp>
+        <p:nvSpPr>
+          <p:cNvPr id="151" name="Text"/>
+          <p:cNvSpPr/>
+          <p:nvPr/>
+        </p:nvSpPr>
+        <p:spPr>
+          <a:xfrm>
+            <a:off x="4886300" y="4049600"/>
+            <a:ext cx="3800500" cy="190000"/>
+          </a:xfrm>
+          <a:prstGeom prst="rect">
+            <a:avLst/>
+          </a:prstGeom>
+          <a:noFill/>
+          <a:ln/>
+        </p:spPr>
+        <p:txBody>
+          <a:bodyPr wrap="square" lIns="0" tIns="0" rIns="0" bIns="0" rtlCol="0" anchor="t"/>
+          <a:lstStyle/>
+          <a:p>
+            <a:pPr marL="0" indent="0" algn="l">
+              <a:buNone/>
+            </a:pPr>
+            <a:r>
+              <a:rPr lang="en-US" sz="850" b="0" dirty="0">
+                <a:solidFill>
+                  <a:srgbClr val="E2E8F0"/>
+                </a:solidFill>
+              </a:rPr>
+              <a:t>Capital adequacy assessment</a:t>
+            </a:r>
+          </a:p>
+        </p:txBody>
+      </p:sp>
+      <p:sp>
+        <p:nvSpPr>
+          <p:cNvPr id="152" name="Text"/>
+          <p:cNvSpPr/>
+          <p:nvPr/>
+        </p:nvSpPr>
+        <p:spPr>
+          <a:xfrm>
+            <a:off x="4686300" y="4299600"/>
+            <a:ext cx="30000" cy="190000"/>
+          </a:xfrm>
+          <a:prstGeom prst="rect">
+            <a:avLst/>
+          </a:prstGeom>
+          <a:noFill/>
+          <a:ln/>
+        </p:spPr>
+        <p:txBody>
+          <a:bodyPr wrap="square" lIns="0" tIns="0" rIns="0" bIns="0" rtlCol="0" anchor="t"/>
+          <a:lstStyle/>
+          <a:p>
+            <a:pPr marL="0" indent="0" algn="l">
+              <a:buNone/>
+            </a:pPr>
+            <a:r>
+              <a:rPr lang="en-US" sz="950" b="1" dirty="0">
+                <a:solidFill>
+                  <a:srgbClr val="D97706"/>
+                </a:solidFill>
+              </a:rPr>
+              <a:t>•</a:t>
+            </a:r>
+          </a:p>
+        </p:txBody>
+      </p:sp>
+      <p:sp>
+        <p:nvSpPr>
+          <p:cNvPr id="153" name="Text"/>
+          <p:cNvSpPr/>
+          <p:nvPr/>
+        </p:nvSpPr>
+        <p:spPr>
+          <a:xfrm>
+            <a:off x="4886300" y="4299600"/>
+            <a:ext cx="3800500" cy="190000"/>
+          </a:xfrm>
+          <a:prstGeom prst="rect">
+            <a:avLst/>
+          </a:prstGeom>
+          <a:noFill/>
+          <a:ln/>
+        </p:spPr>
+        <p:txBody>
+          <a:bodyPr wrap="square" lIns="0" tIns="0" rIns="0" bIns="0" rtlCol="0" anchor="t"/>
+          <a:lstStyle/>
+          <a:p>
+            <a:pPr marL="0" indent="0" algn="l">
+              <a:buNone/>
+            </a:pPr>
+            <a:r>
+              <a:rPr lang="en-US" sz="850" b="0" dirty="0">
+                <a:solidFill>
+                  <a:srgbClr val="E2E8F0"/>
+                </a:solidFill>
+              </a:rPr>
+              <a:t>Structured executive report</a:t>
+            </a:r>
           </a:p>
         </p:txBody>
       </p:sp>

--- a/Capstone_Project/Credit-Risk-Intelligence-Platform/docs/Project_Documents/Credit_Risk_Platform_Capstone_project.pptx
+++ b/Capstone_Project/Credit-Risk-Intelligence-Platform/docs/Project_Documents/Credit_Risk_Platform_Capstone_project.pptx
@@ -15688,7 +15688,7 @@
                 <a:ea typeface="Cambria" pitchFamily="34" charset="-122"/>
                 <a:cs typeface="Cambria" pitchFamily="34" charset="-120"/>
               </a:rPr>
-              <a:t>How Our Project Followed EY Coding Guidelines</a:t>
+              <a:t>How Our Project Followed Coding Guidelines</a:t>
             </a:r>
             <a:endParaRPr kumimoji="0" lang="en-US" sz="2200" b="0" i="0" u="none" strike="noStrike" kern="1200" cap="none" spc="0" normalizeH="0" baseline="0" noProof="0" dirty="0">
               <a:ln>

--- a/Capstone_Project/Credit-Risk-Intelligence-Platform/docs/Project_Documents/Credit_Risk_Platform_Capstone_project.pptx
+++ b/Capstone_Project/Credit-Risk-Intelligence-Platform/docs/Project_Documents/Credit_Risk_Platform_Capstone_project.pptx
@@ -17600,7 +17600,7 @@
                 <a:ea typeface="Cambria" pitchFamily="34" charset="-122"/>
                 <a:cs typeface="Cambria" pitchFamily="34" charset="-120"/>
               </a:rPr>
-              <a:t>Questions &amp; Answers</a:t>
+              <a:t> Questions &amp; Answers</a:t>
             </a:r>
             <a:endParaRPr lang="en-US" sz="2400" dirty="0"/>
           </a:p>

--- a/Capstone_Project/Credit-Risk-Intelligence-Platform/docs/Project_Documents/Credit_Risk_Platform_Capstone_project.pptx
+++ b/Capstone_Project/Credit-Risk-Intelligence-Platform/docs/Project_Documents/Credit_Risk_Platform_Capstone_project.pptx
@@ -2044,66 +2044,6 @@
       </p:sp>
       <p:sp>
         <p:nvSpPr>
-          <p:cNvPr id="5" name="Shape 3"/>
-          <p:cNvSpPr/>
-          <p:nvPr/>
-        </p:nvSpPr>
-        <p:spPr>
-          <a:xfrm>
-            <a:off x="640080" y="822960"/>
-            <a:ext cx="1280160" cy="256032"/>
-          </a:xfrm>
-          <a:prstGeom prst="roundRect">
-            <a:avLst>
-              <a:gd name="adj" fmla="val 50000"/>
-            </a:avLst>
-          </a:prstGeom>
-          <a:solidFill>
-            <a:srgbClr val="0891B2">
-              <a:alpha val="25000"/>
-            </a:srgbClr>
-          </a:solidFill>
-          <a:ln/>
-        </p:spPr>
-      </p:sp>
-      <p:sp>
-        <p:nvSpPr>
-          <p:cNvPr id="6" name="Text 4"/>
-          <p:cNvSpPr/>
-          <p:nvPr/>
-        </p:nvSpPr>
-        <p:spPr>
-          <a:xfrm>
-            <a:off x="640080" y="822960"/>
-            <a:ext cx="1280160" cy="256032"/>
-          </a:xfrm>
-          <a:prstGeom prst="rect">
-            <a:avLst/>
-          </a:prstGeom>
-          <a:noFill/>
-          <a:ln/>
-        </p:spPr>
-        <p:txBody>
-          <a:bodyPr wrap="square" lIns="0" tIns="0" rIns="0" bIns="0" rtlCol="0" anchor="ctr"/>
-          <a:lstStyle/>
-          <a:p>
-            <a:pPr marL="0" indent="0" algn="ctr">
-              <a:buNone/>
-            </a:pPr>
-            <a:r>
-              <a:rPr lang="en-US" sz="900" b="1" kern="0" spc="150" dirty="0">
-                <a:solidFill>
-                  <a:srgbClr val="0891B2"/>
-                </a:solidFill>
-              </a:rPr>
-              <a:t>EY TRAINING 2026</a:t>
-            </a:r>
-            <a:endParaRPr lang="en-US" sz="900" dirty="0"/>
-          </a:p>
-        </p:txBody>
-      </p:sp>
-      <p:sp>
-        <p:nvSpPr>
           <p:cNvPr id="7" name="Text 5"/>
           <p:cNvSpPr/>
           <p:nvPr/>
@@ -12206,7 +12146,7 @@
                 <a:ea typeface="+mn-ea"/>
                 <a:cs typeface="+mn-cs"/>
               </a:rPr>
-              <a:t>With gratitude — built end-to-end by a 2-person team over 5 days for the EY Training 2026 Capstone, with guidance from o</a:t>
+              <a:t>With gratitude — built end-to-end by a 2-person team over 5 days with guidance from o</a:t>
             </a:r>
             <a:r>
               <a:rPr kumimoji="0" lang="en-US" sz="1050" b="0" i="0" u="none" strike="noStrike" kern="1200" cap="none" spc="0" normalizeH="0" baseline="0" noProof="0" dirty="0">
@@ -15616,7 +15556,7 @@
                 <a:ea typeface="Calibri" pitchFamily="34" charset="-122"/>
                 <a:cs typeface="Calibri" pitchFamily="34" charset="-120"/>
               </a:rPr>
-              <a:t>EY GUIDELINES · IN PRACTICE</a:t>
+              <a:t> GUIDELINES · IN PRACTICE</a:t>
             </a:r>
             <a:endParaRPr kumimoji="0" lang="en-US" sz="900" b="0" i="0" u="none" strike="noStrike" kern="1200" cap="none" spc="0" normalizeH="0" baseline="0" noProof="0" dirty="0">
               <a:ln>
@@ -15760,7 +15700,7 @@
                 <a:ea typeface="Calibri" pitchFamily="34" charset="-122"/>
                 <a:cs typeface="Calibri" pitchFamily="34" charset="-120"/>
               </a:rPr>
-              <a:t>Every EY coding principle mapped to what we actually built and shipped on the Credit Risk Intelligence Platform.</a:t>
+              <a:t>Every coding principle mapped to what we actually built and shipped on the Credit Risk Intelligence Platform.</a:t>
             </a:r>
             <a:endParaRPr kumimoji="0" lang="en-US" sz="1050" b="0" i="0" u="none" strike="noStrike" kern="1200" cap="none" spc="0" normalizeH="0" baseline="0" noProof="0" dirty="0">
               <a:ln>
@@ -17802,21 +17742,30 @@
           <a:bodyPr wrap="square" lIns="0" tIns="0" rIns="0" bIns="0" rtlCol="0" anchor="ctr"/>
           <a:lstStyle/>
           <a:p>
-            <a:pPr marL="0" indent="0">
-              <a:buNone/>
-            </a:pPr>
             <a:r>
               <a:rPr lang="en-US" sz="950" dirty="0">
                 <a:solidFill>
                   <a:srgbClr val="FFFFFF"/>
                 </a:solidFill>
                 <a:latin typeface="Courier New" pitchFamily="34" charset="0"/>
-                <a:ea typeface="Courier New" pitchFamily="34" charset="-122"/>
                 <a:cs typeface="Courier New" pitchFamily="34" charset="-120"/>
-              </a:rPr>
-              <a:t>github.com/Chaurasiyakash0136/EY-Training-2026</a:t>
-            </a:r>
-            <a:endParaRPr lang="en-US" sz="950" dirty="0"/>
+                <a:hlinkClick r:id="rId3">
+                  <a:extLst>
+                    <a:ext uri="{A12FA001-AC4F-418D-AE19-62706E023703}">
+                      <ahyp:hlinkClr xmlns:ahyp="http://schemas.microsoft.com/office/drawing/2018/hyperlinkcolor" val="tx"/>
+                    </a:ext>
+                  </a:extLst>
+                </a:hlinkClick>
+              </a:rPr>
+              <a:t>github.com/Chaurasiyakash0136/Training-2026</a:t>
+            </a:r>
+            <a:endParaRPr lang="en-US" sz="950" dirty="0">
+              <a:solidFill>
+                <a:srgbClr val="FFFFFF"/>
+              </a:solidFill>
+              <a:latin typeface="Courier New" pitchFamily="34" charset="0"/>
+              <a:cs typeface="Courier New" pitchFamily="34" charset="-120"/>
+            </a:endParaRPr>
           </a:p>
         </p:txBody>
       </p:sp>
@@ -18058,7 +18007,7 @@
                   <a:srgbClr val="94A3B8"/>
                 </a:solidFill>
               </a:rPr>
-              <a:t>Akash Chaurasiya  ·  Ashu Sharma  ·  EY Training 2026  </a:t>
+              <a:t>Akash Chaurasiya  ·  Ashu Sharma  </a:t>
             </a:r>
             <a:endParaRPr lang="en-US" sz="1100" dirty="0"/>
           </a:p>
